--- a/ProposalWriting/Presentation/BoldyProposalDefense [Autosaved].pptx
+++ b/ProposalWriting/Presentation/BoldyProposalDefense [Autosaved].pptx
@@ -9,15 +9,15 @@
   </p:notesMasterIdLst>
   <p:sldIdLst>
     <p:sldId id="256" r:id="rId2"/>
-    <p:sldId id="257" r:id="rId3"/>
-    <p:sldId id="258" r:id="rId4"/>
-    <p:sldId id="285" r:id="rId5"/>
-    <p:sldId id="286" r:id="rId6"/>
-    <p:sldId id="287" r:id="rId7"/>
-    <p:sldId id="259" r:id="rId8"/>
-    <p:sldId id="264" r:id="rId9"/>
-    <p:sldId id="265" r:id="rId10"/>
-    <p:sldId id="266" r:id="rId11"/>
+    <p:sldId id="259" r:id="rId3"/>
+    <p:sldId id="257" r:id="rId4"/>
+    <p:sldId id="264" r:id="rId5"/>
+    <p:sldId id="265" r:id="rId6"/>
+    <p:sldId id="266" r:id="rId7"/>
+    <p:sldId id="258" r:id="rId8"/>
+    <p:sldId id="285" r:id="rId9"/>
+    <p:sldId id="286" r:id="rId10"/>
+    <p:sldId id="287" r:id="rId11"/>
     <p:sldId id="260" r:id="rId12"/>
     <p:sldId id="267" r:id="rId13"/>
     <p:sldId id="269" r:id="rId14"/>
@@ -432,7 +432,7 @@
           <a:p>
             <a:fld id="{49E120CA-99AD-3943-B60B-43DCF85265B8}" type="datetimeFigureOut">
               <a:rPr lang="en-US" smtClean="0"/>
-              <a:t>10/1/26</a:t>
+              <a:t>10/2/26</a:t>
             </a:fld>
             <a:endParaRPr lang="en-US"/>
           </a:p>
@@ -846,7 +846,7 @@
           <a:p>
             <a:fld id="{B105E061-EB09-174B-A0D5-FC5974A2AFFB}" type="datetime1">
               <a:rPr lang="en-US" smtClean="0"/>
-              <a:t>10/1/26</a:t>
+              <a:t>10/2/26</a:t>
             </a:fld>
             <a:endParaRPr lang="en-US"/>
           </a:p>
@@ -1047,7 +1047,7 @@
           <a:p>
             <a:fld id="{621252E1-B88E-3342-B0A7-CCAE0CA75BBB}" type="datetime1">
               <a:rPr lang="en-US" smtClean="0"/>
-              <a:t>10/1/26</a:t>
+              <a:t>10/2/26</a:t>
             </a:fld>
             <a:endParaRPr lang="en-US"/>
           </a:p>
@@ -1258,7 +1258,7 @@
           <a:p>
             <a:fld id="{EACE6763-50BE-5B49-B87C-4D19468B7C96}" type="datetime1">
               <a:rPr lang="en-US" smtClean="0"/>
-              <a:t>10/1/26</a:t>
+              <a:t>10/2/26</a:t>
             </a:fld>
             <a:endParaRPr lang="en-US"/>
           </a:p>
@@ -1459,7 +1459,7 @@
           <a:p>
             <a:fld id="{63944F94-749A-F843-B6E1-57F25A03E432}" type="datetime1">
               <a:rPr lang="en-US" smtClean="0"/>
-              <a:t>10/1/26</a:t>
+              <a:t>10/2/26</a:t>
             </a:fld>
             <a:endParaRPr lang="en-US"/>
           </a:p>
@@ -1737,7 +1737,7 @@
           <a:p>
             <a:fld id="{993C7A3E-56A5-C84D-976C-B35F3FE89F79}" type="datetime1">
               <a:rPr lang="en-US" smtClean="0"/>
-              <a:t>10/1/26</a:t>
+              <a:t>10/2/26</a:t>
             </a:fld>
             <a:endParaRPr lang="en-US"/>
           </a:p>
@@ -2005,7 +2005,7 @@
           <a:p>
             <a:fld id="{F4B52015-7C28-484D-B145-D28E2A08F900}" type="datetime1">
               <a:rPr lang="en-US" smtClean="0"/>
-              <a:t>10/1/26</a:t>
+              <a:t>10/2/26</a:t>
             </a:fld>
             <a:endParaRPr lang="en-US"/>
           </a:p>
@@ -2420,7 +2420,7 @@
           <a:p>
             <a:fld id="{FCA991B3-1372-E242-8B38-E6436435C338}" type="datetime1">
               <a:rPr lang="en-US" smtClean="0"/>
-              <a:t>10/1/26</a:t>
+              <a:t>10/2/26</a:t>
             </a:fld>
             <a:endParaRPr lang="en-US"/>
           </a:p>
@@ -2564,7 +2564,7 @@
           <a:p>
             <a:fld id="{919EF1DF-064D-3A44-9645-D74AED0CCD60}" type="datetime1">
               <a:rPr lang="en-US" smtClean="0"/>
-              <a:t>10/1/26</a:t>
+              <a:t>10/2/26</a:t>
             </a:fld>
             <a:endParaRPr lang="en-US"/>
           </a:p>
@@ -2680,7 +2680,7 @@
           <a:p>
             <a:fld id="{7802D0E8-747A-794C-8F8A-E949892A428B}" type="datetime1">
               <a:rPr lang="en-US" smtClean="0"/>
-              <a:t>10/1/26</a:t>
+              <a:t>10/2/26</a:t>
             </a:fld>
             <a:endParaRPr lang="en-US"/>
           </a:p>
@@ -2994,7 +2994,7 @@
           <a:p>
             <a:fld id="{6369CB82-7A51-6E4C-81E6-424375AAB724}" type="datetime1">
               <a:rPr lang="en-US" smtClean="0"/>
-              <a:t>10/1/26</a:t>
+              <a:t>10/2/26</a:t>
             </a:fld>
             <a:endParaRPr lang="en-US"/>
           </a:p>
@@ -3285,7 +3285,7 @@
           <a:p>
             <a:fld id="{88931E28-5FD3-854B-AAE6-645D4F1C2615}" type="datetime1">
               <a:rPr lang="en-US" smtClean="0"/>
-              <a:t>10/1/26</a:t>
+              <a:t>10/2/26</a:t>
             </a:fld>
             <a:endParaRPr lang="en-US"/>
           </a:p>
@@ -3529,7 +3529,7 @@
           <a:p>
             <a:fld id="{13B6B83F-07D0-CF48-A32E-56605F2D4971}" type="datetime1">
               <a:rPr lang="en-US" smtClean="0"/>
-              <a:t>10/1/26</a:t>
+              <a:t>10/2/26</a:t>
             </a:fld>
             <a:endParaRPr lang="en-US"/>
           </a:p>
@@ -3950,8 +3950,8 @@
           <a:chExt cx="0" cy="0"/>
         </a:xfrm>
       </p:grpSpPr>
-      <mc:AlternateContent xmlns:mc="http://schemas.openxmlformats.org/markup-compatibility/2006">
-        <mc:Choice xmlns:a14="http://schemas.microsoft.com/office/drawing/2010/main" Requires="a14">
+      <mc:AlternateContent xmlns:mc="http://schemas.openxmlformats.org/markup-compatibility/2006" xmlns:a14="http://schemas.microsoft.com/office/drawing/2010/main">
+        <mc:Choice Requires="a14">
           <p:sp>
             <p:nvSpPr>
               <p:cNvPr id="2" name="Title 1">
@@ -3991,6 +3991,7 @@
                         <m:ctrlPr>
                           <a:rPr lang="en-US" sz="4400" i="1" smtClean="0">
                             <a:latin typeface="Cambria Math" panose="02040503050406030204" pitchFamily="18" charset="0"/>
+                            <a:ea typeface="Cambria Math" panose="02040503050406030204" pitchFamily="18" charset="0"/>
                           </a:rPr>
                         </m:ctrlPr>
                       </m:sSupPr>
@@ -4015,7 +4016,7 @@
                     <m:sSup>
                       <m:sSupPr>
                         <m:ctrlPr>
-                          <a:rPr lang="en-US" sz="4400" i="1" smtClean="0">
+                          <a:rPr lang="en-US" sz="4400" b="0" i="1" smtClean="0">
                             <a:latin typeface="Cambria Math" panose="02040503050406030204" pitchFamily="18" charset="0"/>
                           </a:rPr>
                         </m:ctrlPr>
@@ -4047,7 +4048,7 @@
                     <m:sSup>
                       <m:sSupPr>
                         <m:ctrlPr>
-                          <a:rPr lang="en-US" sz="4400" i="1" smtClean="0">
+                          <a:rPr lang="en-US" sz="4400" b="0" i="1" smtClean="0">
                             <a:latin typeface="Cambria Math" panose="02040503050406030204" pitchFamily="18" charset="0"/>
                             <a:ea typeface="Cambria Math" panose="02040503050406030204" pitchFamily="18" charset="0"/>
                           </a:rPr>
@@ -4075,7 +4076,7 @@
                     <m:sSup>
                       <m:sSupPr>
                         <m:ctrlPr>
-                          <a:rPr lang="en-US" sz="4400" i="1" smtClean="0">
+                          <a:rPr lang="en-US" sz="4400" b="0" i="1" smtClean="0">
                             <a:latin typeface="Cambria Math" panose="02040503050406030204" pitchFamily="18" charset="0"/>
                             <a:ea typeface="Cambria Math" panose="02040503050406030204" pitchFamily="18" charset="0"/>
                           </a:rPr>
@@ -4110,7 +4111,7 @@
             </p:txBody>
           </p:sp>
         </mc:Choice>
-        <mc:Fallback>
+        <mc:Fallback xmlns="">
           <p:sp>
             <p:nvSpPr>
               <p:cNvPr id="2" name="Title 1">
@@ -4302,7 +4303,7 @@
           <p:cNvPr id="2" name="Title 1">
             <a:extLst>
               <a:ext uri="{FF2B5EF4-FFF2-40B4-BE49-F238E27FC236}">
-                <a16:creationId xmlns:a16="http://schemas.microsoft.com/office/drawing/2014/main" id="{DD8BE141-8AF4-86A0-A640-9DC5731FF8FC}"/>
+                <a16:creationId xmlns:a16="http://schemas.microsoft.com/office/drawing/2014/main" id="{88BD7683-6D47-BCC4-B9B0-A0A36F4CBD90}"/>
               </a:ext>
             </a:extLst>
           </p:cNvPr>
@@ -4320,7 +4321,7 @@
           <a:p>
             <a:r>
               <a:rPr lang="en-US" dirty="0"/>
-              <a:t>Other Tests of CLFV Models</a:t>
+              <a:t>Relevant Backgrounds and Mitigation </a:t>
             </a:r>
           </a:p>
         </p:txBody>
@@ -4330,7 +4331,7 @@
           <p:cNvPr id="3" name="Content Placeholder 2">
             <a:extLst>
               <a:ext uri="{FF2B5EF4-FFF2-40B4-BE49-F238E27FC236}">
-                <a16:creationId xmlns:a16="http://schemas.microsoft.com/office/drawing/2014/main" id="{E8433CAA-16E5-D7E9-22CB-0B4DC863D225}"/>
+                <a16:creationId xmlns:a16="http://schemas.microsoft.com/office/drawing/2014/main" id="{7CF2567C-C18A-9A04-B0E1-F7AAD309938A}"/>
               </a:ext>
             </a:extLst>
           </p:cNvPr>
@@ -4346,7 +4347,46 @@
           <a:bodyPr/>
           <a:lstStyle/>
           <a:p>
-            <a:endParaRPr lang="en-US"/>
+            <a:r>
+              <a:rPr lang="en-US" dirty="0"/>
+              <a:t>Muon Decay-in-Orbit</a:t>
+            </a:r>
+          </a:p>
+          <a:p>
+            <a:r>
+              <a:rPr lang="en-US" dirty="0"/>
+              <a:t>Radiative Muon Capture (RMC)</a:t>
+            </a:r>
+          </a:p>
+          <a:p>
+            <a:r>
+              <a:rPr lang="en-US" dirty="0"/>
+              <a:t>Radiative Pion Capture (RPC)</a:t>
+            </a:r>
+          </a:p>
+          <a:p>
+            <a:r>
+              <a:rPr lang="en-US" dirty="0"/>
+              <a:t>Electromagnetic Production Processes</a:t>
+            </a:r>
+          </a:p>
+          <a:p>
+            <a:r>
+              <a:rPr lang="en-US" dirty="0"/>
+              <a:t>Beam Flash</a:t>
+            </a:r>
+          </a:p>
+          <a:p>
+            <a:r>
+              <a:rPr lang="en-US" dirty="0"/>
+              <a:t>Cosmic Ray Muons and Byproducts</a:t>
+            </a:r>
+          </a:p>
+          <a:p>
+            <a:r>
+              <a:rPr lang="en-US" dirty="0"/>
+              <a:t>Reconstruction Error</a:t>
+            </a:r>
           </a:p>
         </p:txBody>
       </p:sp>
@@ -4355,7 +4395,7 @@
           <p:cNvPr id="5" name="Footer Placeholder 4">
             <a:extLst>
               <a:ext uri="{FF2B5EF4-FFF2-40B4-BE49-F238E27FC236}">
-                <a16:creationId xmlns:a16="http://schemas.microsoft.com/office/drawing/2014/main" id="{47FEE70D-3C0A-17C0-01F3-A88D794E8862}"/>
+                <a16:creationId xmlns:a16="http://schemas.microsoft.com/office/drawing/2014/main" id="{19790F6C-CC2F-1A6E-8CE5-D3E3540FBEB2}"/>
               </a:ext>
             </a:extLst>
           </p:cNvPr>
@@ -4383,7 +4423,7 @@
           <p:cNvPr id="6" name="Slide Number Placeholder 5">
             <a:extLst>
               <a:ext uri="{FF2B5EF4-FFF2-40B4-BE49-F238E27FC236}">
-                <a16:creationId xmlns:a16="http://schemas.microsoft.com/office/drawing/2014/main" id="{6DDD0A70-BD65-6179-740B-62B7B709CE2F}"/>
+                <a16:creationId xmlns:a16="http://schemas.microsoft.com/office/drawing/2014/main" id="{3688C638-A98D-1870-B400-BD16FF2710F3}"/>
               </a:ext>
             </a:extLst>
           </p:cNvPr>
@@ -4410,7 +4450,7 @@
     </p:spTree>
     <p:extLst>
       <p:ext uri="{BB962C8B-B14F-4D97-AF65-F5344CB8AC3E}">
-        <p14:creationId xmlns:p14="http://schemas.microsoft.com/office/powerpoint/2010/main" val="3985553873"/>
+        <p14:creationId xmlns:p14="http://schemas.microsoft.com/office/powerpoint/2010/main" val="386529000"/>
       </p:ext>
     </p:extLst>
   </p:cSld>
@@ -4605,8 +4645,8 @@
           </a:p>
         </p:txBody>
       </p:sp>
-      <mc:AlternateContent xmlns:mc="http://schemas.openxmlformats.org/markup-compatibility/2006">
-        <mc:Choice xmlns:a14="http://schemas.microsoft.com/office/drawing/2010/main" Requires="a14">
+      <mc:AlternateContent xmlns:mc="http://schemas.openxmlformats.org/markup-compatibility/2006" xmlns:a14="http://schemas.microsoft.com/office/drawing/2010/main">
+        <mc:Choice Requires="a14">
           <p:sp>
             <p:nvSpPr>
               <p:cNvPr id="3" name="Content Placeholder 2">
@@ -4650,7 +4690,7 @@
                     <m:sSub>
                       <m:sSubPr>
                         <m:ctrlPr>
-                          <a:rPr lang="en-US" i="1" smtClean="0">
+                          <a:rPr lang="en-US" b="0" i="1" smtClean="0">
                             <a:latin typeface="Cambria Math" panose="02040503050406030204" pitchFamily="18" charset="0"/>
                           </a:rPr>
                         </m:ctrlPr>
@@ -4667,7 +4707,7 @@
                         <m:sSup>
                           <m:sSupPr>
                             <m:ctrlPr>
-                              <a:rPr lang="en-US" i="1" smtClean="0">
+                              <a:rPr lang="en-US" b="0" i="1" smtClean="0">
                                 <a:latin typeface="Cambria Math" panose="02040503050406030204" pitchFamily="18" charset="0"/>
                               </a:rPr>
                             </m:ctrlPr>
@@ -4749,7 +4789,7 @@
             </p:txBody>
           </p:sp>
         </mc:Choice>
-        <mc:Fallback>
+        <mc:Fallback xmlns="">
           <p:sp>
             <p:nvSpPr>
               <p:cNvPr id="3" name="Content Placeholder 2">
@@ -5547,7 +5587,7 @@
                         <m:sSub>
                           <m:sSubPr>
                             <m:ctrlPr>
-                              <a:rPr lang="en-US" i="1" smtClean="0">
+                              <a:rPr lang="en-US" b="0" i="1" smtClean="0">
                                 <a:latin typeface="Cambria Math" panose="02040503050406030204" pitchFamily="18" charset="0"/>
                               </a:rPr>
                             </m:ctrlPr>
@@ -5807,7 +5847,7 @@
                         <m:sSub>
                           <m:sSubPr>
                             <m:ctrlPr>
-                              <a:rPr lang="en-US" i="1" smtClean="0">
+                              <a:rPr lang="en-US" b="0" i="1" smtClean="0">
                                 <a:latin typeface="Cambria Math" panose="02040503050406030204" pitchFamily="18" charset="0"/>
                               </a:rPr>
                             </m:ctrlPr>
@@ -6434,7 +6474,7 @@
                         <m:sSub>
                           <m:sSubPr>
                             <m:ctrlPr>
-                              <a:rPr lang="en-US" i="1" smtClean="0">
+                              <a:rPr lang="en-US" b="0" i="1" smtClean="0">
                                 <a:latin typeface="Cambria Math" panose="02040503050406030204" pitchFamily="18" charset="0"/>
                               </a:rPr>
                             </m:ctrlPr>
@@ -6738,7 +6778,7 @@
                         <m:sSub>
                           <m:sSubPr>
                             <m:ctrlPr>
-                              <a:rPr lang="en-US" i="1" smtClean="0">
+                              <a:rPr lang="en-US" b="0" i="1" smtClean="0">
                                 <a:latin typeface="Cambria Math" panose="02040503050406030204" pitchFamily="18" charset="0"/>
                               </a:rPr>
                             </m:ctrlPr>
@@ -7533,7 +7573,7 @@
                         <m:sSub>
                           <m:sSubPr>
                             <m:ctrlPr>
-                              <a:rPr lang="en-US" i="1" smtClean="0">
+                              <a:rPr lang="en-US" b="0" i="1" smtClean="0">
                                 <a:latin typeface="Cambria Math" panose="02040503050406030204" pitchFamily="18" charset="0"/>
                               </a:rPr>
                             </m:ctrlPr>
@@ -7686,7 +7726,7 @@
                         <m:sSub>
                           <m:sSubPr>
                             <m:ctrlPr>
-                              <a:rPr lang="en-US" i="1" smtClean="0">
+                              <a:rPr lang="en-US" b="0" i="1" smtClean="0">
                                 <a:latin typeface="Cambria Math" panose="02040503050406030204" pitchFamily="18" charset="0"/>
                               </a:rPr>
                             </m:ctrlPr>
@@ -7839,7 +7879,7 @@
                         <m:sSub>
                           <m:sSubPr>
                             <m:ctrlPr>
-                              <a:rPr lang="en-US" i="1" smtClean="0">
+                              <a:rPr lang="en-US" b="0" i="1" smtClean="0">
                                 <a:latin typeface="Cambria Math" panose="02040503050406030204" pitchFamily="18" charset="0"/>
                               </a:rPr>
                             </m:ctrlPr>
@@ -8011,7 +8051,7 @@
                         <m:sSub>
                           <m:sSubPr>
                             <m:ctrlPr>
-                              <a:rPr lang="en-US" i="1" smtClean="0">
+                              <a:rPr lang="en-US" b="0" i="1" smtClean="0">
                                 <a:latin typeface="Cambria Math" panose="02040503050406030204" pitchFamily="18" charset="0"/>
                               </a:rPr>
                             </m:ctrlPr>
@@ -8299,10 +8339,7 @@
                 <a:pPr/>
                 <a14:m>
                   <m:oMathPara xmlns:m="http://schemas.openxmlformats.org/officeDocument/2006/math">
-                    <m:oMathParaPr>
-                      <m:jc m:val="centerGroup"/>
-                    </m:oMathParaPr>
-                    <m:oMath xmlns:m="http://schemas.openxmlformats.org/officeDocument/2006/math">
+                    <m:oMath>
                       <m:acc>
                         <m:accPr>
                           <m:chr m:val="⃑"/>
@@ -8316,7 +8353,7 @@
                           <m:sSub>
                             <m:sSubPr>
                               <m:ctrlPr>
-                                <a:rPr lang="en-US" i="1" smtClean="0">
+                                <a:rPr lang="en-US" b="0" i="1" smtClean="0">
                                   <a:latin typeface="Cambria Math" panose="02040503050406030204" pitchFamily="18" charset="0"/>
                                 </a:rPr>
                               </m:ctrlPr>
@@ -10303,7 +10340,7 @@
           <p:cNvPr id="2" name="Title 1">
             <a:extLst>
               <a:ext uri="{FF2B5EF4-FFF2-40B4-BE49-F238E27FC236}">
-                <a16:creationId xmlns:a16="http://schemas.microsoft.com/office/drawing/2014/main" id="{0A6EDBD2-CF9D-C418-5103-66841D030DC7}"/>
+                <a16:creationId xmlns:a16="http://schemas.microsoft.com/office/drawing/2014/main" id="{87CCA332-8AD9-D920-5DDD-DB6A3CFB3F35}"/>
               </a:ext>
             </a:extLst>
           </p:cNvPr>
@@ -10319,32 +10356,35 @@
           <a:bodyPr/>
           <a:lstStyle/>
           <a:p>
-            <a:endParaRPr lang="en-US"/>
-          </a:p>
-        </p:txBody>
-      </p:sp>
-      <p:sp>
-        <p:nvSpPr>
-          <p:cNvPr id="3" name="Content Placeholder 2">
-            <a:extLst>
-              <a:ext uri="{FF2B5EF4-FFF2-40B4-BE49-F238E27FC236}">
-                <a16:creationId xmlns:a16="http://schemas.microsoft.com/office/drawing/2014/main" id="{133185E4-2D81-D0B6-1538-D0309E1C74B5}"/>
-              </a:ext>
-            </a:extLst>
-          </p:cNvPr>
-          <p:cNvSpPr>
-            <a:spLocks noGrp="1"/>
-          </p:cNvSpPr>
-          <p:nvPr>
-            <p:ph idx="1"/>
-          </p:nvPr>
-        </p:nvSpPr>
-        <p:spPr/>
-        <p:txBody>
-          <a:bodyPr/>
-          <a:lstStyle/>
-          <a:p>
-            <a:endParaRPr lang="en-US"/>
+            <a:r>
+              <a:rPr lang="en-US" dirty="0"/>
+              <a:t>Theoretical Motivation</a:t>
+            </a:r>
+          </a:p>
+        </p:txBody>
+      </p:sp>
+      <p:sp>
+        <p:nvSpPr>
+          <p:cNvPr id="3" name="Text Placeholder 2">
+            <a:extLst>
+              <a:ext uri="{FF2B5EF4-FFF2-40B4-BE49-F238E27FC236}">
+                <a16:creationId xmlns:a16="http://schemas.microsoft.com/office/drawing/2014/main" id="{5DD99F40-0606-45BC-B3FF-4A6F5EFB4DEA}"/>
+              </a:ext>
+            </a:extLst>
+          </p:cNvPr>
+          <p:cNvSpPr>
+            <a:spLocks noGrp="1"/>
+          </p:cNvSpPr>
+          <p:nvPr>
+            <p:ph type="body" idx="1"/>
+          </p:nvPr>
+        </p:nvSpPr>
+        <p:spPr/>
+        <p:txBody>
+          <a:bodyPr/>
+          <a:lstStyle/>
+          <a:p>
+            <a:endParaRPr lang="en-US" dirty="0"/>
           </a:p>
         </p:txBody>
       </p:sp>
@@ -10353,7 +10393,7 @@
           <p:cNvPr id="5" name="Footer Placeholder 4">
             <a:extLst>
               <a:ext uri="{FF2B5EF4-FFF2-40B4-BE49-F238E27FC236}">
-                <a16:creationId xmlns:a16="http://schemas.microsoft.com/office/drawing/2014/main" id="{1F356C43-9187-1D95-38CE-90813B843A4F}"/>
+                <a16:creationId xmlns:a16="http://schemas.microsoft.com/office/drawing/2014/main" id="{F03599A0-AD5C-762A-1521-8A1BBCA31A5F}"/>
               </a:ext>
             </a:extLst>
           </p:cNvPr>
@@ -10381,7 +10421,7 @@
           <p:cNvPr id="6" name="Slide Number Placeholder 5">
             <a:extLst>
               <a:ext uri="{FF2B5EF4-FFF2-40B4-BE49-F238E27FC236}">
-                <a16:creationId xmlns:a16="http://schemas.microsoft.com/office/drawing/2014/main" id="{D86C6CBE-50E4-BD42-75A7-63B22C87132A}"/>
+                <a16:creationId xmlns:a16="http://schemas.microsoft.com/office/drawing/2014/main" id="{08814B3D-D399-16FE-F903-639EFF7B7335}"/>
               </a:ext>
             </a:extLst>
           </p:cNvPr>
@@ -10408,7 +10448,7 @@
     </p:spTree>
     <p:extLst>
       <p:ext uri="{BB962C8B-B14F-4D97-AF65-F5344CB8AC3E}">
-        <p14:creationId xmlns:p14="http://schemas.microsoft.com/office/powerpoint/2010/main" val="3848536427"/>
+        <p14:creationId xmlns:p14="http://schemas.microsoft.com/office/powerpoint/2010/main" val="3071422167"/>
       </p:ext>
     </p:extLst>
   </p:cSld>
@@ -11839,7 +11879,7 @@
           <p:cNvPr id="2" name="Title 1">
             <a:extLst>
               <a:ext uri="{FF2B5EF4-FFF2-40B4-BE49-F238E27FC236}">
-                <a16:creationId xmlns:a16="http://schemas.microsoft.com/office/drawing/2014/main" id="{963131C8-0D61-FAC3-E34D-35B6966BBC4B}"/>
+                <a16:creationId xmlns:a16="http://schemas.microsoft.com/office/drawing/2014/main" id="{0A6EDBD2-CF9D-C418-5103-66841D030DC7}"/>
               </a:ext>
             </a:extLst>
           </p:cNvPr>
@@ -11857,25 +11897,30 @@
           <a:p>
             <a:r>
               <a:rPr lang="en-US" dirty="0"/>
-              <a:t>The Mu2e Experiment</a:t>
-            </a:r>
-          </a:p>
-        </p:txBody>
-      </p:sp>
-      <p:sp>
-        <p:nvSpPr>
-          <p:cNvPr id="3" name="Text Placeholder 2">
-            <a:extLst>
-              <a:ext uri="{FF2B5EF4-FFF2-40B4-BE49-F238E27FC236}">
-                <a16:creationId xmlns:a16="http://schemas.microsoft.com/office/drawing/2014/main" id="{92CE8180-E664-79B1-AC71-9C5770AD78B9}"/>
-              </a:ext>
-            </a:extLst>
-          </p:cNvPr>
-          <p:cNvSpPr>
-            <a:spLocks noGrp="1"/>
-          </p:cNvSpPr>
-          <p:nvPr>
-            <p:ph type="body" idx="1"/>
+              <a:t>Standard Model </a:t>
+            </a:r>
+            <a:r>
+              <a:rPr lang="en-US"/>
+              <a:t>of Particle Physics</a:t>
+            </a:r>
+            <a:endParaRPr lang="en-US" dirty="0"/>
+          </a:p>
+        </p:txBody>
+      </p:sp>
+      <p:sp>
+        <p:nvSpPr>
+          <p:cNvPr id="3" name="Content Placeholder 2">
+            <a:extLst>
+              <a:ext uri="{FF2B5EF4-FFF2-40B4-BE49-F238E27FC236}">
+                <a16:creationId xmlns:a16="http://schemas.microsoft.com/office/drawing/2014/main" id="{133185E4-2D81-D0B6-1538-D0309E1C74B5}"/>
+              </a:ext>
+            </a:extLst>
+          </p:cNvPr>
+          <p:cNvSpPr>
+            <a:spLocks noGrp="1"/>
+          </p:cNvSpPr>
+          <p:nvPr>
+            <p:ph idx="1"/>
           </p:nvPr>
         </p:nvSpPr>
         <p:spPr/>
@@ -11892,7 +11937,7 @@
           <p:cNvPr id="5" name="Footer Placeholder 4">
             <a:extLst>
               <a:ext uri="{FF2B5EF4-FFF2-40B4-BE49-F238E27FC236}">
-                <a16:creationId xmlns:a16="http://schemas.microsoft.com/office/drawing/2014/main" id="{4A80378D-63BD-7C4B-A77A-B3EEC2B282E2}"/>
+                <a16:creationId xmlns:a16="http://schemas.microsoft.com/office/drawing/2014/main" id="{1F356C43-9187-1D95-38CE-90813B843A4F}"/>
               </a:ext>
             </a:extLst>
           </p:cNvPr>
@@ -11920,7 +11965,7 @@
           <p:cNvPr id="6" name="Slide Number Placeholder 5">
             <a:extLst>
               <a:ext uri="{FF2B5EF4-FFF2-40B4-BE49-F238E27FC236}">
-                <a16:creationId xmlns:a16="http://schemas.microsoft.com/office/drawing/2014/main" id="{13BA0451-3DAD-69CF-AC45-A9C1AFB59090}"/>
+                <a16:creationId xmlns:a16="http://schemas.microsoft.com/office/drawing/2014/main" id="{D86C6CBE-50E4-BD42-75A7-63B22C87132A}"/>
               </a:ext>
             </a:extLst>
           </p:cNvPr>
@@ -11947,7 +11992,7 @@
     </p:spTree>
     <p:extLst>
       <p:ext uri="{BB962C8B-B14F-4D97-AF65-F5344CB8AC3E}">
-        <p14:creationId xmlns:p14="http://schemas.microsoft.com/office/powerpoint/2010/main" val="708256937"/>
+        <p14:creationId xmlns:p14="http://schemas.microsoft.com/office/powerpoint/2010/main" val="3848536427"/>
       </p:ext>
     </p:extLst>
   </p:cSld>
@@ -12993,8 +13038,8 @@
           </a:p>
         </p:txBody>
       </p:sp>
-      <mc:AlternateContent xmlns:mc="http://schemas.openxmlformats.org/markup-compatibility/2006">
-        <mc:Choice xmlns:a14="http://schemas.microsoft.com/office/drawing/2010/main" Requires="a14">
+      <mc:AlternateContent xmlns:mc="http://schemas.openxmlformats.org/markup-compatibility/2006" xmlns:a14="http://schemas.microsoft.com/office/drawing/2010/main">
+        <mc:Choice Requires="a14">
           <p:sp>
             <p:nvSpPr>
               <p:cNvPr id="3" name="Content Placeholder 2">
@@ -13188,7 +13233,7 @@
             </p:txBody>
           </p:sp>
         </mc:Choice>
-        <mc:Fallback>
+        <mc:Fallback xmlns="">
           <p:sp>
             <p:nvSpPr>
               <p:cNvPr id="3" name="Content Placeholder 2">
@@ -13660,8 +13705,8 @@
           </a:p>
         </p:txBody>
       </p:sp>
-      <mc:AlternateContent xmlns:mc="http://schemas.openxmlformats.org/markup-compatibility/2006">
-        <mc:Choice xmlns:a14="http://schemas.microsoft.com/office/drawing/2010/main" Requires="a14">
+      <mc:AlternateContent xmlns:mc="http://schemas.openxmlformats.org/markup-compatibility/2006" xmlns:a14="http://schemas.microsoft.com/office/drawing/2010/main">
+        <mc:Choice Requires="a14">
           <p:sp>
             <p:nvSpPr>
               <p:cNvPr id="3" name="Content Placeholder 2">
@@ -13740,7 +13785,7 @@
                       <m:accPr>
                         <m:chr m:val="⃑"/>
                         <m:ctrlPr>
-                          <a:rPr lang="en-US" i="1" smtClean="0">
+                          <a:rPr lang="en-US" b="0" i="1" smtClean="0">
                             <a:latin typeface="Cambria Math" panose="02040503050406030204" pitchFamily="18" charset="0"/>
                           </a:rPr>
                         </m:ctrlPr>
@@ -13825,7 +13870,7 @@
                       <m:accPr>
                         <m:chr m:val="⃑"/>
                         <m:ctrlPr>
-                          <a:rPr lang="en-US" i="1" smtClean="0">
+                          <a:rPr lang="en-US" b="0" i="1" smtClean="0">
                             <a:latin typeface="Cambria Math" panose="02040503050406030204" pitchFamily="18" charset="0"/>
                           </a:rPr>
                         </m:ctrlPr>
@@ -13908,7 +13953,7 @@
             </p:txBody>
           </p:sp>
         </mc:Choice>
-        <mc:Fallback>
+        <mc:Fallback xmlns="">
           <p:sp>
             <p:nvSpPr>
               <p:cNvPr id="3" name="Content Placeholder 2">
@@ -14040,7 +14085,7 @@
           <p:cNvPr id="2" name="Title 1">
             <a:extLst>
               <a:ext uri="{FF2B5EF4-FFF2-40B4-BE49-F238E27FC236}">
-                <a16:creationId xmlns:a16="http://schemas.microsoft.com/office/drawing/2014/main" id="{FC5B137A-485D-0274-8DC0-9D6BB96AC2A9}"/>
+                <a16:creationId xmlns:a16="http://schemas.microsoft.com/office/drawing/2014/main" id="{E18806B5-1DE0-9C43-1112-600F95963F8E}"/>
               </a:ext>
             </a:extLst>
           </p:cNvPr>
@@ -14058,7 +14103,7 @@
           <a:p>
             <a:r>
               <a:rPr lang="en-US" dirty="0"/>
-              <a:t>Primary Experimental Goals</a:t>
+              <a:t>Flavor and Charged Flavor Violation</a:t>
             </a:r>
           </a:p>
         </p:txBody>
@@ -14068,7 +14113,7 @@
           <p:cNvPr id="3" name="Content Placeholder 2">
             <a:extLst>
               <a:ext uri="{FF2B5EF4-FFF2-40B4-BE49-F238E27FC236}">
-                <a16:creationId xmlns:a16="http://schemas.microsoft.com/office/drawing/2014/main" id="{027986AA-BB7E-80A3-D709-9E275171FF74}"/>
+                <a16:creationId xmlns:a16="http://schemas.microsoft.com/office/drawing/2014/main" id="{004AB05C-D1ED-58F5-BF6C-BFA57B0D0030}"/>
               </a:ext>
             </a:extLst>
           </p:cNvPr>
@@ -14084,61 +14129,16 @@
           <a:bodyPr/>
           <a:lstStyle/>
           <a:p>
-            <a:r>
-              <a:rPr lang="en-US" dirty="0"/>
-              <a:t>Detection of the coherent conversion of </a:t>
-            </a:r>
-          </a:p>
-          <a:p>
-            <a:r>
-              <a:rPr lang="en-US" dirty="0"/>
-              <a:t>K-shell conversion</a:t>
-            </a:r>
-          </a:p>
-          <a:p>
-            <a:r>
-              <a:rPr lang="en-US" dirty="0"/>
-              <a:t>Monoenergetic (104.973 MeV) single electron signature</a:t>
-            </a:r>
-          </a:p>
-        </p:txBody>
-      </p:sp>
-      <p:pic>
-        <p:nvPicPr>
-          <p:cNvPr id="4" name="Picture 3">
-            <a:extLst>
-              <a:ext uri="{FF2B5EF4-FFF2-40B4-BE49-F238E27FC236}">
-                <a16:creationId xmlns:a16="http://schemas.microsoft.com/office/drawing/2014/main" id="{31230D72-72D5-3941-CD0B-1865EB1E4A6B}"/>
-              </a:ext>
-            </a:extLst>
-          </p:cNvPr>
-          <p:cNvPicPr>
-            <a:picLocks noChangeAspect="1"/>
-          </p:cNvPicPr>
-          <p:nvPr/>
-        </p:nvPicPr>
-        <p:blipFill>
-          <a:blip r:embed="rId2"/>
-          <a:stretch>
-            <a:fillRect/>
-          </a:stretch>
-        </p:blipFill>
-        <p:spPr>
-          <a:xfrm>
-            <a:off x="7328808" y="1881513"/>
-            <a:ext cx="1991541" cy="317492"/>
-          </a:xfrm>
-          <a:prstGeom prst="rect">
-            <a:avLst/>
-          </a:prstGeom>
-        </p:spPr>
-      </p:pic>
-      <p:sp>
-        <p:nvSpPr>
-          <p:cNvPr id="6" name="Footer Placeholder 5">
-            <a:extLst>
-              <a:ext uri="{FF2B5EF4-FFF2-40B4-BE49-F238E27FC236}">
-                <a16:creationId xmlns:a16="http://schemas.microsoft.com/office/drawing/2014/main" id="{5BA811A3-D9FD-DD4F-0F3B-68964BD9C22B}"/>
+            <a:endParaRPr lang="en-US"/>
+          </a:p>
+        </p:txBody>
+      </p:sp>
+      <p:sp>
+        <p:nvSpPr>
+          <p:cNvPr id="5" name="Footer Placeholder 4">
+            <a:extLst>
+              <a:ext uri="{FF2B5EF4-FFF2-40B4-BE49-F238E27FC236}">
+                <a16:creationId xmlns:a16="http://schemas.microsoft.com/office/drawing/2014/main" id="{A980BACF-2A07-8166-205D-A9011A2593D2}"/>
               </a:ext>
             </a:extLst>
           </p:cNvPr>
@@ -14163,10 +14163,10 @@
       </p:sp>
       <p:sp>
         <p:nvSpPr>
-          <p:cNvPr id="7" name="Slide Number Placeholder 6">
-            <a:extLst>
-              <a:ext uri="{FF2B5EF4-FFF2-40B4-BE49-F238E27FC236}">
-                <a16:creationId xmlns:a16="http://schemas.microsoft.com/office/drawing/2014/main" id="{2A1E8DE2-014F-63F7-AB4F-A3B6F3963F70}"/>
+          <p:cNvPr id="6" name="Slide Number Placeholder 5">
+            <a:extLst>
+              <a:ext uri="{FF2B5EF4-FFF2-40B4-BE49-F238E27FC236}">
+                <a16:creationId xmlns:a16="http://schemas.microsoft.com/office/drawing/2014/main" id="{89171392-E5AC-CE2F-5495-5F8534D2ECF6}"/>
               </a:ext>
             </a:extLst>
           </p:cNvPr>
@@ -14193,7 +14193,7 @@
     </p:spTree>
     <p:extLst>
       <p:ext uri="{BB962C8B-B14F-4D97-AF65-F5344CB8AC3E}">
-        <p14:creationId xmlns:p14="http://schemas.microsoft.com/office/powerpoint/2010/main" val="718307452"/>
+        <p14:creationId xmlns:p14="http://schemas.microsoft.com/office/powerpoint/2010/main" val="669870449"/>
       </p:ext>
     </p:extLst>
   </p:cSld>
@@ -14482,7 +14482,7 @@
           <p:cNvPr id="2" name="Title 1">
             <a:extLst>
               <a:ext uri="{FF2B5EF4-FFF2-40B4-BE49-F238E27FC236}">
-                <a16:creationId xmlns:a16="http://schemas.microsoft.com/office/drawing/2014/main" id="{B0738086-5BCE-5D12-CE7E-196C58130BC7}"/>
+                <a16:creationId xmlns:a16="http://schemas.microsoft.com/office/drawing/2014/main" id="{AA6BB1C5-10C7-BF33-1D1B-01E0BF47027A}"/>
               </a:ext>
             </a:extLst>
           </p:cNvPr>
@@ -14500,98 +14500,76 @@
           <a:p>
             <a:r>
               <a:rPr lang="en-US" dirty="0"/>
-              <a:t>Design</a:t>
-            </a:r>
-          </a:p>
-        </p:txBody>
-      </p:sp>
-      <p:sp>
-        <p:nvSpPr>
-          <p:cNvPr id="3" name="Content Placeholder 2">
-            <a:extLst>
-              <a:ext uri="{FF2B5EF4-FFF2-40B4-BE49-F238E27FC236}">
-                <a16:creationId xmlns:a16="http://schemas.microsoft.com/office/drawing/2014/main" id="{96AF68DE-F940-1E30-B16B-4A91096C4320}"/>
-              </a:ext>
-            </a:extLst>
-          </p:cNvPr>
-          <p:cNvSpPr>
-            <a:spLocks noGrp="1"/>
-          </p:cNvSpPr>
+              <a:t>The                            Process</a:t>
+            </a:r>
+          </a:p>
+        </p:txBody>
+      </p:sp>
+      <p:pic>
+        <p:nvPicPr>
+          <p:cNvPr id="6" name="Content Placeholder 5" descr="A diagram of a mathematical equation&#10;&#10;AI-generated content may be incorrect.">
+            <a:extLst>
+              <a:ext uri="{FF2B5EF4-FFF2-40B4-BE49-F238E27FC236}">
+                <a16:creationId xmlns:a16="http://schemas.microsoft.com/office/drawing/2014/main" id="{DAC76081-EEC6-66E5-6E2E-142868FA2DD0}"/>
+              </a:ext>
+            </a:extLst>
+          </p:cNvPr>
+          <p:cNvPicPr>
+            <a:picLocks noGrp="1" noChangeAspect="1"/>
+          </p:cNvPicPr>
           <p:nvPr>
             <p:ph idx="1"/>
           </p:nvPr>
-        </p:nvSpPr>
-        <p:spPr/>
-        <p:txBody>
-          <a:bodyPr/>
-          <a:lstStyle/>
-          <a:p>
-            <a:r>
-              <a:rPr lang="en-US" dirty="0"/>
-              <a:t>Production</a:t>
-            </a:r>
-          </a:p>
-          <a:p>
-            <a:r>
-              <a:rPr lang="en-US" dirty="0"/>
-              <a:t>Transport</a:t>
-            </a:r>
-          </a:p>
-          <a:p>
-            <a:r>
-              <a:rPr lang="en-US" dirty="0"/>
-              <a:t>Detector</a:t>
-            </a:r>
-          </a:p>
-          <a:p>
-            <a:pPr lvl="1"/>
-            <a:r>
-              <a:rPr lang="en-US" dirty="0"/>
-              <a:t>Tracker</a:t>
-            </a:r>
-          </a:p>
-          <a:p>
-            <a:pPr lvl="1"/>
-            <a:r>
-              <a:rPr lang="en-US" dirty="0"/>
-              <a:t>Calorimeter</a:t>
-            </a:r>
-          </a:p>
-          <a:p>
-            <a:pPr lvl="1"/>
-            <a:r>
-              <a:rPr lang="en-US" dirty="0"/>
-              <a:t>Detector Solenoid</a:t>
-            </a:r>
-          </a:p>
-          <a:p>
-            <a:r>
-              <a:rPr lang="en-US" dirty="0"/>
-              <a:t>Computing</a:t>
-            </a:r>
-          </a:p>
-          <a:p>
-            <a:pPr lvl="1"/>
-            <a:r>
-              <a:rPr lang="en-US" dirty="0"/>
-              <a:t>Trigger</a:t>
-            </a:r>
-          </a:p>
-          <a:p>
-            <a:pPr lvl="1"/>
-            <a:r>
-              <a:rPr lang="en-US" dirty="0"/>
-              <a:t>DAQ and DQM</a:t>
-            </a:r>
-          </a:p>
-        </p:txBody>
-      </p:sp>
-      <p:sp>
-        <p:nvSpPr>
-          <p:cNvPr id="5" name="Footer Placeholder 4">
-            <a:extLst>
-              <a:ext uri="{FF2B5EF4-FFF2-40B4-BE49-F238E27FC236}">
-                <a16:creationId xmlns:a16="http://schemas.microsoft.com/office/drawing/2014/main" id="{3314C16F-256D-43FC-74CC-ACCC7641CC97}"/>
+        </p:nvPicPr>
+        <p:blipFill>
+          <a:blip r:embed="rId2"/>
+          <a:stretch>
+            <a:fillRect/>
+          </a:stretch>
+        </p:blipFill>
+        <p:spPr>
+          <a:xfrm>
+            <a:off x="1289050" y="2794794"/>
+            <a:ext cx="9613900" cy="2413000"/>
+          </a:xfrm>
+        </p:spPr>
+      </p:pic>
+      <p:pic>
+        <p:nvPicPr>
+          <p:cNvPr id="4" name="Picture 3">
+            <a:extLst>
+              <a:ext uri="{FF2B5EF4-FFF2-40B4-BE49-F238E27FC236}">
+                <a16:creationId xmlns:a16="http://schemas.microsoft.com/office/drawing/2014/main" id="{B0E24DE1-890B-0AC2-04FA-72EE5A2A19FC}"/>
+              </a:ext>
+            </a:extLst>
+          </p:cNvPr>
+          <p:cNvPicPr>
+            <a:picLocks noChangeAspect="1"/>
+          </p:cNvPicPr>
+          <p:nvPr/>
+        </p:nvPicPr>
+        <p:blipFill>
+          <a:blip r:embed="rId3"/>
+          <a:stretch>
+            <a:fillRect/>
+          </a:stretch>
+        </p:blipFill>
+        <p:spPr>
+          <a:xfrm>
+            <a:off x="1897017" y="831056"/>
+            <a:ext cx="2794000" cy="393700"/>
+          </a:xfrm>
+          <a:prstGeom prst="rect">
+            <a:avLst/>
+          </a:prstGeom>
+        </p:spPr>
+      </p:pic>
+      <p:sp>
+        <p:nvSpPr>
+          <p:cNvPr id="8" name="Footer Placeholder 7">
+            <a:extLst>
+              <a:ext uri="{FF2B5EF4-FFF2-40B4-BE49-F238E27FC236}">
+                <a16:creationId xmlns:a16="http://schemas.microsoft.com/office/drawing/2014/main" id="{FF4D8BF8-E238-E659-656D-A7C11364FD47}"/>
               </a:ext>
             </a:extLst>
           </p:cNvPr>
@@ -14616,10 +14594,10 @@
       </p:sp>
       <p:sp>
         <p:nvSpPr>
-          <p:cNvPr id="6" name="Slide Number Placeholder 5">
-            <a:extLst>
-              <a:ext uri="{FF2B5EF4-FFF2-40B4-BE49-F238E27FC236}">
-                <a16:creationId xmlns:a16="http://schemas.microsoft.com/office/drawing/2014/main" id="{3B8E0276-1DD3-A3CD-7377-30DD6DE7D9EC}"/>
+          <p:cNvPr id="9" name="Slide Number Placeholder 8">
+            <a:extLst>
+              <a:ext uri="{FF2B5EF4-FFF2-40B4-BE49-F238E27FC236}">
+                <a16:creationId xmlns:a16="http://schemas.microsoft.com/office/drawing/2014/main" id="{457C9535-E36D-A180-D48C-5426F9A356D9}"/>
               </a:ext>
             </a:extLst>
           </p:cNvPr>
@@ -14646,7 +14624,7 @@
     </p:spTree>
     <p:extLst>
       <p:ext uri="{BB962C8B-B14F-4D97-AF65-F5344CB8AC3E}">
-        <p14:creationId xmlns:p14="http://schemas.microsoft.com/office/powerpoint/2010/main" val="1085278885"/>
+        <p14:creationId xmlns:p14="http://schemas.microsoft.com/office/powerpoint/2010/main" val="2707345367"/>
       </p:ext>
     </p:extLst>
   </p:cSld>
@@ -14678,7 +14656,7 @@
           <p:cNvPr id="2" name="Title 1">
             <a:extLst>
               <a:ext uri="{FF2B5EF4-FFF2-40B4-BE49-F238E27FC236}">
-                <a16:creationId xmlns:a16="http://schemas.microsoft.com/office/drawing/2014/main" id="{88BD7683-6D47-BCC4-B9B0-A0A36F4CBD90}"/>
+                <a16:creationId xmlns:a16="http://schemas.microsoft.com/office/drawing/2014/main" id="{DD8BE141-8AF4-86A0-A640-9DC5731FF8FC}"/>
               </a:ext>
             </a:extLst>
           </p:cNvPr>
@@ -14696,7 +14674,7 @@
           <a:p>
             <a:r>
               <a:rPr lang="en-US" dirty="0"/>
-              <a:t>Relevant Backgrounds and Mitigation </a:t>
+              <a:t>Other Tests of CLFV Models</a:t>
             </a:r>
           </a:p>
         </p:txBody>
@@ -14706,7 +14684,7 @@
           <p:cNvPr id="3" name="Content Placeholder 2">
             <a:extLst>
               <a:ext uri="{FF2B5EF4-FFF2-40B4-BE49-F238E27FC236}">
-                <a16:creationId xmlns:a16="http://schemas.microsoft.com/office/drawing/2014/main" id="{7CF2567C-C18A-9A04-B0E1-F7AAD309938A}"/>
+                <a16:creationId xmlns:a16="http://schemas.microsoft.com/office/drawing/2014/main" id="{E8433CAA-16E5-D7E9-22CB-0B4DC863D225}"/>
               </a:ext>
             </a:extLst>
           </p:cNvPr>
@@ -14722,46 +14700,7 @@
           <a:bodyPr/>
           <a:lstStyle/>
           <a:p>
-            <a:r>
-              <a:rPr lang="en-US" dirty="0"/>
-              <a:t>Muon Decay-in-Orbit</a:t>
-            </a:r>
-          </a:p>
-          <a:p>
-            <a:r>
-              <a:rPr lang="en-US" dirty="0"/>
-              <a:t>Radiative Muon Capture (RMC)</a:t>
-            </a:r>
-          </a:p>
-          <a:p>
-            <a:r>
-              <a:rPr lang="en-US" dirty="0"/>
-              <a:t>Radiative Pion Capture (RPC)</a:t>
-            </a:r>
-          </a:p>
-          <a:p>
-            <a:r>
-              <a:rPr lang="en-US" dirty="0"/>
-              <a:t>Electromagnetic Production Processes</a:t>
-            </a:r>
-          </a:p>
-          <a:p>
-            <a:r>
-              <a:rPr lang="en-US" dirty="0"/>
-              <a:t>Beam Flash</a:t>
-            </a:r>
-          </a:p>
-          <a:p>
-            <a:r>
-              <a:rPr lang="en-US" dirty="0"/>
-              <a:t>Cosmic Ray Muons and Byproducts</a:t>
-            </a:r>
-          </a:p>
-          <a:p>
-            <a:r>
-              <a:rPr lang="en-US" dirty="0"/>
-              <a:t>Reconstruction Error</a:t>
-            </a:r>
+            <a:endParaRPr lang="en-US"/>
           </a:p>
         </p:txBody>
       </p:sp>
@@ -14770,7 +14709,7 @@
           <p:cNvPr id="5" name="Footer Placeholder 4">
             <a:extLst>
               <a:ext uri="{FF2B5EF4-FFF2-40B4-BE49-F238E27FC236}">
-                <a16:creationId xmlns:a16="http://schemas.microsoft.com/office/drawing/2014/main" id="{19790F6C-CC2F-1A6E-8CE5-D3E3540FBEB2}"/>
+                <a16:creationId xmlns:a16="http://schemas.microsoft.com/office/drawing/2014/main" id="{47FEE70D-3C0A-17C0-01F3-A88D794E8862}"/>
               </a:ext>
             </a:extLst>
           </p:cNvPr>
@@ -14798,7 +14737,7 @@
           <p:cNvPr id="6" name="Slide Number Placeholder 5">
             <a:extLst>
               <a:ext uri="{FF2B5EF4-FFF2-40B4-BE49-F238E27FC236}">
-                <a16:creationId xmlns:a16="http://schemas.microsoft.com/office/drawing/2014/main" id="{3688C638-A98D-1870-B400-BD16FF2710F3}"/>
+                <a16:creationId xmlns:a16="http://schemas.microsoft.com/office/drawing/2014/main" id="{6DDD0A70-BD65-6179-740B-62B7B709CE2F}"/>
               </a:ext>
             </a:extLst>
           </p:cNvPr>
@@ -14825,7 +14764,7 @@
     </p:spTree>
     <p:extLst>
       <p:ext uri="{BB962C8B-B14F-4D97-AF65-F5344CB8AC3E}">
-        <p14:creationId xmlns:p14="http://schemas.microsoft.com/office/powerpoint/2010/main" val="386529000"/>
+        <p14:creationId xmlns:p14="http://schemas.microsoft.com/office/powerpoint/2010/main" val="3985553873"/>
       </p:ext>
     </p:extLst>
   </p:cSld>
@@ -14857,7 +14796,7 @@
           <p:cNvPr id="2" name="Title 1">
             <a:extLst>
               <a:ext uri="{FF2B5EF4-FFF2-40B4-BE49-F238E27FC236}">
-                <a16:creationId xmlns:a16="http://schemas.microsoft.com/office/drawing/2014/main" id="{87CCA332-8AD9-D920-5DDD-DB6A3CFB3F35}"/>
+                <a16:creationId xmlns:a16="http://schemas.microsoft.com/office/drawing/2014/main" id="{963131C8-0D61-FAC3-E34D-35B6966BBC4B}"/>
               </a:ext>
             </a:extLst>
           </p:cNvPr>
@@ -14875,7 +14814,7 @@
           <a:p>
             <a:r>
               <a:rPr lang="en-US" dirty="0"/>
-              <a:t>Theoretical Motivation</a:t>
+              <a:t>The Mu2e Experiment</a:t>
             </a:r>
           </a:p>
         </p:txBody>
@@ -14885,7 +14824,7 @@
           <p:cNvPr id="3" name="Text Placeholder 2">
             <a:extLst>
               <a:ext uri="{FF2B5EF4-FFF2-40B4-BE49-F238E27FC236}">
-                <a16:creationId xmlns:a16="http://schemas.microsoft.com/office/drawing/2014/main" id="{5DD99F40-0606-45BC-B3FF-4A6F5EFB4DEA}"/>
+                <a16:creationId xmlns:a16="http://schemas.microsoft.com/office/drawing/2014/main" id="{92CE8180-E664-79B1-AC71-9C5770AD78B9}"/>
               </a:ext>
             </a:extLst>
           </p:cNvPr>
@@ -14901,7 +14840,7 @@
           <a:bodyPr/>
           <a:lstStyle/>
           <a:p>
-            <a:endParaRPr lang="en-US" dirty="0"/>
+            <a:endParaRPr lang="en-US"/>
           </a:p>
         </p:txBody>
       </p:sp>
@@ -14910,7 +14849,7 @@
           <p:cNvPr id="5" name="Footer Placeholder 4">
             <a:extLst>
               <a:ext uri="{FF2B5EF4-FFF2-40B4-BE49-F238E27FC236}">
-                <a16:creationId xmlns:a16="http://schemas.microsoft.com/office/drawing/2014/main" id="{F03599A0-AD5C-762A-1521-8A1BBCA31A5F}"/>
+                <a16:creationId xmlns:a16="http://schemas.microsoft.com/office/drawing/2014/main" id="{4A80378D-63BD-7C4B-A77A-B3EEC2B282E2}"/>
               </a:ext>
             </a:extLst>
           </p:cNvPr>
@@ -14938,7 +14877,7 @@
           <p:cNvPr id="6" name="Slide Number Placeholder 5">
             <a:extLst>
               <a:ext uri="{FF2B5EF4-FFF2-40B4-BE49-F238E27FC236}">
-                <a16:creationId xmlns:a16="http://schemas.microsoft.com/office/drawing/2014/main" id="{08814B3D-D399-16FE-F903-639EFF7B7335}"/>
+                <a16:creationId xmlns:a16="http://schemas.microsoft.com/office/drawing/2014/main" id="{13BA0451-3DAD-69CF-AC45-A9C1AFB59090}"/>
               </a:ext>
             </a:extLst>
           </p:cNvPr>
@@ -14965,7 +14904,7 @@
     </p:spTree>
     <p:extLst>
       <p:ext uri="{BB962C8B-B14F-4D97-AF65-F5344CB8AC3E}">
-        <p14:creationId xmlns:p14="http://schemas.microsoft.com/office/powerpoint/2010/main" val="3071422167"/>
+        <p14:creationId xmlns:p14="http://schemas.microsoft.com/office/powerpoint/2010/main" val="708256937"/>
       </p:ext>
     </p:extLst>
   </p:cSld>
@@ -14997,7 +14936,7 @@
           <p:cNvPr id="2" name="Title 1">
             <a:extLst>
               <a:ext uri="{FF2B5EF4-FFF2-40B4-BE49-F238E27FC236}">
-                <a16:creationId xmlns:a16="http://schemas.microsoft.com/office/drawing/2014/main" id="{E18806B5-1DE0-9C43-1112-600F95963F8E}"/>
+                <a16:creationId xmlns:a16="http://schemas.microsoft.com/office/drawing/2014/main" id="{FC5B137A-485D-0274-8DC0-9D6BB96AC2A9}"/>
               </a:ext>
             </a:extLst>
           </p:cNvPr>
@@ -15015,7 +14954,7 @@
           <a:p>
             <a:r>
               <a:rPr lang="en-US" dirty="0"/>
-              <a:t>Flavor and Charged Flavor Violation</a:t>
+              <a:t>Primary Experimental Goals</a:t>
             </a:r>
           </a:p>
         </p:txBody>
@@ -15025,7 +14964,7 @@
           <p:cNvPr id="3" name="Content Placeholder 2">
             <a:extLst>
               <a:ext uri="{FF2B5EF4-FFF2-40B4-BE49-F238E27FC236}">
-                <a16:creationId xmlns:a16="http://schemas.microsoft.com/office/drawing/2014/main" id="{004AB05C-D1ED-58F5-BF6C-BFA57B0D0030}"/>
+                <a16:creationId xmlns:a16="http://schemas.microsoft.com/office/drawing/2014/main" id="{027986AA-BB7E-80A3-D709-9E275171FF74}"/>
               </a:ext>
             </a:extLst>
           </p:cNvPr>
@@ -15041,16 +14980,61 @@
           <a:bodyPr/>
           <a:lstStyle/>
           <a:p>
-            <a:endParaRPr lang="en-US"/>
-          </a:p>
-        </p:txBody>
-      </p:sp>
-      <p:sp>
-        <p:nvSpPr>
-          <p:cNvPr id="5" name="Footer Placeholder 4">
-            <a:extLst>
-              <a:ext uri="{FF2B5EF4-FFF2-40B4-BE49-F238E27FC236}">
-                <a16:creationId xmlns:a16="http://schemas.microsoft.com/office/drawing/2014/main" id="{A980BACF-2A07-8166-205D-A9011A2593D2}"/>
+            <a:r>
+              <a:rPr lang="en-US" dirty="0"/>
+              <a:t>Detection of the coherent conversion of </a:t>
+            </a:r>
+          </a:p>
+          <a:p>
+            <a:r>
+              <a:rPr lang="en-US" dirty="0"/>
+              <a:t>K-shell conversion</a:t>
+            </a:r>
+          </a:p>
+          <a:p>
+            <a:r>
+              <a:rPr lang="en-US" dirty="0"/>
+              <a:t>Monoenergetic (104.973 MeV) single electron signature</a:t>
+            </a:r>
+          </a:p>
+        </p:txBody>
+      </p:sp>
+      <p:pic>
+        <p:nvPicPr>
+          <p:cNvPr id="4" name="Picture 3">
+            <a:extLst>
+              <a:ext uri="{FF2B5EF4-FFF2-40B4-BE49-F238E27FC236}">
+                <a16:creationId xmlns:a16="http://schemas.microsoft.com/office/drawing/2014/main" id="{31230D72-72D5-3941-CD0B-1865EB1E4A6B}"/>
+              </a:ext>
+            </a:extLst>
+          </p:cNvPr>
+          <p:cNvPicPr>
+            <a:picLocks noChangeAspect="1"/>
+          </p:cNvPicPr>
+          <p:nvPr/>
+        </p:nvPicPr>
+        <p:blipFill>
+          <a:blip r:embed="rId2"/>
+          <a:stretch>
+            <a:fillRect/>
+          </a:stretch>
+        </p:blipFill>
+        <p:spPr>
+          <a:xfrm>
+            <a:off x="7328808" y="1881513"/>
+            <a:ext cx="1991541" cy="317492"/>
+          </a:xfrm>
+          <a:prstGeom prst="rect">
+            <a:avLst/>
+          </a:prstGeom>
+        </p:spPr>
+      </p:pic>
+      <p:sp>
+        <p:nvSpPr>
+          <p:cNvPr id="6" name="Footer Placeholder 5">
+            <a:extLst>
+              <a:ext uri="{FF2B5EF4-FFF2-40B4-BE49-F238E27FC236}">
+                <a16:creationId xmlns:a16="http://schemas.microsoft.com/office/drawing/2014/main" id="{5BA811A3-D9FD-DD4F-0F3B-68964BD9C22B}"/>
               </a:ext>
             </a:extLst>
           </p:cNvPr>
@@ -15075,10 +15059,10 @@
       </p:sp>
       <p:sp>
         <p:nvSpPr>
-          <p:cNvPr id="6" name="Slide Number Placeholder 5">
-            <a:extLst>
-              <a:ext uri="{FF2B5EF4-FFF2-40B4-BE49-F238E27FC236}">
-                <a16:creationId xmlns:a16="http://schemas.microsoft.com/office/drawing/2014/main" id="{89171392-E5AC-CE2F-5495-5F8534D2ECF6}"/>
+          <p:cNvPr id="7" name="Slide Number Placeholder 6">
+            <a:extLst>
+              <a:ext uri="{FF2B5EF4-FFF2-40B4-BE49-F238E27FC236}">
+                <a16:creationId xmlns:a16="http://schemas.microsoft.com/office/drawing/2014/main" id="{2A1E8DE2-014F-63F7-AB4F-A3B6F3963F70}"/>
               </a:ext>
             </a:extLst>
           </p:cNvPr>
@@ -15105,7 +15089,7 @@
     </p:spTree>
     <p:extLst>
       <p:ext uri="{BB962C8B-B14F-4D97-AF65-F5344CB8AC3E}">
-        <p14:creationId xmlns:p14="http://schemas.microsoft.com/office/powerpoint/2010/main" val="669870449"/>
+        <p14:creationId xmlns:p14="http://schemas.microsoft.com/office/powerpoint/2010/main" val="718307452"/>
       </p:ext>
     </p:extLst>
   </p:cSld>
@@ -15137,7 +15121,7 @@
           <p:cNvPr id="2" name="Title 1">
             <a:extLst>
               <a:ext uri="{FF2B5EF4-FFF2-40B4-BE49-F238E27FC236}">
-                <a16:creationId xmlns:a16="http://schemas.microsoft.com/office/drawing/2014/main" id="{AA6BB1C5-10C7-BF33-1D1B-01E0BF47027A}"/>
+                <a16:creationId xmlns:a16="http://schemas.microsoft.com/office/drawing/2014/main" id="{B0738086-5BCE-5D12-CE7E-196C58130BC7}"/>
               </a:ext>
             </a:extLst>
           </p:cNvPr>
@@ -15155,76 +15139,98 @@
           <a:p>
             <a:r>
               <a:rPr lang="en-US" dirty="0"/>
-              <a:t>The                            Process</a:t>
-            </a:r>
-          </a:p>
-        </p:txBody>
-      </p:sp>
-      <p:pic>
-        <p:nvPicPr>
-          <p:cNvPr id="6" name="Content Placeholder 5" descr="A diagram of a mathematical equation&#10;&#10;AI-generated content may be incorrect.">
-            <a:extLst>
-              <a:ext uri="{FF2B5EF4-FFF2-40B4-BE49-F238E27FC236}">
-                <a16:creationId xmlns:a16="http://schemas.microsoft.com/office/drawing/2014/main" id="{DAC76081-EEC6-66E5-6E2E-142868FA2DD0}"/>
-              </a:ext>
-            </a:extLst>
-          </p:cNvPr>
-          <p:cNvPicPr>
-            <a:picLocks noGrp="1" noChangeAspect="1"/>
-          </p:cNvPicPr>
+              <a:t>Design</a:t>
+            </a:r>
+          </a:p>
+        </p:txBody>
+      </p:sp>
+      <p:sp>
+        <p:nvSpPr>
+          <p:cNvPr id="3" name="Content Placeholder 2">
+            <a:extLst>
+              <a:ext uri="{FF2B5EF4-FFF2-40B4-BE49-F238E27FC236}">
+                <a16:creationId xmlns:a16="http://schemas.microsoft.com/office/drawing/2014/main" id="{96AF68DE-F940-1E30-B16B-4A91096C4320}"/>
+              </a:ext>
+            </a:extLst>
+          </p:cNvPr>
+          <p:cNvSpPr>
+            <a:spLocks noGrp="1"/>
+          </p:cNvSpPr>
           <p:nvPr>
             <p:ph idx="1"/>
           </p:nvPr>
-        </p:nvPicPr>
-        <p:blipFill>
-          <a:blip r:embed="rId2"/>
-          <a:stretch>
-            <a:fillRect/>
-          </a:stretch>
-        </p:blipFill>
-        <p:spPr>
-          <a:xfrm>
-            <a:off x="1289050" y="2794794"/>
-            <a:ext cx="9613900" cy="2413000"/>
-          </a:xfrm>
-        </p:spPr>
-      </p:pic>
-      <p:pic>
-        <p:nvPicPr>
-          <p:cNvPr id="4" name="Picture 3">
-            <a:extLst>
-              <a:ext uri="{FF2B5EF4-FFF2-40B4-BE49-F238E27FC236}">
-                <a16:creationId xmlns:a16="http://schemas.microsoft.com/office/drawing/2014/main" id="{B0E24DE1-890B-0AC2-04FA-72EE5A2A19FC}"/>
-              </a:ext>
-            </a:extLst>
-          </p:cNvPr>
-          <p:cNvPicPr>
-            <a:picLocks noChangeAspect="1"/>
-          </p:cNvPicPr>
-          <p:nvPr/>
-        </p:nvPicPr>
-        <p:blipFill>
-          <a:blip r:embed="rId3"/>
-          <a:stretch>
-            <a:fillRect/>
-          </a:stretch>
-        </p:blipFill>
-        <p:spPr>
-          <a:xfrm>
-            <a:off x="1897017" y="831056"/>
-            <a:ext cx="2794000" cy="393700"/>
-          </a:xfrm>
-          <a:prstGeom prst="rect">
-            <a:avLst/>
-          </a:prstGeom>
-        </p:spPr>
-      </p:pic>
-      <p:sp>
-        <p:nvSpPr>
-          <p:cNvPr id="8" name="Footer Placeholder 7">
-            <a:extLst>
-              <a:ext uri="{FF2B5EF4-FFF2-40B4-BE49-F238E27FC236}">
-                <a16:creationId xmlns:a16="http://schemas.microsoft.com/office/drawing/2014/main" id="{FF4D8BF8-E238-E659-656D-A7C11364FD47}"/>
+        </p:nvSpPr>
+        <p:spPr/>
+        <p:txBody>
+          <a:bodyPr/>
+          <a:lstStyle/>
+          <a:p>
+            <a:r>
+              <a:rPr lang="en-US" dirty="0"/>
+              <a:t>Production</a:t>
+            </a:r>
+          </a:p>
+          <a:p>
+            <a:r>
+              <a:rPr lang="en-US" dirty="0"/>
+              <a:t>Transport</a:t>
+            </a:r>
+          </a:p>
+          <a:p>
+            <a:r>
+              <a:rPr lang="en-US" dirty="0"/>
+              <a:t>Detector</a:t>
+            </a:r>
+          </a:p>
+          <a:p>
+            <a:pPr lvl="1"/>
+            <a:r>
+              <a:rPr lang="en-US" dirty="0"/>
+              <a:t>Tracker</a:t>
+            </a:r>
+          </a:p>
+          <a:p>
+            <a:pPr lvl="1"/>
+            <a:r>
+              <a:rPr lang="en-US" dirty="0"/>
+              <a:t>Calorimeter</a:t>
+            </a:r>
+          </a:p>
+          <a:p>
+            <a:pPr lvl="1"/>
+            <a:r>
+              <a:rPr lang="en-US" dirty="0"/>
+              <a:t>Detector Solenoid</a:t>
+            </a:r>
+          </a:p>
+          <a:p>
+            <a:r>
+              <a:rPr lang="en-US" dirty="0"/>
+              <a:t>Computing</a:t>
+            </a:r>
+          </a:p>
+          <a:p>
+            <a:pPr lvl="1"/>
+            <a:r>
+              <a:rPr lang="en-US" dirty="0"/>
+              <a:t>Trigger</a:t>
+            </a:r>
+          </a:p>
+          <a:p>
+            <a:pPr lvl="1"/>
+            <a:r>
+              <a:rPr lang="en-US" dirty="0"/>
+              <a:t>DAQ and DQM</a:t>
+            </a:r>
+          </a:p>
+        </p:txBody>
+      </p:sp>
+      <p:sp>
+        <p:nvSpPr>
+          <p:cNvPr id="5" name="Footer Placeholder 4">
+            <a:extLst>
+              <a:ext uri="{FF2B5EF4-FFF2-40B4-BE49-F238E27FC236}">
+                <a16:creationId xmlns:a16="http://schemas.microsoft.com/office/drawing/2014/main" id="{3314C16F-256D-43FC-74CC-ACCC7641CC97}"/>
               </a:ext>
             </a:extLst>
           </p:cNvPr>
@@ -15249,10 +15255,10 @@
       </p:sp>
       <p:sp>
         <p:nvSpPr>
-          <p:cNvPr id="9" name="Slide Number Placeholder 8">
-            <a:extLst>
-              <a:ext uri="{FF2B5EF4-FFF2-40B4-BE49-F238E27FC236}">
-                <a16:creationId xmlns:a16="http://schemas.microsoft.com/office/drawing/2014/main" id="{457C9535-E36D-A180-D48C-5426F9A356D9}"/>
+          <p:cNvPr id="6" name="Slide Number Placeholder 5">
+            <a:extLst>
+              <a:ext uri="{FF2B5EF4-FFF2-40B4-BE49-F238E27FC236}">
+                <a16:creationId xmlns:a16="http://schemas.microsoft.com/office/drawing/2014/main" id="{3B8E0276-1DD3-A3CD-7377-30DD6DE7D9EC}"/>
               </a:ext>
             </a:extLst>
           </p:cNvPr>
@@ -15279,7 +15285,7 @@
     </p:spTree>
     <p:extLst>
       <p:ext uri="{BB962C8B-B14F-4D97-AF65-F5344CB8AC3E}">
-        <p14:creationId xmlns:p14="http://schemas.microsoft.com/office/powerpoint/2010/main" val="2707345367"/>
+        <p14:creationId xmlns:p14="http://schemas.microsoft.com/office/powerpoint/2010/main" val="1085278885"/>
       </p:ext>
     </p:extLst>
   </p:cSld>

--- a/ProposalWriting/Presentation/BoldyProposalDefense [Autosaved].pptx
+++ b/ProposalWriting/Presentation/BoldyProposalDefense [Autosaved].pptx
@@ -5,7 +5,7 @@
     <p:sldMasterId id="2147483648" r:id="rId1"/>
   </p:sldMasterIdLst>
   <p:notesMasterIdLst>
-    <p:notesMasterId r:id="rId43"/>
+    <p:notesMasterId r:id="rId44"/>
   </p:notesMasterIdLst>
   <p:sldIdLst>
     <p:sldId id="256" r:id="rId2"/>
@@ -22,33 +22,34 @@
     <p:sldId id="267" r:id="rId13"/>
     <p:sldId id="269" r:id="rId14"/>
     <p:sldId id="268" r:id="rId15"/>
-    <p:sldId id="292" r:id="rId16"/>
-    <p:sldId id="261" r:id="rId17"/>
-    <p:sldId id="270" r:id="rId18"/>
-    <p:sldId id="274" r:id="rId19"/>
-    <p:sldId id="271" r:id="rId20"/>
-    <p:sldId id="275" r:id="rId21"/>
-    <p:sldId id="272" r:id="rId22"/>
-    <p:sldId id="276" r:id="rId23"/>
-    <p:sldId id="273" r:id="rId24"/>
-    <p:sldId id="288" r:id="rId25"/>
-    <p:sldId id="262" r:id="rId26"/>
-    <p:sldId id="277" r:id="rId27"/>
-    <p:sldId id="278" r:id="rId28"/>
-    <p:sldId id="279" r:id="rId29"/>
-    <p:sldId id="280" r:id="rId30"/>
-    <p:sldId id="281" r:id="rId31"/>
-    <p:sldId id="282" r:id="rId32"/>
-    <p:sldId id="296" r:id="rId33"/>
-    <p:sldId id="289" r:id="rId34"/>
-    <p:sldId id="263" r:id="rId35"/>
-    <p:sldId id="283" r:id="rId36"/>
-    <p:sldId id="284" r:id="rId37"/>
-    <p:sldId id="290" r:id="rId38"/>
-    <p:sldId id="295" r:id="rId39"/>
-    <p:sldId id="293" r:id="rId40"/>
-    <p:sldId id="291" r:id="rId41"/>
-    <p:sldId id="294" r:id="rId42"/>
+    <p:sldId id="297" r:id="rId16"/>
+    <p:sldId id="292" r:id="rId17"/>
+    <p:sldId id="261" r:id="rId18"/>
+    <p:sldId id="270" r:id="rId19"/>
+    <p:sldId id="274" r:id="rId20"/>
+    <p:sldId id="271" r:id="rId21"/>
+    <p:sldId id="275" r:id="rId22"/>
+    <p:sldId id="272" r:id="rId23"/>
+    <p:sldId id="276" r:id="rId24"/>
+    <p:sldId id="273" r:id="rId25"/>
+    <p:sldId id="288" r:id="rId26"/>
+    <p:sldId id="262" r:id="rId27"/>
+    <p:sldId id="277" r:id="rId28"/>
+    <p:sldId id="278" r:id="rId29"/>
+    <p:sldId id="279" r:id="rId30"/>
+    <p:sldId id="280" r:id="rId31"/>
+    <p:sldId id="281" r:id="rId32"/>
+    <p:sldId id="282" r:id="rId33"/>
+    <p:sldId id="296" r:id="rId34"/>
+    <p:sldId id="289" r:id="rId35"/>
+    <p:sldId id="263" r:id="rId36"/>
+    <p:sldId id="283" r:id="rId37"/>
+    <p:sldId id="284" r:id="rId38"/>
+    <p:sldId id="290" r:id="rId39"/>
+    <p:sldId id="295" r:id="rId40"/>
+    <p:sldId id="293" r:id="rId41"/>
+    <p:sldId id="291" r:id="rId42"/>
+    <p:sldId id="294" r:id="rId43"/>
   </p:sldIdLst>
   <p:sldSz cx="12192000" cy="6858000"/>
   <p:notesSz cx="6858000" cy="9144000"/>
@@ -4447,6 +4448,64 @@
           </a:p>
         </p:txBody>
       </p:sp>
+      <p:sp>
+        <p:nvSpPr>
+          <p:cNvPr id="4" name="Title 1">
+            <a:extLst>
+              <a:ext uri="{FF2B5EF4-FFF2-40B4-BE49-F238E27FC236}">
+                <a16:creationId xmlns:a16="http://schemas.microsoft.com/office/drawing/2014/main" id="{6AF30B85-8622-FF04-2703-3943E8517E76}"/>
+              </a:ext>
+            </a:extLst>
+          </p:cNvPr>
+          <p:cNvSpPr txBox="1">
+            <a:spLocks/>
+          </p:cNvSpPr>
+          <p:nvPr/>
+        </p:nvSpPr>
+        <p:spPr>
+          <a:xfrm>
+            <a:off x="0" y="0"/>
+            <a:ext cx="10515600" cy="424543"/>
+          </a:xfrm>
+          <a:prstGeom prst="rect">
+            <a:avLst/>
+          </a:prstGeom>
+        </p:spPr>
+        <p:txBody>
+          <a:bodyPr vert="horz" lIns="91440" tIns="45720" rIns="91440" bIns="45720" rtlCol="0" anchor="ctr">
+            <a:normAutofit fontScale="90000" lnSpcReduction="10000"/>
+          </a:bodyPr>
+          <a:lstStyle>
+            <a:lvl1pPr algn="l" defTabSz="914400" rtl="0" eaLnBrk="1" latinLnBrk="0" hangingPunct="1">
+              <a:lnSpc>
+                <a:spcPct val="90000"/>
+              </a:lnSpc>
+              <a:spcBef>
+                <a:spcPct val="0"/>
+              </a:spcBef>
+              <a:buNone/>
+              <a:defRPr sz="4400" kern="1200">
+                <a:solidFill>
+                  <a:schemeClr val="tx1"/>
+                </a:solidFill>
+                <a:latin typeface="+mj-lt"/>
+                <a:ea typeface="+mj-ea"/>
+                <a:cs typeface="+mj-cs"/>
+              </a:defRPr>
+            </a:lvl1pPr>
+          </a:lstStyle>
+          <a:p>
+            <a:r>
+              <a:rPr lang="en-US" sz="2800" dirty="0">
+                <a:solidFill>
+                  <a:srgbClr val="C00000"/>
+                </a:solidFill>
+              </a:rPr>
+              <a:t>Relevant Backgrounds and Mitigation Techniques</a:t>
+            </a:r>
+          </a:p>
+        </p:txBody>
+      </p:sp>
     </p:spTree>
     <p:extLst>
       <p:ext uri="{BB962C8B-B14F-4D97-AF65-F5344CB8AC3E}">
@@ -4916,6 +4975,269 @@
           </a:prstGeom>
         </p:spPr>
       </p:pic>
+      <mc:AlternateContent xmlns:mc="http://schemas.openxmlformats.org/markup-compatibility/2006">
+        <mc:Choice xmlns:a14="http://schemas.microsoft.com/office/drawing/2010/main" Requires="a14">
+          <p:sp>
+            <p:nvSpPr>
+              <p:cNvPr id="4" name="Title 1">
+                <a:extLst>
+                  <a:ext uri="{FF2B5EF4-FFF2-40B4-BE49-F238E27FC236}">
+                    <a16:creationId xmlns:a16="http://schemas.microsoft.com/office/drawing/2014/main" id="{F4D19819-A4B6-C926-3895-93903E2D5D1C}"/>
+                  </a:ext>
+                </a:extLst>
+              </p:cNvPr>
+              <p:cNvSpPr txBox="1">
+                <a:spLocks/>
+              </p:cNvSpPr>
+              <p:nvPr/>
+            </p:nvSpPr>
+            <p:spPr>
+              <a:xfrm>
+                <a:off x="0" y="0"/>
+                <a:ext cx="10515600" cy="570689"/>
+              </a:xfrm>
+              <a:prstGeom prst="rect">
+                <a:avLst/>
+              </a:prstGeom>
+            </p:spPr>
+            <p:txBody>
+              <a:bodyPr vert="horz" lIns="91440" tIns="45720" rIns="91440" bIns="45720" rtlCol="0" anchor="ctr">
+                <a:normAutofit fontScale="97500"/>
+              </a:bodyPr>
+              <a:lstStyle>
+                <a:lvl1pPr algn="l" defTabSz="914400" rtl="0" eaLnBrk="1" latinLnBrk="0" hangingPunct="1">
+                  <a:lnSpc>
+                    <a:spcPct val="90000"/>
+                  </a:lnSpc>
+                  <a:spcBef>
+                    <a:spcPct val="0"/>
+                  </a:spcBef>
+                  <a:buNone/>
+                  <a:defRPr sz="4400" kern="1200">
+                    <a:solidFill>
+                      <a:schemeClr val="tx1"/>
+                    </a:solidFill>
+                    <a:latin typeface="+mj-lt"/>
+                    <a:ea typeface="+mj-ea"/>
+                    <a:cs typeface="+mj-cs"/>
+                  </a:defRPr>
+                </a:lvl1pPr>
+              </a:lstStyle>
+              <a:p>
+                <a14:m>
+                  <m:oMath xmlns:m="http://schemas.openxmlformats.org/officeDocument/2006/math">
+                    <m:sSup>
+                      <m:sSupPr>
+                        <m:ctrlPr>
+                          <a:rPr lang="en-US" sz="2800" i="1" smtClean="0">
+                            <a:solidFill>
+                              <a:srgbClr val="C00000"/>
+                            </a:solidFill>
+                            <a:latin typeface="Cambria Math" panose="02040503050406030204" pitchFamily="18" charset="0"/>
+                          </a:rPr>
+                        </m:ctrlPr>
+                      </m:sSupPr>
+                      <m:e>
+                        <m:r>
+                          <a:rPr lang="en-US" sz="2800" i="1" smtClean="0">
+                            <a:solidFill>
+                              <a:srgbClr val="C00000"/>
+                            </a:solidFill>
+                            <a:latin typeface="Cambria Math" panose="02040503050406030204" pitchFamily="18" charset="0"/>
+                            <a:ea typeface="Cambria Math" panose="02040503050406030204" pitchFamily="18" charset="0"/>
+                          </a:rPr>
+                          <m:t>𝜇</m:t>
+                        </m:r>
+                      </m:e>
+                      <m:sup>
+                        <m:r>
+                          <a:rPr lang="en-US" sz="2800" b="0" i="1" smtClean="0">
+                            <a:solidFill>
+                              <a:srgbClr val="C00000"/>
+                            </a:solidFill>
+                            <a:latin typeface="Cambria Math" panose="02040503050406030204" pitchFamily="18" charset="0"/>
+                          </a:rPr>
+                          <m:t>−</m:t>
+                        </m:r>
+                      </m:sup>
+                    </m:sSup>
+                    <m:sSup>
+                      <m:sSupPr>
+                        <m:ctrlPr>
+                          <a:rPr lang="en-US" sz="2800" i="1" smtClean="0">
+                            <a:solidFill>
+                              <a:srgbClr val="C00000"/>
+                            </a:solidFill>
+                            <a:latin typeface="Cambria Math" panose="02040503050406030204" pitchFamily="18" charset="0"/>
+                          </a:rPr>
+                        </m:ctrlPr>
+                      </m:sSupPr>
+                      <m:e>
+                        <m:r>
+                          <a:rPr lang="en-US" sz="2800" b="0" i="1" smtClean="0">
+                            <a:solidFill>
+                              <a:srgbClr val="C00000"/>
+                            </a:solidFill>
+                            <a:latin typeface="Cambria Math" panose="02040503050406030204" pitchFamily="18" charset="0"/>
+                          </a:rPr>
+                          <m:t>𝑒</m:t>
+                        </m:r>
+                      </m:e>
+                      <m:sup>
+                        <m:r>
+                          <a:rPr lang="en-US" sz="2800" b="0" i="1" smtClean="0">
+                            <a:solidFill>
+                              <a:srgbClr val="C00000"/>
+                            </a:solidFill>
+                            <a:latin typeface="Cambria Math" panose="02040503050406030204" pitchFamily="18" charset="0"/>
+                          </a:rPr>
+                          <m:t>−</m:t>
+                        </m:r>
+                      </m:sup>
+                    </m:sSup>
+                    <m:r>
+                      <a:rPr lang="en-US" sz="2800" i="1" smtClean="0">
+                        <a:solidFill>
+                          <a:srgbClr val="C00000"/>
+                        </a:solidFill>
+                        <a:latin typeface="Cambria Math" panose="02040503050406030204" pitchFamily="18" charset="0"/>
+                        <a:ea typeface="Cambria Math" panose="02040503050406030204" pitchFamily="18" charset="0"/>
+                      </a:rPr>
+                      <m:t>→</m:t>
+                    </m:r>
+                    <m:sSup>
+                      <m:sSupPr>
+                        <m:ctrlPr>
+                          <a:rPr lang="en-US" sz="2800" i="1" smtClean="0">
+                            <a:solidFill>
+                              <a:srgbClr val="C00000"/>
+                            </a:solidFill>
+                            <a:latin typeface="Cambria Math" panose="02040503050406030204" pitchFamily="18" charset="0"/>
+                            <a:ea typeface="Cambria Math" panose="02040503050406030204" pitchFamily="18" charset="0"/>
+                          </a:rPr>
+                        </m:ctrlPr>
+                      </m:sSupPr>
+                      <m:e>
+                        <m:r>
+                          <a:rPr lang="en-US" sz="2800" b="0" i="1" smtClean="0">
+                            <a:solidFill>
+                              <a:srgbClr val="C00000"/>
+                            </a:solidFill>
+                            <a:latin typeface="Cambria Math" panose="02040503050406030204" pitchFamily="18" charset="0"/>
+                            <a:ea typeface="Cambria Math" panose="02040503050406030204" pitchFamily="18" charset="0"/>
+                          </a:rPr>
+                          <m:t>𝑒</m:t>
+                        </m:r>
+                      </m:e>
+                      <m:sup>
+                        <m:r>
+                          <a:rPr lang="en-US" sz="2800" b="0" i="1" smtClean="0">
+                            <a:solidFill>
+                              <a:srgbClr val="C00000"/>
+                            </a:solidFill>
+                            <a:latin typeface="Cambria Math" panose="02040503050406030204" pitchFamily="18" charset="0"/>
+                            <a:ea typeface="Cambria Math" panose="02040503050406030204" pitchFamily="18" charset="0"/>
+                          </a:rPr>
+                          <m:t>−</m:t>
+                        </m:r>
+                      </m:sup>
+                    </m:sSup>
+                    <m:sSup>
+                      <m:sSupPr>
+                        <m:ctrlPr>
+                          <a:rPr lang="en-US" sz="2800" i="1" smtClean="0">
+                            <a:solidFill>
+                              <a:srgbClr val="C00000"/>
+                            </a:solidFill>
+                            <a:latin typeface="Cambria Math" panose="02040503050406030204" pitchFamily="18" charset="0"/>
+                            <a:ea typeface="Cambria Math" panose="02040503050406030204" pitchFamily="18" charset="0"/>
+                          </a:rPr>
+                        </m:ctrlPr>
+                      </m:sSupPr>
+                      <m:e>
+                        <m:r>
+                          <a:rPr lang="en-US" sz="2800" b="0" i="1" smtClean="0">
+                            <a:solidFill>
+                              <a:srgbClr val="C00000"/>
+                            </a:solidFill>
+                            <a:latin typeface="Cambria Math" panose="02040503050406030204" pitchFamily="18" charset="0"/>
+                            <a:ea typeface="Cambria Math" panose="02040503050406030204" pitchFamily="18" charset="0"/>
+                          </a:rPr>
+                          <m:t>𝑒</m:t>
+                        </m:r>
+                      </m:e>
+                      <m:sup>
+                        <m:r>
+                          <a:rPr lang="en-US" sz="2800" b="0" i="1" smtClean="0">
+                            <a:solidFill>
+                              <a:srgbClr val="C00000"/>
+                            </a:solidFill>
+                            <a:latin typeface="Cambria Math" panose="02040503050406030204" pitchFamily="18" charset="0"/>
+                            <a:ea typeface="Cambria Math" panose="02040503050406030204" pitchFamily="18" charset="0"/>
+                          </a:rPr>
+                          <m:t>−</m:t>
+                        </m:r>
+                      </m:sup>
+                    </m:sSup>
+                  </m:oMath>
+                </a14:m>
+                <a:r>
+                  <a:rPr lang="en-US" sz="2800" dirty="0">
+                    <a:solidFill>
+                      <a:srgbClr val="C00000"/>
+                    </a:solidFill>
+                  </a:rPr>
+                  <a:t> Process Signal Characteristics</a:t>
+                </a:r>
+              </a:p>
+            </p:txBody>
+          </p:sp>
+        </mc:Choice>
+        <mc:Fallback>
+          <p:sp>
+            <p:nvSpPr>
+              <p:cNvPr id="4" name="Title 1">
+                <a:extLst>
+                  <a:ext uri="{FF2B5EF4-FFF2-40B4-BE49-F238E27FC236}">
+                    <a16:creationId xmlns:a16="http://schemas.microsoft.com/office/drawing/2014/main" id="{F4D19819-A4B6-C926-3895-93903E2D5D1C}"/>
+                  </a:ext>
+                </a:extLst>
+              </p:cNvPr>
+              <p:cNvSpPr txBox="1">
+                <a:spLocks noRot="1" noChangeAspect="1" noMove="1" noResize="1" noEditPoints="1" noAdjustHandles="1" noChangeArrowheads="1" noChangeShapeType="1" noTextEdit="1"/>
+              </p:cNvSpPr>
+              <p:nvPr/>
+            </p:nvSpPr>
+            <p:spPr>
+              <a:xfrm>
+                <a:off x="0" y="0"/>
+                <a:ext cx="10515600" cy="570689"/>
+              </a:xfrm>
+              <a:prstGeom prst="rect">
+                <a:avLst/>
+              </a:prstGeom>
+              <a:blipFill>
+                <a:blip r:embed="rId4"/>
+                <a:stretch>
+                  <a:fillRect l="-241" t="-8696" b="-17391"/>
+                </a:stretch>
+              </a:blipFill>
+            </p:spPr>
+            <p:txBody>
+              <a:bodyPr/>
+              <a:lstStyle/>
+              <a:p>
+                <a:r>
+                  <a:rPr lang="en-US">
+                    <a:noFill/>
+                  </a:rPr>
+                  <a:t> </a:t>
+                </a:r>
+              </a:p>
+            </p:txBody>
+          </p:sp>
+        </mc:Fallback>
+      </mc:AlternateContent>
     </p:spTree>
     <p:extLst>
       <p:ext uri="{BB962C8B-B14F-4D97-AF65-F5344CB8AC3E}">
@@ -5071,6 +5393,64 @@
           </a:p>
         </p:txBody>
       </p:sp>
+      <p:sp>
+        <p:nvSpPr>
+          <p:cNvPr id="4" name="Title 1">
+            <a:extLst>
+              <a:ext uri="{FF2B5EF4-FFF2-40B4-BE49-F238E27FC236}">
+                <a16:creationId xmlns:a16="http://schemas.microsoft.com/office/drawing/2014/main" id="{F6792DCE-6A75-7027-6A53-3DF0F89D04F0}"/>
+              </a:ext>
+            </a:extLst>
+          </p:cNvPr>
+          <p:cNvSpPr txBox="1">
+            <a:spLocks/>
+          </p:cNvSpPr>
+          <p:nvPr/>
+        </p:nvSpPr>
+        <p:spPr>
+          <a:xfrm>
+            <a:off x="0" y="0"/>
+            <a:ext cx="10515600" cy="424543"/>
+          </a:xfrm>
+          <a:prstGeom prst="rect">
+            <a:avLst/>
+          </a:prstGeom>
+        </p:spPr>
+        <p:txBody>
+          <a:bodyPr vert="horz" lIns="91440" tIns="45720" rIns="91440" bIns="45720" rtlCol="0" anchor="ctr">
+            <a:normAutofit fontScale="90000" lnSpcReduction="10000"/>
+          </a:bodyPr>
+          <a:lstStyle>
+            <a:lvl1pPr algn="l" defTabSz="914400" rtl="0" eaLnBrk="1" latinLnBrk="0" hangingPunct="1">
+              <a:lnSpc>
+                <a:spcPct val="90000"/>
+              </a:lnSpc>
+              <a:spcBef>
+                <a:spcPct val="0"/>
+              </a:spcBef>
+              <a:buNone/>
+              <a:defRPr sz="4400" kern="1200">
+                <a:solidFill>
+                  <a:schemeClr val="tx1"/>
+                </a:solidFill>
+                <a:latin typeface="+mj-lt"/>
+                <a:ea typeface="+mj-ea"/>
+                <a:cs typeface="+mj-cs"/>
+              </a:defRPr>
+            </a:lvl1pPr>
+          </a:lstStyle>
+          <a:p>
+            <a:r>
+              <a:rPr lang="en-US" sz="2800" dirty="0">
+                <a:solidFill>
+                  <a:srgbClr val="C00000"/>
+                </a:solidFill>
+              </a:rPr>
+              <a:t>Experimental Configuration Requirements</a:t>
+            </a:r>
+          </a:p>
+        </p:txBody>
+      </p:sp>
     </p:spTree>
     <p:extLst>
       <p:ext uri="{BB962C8B-B14F-4D97-AF65-F5344CB8AC3E}">
@@ -5211,6 +5591,64 @@
           </a:p>
         </p:txBody>
       </p:sp>
+      <p:sp>
+        <p:nvSpPr>
+          <p:cNvPr id="4" name="Title 1">
+            <a:extLst>
+              <a:ext uri="{FF2B5EF4-FFF2-40B4-BE49-F238E27FC236}">
+                <a16:creationId xmlns:a16="http://schemas.microsoft.com/office/drawing/2014/main" id="{600B18C0-31B9-1095-3934-6600F13D2C5E}"/>
+              </a:ext>
+            </a:extLst>
+          </p:cNvPr>
+          <p:cNvSpPr txBox="1">
+            <a:spLocks/>
+          </p:cNvSpPr>
+          <p:nvPr/>
+        </p:nvSpPr>
+        <p:spPr>
+          <a:xfrm>
+            <a:off x="0" y="0"/>
+            <a:ext cx="10515600" cy="424543"/>
+          </a:xfrm>
+          <a:prstGeom prst="rect">
+            <a:avLst/>
+          </a:prstGeom>
+        </p:spPr>
+        <p:txBody>
+          <a:bodyPr vert="horz" lIns="91440" tIns="45720" rIns="91440" bIns="45720" rtlCol="0" anchor="ctr">
+            <a:normAutofit fontScale="90000" lnSpcReduction="10000"/>
+          </a:bodyPr>
+          <a:lstStyle>
+            <a:lvl1pPr algn="l" defTabSz="914400" rtl="0" eaLnBrk="1" latinLnBrk="0" hangingPunct="1">
+              <a:lnSpc>
+                <a:spcPct val="90000"/>
+              </a:lnSpc>
+              <a:spcBef>
+                <a:spcPct val="0"/>
+              </a:spcBef>
+              <a:buNone/>
+              <a:defRPr sz="4400" kern="1200">
+                <a:solidFill>
+                  <a:schemeClr val="tx1"/>
+                </a:solidFill>
+                <a:latin typeface="+mj-lt"/>
+                <a:ea typeface="+mj-ea"/>
+                <a:cs typeface="+mj-cs"/>
+              </a:defRPr>
+            </a:lvl1pPr>
+          </a:lstStyle>
+          <a:p>
+            <a:r>
+              <a:rPr lang="en-US" sz="2800" dirty="0">
+                <a:solidFill>
+                  <a:srgbClr val="C00000"/>
+                </a:solidFill>
+              </a:rPr>
+              <a:t>Vertexing Procedure for Finding a Common Origin Position (Part 1)</a:t>
+            </a:r>
+          </a:p>
+        </p:txBody>
+      </p:sp>
     </p:spTree>
     <p:extLst>
       <p:ext uri="{BB962C8B-B14F-4D97-AF65-F5344CB8AC3E}">
@@ -5225,6 +5663,181 @@
 </file>
 
 <file path=ppt/slides/slide15.xml><?xml version="1.0" encoding="utf-8"?>
+<p:sld xmlns:a="http://schemas.openxmlformats.org/drawingml/2006/main" xmlns:r="http://schemas.openxmlformats.org/officeDocument/2006/relationships" xmlns:p="http://schemas.openxmlformats.org/presentationml/2006/main">
+  <p:cSld>
+    <p:spTree>
+      <p:nvGrpSpPr>
+        <p:cNvPr id="1" name=""/>
+        <p:cNvGrpSpPr/>
+        <p:nvPr/>
+      </p:nvGrpSpPr>
+      <p:grpSpPr>
+        <a:xfrm>
+          <a:off x="0" y="0"/>
+          <a:ext cx="0" cy="0"/>
+          <a:chOff x="0" y="0"/>
+          <a:chExt cx="0" cy="0"/>
+        </a:xfrm>
+      </p:grpSpPr>
+      <p:sp>
+        <p:nvSpPr>
+          <p:cNvPr id="3" name="Content Placeholder 2">
+            <a:extLst>
+              <a:ext uri="{FF2B5EF4-FFF2-40B4-BE49-F238E27FC236}">
+                <a16:creationId xmlns:a16="http://schemas.microsoft.com/office/drawing/2014/main" id="{A940ED4D-C33E-E5F8-CA97-18BC365760D1}"/>
+              </a:ext>
+            </a:extLst>
+          </p:cNvPr>
+          <p:cNvSpPr>
+            <a:spLocks noGrp="1"/>
+          </p:cNvSpPr>
+          <p:nvPr>
+            <p:ph idx="1"/>
+          </p:nvPr>
+        </p:nvSpPr>
+        <p:spPr>
+          <a:xfrm>
+            <a:off x="0" y="424542"/>
+            <a:ext cx="12192000" cy="5931807"/>
+          </a:xfrm>
+        </p:spPr>
+        <p:txBody>
+          <a:bodyPr/>
+          <a:lstStyle/>
+          <a:p>
+            <a:endParaRPr lang="en-US" dirty="0"/>
+          </a:p>
+        </p:txBody>
+      </p:sp>
+      <p:sp>
+        <p:nvSpPr>
+          <p:cNvPr id="4" name="Footer Placeholder 3">
+            <a:extLst>
+              <a:ext uri="{FF2B5EF4-FFF2-40B4-BE49-F238E27FC236}">
+                <a16:creationId xmlns:a16="http://schemas.microsoft.com/office/drawing/2014/main" id="{2914EE09-88E0-1DF0-128C-9477717F7403}"/>
+              </a:ext>
+            </a:extLst>
+          </p:cNvPr>
+          <p:cNvSpPr>
+            <a:spLocks noGrp="1"/>
+          </p:cNvSpPr>
+          <p:nvPr>
+            <p:ph type="ftr" sz="quarter" idx="11"/>
+          </p:nvPr>
+        </p:nvSpPr>
+        <p:spPr/>
+        <p:txBody>
+          <a:bodyPr/>
+          <a:lstStyle/>
+          <a:p>
+            <a:r>
+              <a:rPr lang="en-US"/>
+              <a:t>Boldy Sensitivity Study Mu2e</a:t>
+            </a:r>
+          </a:p>
+        </p:txBody>
+      </p:sp>
+      <p:sp>
+        <p:nvSpPr>
+          <p:cNvPr id="5" name="Slide Number Placeholder 4">
+            <a:extLst>
+              <a:ext uri="{FF2B5EF4-FFF2-40B4-BE49-F238E27FC236}">
+                <a16:creationId xmlns:a16="http://schemas.microsoft.com/office/drawing/2014/main" id="{7966E375-625A-8CD1-030C-51B6D6984DD7}"/>
+              </a:ext>
+            </a:extLst>
+          </p:cNvPr>
+          <p:cNvSpPr>
+            <a:spLocks noGrp="1"/>
+          </p:cNvSpPr>
+          <p:nvPr>
+            <p:ph type="sldNum" sz="quarter" idx="12"/>
+          </p:nvPr>
+        </p:nvSpPr>
+        <p:spPr/>
+        <p:txBody>
+          <a:bodyPr/>
+          <a:lstStyle/>
+          <a:p>
+            <a:fld id="{C0E0CB54-3DBF-E947-906E-85E307CF7971}" type="slidenum">
+              <a:rPr lang="en-US" smtClean="0"/>
+              <a:t>15</a:t>
+            </a:fld>
+            <a:endParaRPr lang="en-US"/>
+          </a:p>
+        </p:txBody>
+      </p:sp>
+      <p:sp>
+        <p:nvSpPr>
+          <p:cNvPr id="6" name="Title 1">
+            <a:extLst>
+              <a:ext uri="{FF2B5EF4-FFF2-40B4-BE49-F238E27FC236}">
+                <a16:creationId xmlns:a16="http://schemas.microsoft.com/office/drawing/2014/main" id="{1D483BED-3804-C48B-82FB-BA93C95D4AFC}"/>
+              </a:ext>
+            </a:extLst>
+          </p:cNvPr>
+          <p:cNvSpPr txBox="1">
+            <a:spLocks/>
+          </p:cNvSpPr>
+          <p:nvPr/>
+        </p:nvSpPr>
+        <p:spPr>
+          <a:xfrm>
+            <a:off x="0" y="0"/>
+            <a:ext cx="10515600" cy="424543"/>
+          </a:xfrm>
+          <a:prstGeom prst="rect">
+            <a:avLst/>
+          </a:prstGeom>
+        </p:spPr>
+        <p:txBody>
+          <a:bodyPr vert="horz" lIns="91440" tIns="45720" rIns="91440" bIns="45720" rtlCol="0" anchor="ctr">
+            <a:normAutofit fontScale="90000" lnSpcReduction="10000"/>
+          </a:bodyPr>
+          <a:lstStyle>
+            <a:lvl1pPr algn="l" defTabSz="914400" rtl="0" eaLnBrk="1" latinLnBrk="0" hangingPunct="1">
+              <a:lnSpc>
+                <a:spcPct val="90000"/>
+              </a:lnSpc>
+              <a:spcBef>
+                <a:spcPct val="0"/>
+              </a:spcBef>
+              <a:buNone/>
+              <a:defRPr sz="4400" kern="1200">
+                <a:solidFill>
+                  <a:schemeClr val="tx1"/>
+                </a:solidFill>
+                <a:latin typeface="+mj-lt"/>
+                <a:ea typeface="+mj-ea"/>
+                <a:cs typeface="+mj-cs"/>
+              </a:defRPr>
+            </a:lvl1pPr>
+          </a:lstStyle>
+          <a:p>
+            <a:r>
+              <a:rPr lang="en-US" sz="2800" dirty="0">
+                <a:solidFill>
+                  <a:srgbClr val="C00000"/>
+                </a:solidFill>
+              </a:rPr>
+              <a:t>Vertexing Procedure for Finding a Common Origin Position (Part 2)</a:t>
+            </a:r>
+          </a:p>
+        </p:txBody>
+      </p:sp>
+    </p:spTree>
+    <p:extLst>
+      <p:ext uri="{BB962C8B-B14F-4D97-AF65-F5344CB8AC3E}">
+        <p14:creationId xmlns:p14="http://schemas.microsoft.com/office/powerpoint/2010/main" val="2163941067"/>
+      </p:ext>
+    </p:extLst>
+  </p:cSld>
+  <p:clrMapOvr>
+    <a:masterClrMapping/>
+  </p:clrMapOvr>
+</p:sld>
+</file>
+
+<file path=ppt/slides/slide16.xml><?xml version="1.0" encoding="utf-8"?>
 <p:sld xmlns:a="http://schemas.openxmlformats.org/drawingml/2006/main" xmlns:r="http://schemas.openxmlformats.org/officeDocument/2006/relationships" xmlns:p="http://schemas.openxmlformats.org/presentationml/2006/main">
   <p:cSld>
     <p:spTree>
@@ -8339,7 +8952,10 @@
                 <a:pPr/>
                 <a14:m>
                   <m:oMathPara xmlns:m="http://schemas.openxmlformats.org/officeDocument/2006/math">
-                    <m:oMath>
+                    <m:oMathParaPr>
+                      <m:jc m:val="centerGroup"/>
+                    </m:oMathParaPr>
+                    <m:oMath xmlns:m="http://schemas.openxmlformats.org/officeDocument/2006/math">
                       <m:acc>
                         <m:accPr>
                           <m:chr m:val="⃑"/>
@@ -8459,7 +9075,7 @@
           <a:p>
             <a:fld id="{F9FD574F-46AC-454F-80BB-50D9197C01E0}" type="slidenum">
               <a:rPr lang="en-US" smtClean="0"/>
-              <a:t>15</a:t>
+              <a:t>16</a:t>
             </a:fld>
             <a:endParaRPr lang="en-US"/>
           </a:p>
@@ -9761,146 +10377,6 @@
 </p:sld>
 </file>
 
-<file path=ppt/slides/slide16.xml><?xml version="1.0" encoding="utf-8"?>
-<p:sld xmlns:a="http://schemas.openxmlformats.org/drawingml/2006/main" xmlns:r="http://schemas.openxmlformats.org/officeDocument/2006/relationships" xmlns:p="http://schemas.openxmlformats.org/presentationml/2006/main">
-  <p:cSld>
-    <p:spTree>
-      <p:nvGrpSpPr>
-        <p:cNvPr id="1" name=""/>
-        <p:cNvGrpSpPr/>
-        <p:nvPr/>
-      </p:nvGrpSpPr>
-      <p:grpSpPr>
-        <a:xfrm>
-          <a:off x="0" y="0"/>
-          <a:ext cx="0" cy="0"/>
-          <a:chOff x="0" y="0"/>
-          <a:chExt cx="0" cy="0"/>
-        </a:xfrm>
-      </p:grpSpPr>
-      <p:sp>
-        <p:nvSpPr>
-          <p:cNvPr id="2" name="Title 1">
-            <a:extLst>
-              <a:ext uri="{FF2B5EF4-FFF2-40B4-BE49-F238E27FC236}">
-                <a16:creationId xmlns:a16="http://schemas.microsoft.com/office/drawing/2014/main" id="{98E1E461-791C-F508-7FE5-4F200E76E236}"/>
-              </a:ext>
-            </a:extLst>
-          </p:cNvPr>
-          <p:cNvSpPr>
-            <a:spLocks noGrp="1"/>
-          </p:cNvSpPr>
-          <p:nvPr>
-            <p:ph type="title"/>
-          </p:nvPr>
-        </p:nvSpPr>
-        <p:spPr/>
-        <p:txBody>
-          <a:bodyPr/>
-          <a:lstStyle/>
-          <a:p>
-            <a:r>
-              <a:rPr lang="en-US" dirty="0"/>
-              <a:t>Initial Investigation</a:t>
-            </a:r>
-          </a:p>
-        </p:txBody>
-      </p:sp>
-      <p:sp>
-        <p:nvSpPr>
-          <p:cNvPr id="3" name="Text Placeholder 2">
-            <a:extLst>
-              <a:ext uri="{FF2B5EF4-FFF2-40B4-BE49-F238E27FC236}">
-                <a16:creationId xmlns:a16="http://schemas.microsoft.com/office/drawing/2014/main" id="{F62C1A3B-C708-DC78-1E76-5A56F9A3FB4E}"/>
-              </a:ext>
-            </a:extLst>
-          </p:cNvPr>
-          <p:cNvSpPr>
-            <a:spLocks noGrp="1"/>
-          </p:cNvSpPr>
-          <p:nvPr>
-            <p:ph type="body" idx="1"/>
-          </p:nvPr>
-        </p:nvSpPr>
-        <p:spPr/>
-        <p:txBody>
-          <a:bodyPr/>
-          <a:lstStyle/>
-          <a:p>
-            <a:endParaRPr lang="en-US"/>
-          </a:p>
-        </p:txBody>
-      </p:sp>
-      <p:sp>
-        <p:nvSpPr>
-          <p:cNvPr id="5" name="Footer Placeholder 4">
-            <a:extLst>
-              <a:ext uri="{FF2B5EF4-FFF2-40B4-BE49-F238E27FC236}">
-                <a16:creationId xmlns:a16="http://schemas.microsoft.com/office/drawing/2014/main" id="{28D68E5D-7C88-4811-0E20-322DD2F43E7B}"/>
-              </a:ext>
-            </a:extLst>
-          </p:cNvPr>
-          <p:cNvSpPr>
-            <a:spLocks noGrp="1"/>
-          </p:cNvSpPr>
-          <p:nvPr>
-            <p:ph type="ftr" sz="quarter" idx="11"/>
-          </p:nvPr>
-        </p:nvSpPr>
-        <p:spPr/>
-        <p:txBody>
-          <a:bodyPr/>
-          <a:lstStyle/>
-          <a:p>
-            <a:r>
-              <a:rPr lang="en-US"/>
-              <a:t>Boldy Sensitivity Study Mu2e</a:t>
-            </a:r>
-          </a:p>
-        </p:txBody>
-      </p:sp>
-      <p:sp>
-        <p:nvSpPr>
-          <p:cNvPr id="6" name="Slide Number Placeholder 5">
-            <a:extLst>
-              <a:ext uri="{FF2B5EF4-FFF2-40B4-BE49-F238E27FC236}">
-                <a16:creationId xmlns:a16="http://schemas.microsoft.com/office/drawing/2014/main" id="{6A87BC8B-5FFB-F088-7715-A624A689B212}"/>
-              </a:ext>
-            </a:extLst>
-          </p:cNvPr>
-          <p:cNvSpPr>
-            <a:spLocks noGrp="1"/>
-          </p:cNvSpPr>
-          <p:nvPr>
-            <p:ph type="sldNum" sz="quarter" idx="12"/>
-          </p:nvPr>
-        </p:nvSpPr>
-        <p:spPr/>
-        <p:txBody>
-          <a:bodyPr/>
-          <a:lstStyle/>
-          <a:p>
-            <a:fld id="{C0E0CB54-3DBF-E947-906E-85E307CF7971}" type="slidenum">
-              <a:rPr lang="en-US" smtClean="0"/>
-              <a:t>16</a:t>
-            </a:fld>
-            <a:endParaRPr lang="en-US"/>
-          </a:p>
-        </p:txBody>
-      </p:sp>
-    </p:spTree>
-    <p:extLst>
-      <p:ext uri="{BB962C8B-B14F-4D97-AF65-F5344CB8AC3E}">
-        <p14:creationId xmlns:p14="http://schemas.microsoft.com/office/powerpoint/2010/main" val="3980222549"/>
-      </p:ext>
-    </p:extLst>
-  </p:cSld>
-  <p:clrMapOvr>
-    <a:masterClrMapping/>
-  </p:clrMapOvr>
-</p:sld>
-</file>
-
 <file path=ppt/slides/slide17.xml><?xml version="1.0" encoding="utf-8"?>
 <p:sld xmlns:a="http://schemas.openxmlformats.org/drawingml/2006/main" xmlns:r="http://schemas.openxmlformats.org/officeDocument/2006/relationships" xmlns:p="http://schemas.openxmlformats.org/presentationml/2006/main">
   <p:cSld>
@@ -9923,7 +10399,7 @@
           <p:cNvPr id="2" name="Title 1">
             <a:extLst>
               <a:ext uri="{FF2B5EF4-FFF2-40B4-BE49-F238E27FC236}">
-                <a16:creationId xmlns:a16="http://schemas.microsoft.com/office/drawing/2014/main" id="{93C2AF71-8E34-2CAA-7AB0-F0179C17C2DE}"/>
+                <a16:creationId xmlns:a16="http://schemas.microsoft.com/office/drawing/2014/main" id="{98E1E461-791C-F508-7FE5-4F200E76E236}"/>
               </a:ext>
             </a:extLst>
           </p:cNvPr>
@@ -9941,25 +10417,25 @@
           <a:p>
             <a:r>
               <a:rPr lang="en-US" dirty="0"/>
-              <a:t>Toy-Generator Creation and Validation</a:t>
-            </a:r>
-          </a:p>
-        </p:txBody>
-      </p:sp>
-      <p:sp>
-        <p:nvSpPr>
-          <p:cNvPr id="3" name="Content Placeholder 2">
-            <a:extLst>
-              <a:ext uri="{FF2B5EF4-FFF2-40B4-BE49-F238E27FC236}">
-                <a16:creationId xmlns:a16="http://schemas.microsoft.com/office/drawing/2014/main" id="{80023601-D1BA-D1E2-CE47-90BA3D838FE3}"/>
-              </a:ext>
-            </a:extLst>
-          </p:cNvPr>
-          <p:cNvSpPr>
-            <a:spLocks noGrp="1"/>
-          </p:cNvSpPr>
-          <p:nvPr>
-            <p:ph idx="1"/>
+              <a:t>Initial Investigation</a:t>
+            </a:r>
+          </a:p>
+        </p:txBody>
+      </p:sp>
+      <p:sp>
+        <p:nvSpPr>
+          <p:cNvPr id="3" name="Text Placeholder 2">
+            <a:extLst>
+              <a:ext uri="{FF2B5EF4-FFF2-40B4-BE49-F238E27FC236}">
+                <a16:creationId xmlns:a16="http://schemas.microsoft.com/office/drawing/2014/main" id="{F62C1A3B-C708-DC78-1E76-5A56F9A3FB4E}"/>
+              </a:ext>
+            </a:extLst>
+          </p:cNvPr>
+          <p:cNvSpPr>
+            <a:spLocks noGrp="1"/>
+          </p:cNvSpPr>
+          <p:nvPr>
+            <p:ph type="body" idx="1"/>
           </p:nvPr>
         </p:nvSpPr>
         <p:spPr/>
@@ -9976,7 +10452,7 @@
           <p:cNvPr id="5" name="Footer Placeholder 4">
             <a:extLst>
               <a:ext uri="{FF2B5EF4-FFF2-40B4-BE49-F238E27FC236}">
-                <a16:creationId xmlns:a16="http://schemas.microsoft.com/office/drawing/2014/main" id="{BB511B34-7D40-9518-EF04-C0A146244B47}"/>
+                <a16:creationId xmlns:a16="http://schemas.microsoft.com/office/drawing/2014/main" id="{28D68E5D-7C88-4811-0E20-322DD2F43E7B}"/>
               </a:ext>
             </a:extLst>
           </p:cNvPr>
@@ -10004,7 +10480,7 @@
           <p:cNvPr id="6" name="Slide Number Placeholder 5">
             <a:extLst>
               <a:ext uri="{FF2B5EF4-FFF2-40B4-BE49-F238E27FC236}">
-                <a16:creationId xmlns:a16="http://schemas.microsoft.com/office/drawing/2014/main" id="{4D22E9C2-160B-2E87-3324-E8ED631563AF}"/>
+                <a16:creationId xmlns:a16="http://schemas.microsoft.com/office/drawing/2014/main" id="{6A87BC8B-5FFB-F088-7715-A624A689B212}"/>
               </a:ext>
             </a:extLst>
           </p:cNvPr>
@@ -10031,7 +10507,7 @@
     </p:spTree>
     <p:extLst>
       <p:ext uri="{BB962C8B-B14F-4D97-AF65-F5344CB8AC3E}">
-        <p14:creationId xmlns:p14="http://schemas.microsoft.com/office/powerpoint/2010/main" val="1016897295"/>
+        <p14:creationId xmlns:p14="http://schemas.microsoft.com/office/powerpoint/2010/main" val="3980222549"/>
       </p:ext>
     </p:extLst>
   </p:cSld>
@@ -10063,7 +10539,7 @@
           <p:cNvPr id="2" name="Title 1">
             <a:extLst>
               <a:ext uri="{FF2B5EF4-FFF2-40B4-BE49-F238E27FC236}">
-                <a16:creationId xmlns:a16="http://schemas.microsoft.com/office/drawing/2014/main" id="{425FA2D8-E18F-941D-45BA-0DB33D62723F}"/>
+                <a16:creationId xmlns:a16="http://schemas.microsoft.com/office/drawing/2014/main" id="{93C2AF71-8E34-2CAA-7AB0-F0179C17C2DE}"/>
               </a:ext>
             </a:extLst>
           </p:cNvPr>
@@ -10079,41 +10555,44 @@
           <a:bodyPr/>
           <a:lstStyle/>
           <a:p>
+            <a:r>
+              <a:rPr lang="en-US" dirty="0"/>
+              <a:t>Toy-Generator Creation and Validation</a:t>
+            </a:r>
+          </a:p>
+        </p:txBody>
+      </p:sp>
+      <p:sp>
+        <p:nvSpPr>
+          <p:cNvPr id="3" name="Content Placeholder 2">
+            <a:extLst>
+              <a:ext uri="{FF2B5EF4-FFF2-40B4-BE49-F238E27FC236}">
+                <a16:creationId xmlns:a16="http://schemas.microsoft.com/office/drawing/2014/main" id="{80023601-D1BA-D1E2-CE47-90BA3D838FE3}"/>
+              </a:ext>
+            </a:extLst>
+          </p:cNvPr>
+          <p:cNvSpPr>
+            <a:spLocks noGrp="1"/>
+          </p:cNvSpPr>
+          <p:nvPr>
+            <p:ph idx="1"/>
+          </p:nvPr>
+        </p:nvSpPr>
+        <p:spPr/>
+        <p:txBody>
+          <a:bodyPr/>
+          <a:lstStyle/>
+          <a:p>
             <a:endParaRPr lang="en-US"/>
           </a:p>
         </p:txBody>
       </p:sp>
       <p:sp>
         <p:nvSpPr>
-          <p:cNvPr id="3" name="Content Placeholder 2">
-            <a:extLst>
-              <a:ext uri="{FF2B5EF4-FFF2-40B4-BE49-F238E27FC236}">
-                <a16:creationId xmlns:a16="http://schemas.microsoft.com/office/drawing/2014/main" id="{287387DE-6109-B68C-13F9-520F603C7843}"/>
-              </a:ext>
-            </a:extLst>
-          </p:cNvPr>
-          <p:cNvSpPr>
-            <a:spLocks noGrp="1"/>
-          </p:cNvSpPr>
-          <p:nvPr>
-            <p:ph idx="1"/>
-          </p:nvPr>
-        </p:nvSpPr>
-        <p:spPr/>
-        <p:txBody>
-          <a:bodyPr/>
-          <a:lstStyle/>
-          <a:p>
-            <a:endParaRPr lang="en-US"/>
-          </a:p>
-        </p:txBody>
-      </p:sp>
-      <p:sp>
-        <p:nvSpPr>
           <p:cNvPr id="5" name="Footer Placeholder 4">
             <a:extLst>
               <a:ext uri="{FF2B5EF4-FFF2-40B4-BE49-F238E27FC236}">
-                <a16:creationId xmlns:a16="http://schemas.microsoft.com/office/drawing/2014/main" id="{AB5FBC7C-7406-88C4-CE80-56D5900F891E}"/>
+                <a16:creationId xmlns:a16="http://schemas.microsoft.com/office/drawing/2014/main" id="{BB511B34-7D40-9518-EF04-C0A146244B47}"/>
               </a:ext>
             </a:extLst>
           </p:cNvPr>
@@ -10141,7 +10620,7 @@
           <p:cNvPr id="6" name="Slide Number Placeholder 5">
             <a:extLst>
               <a:ext uri="{FF2B5EF4-FFF2-40B4-BE49-F238E27FC236}">
-                <a16:creationId xmlns:a16="http://schemas.microsoft.com/office/drawing/2014/main" id="{32D064DD-40B5-426A-3AD2-B8CC54810CB6}"/>
+                <a16:creationId xmlns:a16="http://schemas.microsoft.com/office/drawing/2014/main" id="{4D22E9C2-160B-2E87-3324-E8ED631563AF}"/>
               </a:ext>
             </a:extLst>
           </p:cNvPr>
@@ -10165,10 +10644,68 @@
           </a:p>
         </p:txBody>
       </p:sp>
+      <p:sp>
+        <p:nvSpPr>
+          <p:cNvPr id="4" name="Title 1">
+            <a:extLst>
+              <a:ext uri="{FF2B5EF4-FFF2-40B4-BE49-F238E27FC236}">
+                <a16:creationId xmlns:a16="http://schemas.microsoft.com/office/drawing/2014/main" id="{AD9BA1F0-6847-47E2-1B99-5D16C86746D2}"/>
+              </a:ext>
+            </a:extLst>
+          </p:cNvPr>
+          <p:cNvSpPr txBox="1">
+            <a:spLocks/>
+          </p:cNvSpPr>
+          <p:nvPr/>
+        </p:nvSpPr>
+        <p:spPr>
+          <a:xfrm>
+            <a:off x="0" y="0"/>
+            <a:ext cx="10515600" cy="424543"/>
+          </a:xfrm>
+          <a:prstGeom prst="rect">
+            <a:avLst/>
+          </a:prstGeom>
+        </p:spPr>
+        <p:txBody>
+          <a:bodyPr vert="horz" lIns="91440" tIns="45720" rIns="91440" bIns="45720" rtlCol="0" anchor="ctr">
+            <a:normAutofit fontScale="90000" lnSpcReduction="10000"/>
+          </a:bodyPr>
+          <a:lstStyle>
+            <a:lvl1pPr algn="l" defTabSz="914400" rtl="0" eaLnBrk="1" latinLnBrk="0" hangingPunct="1">
+              <a:lnSpc>
+                <a:spcPct val="90000"/>
+              </a:lnSpc>
+              <a:spcBef>
+                <a:spcPct val="0"/>
+              </a:spcBef>
+              <a:buNone/>
+              <a:defRPr sz="4400" kern="1200">
+                <a:solidFill>
+                  <a:schemeClr val="tx1"/>
+                </a:solidFill>
+                <a:latin typeface="+mj-lt"/>
+                <a:ea typeface="+mj-ea"/>
+                <a:cs typeface="+mj-cs"/>
+              </a:defRPr>
+            </a:lvl1pPr>
+          </a:lstStyle>
+          <a:p>
+            <a:r>
+              <a:rPr lang="en-US" sz="2800" dirty="0">
+                <a:solidFill>
+                  <a:srgbClr val="C00000"/>
+                </a:solidFill>
+              </a:rPr>
+              <a:t>Toy-Generator Creation and Validation</a:t>
+            </a:r>
+          </a:p>
+        </p:txBody>
+      </p:sp>
     </p:spTree>
     <p:extLst>
       <p:ext uri="{BB962C8B-B14F-4D97-AF65-F5344CB8AC3E}">
-        <p14:creationId xmlns:p14="http://schemas.microsoft.com/office/powerpoint/2010/main" val="452104097"/>
+        <p14:creationId xmlns:p14="http://schemas.microsoft.com/office/powerpoint/2010/main" val="1016897295"/>
       </p:ext>
     </p:extLst>
   </p:cSld>
@@ -10200,7 +10737,7 @@
           <p:cNvPr id="2" name="Title 1">
             <a:extLst>
               <a:ext uri="{FF2B5EF4-FFF2-40B4-BE49-F238E27FC236}">
-                <a16:creationId xmlns:a16="http://schemas.microsoft.com/office/drawing/2014/main" id="{36DCFFC3-E975-E0F8-4BFD-C28C957E38B1}"/>
+                <a16:creationId xmlns:a16="http://schemas.microsoft.com/office/drawing/2014/main" id="{425FA2D8-E18F-941D-45BA-0DB33D62723F}"/>
               </a:ext>
             </a:extLst>
           </p:cNvPr>
@@ -10216,10 +10753,7 @@
           <a:bodyPr/>
           <a:lstStyle/>
           <a:p>
-            <a:r>
-              <a:rPr lang="en-US" dirty="0"/>
-              <a:t>Analysis Products (from Stops)</a:t>
-            </a:r>
+            <a:endParaRPr lang="en-US"/>
           </a:p>
         </p:txBody>
       </p:sp>
@@ -10228,7 +10762,7 @@
           <p:cNvPr id="3" name="Content Placeholder 2">
             <a:extLst>
               <a:ext uri="{FF2B5EF4-FFF2-40B4-BE49-F238E27FC236}">
-                <a16:creationId xmlns:a16="http://schemas.microsoft.com/office/drawing/2014/main" id="{1344FC29-36B1-2974-B23B-46E1A335B617}"/>
+                <a16:creationId xmlns:a16="http://schemas.microsoft.com/office/drawing/2014/main" id="{287387DE-6109-B68C-13F9-520F603C7843}"/>
               </a:ext>
             </a:extLst>
           </p:cNvPr>
@@ -10253,7 +10787,7 @@
           <p:cNvPr id="5" name="Footer Placeholder 4">
             <a:extLst>
               <a:ext uri="{FF2B5EF4-FFF2-40B4-BE49-F238E27FC236}">
-                <a16:creationId xmlns:a16="http://schemas.microsoft.com/office/drawing/2014/main" id="{018E6755-FD7F-C93C-0C8A-8FCC6E7EFE82}"/>
+                <a16:creationId xmlns:a16="http://schemas.microsoft.com/office/drawing/2014/main" id="{AB5FBC7C-7406-88C4-CE80-56D5900F891E}"/>
               </a:ext>
             </a:extLst>
           </p:cNvPr>
@@ -10281,7 +10815,7 @@
           <p:cNvPr id="6" name="Slide Number Placeholder 5">
             <a:extLst>
               <a:ext uri="{FF2B5EF4-FFF2-40B4-BE49-F238E27FC236}">
-                <a16:creationId xmlns:a16="http://schemas.microsoft.com/office/drawing/2014/main" id="{6ADF45E0-CF42-AFB8-C99E-FE4FD073077A}"/>
+                <a16:creationId xmlns:a16="http://schemas.microsoft.com/office/drawing/2014/main" id="{32D064DD-40B5-426A-3AD2-B8CC54810CB6}"/>
               </a:ext>
             </a:extLst>
           </p:cNvPr>
@@ -10308,7 +10842,7 @@
     </p:spTree>
     <p:extLst>
       <p:ext uri="{BB962C8B-B14F-4D97-AF65-F5344CB8AC3E}">
-        <p14:creationId xmlns:p14="http://schemas.microsoft.com/office/powerpoint/2010/main" val="1797830124"/>
+        <p14:creationId xmlns:p14="http://schemas.microsoft.com/office/powerpoint/2010/main" val="452104097"/>
       </p:ext>
     </p:extLst>
   </p:cSld>
@@ -10480,7 +11014,7 @@
           <p:cNvPr id="2" name="Title 1">
             <a:extLst>
               <a:ext uri="{FF2B5EF4-FFF2-40B4-BE49-F238E27FC236}">
-                <a16:creationId xmlns:a16="http://schemas.microsoft.com/office/drawing/2014/main" id="{7420E51E-E5A7-FA6A-5A09-17F9C6D24294}"/>
+                <a16:creationId xmlns:a16="http://schemas.microsoft.com/office/drawing/2014/main" id="{36DCFFC3-E975-E0F8-4BFD-C28C957E38B1}"/>
               </a:ext>
             </a:extLst>
           </p:cNvPr>
@@ -10496,41 +11030,44 @@
           <a:bodyPr/>
           <a:lstStyle/>
           <a:p>
+            <a:r>
+              <a:rPr lang="en-US" dirty="0"/>
+              <a:t>Analysis Products (from Stops)</a:t>
+            </a:r>
+          </a:p>
+        </p:txBody>
+      </p:sp>
+      <p:sp>
+        <p:nvSpPr>
+          <p:cNvPr id="3" name="Content Placeholder 2">
+            <a:extLst>
+              <a:ext uri="{FF2B5EF4-FFF2-40B4-BE49-F238E27FC236}">
+                <a16:creationId xmlns:a16="http://schemas.microsoft.com/office/drawing/2014/main" id="{1344FC29-36B1-2974-B23B-46E1A335B617}"/>
+              </a:ext>
+            </a:extLst>
+          </p:cNvPr>
+          <p:cNvSpPr>
+            <a:spLocks noGrp="1"/>
+          </p:cNvSpPr>
+          <p:nvPr>
+            <p:ph idx="1"/>
+          </p:nvPr>
+        </p:nvSpPr>
+        <p:spPr/>
+        <p:txBody>
+          <a:bodyPr/>
+          <a:lstStyle/>
+          <a:p>
             <a:endParaRPr lang="en-US"/>
           </a:p>
         </p:txBody>
       </p:sp>
       <p:sp>
         <p:nvSpPr>
-          <p:cNvPr id="3" name="Content Placeholder 2">
-            <a:extLst>
-              <a:ext uri="{FF2B5EF4-FFF2-40B4-BE49-F238E27FC236}">
-                <a16:creationId xmlns:a16="http://schemas.microsoft.com/office/drawing/2014/main" id="{B8E3B519-D25D-CD44-8434-451C610EAE65}"/>
-              </a:ext>
-            </a:extLst>
-          </p:cNvPr>
-          <p:cNvSpPr>
-            <a:spLocks noGrp="1"/>
-          </p:cNvSpPr>
-          <p:nvPr>
-            <p:ph idx="1"/>
-          </p:nvPr>
-        </p:nvSpPr>
-        <p:spPr/>
-        <p:txBody>
-          <a:bodyPr/>
-          <a:lstStyle/>
-          <a:p>
-            <a:endParaRPr lang="en-US"/>
-          </a:p>
-        </p:txBody>
-      </p:sp>
-      <p:sp>
-        <p:nvSpPr>
           <p:cNvPr id="5" name="Footer Placeholder 4">
             <a:extLst>
               <a:ext uri="{FF2B5EF4-FFF2-40B4-BE49-F238E27FC236}">
-                <a16:creationId xmlns:a16="http://schemas.microsoft.com/office/drawing/2014/main" id="{D25B5469-6CFD-57DE-7A43-05E09DB737EF}"/>
+                <a16:creationId xmlns:a16="http://schemas.microsoft.com/office/drawing/2014/main" id="{018E6755-FD7F-C93C-0C8A-8FCC6E7EFE82}"/>
               </a:ext>
             </a:extLst>
           </p:cNvPr>
@@ -10558,7 +11095,7 @@
           <p:cNvPr id="6" name="Slide Number Placeholder 5">
             <a:extLst>
               <a:ext uri="{FF2B5EF4-FFF2-40B4-BE49-F238E27FC236}">
-                <a16:creationId xmlns:a16="http://schemas.microsoft.com/office/drawing/2014/main" id="{FF728134-85D7-009E-6BDC-FE46F516BC99}"/>
+                <a16:creationId xmlns:a16="http://schemas.microsoft.com/office/drawing/2014/main" id="{6ADF45E0-CF42-AFB8-C99E-FE4FD073077A}"/>
               </a:ext>
             </a:extLst>
           </p:cNvPr>
@@ -10582,10 +11119,68 @@
           </a:p>
         </p:txBody>
       </p:sp>
+      <p:sp>
+        <p:nvSpPr>
+          <p:cNvPr id="4" name="Title 1">
+            <a:extLst>
+              <a:ext uri="{FF2B5EF4-FFF2-40B4-BE49-F238E27FC236}">
+                <a16:creationId xmlns:a16="http://schemas.microsoft.com/office/drawing/2014/main" id="{A4A75C05-EE76-B1F4-4732-23B89B31512A}"/>
+              </a:ext>
+            </a:extLst>
+          </p:cNvPr>
+          <p:cNvSpPr txBox="1">
+            <a:spLocks/>
+          </p:cNvSpPr>
+          <p:nvPr/>
+        </p:nvSpPr>
+        <p:spPr>
+          <a:xfrm>
+            <a:off x="0" y="0"/>
+            <a:ext cx="10515600" cy="424543"/>
+          </a:xfrm>
+          <a:prstGeom prst="rect">
+            <a:avLst/>
+          </a:prstGeom>
+        </p:spPr>
+        <p:txBody>
+          <a:bodyPr vert="horz" lIns="91440" tIns="45720" rIns="91440" bIns="45720" rtlCol="0" anchor="ctr">
+            <a:normAutofit fontScale="90000" lnSpcReduction="10000"/>
+          </a:bodyPr>
+          <a:lstStyle>
+            <a:lvl1pPr algn="l" defTabSz="914400" rtl="0" eaLnBrk="1" latinLnBrk="0" hangingPunct="1">
+              <a:lnSpc>
+                <a:spcPct val="90000"/>
+              </a:lnSpc>
+              <a:spcBef>
+                <a:spcPct val="0"/>
+              </a:spcBef>
+              <a:buNone/>
+              <a:defRPr sz="4400" kern="1200">
+                <a:solidFill>
+                  <a:schemeClr val="tx1"/>
+                </a:solidFill>
+                <a:latin typeface="+mj-lt"/>
+                <a:ea typeface="+mj-ea"/>
+                <a:cs typeface="+mj-cs"/>
+              </a:defRPr>
+            </a:lvl1pPr>
+          </a:lstStyle>
+          <a:p>
+            <a:r>
+              <a:rPr lang="en-US" sz="2800" dirty="0">
+                <a:solidFill>
+                  <a:srgbClr val="C00000"/>
+                </a:solidFill>
+              </a:rPr>
+              <a:t>Analysis Products Produced from Muon Stops</a:t>
+            </a:r>
+          </a:p>
+        </p:txBody>
+      </p:sp>
     </p:spTree>
     <p:extLst>
       <p:ext uri="{BB962C8B-B14F-4D97-AF65-F5344CB8AC3E}">
-        <p14:creationId xmlns:p14="http://schemas.microsoft.com/office/powerpoint/2010/main" val="3512922861"/>
+        <p14:creationId xmlns:p14="http://schemas.microsoft.com/office/powerpoint/2010/main" val="1797830124"/>
       </p:ext>
     </p:extLst>
   </p:cSld>
@@ -10617,7 +11212,7 @@
           <p:cNvPr id="2" name="Title 1">
             <a:extLst>
               <a:ext uri="{FF2B5EF4-FFF2-40B4-BE49-F238E27FC236}">
-                <a16:creationId xmlns:a16="http://schemas.microsoft.com/office/drawing/2014/main" id="{D2E68E33-2728-D6B4-AA72-1603BD572F74}"/>
+                <a16:creationId xmlns:a16="http://schemas.microsoft.com/office/drawing/2014/main" id="{7420E51E-E5A7-FA6A-5A09-17F9C6D24294}"/>
               </a:ext>
             </a:extLst>
           </p:cNvPr>
@@ -10633,10 +11228,7 @@
           <a:bodyPr/>
           <a:lstStyle/>
           <a:p>
-            <a:r>
-              <a:rPr lang="en-US" dirty="0"/>
-              <a:t>Candidacy Cuts for Vertexing</a:t>
-            </a:r>
+            <a:endParaRPr lang="en-US"/>
           </a:p>
         </p:txBody>
       </p:sp>
@@ -10645,7 +11237,7 @@
           <p:cNvPr id="3" name="Content Placeholder 2">
             <a:extLst>
               <a:ext uri="{FF2B5EF4-FFF2-40B4-BE49-F238E27FC236}">
-                <a16:creationId xmlns:a16="http://schemas.microsoft.com/office/drawing/2014/main" id="{CB26FED9-452A-EC21-922F-5FECBDAC6849}"/>
+                <a16:creationId xmlns:a16="http://schemas.microsoft.com/office/drawing/2014/main" id="{B8E3B519-D25D-CD44-8434-451C610EAE65}"/>
               </a:ext>
             </a:extLst>
           </p:cNvPr>
@@ -10670,7 +11262,7 @@
           <p:cNvPr id="5" name="Footer Placeholder 4">
             <a:extLst>
               <a:ext uri="{FF2B5EF4-FFF2-40B4-BE49-F238E27FC236}">
-                <a16:creationId xmlns:a16="http://schemas.microsoft.com/office/drawing/2014/main" id="{B2994E62-85EE-3976-2FFC-E1B2C03DADFD}"/>
+                <a16:creationId xmlns:a16="http://schemas.microsoft.com/office/drawing/2014/main" id="{D25B5469-6CFD-57DE-7A43-05E09DB737EF}"/>
               </a:ext>
             </a:extLst>
           </p:cNvPr>
@@ -10698,7 +11290,7 @@
           <p:cNvPr id="6" name="Slide Number Placeholder 5">
             <a:extLst>
               <a:ext uri="{FF2B5EF4-FFF2-40B4-BE49-F238E27FC236}">
-                <a16:creationId xmlns:a16="http://schemas.microsoft.com/office/drawing/2014/main" id="{B5C4AE26-57D9-56C3-A23A-C9DAAED2D534}"/>
+                <a16:creationId xmlns:a16="http://schemas.microsoft.com/office/drawing/2014/main" id="{FF728134-85D7-009E-6BDC-FE46F516BC99}"/>
               </a:ext>
             </a:extLst>
           </p:cNvPr>
@@ -10725,7 +11317,7 @@
     </p:spTree>
     <p:extLst>
       <p:ext uri="{BB962C8B-B14F-4D97-AF65-F5344CB8AC3E}">
-        <p14:creationId xmlns:p14="http://schemas.microsoft.com/office/powerpoint/2010/main" val="1099049997"/>
+        <p14:creationId xmlns:p14="http://schemas.microsoft.com/office/powerpoint/2010/main" val="3512922861"/>
       </p:ext>
     </p:extLst>
   </p:cSld>
@@ -10757,7 +11349,7 @@
           <p:cNvPr id="2" name="Title 1">
             <a:extLst>
               <a:ext uri="{FF2B5EF4-FFF2-40B4-BE49-F238E27FC236}">
-                <a16:creationId xmlns:a16="http://schemas.microsoft.com/office/drawing/2014/main" id="{79917C15-BC85-89E1-57CC-D1FA92DA824E}"/>
+                <a16:creationId xmlns:a16="http://schemas.microsoft.com/office/drawing/2014/main" id="{D2E68E33-2728-D6B4-AA72-1603BD572F74}"/>
               </a:ext>
             </a:extLst>
           </p:cNvPr>
@@ -10773,41 +11365,44 @@
           <a:bodyPr/>
           <a:lstStyle/>
           <a:p>
+            <a:r>
+              <a:rPr lang="en-US" dirty="0"/>
+              <a:t>Candidacy Cuts for Vertexing</a:t>
+            </a:r>
+          </a:p>
+        </p:txBody>
+      </p:sp>
+      <p:sp>
+        <p:nvSpPr>
+          <p:cNvPr id="3" name="Content Placeholder 2">
+            <a:extLst>
+              <a:ext uri="{FF2B5EF4-FFF2-40B4-BE49-F238E27FC236}">
+                <a16:creationId xmlns:a16="http://schemas.microsoft.com/office/drawing/2014/main" id="{CB26FED9-452A-EC21-922F-5FECBDAC6849}"/>
+              </a:ext>
+            </a:extLst>
+          </p:cNvPr>
+          <p:cNvSpPr>
+            <a:spLocks noGrp="1"/>
+          </p:cNvSpPr>
+          <p:nvPr>
+            <p:ph idx="1"/>
+          </p:nvPr>
+        </p:nvSpPr>
+        <p:spPr/>
+        <p:txBody>
+          <a:bodyPr/>
+          <a:lstStyle/>
+          <a:p>
             <a:endParaRPr lang="en-US"/>
           </a:p>
         </p:txBody>
       </p:sp>
       <p:sp>
         <p:nvSpPr>
-          <p:cNvPr id="3" name="Content Placeholder 2">
-            <a:extLst>
-              <a:ext uri="{FF2B5EF4-FFF2-40B4-BE49-F238E27FC236}">
-                <a16:creationId xmlns:a16="http://schemas.microsoft.com/office/drawing/2014/main" id="{5B9AA495-1A5F-4283-19B1-0B43176FCE31}"/>
-              </a:ext>
-            </a:extLst>
-          </p:cNvPr>
-          <p:cNvSpPr>
-            <a:spLocks noGrp="1"/>
-          </p:cNvSpPr>
-          <p:nvPr>
-            <p:ph idx="1"/>
-          </p:nvPr>
-        </p:nvSpPr>
-        <p:spPr/>
-        <p:txBody>
-          <a:bodyPr/>
-          <a:lstStyle/>
-          <a:p>
-            <a:endParaRPr lang="en-US"/>
-          </a:p>
-        </p:txBody>
-      </p:sp>
-      <p:sp>
-        <p:nvSpPr>
           <p:cNvPr id="5" name="Footer Placeholder 4">
             <a:extLst>
               <a:ext uri="{FF2B5EF4-FFF2-40B4-BE49-F238E27FC236}">
-                <a16:creationId xmlns:a16="http://schemas.microsoft.com/office/drawing/2014/main" id="{1BF9F854-1AEC-B963-BF42-83D4456557E1}"/>
+                <a16:creationId xmlns:a16="http://schemas.microsoft.com/office/drawing/2014/main" id="{B2994E62-85EE-3976-2FFC-E1B2C03DADFD}"/>
               </a:ext>
             </a:extLst>
           </p:cNvPr>
@@ -10835,7 +11430,7 @@
           <p:cNvPr id="6" name="Slide Number Placeholder 5">
             <a:extLst>
               <a:ext uri="{FF2B5EF4-FFF2-40B4-BE49-F238E27FC236}">
-                <a16:creationId xmlns:a16="http://schemas.microsoft.com/office/drawing/2014/main" id="{D22D8E94-2436-805D-6C21-A58214C36A4C}"/>
+                <a16:creationId xmlns:a16="http://schemas.microsoft.com/office/drawing/2014/main" id="{B5C4AE26-57D9-56C3-A23A-C9DAAED2D534}"/>
               </a:ext>
             </a:extLst>
           </p:cNvPr>
@@ -10859,10 +11454,68 @@
           </a:p>
         </p:txBody>
       </p:sp>
+      <p:sp>
+        <p:nvSpPr>
+          <p:cNvPr id="4" name="Title 1">
+            <a:extLst>
+              <a:ext uri="{FF2B5EF4-FFF2-40B4-BE49-F238E27FC236}">
+                <a16:creationId xmlns:a16="http://schemas.microsoft.com/office/drawing/2014/main" id="{8DB6C83B-2E04-5927-B5CF-03728C4EC4EB}"/>
+              </a:ext>
+            </a:extLst>
+          </p:cNvPr>
+          <p:cNvSpPr txBox="1">
+            <a:spLocks/>
+          </p:cNvSpPr>
+          <p:nvPr/>
+        </p:nvSpPr>
+        <p:spPr>
+          <a:xfrm>
+            <a:off x="0" y="0"/>
+            <a:ext cx="10515600" cy="424543"/>
+          </a:xfrm>
+          <a:prstGeom prst="rect">
+            <a:avLst/>
+          </a:prstGeom>
+        </p:spPr>
+        <p:txBody>
+          <a:bodyPr vert="horz" lIns="91440" tIns="45720" rIns="91440" bIns="45720" rtlCol="0" anchor="ctr">
+            <a:normAutofit fontScale="90000" lnSpcReduction="10000"/>
+          </a:bodyPr>
+          <a:lstStyle>
+            <a:lvl1pPr algn="l" defTabSz="914400" rtl="0" eaLnBrk="1" latinLnBrk="0" hangingPunct="1">
+              <a:lnSpc>
+                <a:spcPct val="90000"/>
+              </a:lnSpc>
+              <a:spcBef>
+                <a:spcPct val="0"/>
+              </a:spcBef>
+              <a:buNone/>
+              <a:defRPr sz="4400" kern="1200">
+                <a:solidFill>
+                  <a:schemeClr val="tx1"/>
+                </a:solidFill>
+                <a:latin typeface="+mj-lt"/>
+                <a:ea typeface="+mj-ea"/>
+                <a:cs typeface="+mj-cs"/>
+              </a:defRPr>
+            </a:lvl1pPr>
+          </a:lstStyle>
+          <a:p>
+            <a:r>
+              <a:rPr lang="en-US" sz="2800" dirty="0">
+                <a:solidFill>
+                  <a:srgbClr val="C00000"/>
+                </a:solidFill>
+              </a:rPr>
+              <a:t>Candidacy Cuts for Vertexing Procedure</a:t>
+            </a:r>
+          </a:p>
+        </p:txBody>
+      </p:sp>
     </p:spTree>
     <p:extLst>
       <p:ext uri="{BB962C8B-B14F-4D97-AF65-F5344CB8AC3E}">
-        <p14:creationId xmlns:p14="http://schemas.microsoft.com/office/powerpoint/2010/main" val="3358176299"/>
+        <p14:creationId xmlns:p14="http://schemas.microsoft.com/office/powerpoint/2010/main" val="1099049997"/>
       </p:ext>
     </p:extLst>
   </p:cSld>
@@ -10894,7 +11547,7 @@
           <p:cNvPr id="2" name="Title 1">
             <a:extLst>
               <a:ext uri="{FF2B5EF4-FFF2-40B4-BE49-F238E27FC236}">
-                <a16:creationId xmlns:a16="http://schemas.microsoft.com/office/drawing/2014/main" id="{70F8309C-832E-1138-7AA0-3DDACD61FF66}"/>
+                <a16:creationId xmlns:a16="http://schemas.microsoft.com/office/drawing/2014/main" id="{79917C15-BC85-89E1-57CC-D1FA92DA824E}"/>
               </a:ext>
             </a:extLst>
           </p:cNvPr>
@@ -10910,14 +11563,7 @@
           <a:bodyPr/>
           <a:lstStyle/>
           <a:p>
-            <a:r>
-              <a:rPr lang="en-US" dirty="0" err="1"/>
-              <a:t>Vertexer</a:t>
-            </a:r>
-            <a:r>
-              <a:rPr lang="en-US" dirty="0"/>
-              <a:t> Resolution</a:t>
-            </a:r>
+            <a:endParaRPr lang="en-US"/>
           </a:p>
         </p:txBody>
       </p:sp>
@@ -10926,7 +11572,7 @@
           <p:cNvPr id="3" name="Content Placeholder 2">
             <a:extLst>
               <a:ext uri="{FF2B5EF4-FFF2-40B4-BE49-F238E27FC236}">
-                <a16:creationId xmlns:a16="http://schemas.microsoft.com/office/drawing/2014/main" id="{784DC180-9A16-0047-42C5-B6FC0ED6A3E0}"/>
+                <a16:creationId xmlns:a16="http://schemas.microsoft.com/office/drawing/2014/main" id="{5B9AA495-1A5F-4283-19B1-0B43176FCE31}"/>
               </a:ext>
             </a:extLst>
           </p:cNvPr>
@@ -10951,7 +11597,7 @@
           <p:cNvPr id="5" name="Footer Placeholder 4">
             <a:extLst>
               <a:ext uri="{FF2B5EF4-FFF2-40B4-BE49-F238E27FC236}">
-                <a16:creationId xmlns:a16="http://schemas.microsoft.com/office/drawing/2014/main" id="{AE45F511-8EC4-4F36-E354-F182E83C53FE}"/>
+                <a16:creationId xmlns:a16="http://schemas.microsoft.com/office/drawing/2014/main" id="{1BF9F854-1AEC-B963-BF42-83D4456557E1}"/>
               </a:ext>
             </a:extLst>
           </p:cNvPr>
@@ -10979,7 +11625,7 @@
           <p:cNvPr id="6" name="Slide Number Placeholder 5">
             <a:extLst>
               <a:ext uri="{FF2B5EF4-FFF2-40B4-BE49-F238E27FC236}">
-                <a16:creationId xmlns:a16="http://schemas.microsoft.com/office/drawing/2014/main" id="{E400E545-F89C-C5B5-4698-CE126550DFA6}"/>
+                <a16:creationId xmlns:a16="http://schemas.microsoft.com/office/drawing/2014/main" id="{D22D8E94-2436-805D-6C21-A58214C36A4C}"/>
               </a:ext>
             </a:extLst>
           </p:cNvPr>
@@ -11006,7 +11652,7 @@
     </p:spTree>
     <p:extLst>
       <p:ext uri="{BB962C8B-B14F-4D97-AF65-F5344CB8AC3E}">
-        <p14:creationId xmlns:p14="http://schemas.microsoft.com/office/powerpoint/2010/main" val="2953153806"/>
+        <p14:creationId xmlns:p14="http://schemas.microsoft.com/office/powerpoint/2010/main" val="3358176299"/>
       </p:ext>
     </p:extLst>
   </p:cSld>
@@ -11038,7 +11684,7 @@
           <p:cNvPr id="2" name="Title 1">
             <a:extLst>
               <a:ext uri="{FF2B5EF4-FFF2-40B4-BE49-F238E27FC236}">
-                <a16:creationId xmlns:a16="http://schemas.microsoft.com/office/drawing/2014/main" id="{BD170231-B259-3118-64A6-CA658979BB07}"/>
+                <a16:creationId xmlns:a16="http://schemas.microsoft.com/office/drawing/2014/main" id="{70F8309C-832E-1138-7AA0-3DDACD61FF66}"/>
               </a:ext>
             </a:extLst>
           </p:cNvPr>
@@ -11054,41 +11700,48 @@
           <a:bodyPr/>
           <a:lstStyle/>
           <a:p>
+            <a:r>
+              <a:rPr lang="en-US" dirty="0" err="1"/>
+              <a:t>Vertexer</a:t>
+            </a:r>
+            <a:r>
+              <a:rPr lang="en-US" dirty="0"/>
+              <a:t> Resolution</a:t>
+            </a:r>
+          </a:p>
+        </p:txBody>
+      </p:sp>
+      <p:sp>
+        <p:nvSpPr>
+          <p:cNvPr id="3" name="Content Placeholder 2">
+            <a:extLst>
+              <a:ext uri="{FF2B5EF4-FFF2-40B4-BE49-F238E27FC236}">
+                <a16:creationId xmlns:a16="http://schemas.microsoft.com/office/drawing/2014/main" id="{784DC180-9A16-0047-42C5-B6FC0ED6A3E0}"/>
+              </a:ext>
+            </a:extLst>
+          </p:cNvPr>
+          <p:cNvSpPr>
+            <a:spLocks noGrp="1"/>
+          </p:cNvSpPr>
+          <p:nvPr>
+            <p:ph idx="1"/>
+          </p:nvPr>
+        </p:nvSpPr>
+        <p:spPr/>
+        <p:txBody>
+          <a:bodyPr/>
+          <a:lstStyle/>
+          <a:p>
             <a:endParaRPr lang="en-US"/>
           </a:p>
         </p:txBody>
       </p:sp>
       <p:sp>
         <p:nvSpPr>
-          <p:cNvPr id="3" name="Content Placeholder 2">
-            <a:extLst>
-              <a:ext uri="{FF2B5EF4-FFF2-40B4-BE49-F238E27FC236}">
-                <a16:creationId xmlns:a16="http://schemas.microsoft.com/office/drawing/2014/main" id="{DB5FBD9C-B25F-3D68-8122-C71AABEAB122}"/>
-              </a:ext>
-            </a:extLst>
-          </p:cNvPr>
-          <p:cNvSpPr>
-            <a:spLocks noGrp="1"/>
-          </p:cNvSpPr>
-          <p:nvPr>
-            <p:ph idx="1"/>
-          </p:nvPr>
-        </p:nvSpPr>
-        <p:spPr/>
-        <p:txBody>
-          <a:bodyPr/>
-          <a:lstStyle/>
-          <a:p>
-            <a:endParaRPr lang="en-US"/>
-          </a:p>
-        </p:txBody>
-      </p:sp>
-      <p:sp>
-        <p:nvSpPr>
           <p:cNvPr id="5" name="Footer Placeholder 4">
             <a:extLst>
               <a:ext uri="{FF2B5EF4-FFF2-40B4-BE49-F238E27FC236}">
-                <a16:creationId xmlns:a16="http://schemas.microsoft.com/office/drawing/2014/main" id="{7A9F9F17-ADD4-7E43-F604-9315B910C528}"/>
+                <a16:creationId xmlns:a16="http://schemas.microsoft.com/office/drawing/2014/main" id="{AE45F511-8EC4-4F36-E354-F182E83C53FE}"/>
               </a:ext>
             </a:extLst>
           </p:cNvPr>
@@ -11116,7 +11769,7 @@
           <p:cNvPr id="6" name="Slide Number Placeholder 5">
             <a:extLst>
               <a:ext uri="{FF2B5EF4-FFF2-40B4-BE49-F238E27FC236}">
-                <a16:creationId xmlns:a16="http://schemas.microsoft.com/office/drawing/2014/main" id="{A3DA68BD-D7EF-3AE1-B746-ADA5CE60AA52}"/>
+                <a16:creationId xmlns:a16="http://schemas.microsoft.com/office/drawing/2014/main" id="{E400E545-F89C-C5B5-4698-CE126550DFA6}"/>
               </a:ext>
             </a:extLst>
           </p:cNvPr>
@@ -11140,10 +11793,68 @@
           </a:p>
         </p:txBody>
       </p:sp>
+      <p:sp>
+        <p:nvSpPr>
+          <p:cNvPr id="4" name="Title 1">
+            <a:extLst>
+              <a:ext uri="{FF2B5EF4-FFF2-40B4-BE49-F238E27FC236}">
+                <a16:creationId xmlns:a16="http://schemas.microsoft.com/office/drawing/2014/main" id="{3F10C72E-FDA7-7374-9F7E-7569CC10A4C9}"/>
+              </a:ext>
+            </a:extLst>
+          </p:cNvPr>
+          <p:cNvSpPr txBox="1">
+            <a:spLocks/>
+          </p:cNvSpPr>
+          <p:nvPr/>
+        </p:nvSpPr>
+        <p:spPr>
+          <a:xfrm>
+            <a:off x="0" y="0"/>
+            <a:ext cx="10515600" cy="424543"/>
+          </a:xfrm>
+          <a:prstGeom prst="rect">
+            <a:avLst/>
+          </a:prstGeom>
+        </p:spPr>
+        <p:txBody>
+          <a:bodyPr vert="horz" lIns="91440" tIns="45720" rIns="91440" bIns="45720" rtlCol="0" anchor="ctr">
+            <a:normAutofit fontScale="90000" lnSpcReduction="10000"/>
+          </a:bodyPr>
+          <a:lstStyle>
+            <a:lvl1pPr algn="l" defTabSz="914400" rtl="0" eaLnBrk="1" latinLnBrk="0" hangingPunct="1">
+              <a:lnSpc>
+                <a:spcPct val="90000"/>
+              </a:lnSpc>
+              <a:spcBef>
+                <a:spcPct val="0"/>
+              </a:spcBef>
+              <a:buNone/>
+              <a:defRPr sz="4400" kern="1200">
+                <a:solidFill>
+                  <a:schemeClr val="tx1"/>
+                </a:solidFill>
+                <a:latin typeface="+mj-lt"/>
+                <a:ea typeface="+mj-ea"/>
+                <a:cs typeface="+mj-cs"/>
+              </a:defRPr>
+            </a:lvl1pPr>
+          </a:lstStyle>
+          <a:p>
+            <a:r>
+              <a:rPr lang="en-US" sz="2800" dirty="0">
+                <a:solidFill>
+                  <a:srgbClr val="C00000"/>
+                </a:solidFill>
+              </a:rPr>
+              <a:t>Resolution of Rudimentary Vertex Proof of Concept</a:t>
+            </a:r>
+          </a:p>
+        </p:txBody>
+      </p:sp>
     </p:spTree>
     <p:extLst>
       <p:ext uri="{BB962C8B-B14F-4D97-AF65-F5344CB8AC3E}">
-        <p14:creationId xmlns:p14="http://schemas.microsoft.com/office/powerpoint/2010/main" val="452786289"/>
+        <p14:creationId xmlns:p14="http://schemas.microsoft.com/office/powerpoint/2010/main" val="2953153806"/>
       </p:ext>
     </p:extLst>
   </p:cSld>
@@ -11175,7 +11886,7 @@
           <p:cNvPr id="2" name="Title 1">
             <a:extLst>
               <a:ext uri="{FF2B5EF4-FFF2-40B4-BE49-F238E27FC236}">
-                <a16:creationId xmlns:a16="http://schemas.microsoft.com/office/drawing/2014/main" id="{BDD7BEF6-3922-DF92-934A-A50EAADF41DD}"/>
+                <a16:creationId xmlns:a16="http://schemas.microsoft.com/office/drawing/2014/main" id="{BD170231-B259-3118-64A6-CA658979BB07}"/>
               </a:ext>
             </a:extLst>
           </p:cNvPr>
@@ -11191,44 +11902,41 @@
           <a:bodyPr/>
           <a:lstStyle/>
           <a:p>
-            <a:r>
-              <a:rPr lang="en-US" dirty="0"/>
-              <a:t>Goals and Deliverables</a:t>
-            </a:r>
-          </a:p>
-        </p:txBody>
-      </p:sp>
-      <p:sp>
-        <p:nvSpPr>
-          <p:cNvPr id="3" name="Text Placeholder 2">
-            <a:extLst>
-              <a:ext uri="{FF2B5EF4-FFF2-40B4-BE49-F238E27FC236}">
-                <a16:creationId xmlns:a16="http://schemas.microsoft.com/office/drawing/2014/main" id="{58EAF08C-8838-ADF0-A14F-EF626FD37B38}"/>
-              </a:ext>
-            </a:extLst>
-          </p:cNvPr>
-          <p:cNvSpPr>
-            <a:spLocks noGrp="1"/>
-          </p:cNvSpPr>
-          <p:nvPr>
-            <p:ph type="body" idx="1"/>
-          </p:nvPr>
-        </p:nvSpPr>
-        <p:spPr/>
-        <p:txBody>
-          <a:bodyPr/>
-          <a:lstStyle/>
-          <a:p>
             <a:endParaRPr lang="en-US"/>
           </a:p>
         </p:txBody>
       </p:sp>
       <p:sp>
         <p:nvSpPr>
+          <p:cNvPr id="3" name="Content Placeholder 2">
+            <a:extLst>
+              <a:ext uri="{FF2B5EF4-FFF2-40B4-BE49-F238E27FC236}">
+                <a16:creationId xmlns:a16="http://schemas.microsoft.com/office/drawing/2014/main" id="{DB5FBD9C-B25F-3D68-8122-C71AABEAB122}"/>
+              </a:ext>
+            </a:extLst>
+          </p:cNvPr>
+          <p:cNvSpPr>
+            <a:spLocks noGrp="1"/>
+          </p:cNvSpPr>
+          <p:nvPr>
+            <p:ph idx="1"/>
+          </p:nvPr>
+        </p:nvSpPr>
+        <p:spPr/>
+        <p:txBody>
+          <a:bodyPr/>
+          <a:lstStyle/>
+          <a:p>
+            <a:endParaRPr lang="en-US"/>
+          </a:p>
+        </p:txBody>
+      </p:sp>
+      <p:sp>
+        <p:nvSpPr>
           <p:cNvPr id="5" name="Footer Placeholder 4">
             <a:extLst>
               <a:ext uri="{FF2B5EF4-FFF2-40B4-BE49-F238E27FC236}">
-                <a16:creationId xmlns:a16="http://schemas.microsoft.com/office/drawing/2014/main" id="{97F3CDDE-7524-5326-94E1-D8AA0350F073}"/>
+                <a16:creationId xmlns:a16="http://schemas.microsoft.com/office/drawing/2014/main" id="{7A9F9F17-ADD4-7E43-F604-9315B910C528}"/>
               </a:ext>
             </a:extLst>
           </p:cNvPr>
@@ -11256,7 +11964,7 @@
           <p:cNvPr id="6" name="Slide Number Placeholder 5">
             <a:extLst>
               <a:ext uri="{FF2B5EF4-FFF2-40B4-BE49-F238E27FC236}">
-                <a16:creationId xmlns:a16="http://schemas.microsoft.com/office/drawing/2014/main" id="{5AEE1E3D-CEFD-E977-7771-1611CC593BAF}"/>
+                <a16:creationId xmlns:a16="http://schemas.microsoft.com/office/drawing/2014/main" id="{A3DA68BD-D7EF-3AE1-B746-ADA5CE60AA52}"/>
               </a:ext>
             </a:extLst>
           </p:cNvPr>
@@ -11283,7 +11991,7 @@
     </p:spTree>
     <p:extLst>
       <p:ext uri="{BB962C8B-B14F-4D97-AF65-F5344CB8AC3E}">
-        <p14:creationId xmlns:p14="http://schemas.microsoft.com/office/powerpoint/2010/main" val="840349070"/>
+        <p14:creationId xmlns:p14="http://schemas.microsoft.com/office/powerpoint/2010/main" val="452786289"/>
       </p:ext>
     </p:extLst>
   </p:cSld>
@@ -11315,7 +12023,7 @@
           <p:cNvPr id="2" name="Title 1">
             <a:extLst>
               <a:ext uri="{FF2B5EF4-FFF2-40B4-BE49-F238E27FC236}">
-                <a16:creationId xmlns:a16="http://schemas.microsoft.com/office/drawing/2014/main" id="{C359B161-21B7-E5E6-A68F-12F3880292B3}"/>
+                <a16:creationId xmlns:a16="http://schemas.microsoft.com/office/drawing/2014/main" id="{BDD7BEF6-3922-DF92-934A-A50EAADF41DD}"/>
               </a:ext>
             </a:extLst>
           </p:cNvPr>
@@ -11332,30 +12040,26 @@
           <a:lstStyle/>
           <a:p>
             <a:r>
-              <a:rPr lang="en-US" dirty="0" err="1"/>
-              <a:t>Vertexer</a:t>
-            </a:r>
-            <a:r>
               <a:rPr lang="en-US" dirty="0"/>
-              <a:t> Improvements</a:t>
-            </a:r>
-          </a:p>
-        </p:txBody>
-      </p:sp>
-      <p:sp>
-        <p:nvSpPr>
-          <p:cNvPr id="3" name="Content Placeholder 2">
-            <a:extLst>
-              <a:ext uri="{FF2B5EF4-FFF2-40B4-BE49-F238E27FC236}">
-                <a16:creationId xmlns:a16="http://schemas.microsoft.com/office/drawing/2014/main" id="{67C34485-C336-718B-C230-D651BA0A32FE}"/>
-              </a:ext>
-            </a:extLst>
-          </p:cNvPr>
-          <p:cNvSpPr>
-            <a:spLocks noGrp="1"/>
-          </p:cNvSpPr>
-          <p:nvPr>
-            <p:ph idx="1"/>
+              <a:t>Goals and Deliverables</a:t>
+            </a:r>
+          </a:p>
+        </p:txBody>
+      </p:sp>
+      <p:sp>
+        <p:nvSpPr>
+          <p:cNvPr id="3" name="Text Placeholder 2">
+            <a:extLst>
+              <a:ext uri="{FF2B5EF4-FFF2-40B4-BE49-F238E27FC236}">
+                <a16:creationId xmlns:a16="http://schemas.microsoft.com/office/drawing/2014/main" id="{58EAF08C-8838-ADF0-A14F-EF626FD37B38}"/>
+              </a:ext>
+            </a:extLst>
+          </p:cNvPr>
+          <p:cNvSpPr>
+            <a:spLocks noGrp="1"/>
+          </p:cNvSpPr>
+          <p:nvPr>
+            <p:ph type="body" idx="1"/>
           </p:nvPr>
         </p:nvSpPr>
         <p:spPr/>
@@ -11372,7 +12076,7 @@
           <p:cNvPr id="5" name="Footer Placeholder 4">
             <a:extLst>
               <a:ext uri="{FF2B5EF4-FFF2-40B4-BE49-F238E27FC236}">
-                <a16:creationId xmlns:a16="http://schemas.microsoft.com/office/drawing/2014/main" id="{E6A2EB45-D49B-88DA-947F-7039EE63971B}"/>
+                <a16:creationId xmlns:a16="http://schemas.microsoft.com/office/drawing/2014/main" id="{97F3CDDE-7524-5326-94E1-D8AA0350F073}"/>
               </a:ext>
             </a:extLst>
           </p:cNvPr>
@@ -11400,7 +12104,7 @@
           <p:cNvPr id="6" name="Slide Number Placeholder 5">
             <a:extLst>
               <a:ext uri="{FF2B5EF4-FFF2-40B4-BE49-F238E27FC236}">
-                <a16:creationId xmlns:a16="http://schemas.microsoft.com/office/drawing/2014/main" id="{C80705AC-D735-D500-4CFD-415696D25B68}"/>
+                <a16:creationId xmlns:a16="http://schemas.microsoft.com/office/drawing/2014/main" id="{5AEE1E3D-CEFD-E977-7771-1611CC593BAF}"/>
               </a:ext>
             </a:extLst>
           </p:cNvPr>
@@ -11427,7 +12131,7 @@
     </p:spTree>
     <p:extLst>
       <p:ext uri="{BB962C8B-B14F-4D97-AF65-F5344CB8AC3E}">
-        <p14:creationId xmlns:p14="http://schemas.microsoft.com/office/powerpoint/2010/main" val="134210310"/>
+        <p14:creationId xmlns:p14="http://schemas.microsoft.com/office/powerpoint/2010/main" val="840349070"/>
       </p:ext>
     </p:extLst>
   </p:cSld>
@@ -11459,7 +12163,7 @@
           <p:cNvPr id="2" name="Title 1">
             <a:extLst>
               <a:ext uri="{FF2B5EF4-FFF2-40B4-BE49-F238E27FC236}">
-                <a16:creationId xmlns:a16="http://schemas.microsoft.com/office/drawing/2014/main" id="{9FF94AB4-2094-057F-2C85-626AF64DE003}"/>
+                <a16:creationId xmlns:a16="http://schemas.microsoft.com/office/drawing/2014/main" id="{C359B161-21B7-E5E6-A68F-12F3880292B3}"/>
               </a:ext>
             </a:extLst>
           </p:cNvPr>
@@ -11476,8 +12180,12 @@
           <a:lstStyle/>
           <a:p>
             <a:r>
+              <a:rPr lang="en-US" dirty="0" err="1"/>
+              <a:t>Vertexer</a:t>
+            </a:r>
+            <a:r>
               <a:rPr lang="en-US" dirty="0"/>
-              <a:t>Mixing of Relevant Backgrounds with Process</a:t>
+              <a:t> Improvements</a:t>
             </a:r>
           </a:p>
         </p:txBody>
@@ -11487,7 +12195,7 @@
           <p:cNvPr id="3" name="Content Placeholder 2">
             <a:extLst>
               <a:ext uri="{FF2B5EF4-FFF2-40B4-BE49-F238E27FC236}">
-                <a16:creationId xmlns:a16="http://schemas.microsoft.com/office/drawing/2014/main" id="{13699EC3-B19A-42E0-3396-2DD015FEE3E0}"/>
+                <a16:creationId xmlns:a16="http://schemas.microsoft.com/office/drawing/2014/main" id="{67C34485-C336-718B-C230-D651BA0A32FE}"/>
               </a:ext>
             </a:extLst>
           </p:cNvPr>
@@ -11512,7 +12220,7 @@
           <p:cNvPr id="5" name="Footer Placeholder 4">
             <a:extLst>
               <a:ext uri="{FF2B5EF4-FFF2-40B4-BE49-F238E27FC236}">
-                <a16:creationId xmlns:a16="http://schemas.microsoft.com/office/drawing/2014/main" id="{E58C9DF4-AB99-AC42-9D56-02020CFA23AA}"/>
+                <a16:creationId xmlns:a16="http://schemas.microsoft.com/office/drawing/2014/main" id="{E6A2EB45-D49B-88DA-947F-7039EE63971B}"/>
               </a:ext>
             </a:extLst>
           </p:cNvPr>
@@ -11540,7 +12248,7 @@
           <p:cNvPr id="6" name="Slide Number Placeholder 5">
             <a:extLst>
               <a:ext uri="{FF2B5EF4-FFF2-40B4-BE49-F238E27FC236}">
-                <a16:creationId xmlns:a16="http://schemas.microsoft.com/office/drawing/2014/main" id="{7E903803-F5ED-2DBF-3BA8-57149DFC039A}"/>
+                <a16:creationId xmlns:a16="http://schemas.microsoft.com/office/drawing/2014/main" id="{C80705AC-D735-D500-4CFD-415696D25B68}"/>
               </a:ext>
             </a:extLst>
           </p:cNvPr>
@@ -11564,10 +12272,68 @@
           </a:p>
         </p:txBody>
       </p:sp>
+      <p:sp>
+        <p:nvSpPr>
+          <p:cNvPr id="4" name="Title 1">
+            <a:extLst>
+              <a:ext uri="{FF2B5EF4-FFF2-40B4-BE49-F238E27FC236}">
+                <a16:creationId xmlns:a16="http://schemas.microsoft.com/office/drawing/2014/main" id="{C5080FBC-DFA4-04BD-D5F5-39ECDA29081D}"/>
+              </a:ext>
+            </a:extLst>
+          </p:cNvPr>
+          <p:cNvSpPr txBox="1">
+            <a:spLocks/>
+          </p:cNvSpPr>
+          <p:nvPr/>
+        </p:nvSpPr>
+        <p:spPr>
+          <a:xfrm>
+            <a:off x="0" y="0"/>
+            <a:ext cx="10515600" cy="424543"/>
+          </a:xfrm>
+          <a:prstGeom prst="rect">
+            <a:avLst/>
+          </a:prstGeom>
+        </p:spPr>
+        <p:txBody>
+          <a:bodyPr vert="horz" lIns="91440" tIns="45720" rIns="91440" bIns="45720" rtlCol="0" anchor="ctr">
+            <a:normAutofit fontScale="90000" lnSpcReduction="10000"/>
+          </a:bodyPr>
+          <a:lstStyle>
+            <a:lvl1pPr algn="l" defTabSz="914400" rtl="0" eaLnBrk="1" latinLnBrk="0" hangingPunct="1">
+              <a:lnSpc>
+                <a:spcPct val="90000"/>
+              </a:lnSpc>
+              <a:spcBef>
+                <a:spcPct val="0"/>
+              </a:spcBef>
+              <a:buNone/>
+              <a:defRPr sz="4400" kern="1200">
+                <a:solidFill>
+                  <a:schemeClr val="tx1"/>
+                </a:solidFill>
+                <a:latin typeface="+mj-lt"/>
+                <a:ea typeface="+mj-ea"/>
+                <a:cs typeface="+mj-cs"/>
+              </a:defRPr>
+            </a:lvl1pPr>
+          </a:lstStyle>
+          <a:p>
+            <a:r>
+              <a:rPr lang="en-US" sz="2800" dirty="0">
+                <a:solidFill>
+                  <a:srgbClr val="C00000"/>
+                </a:solidFill>
+              </a:rPr>
+              <a:t>Improvements to Vertexing Procedure</a:t>
+            </a:r>
+          </a:p>
+        </p:txBody>
+      </p:sp>
     </p:spTree>
     <p:extLst>
       <p:ext uri="{BB962C8B-B14F-4D97-AF65-F5344CB8AC3E}">
-        <p14:creationId xmlns:p14="http://schemas.microsoft.com/office/powerpoint/2010/main" val="3459475801"/>
+        <p14:creationId xmlns:p14="http://schemas.microsoft.com/office/powerpoint/2010/main" val="134210310"/>
       </p:ext>
     </p:extLst>
   </p:cSld>
@@ -11599,7 +12365,7 @@
           <p:cNvPr id="2" name="Title 1">
             <a:extLst>
               <a:ext uri="{FF2B5EF4-FFF2-40B4-BE49-F238E27FC236}">
-                <a16:creationId xmlns:a16="http://schemas.microsoft.com/office/drawing/2014/main" id="{8637BF2B-5112-4B4D-10C3-5AF9705442AE}"/>
+                <a16:creationId xmlns:a16="http://schemas.microsoft.com/office/drawing/2014/main" id="{9FF94AB4-2094-057F-2C85-626AF64DE003}"/>
               </a:ext>
             </a:extLst>
           </p:cNvPr>
@@ -11617,7 +12383,7 @@
           <a:p>
             <a:r>
               <a:rPr lang="en-US" dirty="0"/>
-              <a:t>Theoretical Refinement of Generator</a:t>
+              <a:t>Mixing of Relevant Backgrounds with Process</a:t>
             </a:r>
           </a:p>
         </p:txBody>
@@ -11627,7 +12393,7 @@
           <p:cNvPr id="3" name="Content Placeholder 2">
             <a:extLst>
               <a:ext uri="{FF2B5EF4-FFF2-40B4-BE49-F238E27FC236}">
-                <a16:creationId xmlns:a16="http://schemas.microsoft.com/office/drawing/2014/main" id="{A02302AA-96B5-20A7-F655-E3EA4E836BA2}"/>
+                <a16:creationId xmlns:a16="http://schemas.microsoft.com/office/drawing/2014/main" id="{13699EC3-B19A-42E0-3396-2DD015FEE3E0}"/>
               </a:ext>
             </a:extLst>
           </p:cNvPr>
@@ -11652,7 +12418,7 @@
           <p:cNvPr id="5" name="Footer Placeholder 4">
             <a:extLst>
               <a:ext uri="{FF2B5EF4-FFF2-40B4-BE49-F238E27FC236}">
-                <a16:creationId xmlns:a16="http://schemas.microsoft.com/office/drawing/2014/main" id="{238CABE1-3614-081A-0AE0-C615D9BBF757}"/>
+                <a16:creationId xmlns:a16="http://schemas.microsoft.com/office/drawing/2014/main" id="{E58C9DF4-AB99-AC42-9D56-02020CFA23AA}"/>
               </a:ext>
             </a:extLst>
           </p:cNvPr>
@@ -11680,7 +12446,7 @@
           <p:cNvPr id="6" name="Slide Number Placeholder 5">
             <a:extLst>
               <a:ext uri="{FF2B5EF4-FFF2-40B4-BE49-F238E27FC236}">
-                <a16:creationId xmlns:a16="http://schemas.microsoft.com/office/drawing/2014/main" id="{C51CC947-510A-ADCF-B979-DE48CD4E9FC2}"/>
+                <a16:creationId xmlns:a16="http://schemas.microsoft.com/office/drawing/2014/main" id="{7E903803-F5ED-2DBF-3BA8-57149DFC039A}"/>
               </a:ext>
             </a:extLst>
           </p:cNvPr>
@@ -11704,10 +12470,281 @@
           </a:p>
         </p:txBody>
       </p:sp>
+      <mc:AlternateContent xmlns:mc="http://schemas.openxmlformats.org/markup-compatibility/2006">
+        <mc:Choice xmlns:a14="http://schemas.microsoft.com/office/drawing/2010/main" Requires="a14">
+          <p:sp>
+            <p:nvSpPr>
+              <p:cNvPr id="4" name="Title 1">
+                <a:extLst>
+                  <a:ext uri="{FF2B5EF4-FFF2-40B4-BE49-F238E27FC236}">
+                    <a16:creationId xmlns:a16="http://schemas.microsoft.com/office/drawing/2014/main" id="{963DDD82-1C4B-6E5A-D844-2CD4FEDBE047}"/>
+                  </a:ext>
+                </a:extLst>
+              </p:cNvPr>
+              <p:cNvSpPr txBox="1">
+                <a:spLocks/>
+              </p:cNvSpPr>
+              <p:nvPr/>
+            </p:nvSpPr>
+            <p:spPr>
+              <a:xfrm>
+                <a:off x="0" y="0"/>
+                <a:ext cx="10515600" cy="551234"/>
+              </a:xfrm>
+              <a:prstGeom prst="rect">
+                <a:avLst/>
+              </a:prstGeom>
+            </p:spPr>
+            <p:txBody>
+              <a:bodyPr vert="horz" lIns="91440" tIns="45720" rIns="91440" bIns="45720" rtlCol="0" anchor="ctr">
+                <a:normAutofit fontScale="97500"/>
+              </a:bodyPr>
+              <a:lstStyle>
+                <a:lvl1pPr algn="l" defTabSz="914400" rtl="0" eaLnBrk="1" latinLnBrk="0" hangingPunct="1">
+                  <a:lnSpc>
+                    <a:spcPct val="90000"/>
+                  </a:lnSpc>
+                  <a:spcBef>
+                    <a:spcPct val="0"/>
+                  </a:spcBef>
+                  <a:buNone/>
+                  <a:defRPr sz="4400" kern="1200">
+                    <a:solidFill>
+                      <a:schemeClr val="tx1"/>
+                    </a:solidFill>
+                    <a:latin typeface="+mj-lt"/>
+                    <a:ea typeface="+mj-ea"/>
+                    <a:cs typeface="+mj-cs"/>
+                  </a:defRPr>
+                </a:lvl1pPr>
+              </a:lstStyle>
+              <a:p>
+                <a:r>
+                  <a:rPr lang="en-US" sz="2800" dirty="0">
+                    <a:solidFill>
+                      <a:srgbClr val="C00000"/>
+                    </a:solidFill>
+                  </a:rPr>
+                  <a:t>Mixing of Relevant Backgrounds with </a:t>
+                </a:r>
+                <a14:m>
+                  <m:oMath xmlns:m="http://schemas.openxmlformats.org/officeDocument/2006/math">
+                    <m:sSup>
+                      <m:sSupPr>
+                        <m:ctrlPr>
+                          <a:rPr lang="en-US" sz="2800" i="1" smtClean="0">
+                            <a:solidFill>
+                              <a:srgbClr val="C00000"/>
+                            </a:solidFill>
+                            <a:latin typeface="Cambria Math" panose="02040503050406030204" pitchFamily="18" charset="0"/>
+                          </a:rPr>
+                        </m:ctrlPr>
+                      </m:sSupPr>
+                      <m:e>
+                        <m:r>
+                          <a:rPr lang="en-US" sz="2800" i="1" smtClean="0">
+                            <a:solidFill>
+                              <a:srgbClr val="C00000"/>
+                            </a:solidFill>
+                            <a:latin typeface="Cambria Math" panose="02040503050406030204" pitchFamily="18" charset="0"/>
+                            <a:ea typeface="Cambria Math" panose="02040503050406030204" pitchFamily="18" charset="0"/>
+                          </a:rPr>
+                          <m:t>𝜇</m:t>
+                        </m:r>
+                      </m:e>
+                      <m:sup>
+                        <m:r>
+                          <a:rPr lang="en-US" sz="2800" b="0" i="1" smtClean="0">
+                            <a:solidFill>
+                              <a:srgbClr val="C00000"/>
+                            </a:solidFill>
+                            <a:latin typeface="Cambria Math" panose="02040503050406030204" pitchFamily="18" charset="0"/>
+                          </a:rPr>
+                          <m:t>−</m:t>
+                        </m:r>
+                      </m:sup>
+                    </m:sSup>
+                    <m:sSup>
+                      <m:sSupPr>
+                        <m:ctrlPr>
+                          <a:rPr lang="en-US" sz="2800" i="1" smtClean="0">
+                            <a:solidFill>
+                              <a:srgbClr val="C00000"/>
+                            </a:solidFill>
+                            <a:latin typeface="Cambria Math" panose="02040503050406030204" pitchFamily="18" charset="0"/>
+                          </a:rPr>
+                        </m:ctrlPr>
+                      </m:sSupPr>
+                      <m:e>
+                        <m:r>
+                          <a:rPr lang="en-US" sz="2800" b="0" i="1" smtClean="0">
+                            <a:solidFill>
+                              <a:srgbClr val="C00000"/>
+                            </a:solidFill>
+                            <a:latin typeface="Cambria Math" panose="02040503050406030204" pitchFamily="18" charset="0"/>
+                          </a:rPr>
+                          <m:t>𝑒</m:t>
+                        </m:r>
+                      </m:e>
+                      <m:sup>
+                        <m:r>
+                          <a:rPr lang="en-US" sz="2800" b="0" i="1" smtClean="0">
+                            <a:solidFill>
+                              <a:srgbClr val="C00000"/>
+                            </a:solidFill>
+                            <a:latin typeface="Cambria Math" panose="02040503050406030204" pitchFamily="18" charset="0"/>
+                          </a:rPr>
+                          <m:t>−</m:t>
+                        </m:r>
+                      </m:sup>
+                    </m:sSup>
+                    <m:r>
+                      <a:rPr lang="en-US" sz="2800" i="1" smtClean="0">
+                        <a:solidFill>
+                          <a:srgbClr val="C00000"/>
+                        </a:solidFill>
+                        <a:latin typeface="Cambria Math" panose="02040503050406030204" pitchFamily="18" charset="0"/>
+                        <a:ea typeface="Cambria Math" panose="02040503050406030204" pitchFamily="18" charset="0"/>
+                      </a:rPr>
+                      <m:t>→</m:t>
+                    </m:r>
+                    <m:sSup>
+                      <m:sSupPr>
+                        <m:ctrlPr>
+                          <a:rPr lang="en-US" sz="2800" i="1" smtClean="0">
+                            <a:solidFill>
+                              <a:srgbClr val="C00000"/>
+                            </a:solidFill>
+                            <a:latin typeface="Cambria Math" panose="02040503050406030204" pitchFamily="18" charset="0"/>
+                            <a:ea typeface="Cambria Math" panose="02040503050406030204" pitchFamily="18" charset="0"/>
+                          </a:rPr>
+                        </m:ctrlPr>
+                      </m:sSupPr>
+                      <m:e>
+                        <m:r>
+                          <a:rPr lang="en-US" sz="2800" b="0" i="1" smtClean="0">
+                            <a:solidFill>
+                              <a:srgbClr val="C00000"/>
+                            </a:solidFill>
+                            <a:latin typeface="Cambria Math" panose="02040503050406030204" pitchFamily="18" charset="0"/>
+                            <a:ea typeface="Cambria Math" panose="02040503050406030204" pitchFamily="18" charset="0"/>
+                          </a:rPr>
+                          <m:t>𝑒</m:t>
+                        </m:r>
+                      </m:e>
+                      <m:sup>
+                        <m:r>
+                          <a:rPr lang="en-US" sz="2800" b="0" i="1" smtClean="0">
+                            <a:solidFill>
+                              <a:srgbClr val="C00000"/>
+                            </a:solidFill>
+                            <a:latin typeface="Cambria Math" panose="02040503050406030204" pitchFamily="18" charset="0"/>
+                            <a:ea typeface="Cambria Math" panose="02040503050406030204" pitchFamily="18" charset="0"/>
+                          </a:rPr>
+                          <m:t>−</m:t>
+                        </m:r>
+                      </m:sup>
+                    </m:sSup>
+                    <m:sSup>
+                      <m:sSupPr>
+                        <m:ctrlPr>
+                          <a:rPr lang="en-US" sz="2800" i="1" smtClean="0">
+                            <a:solidFill>
+                              <a:srgbClr val="C00000"/>
+                            </a:solidFill>
+                            <a:latin typeface="Cambria Math" panose="02040503050406030204" pitchFamily="18" charset="0"/>
+                            <a:ea typeface="Cambria Math" panose="02040503050406030204" pitchFamily="18" charset="0"/>
+                          </a:rPr>
+                        </m:ctrlPr>
+                      </m:sSupPr>
+                      <m:e>
+                        <m:r>
+                          <a:rPr lang="en-US" sz="2800" b="0" i="1" smtClean="0">
+                            <a:solidFill>
+                              <a:srgbClr val="C00000"/>
+                            </a:solidFill>
+                            <a:latin typeface="Cambria Math" panose="02040503050406030204" pitchFamily="18" charset="0"/>
+                            <a:ea typeface="Cambria Math" panose="02040503050406030204" pitchFamily="18" charset="0"/>
+                          </a:rPr>
+                          <m:t>𝑒</m:t>
+                        </m:r>
+                      </m:e>
+                      <m:sup>
+                        <m:r>
+                          <a:rPr lang="en-US" sz="2800" b="0" i="1" smtClean="0">
+                            <a:solidFill>
+                              <a:srgbClr val="C00000"/>
+                            </a:solidFill>
+                            <a:latin typeface="Cambria Math" panose="02040503050406030204" pitchFamily="18" charset="0"/>
+                            <a:ea typeface="Cambria Math" panose="02040503050406030204" pitchFamily="18" charset="0"/>
+                          </a:rPr>
+                          <m:t>−</m:t>
+                        </m:r>
+                      </m:sup>
+                    </m:sSup>
+                  </m:oMath>
+                </a14:m>
+                <a:r>
+                  <a:rPr lang="en-US" sz="2800" dirty="0">
+                    <a:solidFill>
+                      <a:srgbClr val="C00000"/>
+                    </a:solidFill>
+                  </a:rPr>
+                  <a:t> Process</a:t>
+                </a:r>
+              </a:p>
+            </p:txBody>
+          </p:sp>
+        </mc:Choice>
+        <mc:Fallback>
+          <p:sp>
+            <p:nvSpPr>
+              <p:cNvPr id="4" name="Title 1">
+                <a:extLst>
+                  <a:ext uri="{FF2B5EF4-FFF2-40B4-BE49-F238E27FC236}">
+                    <a16:creationId xmlns:a16="http://schemas.microsoft.com/office/drawing/2014/main" id="{963DDD82-1C4B-6E5A-D844-2CD4FEDBE047}"/>
+                  </a:ext>
+                </a:extLst>
+              </p:cNvPr>
+              <p:cNvSpPr txBox="1">
+                <a:spLocks noRot="1" noChangeAspect="1" noMove="1" noResize="1" noEditPoints="1" noAdjustHandles="1" noChangeArrowheads="1" noChangeShapeType="1" noTextEdit="1"/>
+              </p:cNvSpPr>
+              <p:nvPr/>
+            </p:nvSpPr>
+            <p:spPr>
+              <a:xfrm>
+                <a:off x="0" y="0"/>
+                <a:ext cx="10515600" cy="551234"/>
+              </a:xfrm>
+              <a:prstGeom prst="rect">
+                <a:avLst/>
+              </a:prstGeom>
+              <a:blipFill>
+                <a:blip r:embed="rId2"/>
+                <a:stretch>
+                  <a:fillRect l="-1206" t="-11364" b="-20455"/>
+                </a:stretch>
+              </a:blipFill>
+            </p:spPr>
+            <p:txBody>
+              <a:bodyPr/>
+              <a:lstStyle/>
+              <a:p>
+                <a:r>
+                  <a:rPr lang="en-US">
+                    <a:noFill/>
+                  </a:rPr>
+                  <a:t> </a:t>
+                </a:r>
+              </a:p>
+            </p:txBody>
+          </p:sp>
+        </mc:Fallback>
+      </mc:AlternateContent>
     </p:spTree>
     <p:extLst>
       <p:ext uri="{BB962C8B-B14F-4D97-AF65-F5344CB8AC3E}">
-        <p14:creationId xmlns:p14="http://schemas.microsoft.com/office/powerpoint/2010/main" val="1044251647"/>
+        <p14:creationId xmlns:p14="http://schemas.microsoft.com/office/powerpoint/2010/main" val="3459475801"/>
       </p:ext>
     </p:extLst>
   </p:cSld>
@@ -11739,7 +12776,7 @@
           <p:cNvPr id="2" name="Title 1">
             <a:extLst>
               <a:ext uri="{FF2B5EF4-FFF2-40B4-BE49-F238E27FC236}">
-                <a16:creationId xmlns:a16="http://schemas.microsoft.com/office/drawing/2014/main" id="{CF447FA9-7EA7-7F99-9C52-F7F52DA585CD}"/>
+                <a16:creationId xmlns:a16="http://schemas.microsoft.com/office/drawing/2014/main" id="{8637BF2B-5112-4B4D-10C3-5AF9705442AE}"/>
               </a:ext>
             </a:extLst>
           </p:cNvPr>
@@ -11757,7 +12794,7 @@
           <a:p>
             <a:r>
               <a:rPr lang="en-US" dirty="0"/>
-              <a:t>Full Sensitivity Study and Statistical Analysis</a:t>
+              <a:t>Theoretical Refinement of Generator</a:t>
             </a:r>
           </a:p>
         </p:txBody>
@@ -11767,7 +12804,7 @@
           <p:cNvPr id="3" name="Content Placeholder 2">
             <a:extLst>
               <a:ext uri="{FF2B5EF4-FFF2-40B4-BE49-F238E27FC236}">
-                <a16:creationId xmlns:a16="http://schemas.microsoft.com/office/drawing/2014/main" id="{3824709D-DC9C-AAFC-608C-7A940CC822B4}"/>
+                <a16:creationId xmlns:a16="http://schemas.microsoft.com/office/drawing/2014/main" id="{A02302AA-96B5-20A7-F655-E3EA4E836BA2}"/>
               </a:ext>
             </a:extLst>
           </p:cNvPr>
@@ -11792,7 +12829,7 @@
           <p:cNvPr id="5" name="Footer Placeholder 4">
             <a:extLst>
               <a:ext uri="{FF2B5EF4-FFF2-40B4-BE49-F238E27FC236}">
-                <a16:creationId xmlns:a16="http://schemas.microsoft.com/office/drawing/2014/main" id="{E5287775-36FF-0178-266E-DFB8530F63C0}"/>
+                <a16:creationId xmlns:a16="http://schemas.microsoft.com/office/drawing/2014/main" id="{238CABE1-3614-081A-0AE0-C615D9BBF757}"/>
               </a:ext>
             </a:extLst>
           </p:cNvPr>
@@ -11820,7 +12857,7 @@
           <p:cNvPr id="6" name="Slide Number Placeholder 5">
             <a:extLst>
               <a:ext uri="{FF2B5EF4-FFF2-40B4-BE49-F238E27FC236}">
-                <a16:creationId xmlns:a16="http://schemas.microsoft.com/office/drawing/2014/main" id="{C46A29E0-900E-A4E1-4F2F-A8EE2275A3BD}"/>
+                <a16:creationId xmlns:a16="http://schemas.microsoft.com/office/drawing/2014/main" id="{C51CC947-510A-ADCF-B979-DE48CD4E9FC2}"/>
               </a:ext>
             </a:extLst>
           </p:cNvPr>
@@ -11844,10 +12881,68 @@
           </a:p>
         </p:txBody>
       </p:sp>
+      <p:sp>
+        <p:nvSpPr>
+          <p:cNvPr id="4" name="Title 1">
+            <a:extLst>
+              <a:ext uri="{FF2B5EF4-FFF2-40B4-BE49-F238E27FC236}">
+                <a16:creationId xmlns:a16="http://schemas.microsoft.com/office/drawing/2014/main" id="{59947902-4FCD-8C78-F95F-A5B992EF7453}"/>
+              </a:ext>
+            </a:extLst>
+          </p:cNvPr>
+          <p:cNvSpPr txBox="1">
+            <a:spLocks/>
+          </p:cNvSpPr>
+          <p:nvPr/>
+        </p:nvSpPr>
+        <p:spPr>
+          <a:xfrm>
+            <a:off x="0" y="0"/>
+            <a:ext cx="10515600" cy="424543"/>
+          </a:xfrm>
+          <a:prstGeom prst="rect">
+            <a:avLst/>
+          </a:prstGeom>
+        </p:spPr>
+        <p:txBody>
+          <a:bodyPr vert="horz" lIns="91440" tIns="45720" rIns="91440" bIns="45720" rtlCol="0" anchor="ctr">
+            <a:normAutofit fontScale="90000" lnSpcReduction="10000"/>
+          </a:bodyPr>
+          <a:lstStyle>
+            <a:lvl1pPr algn="l" defTabSz="914400" rtl="0" eaLnBrk="1" latinLnBrk="0" hangingPunct="1">
+              <a:lnSpc>
+                <a:spcPct val="90000"/>
+              </a:lnSpc>
+              <a:spcBef>
+                <a:spcPct val="0"/>
+              </a:spcBef>
+              <a:buNone/>
+              <a:defRPr sz="4400" kern="1200">
+                <a:solidFill>
+                  <a:schemeClr val="tx1"/>
+                </a:solidFill>
+                <a:latin typeface="+mj-lt"/>
+                <a:ea typeface="+mj-ea"/>
+                <a:cs typeface="+mj-cs"/>
+              </a:defRPr>
+            </a:lvl1pPr>
+          </a:lstStyle>
+          <a:p>
+            <a:r>
+              <a:rPr lang="en-US" sz="2800" dirty="0">
+                <a:solidFill>
+                  <a:srgbClr val="C00000"/>
+                </a:solidFill>
+              </a:rPr>
+              <a:t>Theoretical Refinement of Toy-Generator</a:t>
+            </a:r>
+          </a:p>
+        </p:txBody>
+      </p:sp>
     </p:spTree>
     <p:extLst>
       <p:ext uri="{BB962C8B-B14F-4D97-AF65-F5344CB8AC3E}">
-        <p14:creationId xmlns:p14="http://schemas.microsoft.com/office/powerpoint/2010/main" val="3458479550"/>
+        <p14:creationId xmlns:p14="http://schemas.microsoft.com/office/powerpoint/2010/main" val="1044251647"/>
       </p:ext>
     </p:extLst>
   </p:cSld>
@@ -11876,59 +12971,31 @@
       </p:grpSpPr>
       <p:sp>
         <p:nvSpPr>
-          <p:cNvPr id="2" name="Title 1">
-            <a:extLst>
-              <a:ext uri="{FF2B5EF4-FFF2-40B4-BE49-F238E27FC236}">
-                <a16:creationId xmlns:a16="http://schemas.microsoft.com/office/drawing/2014/main" id="{0A6EDBD2-CF9D-C418-5103-66841D030DC7}"/>
-              </a:ext>
-            </a:extLst>
-          </p:cNvPr>
-          <p:cNvSpPr>
-            <a:spLocks noGrp="1"/>
-          </p:cNvSpPr>
-          <p:nvPr>
-            <p:ph type="title"/>
-          </p:nvPr>
-        </p:nvSpPr>
-        <p:spPr/>
-        <p:txBody>
-          <a:bodyPr/>
-          <a:lstStyle/>
-          <a:p>
-            <a:r>
-              <a:rPr lang="en-US" dirty="0"/>
-              <a:t>Standard Model </a:t>
-            </a:r>
-            <a:r>
-              <a:rPr lang="en-US"/>
-              <a:t>of Particle Physics</a:t>
-            </a:r>
+          <p:cNvPr id="3" name="Content Placeholder 2">
+            <a:extLst>
+              <a:ext uri="{FF2B5EF4-FFF2-40B4-BE49-F238E27FC236}">
+                <a16:creationId xmlns:a16="http://schemas.microsoft.com/office/drawing/2014/main" id="{133185E4-2D81-D0B6-1538-D0309E1C74B5}"/>
+              </a:ext>
+            </a:extLst>
+          </p:cNvPr>
+          <p:cNvSpPr>
+            <a:spLocks noGrp="1"/>
+          </p:cNvSpPr>
+          <p:nvPr>
+            <p:ph idx="1"/>
+          </p:nvPr>
+        </p:nvSpPr>
+        <p:spPr>
+          <a:xfrm>
+            <a:off x="0" y="424544"/>
+            <a:ext cx="12192000" cy="5752420"/>
+          </a:xfrm>
+        </p:spPr>
+        <p:txBody>
+          <a:bodyPr/>
+          <a:lstStyle/>
+          <a:p>
             <a:endParaRPr lang="en-US" dirty="0"/>
-          </a:p>
-        </p:txBody>
-      </p:sp>
-      <p:sp>
-        <p:nvSpPr>
-          <p:cNvPr id="3" name="Content Placeholder 2">
-            <a:extLst>
-              <a:ext uri="{FF2B5EF4-FFF2-40B4-BE49-F238E27FC236}">
-                <a16:creationId xmlns:a16="http://schemas.microsoft.com/office/drawing/2014/main" id="{133185E4-2D81-D0B6-1538-D0309E1C74B5}"/>
-              </a:ext>
-            </a:extLst>
-          </p:cNvPr>
-          <p:cNvSpPr>
-            <a:spLocks noGrp="1"/>
-          </p:cNvSpPr>
-          <p:nvPr>
-            <p:ph idx="1"/>
-          </p:nvPr>
-        </p:nvSpPr>
-        <p:spPr/>
-        <p:txBody>
-          <a:bodyPr/>
-          <a:lstStyle/>
-          <a:p>
-            <a:endParaRPr lang="en-US"/>
           </a:p>
         </p:txBody>
       </p:sp>
@@ -11986,6 +13053,64 @@
               <a:t>3</a:t>
             </a:fld>
             <a:endParaRPr lang="en-US"/>
+          </a:p>
+        </p:txBody>
+      </p:sp>
+      <p:sp>
+        <p:nvSpPr>
+          <p:cNvPr id="8" name="Title 1">
+            <a:extLst>
+              <a:ext uri="{FF2B5EF4-FFF2-40B4-BE49-F238E27FC236}">
+                <a16:creationId xmlns:a16="http://schemas.microsoft.com/office/drawing/2014/main" id="{ACC302B8-E003-5FBF-8535-6F8D3B2E6A23}"/>
+              </a:ext>
+            </a:extLst>
+          </p:cNvPr>
+          <p:cNvSpPr txBox="1">
+            <a:spLocks/>
+          </p:cNvSpPr>
+          <p:nvPr/>
+        </p:nvSpPr>
+        <p:spPr>
+          <a:xfrm>
+            <a:off x="0" y="0"/>
+            <a:ext cx="10515600" cy="424543"/>
+          </a:xfrm>
+          <a:prstGeom prst="rect">
+            <a:avLst/>
+          </a:prstGeom>
+        </p:spPr>
+        <p:txBody>
+          <a:bodyPr vert="horz" lIns="91440" tIns="45720" rIns="91440" bIns="45720" rtlCol="0" anchor="ctr">
+            <a:normAutofit fontScale="90000" lnSpcReduction="10000"/>
+          </a:bodyPr>
+          <a:lstStyle>
+            <a:lvl1pPr algn="l" defTabSz="914400" rtl="0" eaLnBrk="1" latinLnBrk="0" hangingPunct="1">
+              <a:lnSpc>
+                <a:spcPct val="90000"/>
+              </a:lnSpc>
+              <a:spcBef>
+                <a:spcPct val="0"/>
+              </a:spcBef>
+              <a:buNone/>
+              <a:defRPr sz="4400" kern="1200">
+                <a:solidFill>
+                  <a:schemeClr val="tx1"/>
+                </a:solidFill>
+                <a:latin typeface="+mj-lt"/>
+                <a:ea typeface="+mj-ea"/>
+                <a:cs typeface="+mj-cs"/>
+              </a:defRPr>
+            </a:lvl1pPr>
+          </a:lstStyle>
+          <a:p>
+            <a:r>
+              <a:rPr lang="en-US" sz="2800" dirty="0">
+                <a:solidFill>
+                  <a:srgbClr val="C00000"/>
+                </a:solidFill>
+              </a:rPr>
+              <a:t>The Standard Model of Particle Physics</a:t>
+            </a:r>
           </a:p>
         </p:txBody>
       </p:sp>
@@ -12024,7 +13149,7 @@
           <p:cNvPr id="2" name="Title 1">
             <a:extLst>
               <a:ext uri="{FF2B5EF4-FFF2-40B4-BE49-F238E27FC236}">
-                <a16:creationId xmlns:a16="http://schemas.microsoft.com/office/drawing/2014/main" id="{939D62CE-5A2C-7C21-97D4-D629099398DD}"/>
+                <a16:creationId xmlns:a16="http://schemas.microsoft.com/office/drawing/2014/main" id="{CF447FA9-7EA7-7F99-9C52-F7F52DA585CD}"/>
               </a:ext>
             </a:extLst>
           </p:cNvPr>
@@ -12042,7 +13167,7 @@
           <a:p>
             <a:r>
               <a:rPr lang="en-US" dirty="0"/>
-              <a:t>Additional Approaches to Improve Argument</a:t>
+              <a:t>Full Sensitivity Study and Statistical Analysis</a:t>
             </a:r>
           </a:p>
         </p:txBody>
@@ -12052,7 +13177,7 @@
           <p:cNvPr id="3" name="Content Placeholder 2">
             <a:extLst>
               <a:ext uri="{FF2B5EF4-FFF2-40B4-BE49-F238E27FC236}">
-                <a16:creationId xmlns:a16="http://schemas.microsoft.com/office/drawing/2014/main" id="{618C2519-85BE-4DAD-8C77-85B9CC8DE9BC}"/>
+                <a16:creationId xmlns:a16="http://schemas.microsoft.com/office/drawing/2014/main" id="{3824709D-DC9C-AAFC-608C-7A940CC822B4}"/>
               </a:ext>
             </a:extLst>
           </p:cNvPr>
@@ -12077,7 +13202,7 @@
           <p:cNvPr id="5" name="Footer Placeholder 4">
             <a:extLst>
               <a:ext uri="{FF2B5EF4-FFF2-40B4-BE49-F238E27FC236}">
-                <a16:creationId xmlns:a16="http://schemas.microsoft.com/office/drawing/2014/main" id="{8F61427A-4F06-7FEB-E7EA-E5CC9BDD0714}"/>
+                <a16:creationId xmlns:a16="http://schemas.microsoft.com/office/drawing/2014/main" id="{E5287775-36FF-0178-266E-DFB8530F63C0}"/>
               </a:ext>
             </a:extLst>
           </p:cNvPr>
@@ -12105,7 +13230,7 @@
           <p:cNvPr id="6" name="Slide Number Placeholder 5">
             <a:extLst>
               <a:ext uri="{FF2B5EF4-FFF2-40B4-BE49-F238E27FC236}">
-                <a16:creationId xmlns:a16="http://schemas.microsoft.com/office/drawing/2014/main" id="{13119D7F-B668-3F0B-DE26-776CC8A1F293}"/>
+                <a16:creationId xmlns:a16="http://schemas.microsoft.com/office/drawing/2014/main" id="{C46A29E0-900E-A4E1-4F2F-A8EE2275A3BD}"/>
               </a:ext>
             </a:extLst>
           </p:cNvPr>
@@ -12129,10 +13254,68 @@
           </a:p>
         </p:txBody>
       </p:sp>
+      <p:sp>
+        <p:nvSpPr>
+          <p:cNvPr id="4" name="Title 1">
+            <a:extLst>
+              <a:ext uri="{FF2B5EF4-FFF2-40B4-BE49-F238E27FC236}">
+                <a16:creationId xmlns:a16="http://schemas.microsoft.com/office/drawing/2014/main" id="{FADF3DD6-B251-5C20-C427-B28A63FFE325}"/>
+              </a:ext>
+            </a:extLst>
+          </p:cNvPr>
+          <p:cNvSpPr txBox="1">
+            <a:spLocks/>
+          </p:cNvSpPr>
+          <p:nvPr/>
+        </p:nvSpPr>
+        <p:spPr>
+          <a:xfrm>
+            <a:off x="0" y="0"/>
+            <a:ext cx="10515600" cy="424543"/>
+          </a:xfrm>
+          <a:prstGeom prst="rect">
+            <a:avLst/>
+          </a:prstGeom>
+        </p:spPr>
+        <p:txBody>
+          <a:bodyPr vert="horz" lIns="91440" tIns="45720" rIns="91440" bIns="45720" rtlCol="0" anchor="ctr">
+            <a:normAutofit fontScale="90000" lnSpcReduction="10000"/>
+          </a:bodyPr>
+          <a:lstStyle>
+            <a:lvl1pPr algn="l" defTabSz="914400" rtl="0" eaLnBrk="1" latinLnBrk="0" hangingPunct="1">
+              <a:lnSpc>
+                <a:spcPct val="90000"/>
+              </a:lnSpc>
+              <a:spcBef>
+                <a:spcPct val="0"/>
+              </a:spcBef>
+              <a:buNone/>
+              <a:defRPr sz="4400" kern="1200">
+                <a:solidFill>
+                  <a:schemeClr val="tx1"/>
+                </a:solidFill>
+                <a:latin typeface="+mj-lt"/>
+                <a:ea typeface="+mj-ea"/>
+                <a:cs typeface="+mj-cs"/>
+              </a:defRPr>
+            </a:lvl1pPr>
+          </a:lstStyle>
+          <a:p>
+            <a:r>
+              <a:rPr lang="en-US" sz="2800" dirty="0">
+                <a:solidFill>
+                  <a:srgbClr val="C00000"/>
+                </a:solidFill>
+              </a:rPr>
+              <a:t>Full Sensitivity Study and Statistical Analysis</a:t>
+            </a:r>
+          </a:p>
+        </p:txBody>
+      </p:sp>
     </p:spTree>
     <p:extLst>
       <p:ext uri="{BB962C8B-B14F-4D97-AF65-F5344CB8AC3E}">
-        <p14:creationId xmlns:p14="http://schemas.microsoft.com/office/powerpoint/2010/main" val="140999145"/>
+        <p14:creationId xmlns:p14="http://schemas.microsoft.com/office/powerpoint/2010/main" val="3458479550"/>
       </p:ext>
     </p:extLst>
   </p:cSld>
@@ -12164,7 +13347,7 @@
           <p:cNvPr id="2" name="Title 1">
             <a:extLst>
               <a:ext uri="{FF2B5EF4-FFF2-40B4-BE49-F238E27FC236}">
-                <a16:creationId xmlns:a16="http://schemas.microsoft.com/office/drawing/2014/main" id="{BC8DCCEE-F6E7-0A1C-8C4B-C538663A3DE9}"/>
+                <a16:creationId xmlns:a16="http://schemas.microsoft.com/office/drawing/2014/main" id="{939D62CE-5A2C-7C21-97D4-D629099398DD}"/>
               </a:ext>
             </a:extLst>
           </p:cNvPr>
@@ -12182,7 +13365,7 @@
           <a:p>
             <a:r>
               <a:rPr lang="en-US" dirty="0"/>
-              <a:t>Additional Professional Development</a:t>
+              <a:t>Additional Approaches to Improve Argument</a:t>
             </a:r>
           </a:p>
         </p:txBody>
@@ -12192,7 +13375,7 @@
           <p:cNvPr id="3" name="Content Placeholder 2">
             <a:extLst>
               <a:ext uri="{FF2B5EF4-FFF2-40B4-BE49-F238E27FC236}">
-                <a16:creationId xmlns:a16="http://schemas.microsoft.com/office/drawing/2014/main" id="{5D0FB4EB-5C21-B80A-9106-2C474B5D434C}"/>
+                <a16:creationId xmlns:a16="http://schemas.microsoft.com/office/drawing/2014/main" id="{618C2519-85BE-4DAD-8C77-85B9CC8DE9BC}"/>
               </a:ext>
             </a:extLst>
           </p:cNvPr>
@@ -12217,7 +13400,7 @@
           <p:cNvPr id="5" name="Footer Placeholder 4">
             <a:extLst>
               <a:ext uri="{FF2B5EF4-FFF2-40B4-BE49-F238E27FC236}">
-                <a16:creationId xmlns:a16="http://schemas.microsoft.com/office/drawing/2014/main" id="{A3EB7D25-D2D3-AEC4-A220-42EB0919A220}"/>
+                <a16:creationId xmlns:a16="http://schemas.microsoft.com/office/drawing/2014/main" id="{8F61427A-4F06-7FEB-E7EA-E5CC9BDD0714}"/>
               </a:ext>
             </a:extLst>
           </p:cNvPr>
@@ -12245,7 +13428,7 @@
           <p:cNvPr id="6" name="Slide Number Placeholder 5">
             <a:extLst>
               <a:ext uri="{FF2B5EF4-FFF2-40B4-BE49-F238E27FC236}">
-                <a16:creationId xmlns:a16="http://schemas.microsoft.com/office/drawing/2014/main" id="{3C5E1946-A889-012A-0B0A-65380A21EF60}"/>
+                <a16:creationId xmlns:a16="http://schemas.microsoft.com/office/drawing/2014/main" id="{13119D7F-B668-3F0B-DE26-776CC8A1F293}"/>
               </a:ext>
             </a:extLst>
           </p:cNvPr>
@@ -12269,10 +13452,68 @@
           </a:p>
         </p:txBody>
       </p:sp>
+      <p:sp>
+        <p:nvSpPr>
+          <p:cNvPr id="4" name="Title 1">
+            <a:extLst>
+              <a:ext uri="{FF2B5EF4-FFF2-40B4-BE49-F238E27FC236}">
+                <a16:creationId xmlns:a16="http://schemas.microsoft.com/office/drawing/2014/main" id="{140EA959-CF40-261F-1F32-493B0FBD9415}"/>
+              </a:ext>
+            </a:extLst>
+          </p:cNvPr>
+          <p:cNvSpPr txBox="1">
+            <a:spLocks/>
+          </p:cNvSpPr>
+          <p:nvPr/>
+        </p:nvSpPr>
+        <p:spPr>
+          <a:xfrm>
+            <a:off x="0" y="0"/>
+            <a:ext cx="10515600" cy="424543"/>
+          </a:xfrm>
+          <a:prstGeom prst="rect">
+            <a:avLst/>
+          </a:prstGeom>
+        </p:spPr>
+        <p:txBody>
+          <a:bodyPr vert="horz" lIns="91440" tIns="45720" rIns="91440" bIns="45720" rtlCol="0" anchor="ctr">
+            <a:normAutofit fontScale="82500" lnSpcReduction="10000"/>
+          </a:bodyPr>
+          <a:lstStyle>
+            <a:lvl1pPr algn="l" defTabSz="914400" rtl="0" eaLnBrk="1" latinLnBrk="0" hangingPunct="1">
+              <a:lnSpc>
+                <a:spcPct val="90000"/>
+              </a:lnSpc>
+              <a:spcBef>
+                <a:spcPct val="0"/>
+              </a:spcBef>
+              <a:buNone/>
+              <a:defRPr sz="4400" kern="1200">
+                <a:solidFill>
+                  <a:schemeClr val="tx1"/>
+                </a:solidFill>
+                <a:latin typeface="+mj-lt"/>
+                <a:ea typeface="+mj-ea"/>
+                <a:cs typeface="+mj-cs"/>
+              </a:defRPr>
+            </a:lvl1pPr>
+          </a:lstStyle>
+          <a:p>
+            <a:r>
+              <a:rPr lang="en-US" sz="2800" dirty="0">
+                <a:solidFill>
+                  <a:srgbClr val="C00000"/>
+                </a:solidFill>
+              </a:rPr>
+              <a:t>Additional Approaches to Improve Sensitivity Estimate and Increase Event ID Accuracy</a:t>
+            </a:r>
+          </a:p>
+        </p:txBody>
+      </p:sp>
     </p:spTree>
     <p:extLst>
       <p:ext uri="{BB962C8B-B14F-4D97-AF65-F5344CB8AC3E}">
-        <p14:creationId xmlns:p14="http://schemas.microsoft.com/office/powerpoint/2010/main" val="358906638"/>
+        <p14:creationId xmlns:p14="http://schemas.microsoft.com/office/powerpoint/2010/main" val="140999145"/>
       </p:ext>
     </p:extLst>
   </p:cSld>
@@ -12304,7 +13545,7 @@
           <p:cNvPr id="2" name="Title 1">
             <a:extLst>
               <a:ext uri="{FF2B5EF4-FFF2-40B4-BE49-F238E27FC236}">
-                <a16:creationId xmlns:a16="http://schemas.microsoft.com/office/drawing/2014/main" id="{3AF9D99B-40BF-62FD-3259-626DC28F1232}"/>
+                <a16:creationId xmlns:a16="http://schemas.microsoft.com/office/drawing/2014/main" id="{BC8DCCEE-F6E7-0A1C-8C4B-C538663A3DE9}"/>
               </a:ext>
             </a:extLst>
           </p:cNvPr>
@@ -12322,7 +13563,7 @@
           <a:p>
             <a:r>
               <a:rPr lang="en-US" dirty="0"/>
-              <a:t>Summary</a:t>
+              <a:t>Additional Professional Development</a:t>
             </a:r>
           </a:p>
         </p:txBody>
@@ -12332,7 +13573,7 @@
           <p:cNvPr id="3" name="Content Placeholder 2">
             <a:extLst>
               <a:ext uri="{FF2B5EF4-FFF2-40B4-BE49-F238E27FC236}">
-                <a16:creationId xmlns:a16="http://schemas.microsoft.com/office/drawing/2014/main" id="{A7650A4E-F4CA-5280-6975-74FBD5529A02}"/>
+                <a16:creationId xmlns:a16="http://schemas.microsoft.com/office/drawing/2014/main" id="{5D0FB4EB-5C21-B80A-9106-2C474B5D434C}"/>
               </a:ext>
             </a:extLst>
           </p:cNvPr>
@@ -12354,10 +13595,10 @@
       </p:sp>
       <p:sp>
         <p:nvSpPr>
-          <p:cNvPr id="4" name="Footer Placeholder 3">
-            <a:extLst>
-              <a:ext uri="{FF2B5EF4-FFF2-40B4-BE49-F238E27FC236}">
-                <a16:creationId xmlns:a16="http://schemas.microsoft.com/office/drawing/2014/main" id="{31AD59E6-61A1-C07E-06CE-52367ABEF3B3}"/>
+          <p:cNvPr id="5" name="Footer Placeholder 4">
+            <a:extLst>
+              <a:ext uri="{FF2B5EF4-FFF2-40B4-BE49-F238E27FC236}">
+                <a16:creationId xmlns:a16="http://schemas.microsoft.com/office/drawing/2014/main" id="{A3EB7D25-D2D3-AEC4-A220-42EB0919A220}"/>
               </a:ext>
             </a:extLst>
           </p:cNvPr>
@@ -12382,10 +13623,10 @@
       </p:sp>
       <p:sp>
         <p:nvSpPr>
-          <p:cNvPr id="5" name="Slide Number Placeholder 4">
-            <a:extLst>
-              <a:ext uri="{FF2B5EF4-FFF2-40B4-BE49-F238E27FC236}">
-                <a16:creationId xmlns:a16="http://schemas.microsoft.com/office/drawing/2014/main" id="{D3338A63-4134-AA43-15EE-B4C3BFB93C37}"/>
+          <p:cNvPr id="6" name="Slide Number Placeholder 5">
+            <a:extLst>
+              <a:ext uri="{FF2B5EF4-FFF2-40B4-BE49-F238E27FC236}">
+                <a16:creationId xmlns:a16="http://schemas.microsoft.com/office/drawing/2014/main" id="{3C5E1946-A889-012A-0B0A-65380A21EF60}"/>
               </a:ext>
             </a:extLst>
           </p:cNvPr>
@@ -12409,10 +13650,68 @@
           </a:p>
         </p:txBody>
       </p:sp>
+      <p:sp>
+        <p:nvSpPr>
+          <p:cNvPr id="4" name="Title 1">
+            <a:extLst>
+              <a:ext uri="{FF2B5EF4-FFF2-40B4-BE49-F238E27FC236}">
+                <a16:creationId xmlns:a16="http://schemas.microsoft.com/office/drawing/2014/main" id="{7B6F1459-D94F-6704-9904-3D221FCD1C1A}"/>
+              </a:ext>
+            </a:extLst>
+          </p:cNvPr>
+          <p:cNvSpPr txBox="1">
+            <a:spLocks/>
+          </p:cNvSpPr>
+          <p:nvPr/>
+        </p:nvSpPr>
+        <p:spPr>
+          <a:xfrm>
+            <a:off x="0" y="0"/>
+            <a:ext cx="10515600" cy="424543"/>
+          </a:xfrm>
+          <a:prstGeom prst="rect">
+            <a:avLst/>
+          </a:prstGeom>
+        </p:spPr>
+        <p:txBody>
+          <a:bodyPr vert="horz" lIns="91440" tIns="45720" rIns="91440" bIns="45720" rtlCol="0" anchor="ctr">
+            <a:normAutofit fontScale="90000" lnSpcReduction="10000"/>
+          </a:bodyPr>
+          <a:lstStyle>
+            <a:lvl1pPr algn="l" defTabSz="914400" rtl="0" eaLnBrk="1" latinLnBrk="0" hangingPunct="1">
+              <a:lnSpc>
+                <a:spcPct val="90000"/>
+              </a:lnSpc>
+              <a:spcBef>
+                <a:spcPct val="0"/>
+              </a:spcBef>
+              <a:buNone/>
+              <a:defRPr sz="4400" kern="1200">
+                <a:solidFill>
+                  <a:schemeClr val="tx1"/>
+                </a:solidFill>
+                <a:latin typeface="+mj-lt"/>
+                <a:ea typeface="+mj-ea"/>
+                <a:cs typeface="+mj-cs"/>
+              </a:defRPr>
+            </a:lvl1pPr>
+          </a:lstStyle>
+          <a:p>
+            <a:r>
+              <a:rPr lang="en-US" sz="2800" dirty="0">
+                <a:solidFill>
+                  <a:srgbClr val="C00000"/>
+                </a:solidFill>
+              </a:rPr>
+              <a:t>Presentations and Description of Efforts to Collaboration and Beyond</a:t>
+            </a:r>
+          </a:p>
+        </p:txBody>
+      </p:sp>
     </p:spTree>
     <p:extLst>
       <p:ext uri="{BB962C8B-B14F-4D97-AF65-F5344CB8AC3E}">
-        <p14:creationId xmlns:p14="http://schemas.microsoft.com/office/powerpoint/2010/main" val="235195856"/>
+        <p14:creationId xmlns:p14="http://schemas.microsoft.com/office/powerpoint/2010/main" val="358906638"/>
       </p:ext>
     </p:extLst>
   </p:cSld>
@@ -12444,7 +13743,7 @@
           <p:cNvPr id="2" name="Title 1">
             <a:extLst>
               <a:ext uri="{FF2B5EF4-FFF2-40B4-BE49-F238E27FC236}">
-                <a16:creationId xmlns:a16="http://schemas.microsoft.com/office/drawing/2014/main" id="{68077B11-9A70-8920-F876-2027D8483193}"/>
+                <a16:creationId xmlns:a16="http://schemas.microsoft.com/office/drawing/2014/main" id="{3AF9D99B-40BF-62FD-3259-626DC28F1232}"/>
               </a:ext>
             </a:extLst>
           </p:cNvPr>
@@ -12462,25 +13761,25 @@
           <a:p>
             <a:r>
               <a:rPr lang="en-US" dirty="0"/>
-              <a:t>Thank you</a:t>
-            </a:r>
-          </a:p>
-        </p:txBody>
-      </p:sp>
-      <p:sp>
-        <p:nvSpPr>
-          <p:cNvPr id="3" name="Text Placeholder 2">
-            <a:extLst>
-              <a:ext uri="{FF2B5EF4-FFF2-40B4-BE49-F238E27FC236}">
-                <a16:creationId xmlns:a16="http://schemas.microsoft.com/office/drawing/2014/main" id="{2C72B878-C847-1AEA-D2C5-68F68A7D2F80}"/>
-              </a:ext>
-            </a:extLst>
-          </p:cNvPr>
-          <p:cNvSpPr>
-            <a:spLocks noGrp="1"/>
-          </p:cNvSpPr>
-          <p:nvPr>
-            <p:ph type="body" idx="1"/>
+              <a:t>Summary</a:t>
+            </a:r>
+          </a:p>
+        </p:txBody>
+      </p:sp>
+      <p:sp>
+        <p:nvSpPr>
+          <p:cNvPr id="3" name="Content Placeholder 2">
+            <a:extLst>
+              <a:ext uri="{FF2B5EF4-FFF2-40B4-BE49-F238E27FC236}">
+                <a16:creationId xmlns:a16="http://schemas.microsoft.com/office/drawing/2014/main" id="{A7650A4E-F4CA-5280-6975-74FBD5529A02}"/>
+              </a:ext>
+            </a:extLst>
+          </p:cNvPr>
+          <p:cNvSpPr>
+            <a:spLocks noGrp="1"/>
+          </p:cNvSpPr>
+          <p:nvPr>
+            <p:ph idx="1"/>
           </p:nvPr>
         </p:nvSpPr>
         <p:spPr/>
@@ -12494,10 +13793,10 @@
       </p:sp>
       <p:sp>
         <p:nvSpPr>
-          <p:cNvPr id="5" name="Footer Placeholder 4">
-            <a:extLst>
-              <a:ext uri="{FF2B5EF4-FFF2-40B4-BE49-F238E27FC236}">
-                <a16:creationId xmlns:a16="http://schemas.microsoft.com/office/drawing/2014/main" id="{27D7FEB2-6A47-3523-C991-2D1B073CEEE0}"/>
+          <p:cNvPr id="4" name="Footer Placeholder 3">
+            <a:extLst>
+              <a:ext uri="{FF2B5EF4-FFF2-40B4-BE49-F238E27FC236}">
+                <a16:creationId xmlns:a16="http://schemas.microsoft.com/office/drawing/2014/main" id="{31AD59E6-61A1-C07E-06CE-52367ABEF3B3}"/>
               </a:ext>
             </a:extLst>
           </p:cNvPr>
@@ -12522,10 +13821,10 @@
       </p:sp>
       <p:sp>
         <p:nvSpPr>
-          <p:cNvPr id="6" name="Slide Number Placeholder 5">
-            <a:extLst>
-              <a:ext uri="{FF2B5EF4-FFF2-40B4-BE49-F238E27FC236}">
-                <a16:creationId xmlns:a16="http://schemas.microsoft.com/office/drawing/2014/main" id="{29471287-A856-92BF-6CDA-2498001889C8}"/>
+          <p:cNvPr id="5" name="Slide Number Placeholder 4">
+            <a:extLst>
+              <a:ext uri="{FF2B5EF4-FFF2-40B4-BE49-F238E27FC236}">
+                <a16:creationId xmlns:a16="http://schemas.microsoft.com/office/drawing/2014/main" id="{D3338A63-4134-AA43-15EE-B4C3BFB93C37}"/>
               </a:ext>
             </a:extLst>
           </p:cNvPr>
@@ -12549,10 +13848,68 @@
           </a:p>
         </p:txBody>
       </p:sp>
+      <p:sp>
+        <p:nvSpPr>
+          <p:cNvPr id="6" name="Title 1">
+            <a:extLst>
+              <a:ext uri="{FF2B5EF4-FFF2-40B4-BE49-F238E27FC236}">
+                <a16:creationId xmlns:a16="http://schemas.microsoft.com/office/drawing/2014/main" id="{093738B7-A13F-DEA1-6318-3AF1AE6C6BB3}"/>
+              </a:ext>
+            </a:extLst>
+          </p:cNvPr>
+          <p:cNvSpPr txBox="1">
+            <a:spLocks/>
+          </p:cNvSpPr>
+          <p:nvPr/>
+        </p:nvSpPr>
+        <p:spPr>
+          <a:xfrm>
+            <a:off x="0" y="0"/>
+            <a:ext cx="10515600" cy="424543"/>
+          </a:xfrm>
+          <a:prstGeom prst="rect">
+            <a:avLst/>
+          </a:prstGeom>
+        </p:spPr>
+        <p:txBody>
+          <a:bodyPr vert="horz" lIns="91440" tIns="45720" rIns="91440" bIns="45720" rtlCol="0" anchor="ctr">
+            <a:normAutofit fontScale="90000" lnSpcReduction="10000"/>
+          </a:bodyPr>
+          <a:lstStyle>
+            <a:lvl1pPr algn="l" defTabSz="914400" rtl="0" eaLnBrk="1" latinLnBrk="0" hangingPunct="1">
+              <a:lnSpc>
+                <a:spcPct val="90000"/>
+              </a:lnSpc>
+              <a:spcBef>
+                <a:spcPct val="0"/>
+              </a:spcBef>
+              <a:buNone/>
+              <a:defRPr sz="4400" kern="1200">
+                <a:solidFill>
+                  <a:schemeClr val="tx1"/>
+                </a:solidFill>
+                <a:latin typeface="+mj-lt"/>
+                <a:ea typeface="+mj-ea"/>
+                <a:cs typeface="+mj-cs"/>
+              </a:defRPr>
+            </a:lvl1pPr>
+          </a:lstStyle>
+          <a:p>
+            <a:r>
+              <a:rPr lang="en-US" sz="2800" dirty="0">
+                <a:solidFill>
+                  <a:srgbClr val="C00000"/>
+                </a:solidFill>
+              </a:rPr>
+              <a:t>Summary</a:t>
+            </a:r>
+          </a:p>
+        </p:txBody>
+      </p:sp>
     </p:spTree>
     <p:extLst>
       <p:ext uri="{BB962C8B-B14F-4D97-AF65-F5344CB8AC3E}">
-        <p14:creationId xmlns:p14="http://schemas.microsoft.com/office/powerpoint/2010/main" val="1106972527"/>
+        <p14:creationId xmlns:p14="http://schemas.microsoft.com/office/powerpoint/2010/main" val="235195856"/>
       </p:ext>
     </p:extLst>
   </p:cSld>
@@ -12584,7 +13941,7 @@
           <p:cNvPr id="2" name="Title 1">
             <a:extLst>
               <a:ext uri="{FF2B5EF4-FFF2-40B4-BE49-F238E27FC236}">
-                <a16:creationId xmlns:a16="http://schemas.microsoft.com/office/drawing/2014/main" id="{5ADE0E4E-125A-776B-1C5F-6DE179C7C105}"/>
+                <a16:creationId xmlns:a16="http://schemas.microsoft.com/office/drawing/2014/main" id="{68077B11-9A70-8920-F876-2027D8483193}"/>
               </a:ext>
             </a:extLst>
           </p:cNvPr>
@@ -12602,7 +13959,7 @@
           <a:p>
             <a:r>
               <a:rPr lang="en-US" dirty="0"/>
-              <a:t>Backup Slides</a:t>
+              <a:t>Thank you</a:t>
             </a:r>
           </a:p>
         </p:txBody>
@@ -12612,7 +13969,7 @@
           <p:cNvPr id="3" name="Text Placeholder 2">
             <a:extLst>
               <a:ext uri="{FF2B5EF4-FFF2-40B4-BE49-F238E27FC236}">
-                <a16:creationId xmlns:a16="http://schemas.microsoft.com/office/drawing/2014/main" id="{5853537D-A747-5FEE-1BC4-A4A2D9CF97C1}"/>
+                <a16:creationId xmlns:a16="http://schemas.microsoft.com/office/drawing/2014/main" id="{2C72B878-C847-1AEA-D2C5-68F68A7D2F80}"/>
               </a:ext>
             </a:extLst>
           </p:cNvPr>
@@ -12637,7 +13994,7 @@
           <p:cNvPr id="5" name="Footer Placeholder 4">
             <a:extLst>
               <a:ext uri="{FF2B5EF4-FFF2-40B4-BE49-F238E27FC236}">
-                <a16:creationId xmlns:a16="http://schemas.microsoft.com/office/drawing/2014/main" id="{A673A0B7-DAAC-3511-91D2-731A96130F6D}"/>
+                <a16:creationId xmlns:a16="http://schemas.microsoft.com/office/drawing/2014/main" id="{27D7FEB2-6A47-3523-C991-2D1B073CEEE0}"/>
               </a:ext>
             </a:extLst>
           </p:cNvPr>
@@ -12665,7 +14022,7 @@
           <p:cNvPr id="6" name="Slide Number Placeholder 5">
             <a:extLst>
               <a:ext uri="{FF2B5EF4-FFF2-40B4-BE49-F238E27FC236}">
-                <a16:creationId xmlns:a16="http://schemas.microsoft.com/office/drawing/2014/main" id="{8E74B460-7284-923C-30C8-7F65F0901A2F}"/>
+                <a16:creationId xmlns:a16="http://schemas.microsoft.com/office/drawing/2014/main" id="{29471287-A856-92BF-6CDA-2498001889C8}"/>
               </a:ext>
             </a:extLst>
           </p:cNvPr>
@@ -12692,7 +14049,7 @@
     </p:spTree>
     <p:extLst>
       <p:ext uri="{BB962C8B-B14F-4D97-AF65-F5344CB8AC3E}">
-        <p14:creationId xmlns:p14="http://schemas.microsoft.com/office/powerpoint/2010/main" val="978507612"/>
+        <p14:creationId xmlns:p14="http://schemas.microsoft.com/office/powerpoint/2010/main" val="1106972527"/>
       </p:ext>
     </p:extLst>
   </p:cSld>
@@ -12724,7 +14081,7 @@
           <p:cNvPr id="2" name="Title 1">
             <a:extLst>
               <a:ext uri="{FF2B5EF4-FFF2-40B4-BE49-F238E27FC236}">
-                <a16:creationId xmlns:a16="http://schemas.microsoft.com/office/drawing/2014/main" id="{C3E6D5EB-46AB-09CF-64DA-308FFCFBEDCB}"/>
+                <a16:creationId xmlns:a16="http://schemas.microsoft.com/office/drawing/2014/main" id="{5ADE0E4E-125A-776B-1C5F-6DE179C7C105}"/>
               </a:ext>
             </a:extLst>
           </p:cNvPr>
@@ -12742,25 +14099,25 @@
           <a:p>
             <a:r>
               <a:rPr lang="en-US" dirty="0"/>
-              <a:t>Geometric Vertexing Description</a:t>
-            </a:r>
-          </a:p>
-        </p:txBody>
-      </p:sp>
-      <p:sp>
-        <p:nvSpPr>
-          <p:cNvPr id="3" name="Content Placeholder 2">
-            <a:extLst>
-              <a:ext uri="{FF2B5EF4-FFF2-40B4-BE49-F238E27FC236}">
-                <a16:creationId xmlns:a16="http://schemas.microsoft.com/office/drawing/2014/main" id="{BB1355BB-5C5E-482A-9ABD-AD566D995D03}"/>
-              </a:ext>
-            </a:extLst>
-          </p:cNvPr>
-          <p:cNvSpPr>
-            <a:spLocks noGrp="1"/>
-          </p:cNvSpPr>
-          <p:nvPr>
-            <p:ph idx="1"/>
+              <a:t>Backup Slides</a:t>
+            </a:r>
+          </a:p>
+        </p:txBody>
+      </p:sp>
+      <p:sp>
+        <p:nvSpPr>
+          <p:cNvPr id="3" name="Text Placeholder 2">
+            <a:extLst>
+              <a:ext uri="{FF2B5EF4-FFF2-40B4-BE49-F238E27FC236}">
+                <a16:creationId xmlns:a16="http://schemas.microsoft.com/office/drawing/2014/main" id="{5853537D-A747-5FEE-1BC4-A4A2D9CF97C1}"/>
+              </a:ext>
+            </a:extLst>
+          </p:cNvPr>
+          <p:cNvSpPr>
+            <a:spLocks noGrp="1"/>
+          </p:cNvSpPr>
+          <p:nvPr>
+            <p:ph type="body" idx="1"/>
           </p:nvPr>
         </p:nvSpPr>
         <p:spPr/>
@@ -12777,7 +14134,7 @@
           <p:cNvPr id="5" name="Footer Placeholder 4">
             <a:extLst>
               <a:ext uri="{FF2B5EF4-FFF2-40B4-BE49-F238E27FC236}">
-                <a16:creationId xmlns:a16="http://schemas.microsoft.com/office/drawing/2014/main" id="{474E05CD-2061-3B5C-B390-F2E364599150}"/>
+                <a16:creationId xmlns:a16="http://schemas.microsoft.com/office/drawing/2014/main" id="{A673A0B7-DAAC-3511-91D2-731A96130F6D}"/>
               </a:ext>
             </a:extLst>
           </p:cNvPr>
@@ -12805,7 +14162,7 @@
           <p:cNvPr id="6" name="Slide Number Placeholder 5">
             <a:extLst>
               <a:ext uri="{FF2B5EF4-FFF2-40B4-BE49-F238E27FC236}">
-                <a16:creationId xmlns:a16="http://schemas.microsoft.com/office/drawing/2014/main" id="{F4294CDF-C221-79CC-574E-C3DCDAA66E65}"/>
+                <a16:creationId xmlns:a16="http://schemas.microsoft.com/office/drawing/2014/main" id="{8E74B460-7284-923C-30C8-7F65F0901A2F}"/>
               </a:ext>
             </a:extLst>
           </p:cNvPr>
@@ -12832,7 +14189,7 @@
     </p:spTree>
     <p:extLst>
       <p:ext uri="{BB962C8B-B14F-4D97-AF65-F5344CB8AC3E}">
-        <p14:creationId xmlns:p14="http://schemas.microsoft.com/office/powerpoint/2010/main" val="4135552891"/>
+        <p14:creationId xmlns:p14="http://schemas.microsoft.com/office/powerpoint/2010/main" val="978507612"/>
       </p:ext>
     </p:extLst>
   </p:cSld>
@@ -12864,7 +14221,7 @@
           <p:cNvPr id="2" name="Title 1">
             <a:extLst>
               <a:ext uri="{FF2B5EF4-FFF2-40B4-BE49-F238E27FC236}">
-                <a16:creationId xmlns:a16="http://schemas.microsoft.com/office/drawing/2014/main" id="{B5F2E749-E201-3232-DAB3-1F82C7BD869E}"/>
+                <a16:creationId xmlns:a16="http://schemas.microsoft.com/office/drawing/2014/main" id="{C3E6D5EB-46AB-09CF-64DA-308FFCFBEDCB}"/>
               </a:ext>
             </a:extLst>
           </p:cNvPr>
@@ -12882,7 +14239,7 @@
           <a:p>
             <a:r>
               <a:rPr lang="en-US" dirty="0"/>
-              <a:t>Muon-Lifetime Considerations</a:t>
+              <a:t>Geometric Vertexing Description</a:t>
             </a:r>
           </a:p>
         </p:txBody>
@@ -12892,7 +14249,7 @@
           <p:cNvPr id="3" name="Content Placeholder 2">
             <a:extLst>
               <a:ext uri="{FF2B5EF4-FFF2-40B4-BE49-F238E27FC236}">
-                <a16:creationId xmlns:a16="http://schemas.microsoft.com/office/drawing/2014/main" id="{9E0A0A40-ADB9-7214-8562-5917CC41F151}"/>
+                <a16:creationId xmlns:a16="http://schemas.microsoft.com/office/drawing/2014/main" id="{BB1355BB-5C5E-482A-9ABD-AD566D995D03}"/>
               </a:ext>
             </a:extLst>
           </p:cNvPr>
@@ -12917,7 +14274,7 @@
           <p:cNvPr id="5" name="Footer Placeholder 4">
             <a:extLst>
               <a:ext uri="{FF2B5EF4-FFF2-40B4-BE49-F238E27FC236}">
-                <a16:creationId xmlns:a16="http://schemas.microsoft.com/office/drawing/2014/main" id="{E44B171F-6537-D2FD-07BF-BE5BF1FF3214}"/>
+                <a16:creationId xmlns:a16="http://schemas.microsoft.com/office/drawing/2014/main" id="{474E05CD-2061-3B5C-B390-F2E364599150}"/>
               </a:ext>
             </a:extLst>
           </p:cNvPr>
@@ -12945,7 +14302,7 @@
           <p:cNvPr id="6" name="Slide Number Placeholder 5">
             <a:extLst>
               <a:ext uri="{FF2B5EF4-FFF2-40B4-BE49-F238E27FC236}">
-                <a16:creationId xmlns:a16="http://schemas.microsoft.com/office/drawing/2014/main" id="{FA00A4A5-DAA8-D675-F330-E5A537364A98}"/>
+                <a16:creationId xmlns:a16="http://schemas.microsoft.com/office/drawing/2014/main" id="{F4294CDF-C221-79CC-574E-C3DCDAA66E65}"/>
               </a:ext>
             </a:extLst>
           </p:cNvPr>
@@ -12966,6 +14323,262 @@
               <a:t>36</a:t>
             </a:fld>
             <a:endParaRPr lang="en-US"/>
+          </a:p>
+        </p:txBody>
+      </p:sp>
+      <p:sp>
+        <p:nvSpPr>
+          <p:cNvPr id="4" name="Title 1">
+            <a:extLst>
+              <a:ext uri="{FF2B5EF4-FFF2-40B4-BE49-F238E27FC236}">
+                <a16:creationId xmlns:a16="http://schemas.microsoft.com/office/drawing/2014/main" id="{2D7D70CF-911E-C5FB-6BB0-4BB7425647C4}"/>
+              </a:ext>
+            </a:extLst>
+          </p:cNvPr>
+          <p:cNvSpPr txBox="1">
+            <a:spLocks/>
+          </p:cNvSpPr>
+          <p:nvPr/>
+        </p:nvSpPr>
+        <p:spPr>
+          <a:xfrm>
+            <a:off x="0" y="0"/>
+            <a:ext cx="10515600" cy="424543"/>
+          </a:xfrm>
+          <a:prstGeom prst="rect">
+            <a:avLst/>
+          </a:prstGeom>
+        </p:spPr>
+        <p:txBody>
+          <a:bodyPr vert="horz" lIns="91440" tIns="45720" rIns="91440" bIns="45720" rtlCol="0" anchor="ctr">
+            <a:normAutofit fontScale="90000" lnSpcReduction="10000"/>
+          </a:bodyPr>
+          <a:lstStyle>
+            <a:lvl1pPr algn="l" defTabSz="914400" rtl="0" eaLnBrk="1" latinLnBrk="0" hangingPunct="1">
+              <a:lnSpc>
+                <a:spcPct val="90000"/>
+              </a:lnSpc>
+              <a:spcBef>
+                <a:spcPct val="0"/>
+              </a:spcBef>
+              <a:buNone/>
+              <a:defRPr sz="4400" kern="1200">
+                <a:solidFill>
+                  <a:schemeClr val="tx1"/>
+                </a:solidFill>
+                <a:latin typeface="+mj-lt"/>
+                <a:ea typeface="+mj-ea"/>
+                <a:cs typeface="+mj-cs"/>
+              </a:defRPr>
+            </a:lvl1pPr>
+          </a:lstStyle>
+          <a:p>
+            <a:r>
+              <a:rPr lang="en-US" sz="2800" dirty="0">
+                <a:solidFill>
+                  <a:srgbClr val="C00000"/>
+                </a:solidFill>
+              </a:rPr>
+              <a:t>Geometric Vertexing Description and Derivation</a:t>
+            </a:r>
+          </a:p>
+        </p:txBody>
+      </p:sp>
+    </p:spTree>
+    <p:extLst>
+      <p:ext uri="{BB962C8B-B14F-4D97-AF65-F5344CB8AC3E}">
+        <p14:creationId xmlns:p14="http://schemas.microsoft.com/office/powerpoint/2010/main" val="4135552891"/>
+      </p:ext>
+    </p:extLst>
+  </p:cSld>
+  <p:clrMapOvr>
+    <a:masterClrMapping/>
+  </p:clrMapOvr>
+</p:sld>
+</file>
+
+<file path=ppt/slides/slide37.xml><?xml version="1.0" encoding="utf-8"?>
+<p:sld xmlns:a="http://schemas.openxmlformats.org/drawingml/2006/main" xmlns:r="http://schemas.openxmlformats.org/officeDocument/2006/relationships" xmlns:p="http://schemas.openxmlformats.org/presentationml/2006/main">
+  <p:cSld>
+    <p:spTree>
+      <p:nvGrpSpPr>
+        <p:cNvPr id="1" name=""/>
+        <p:cNvGrpSpPr/>
+        <p:nvPr/>
+      </p:nvGrpSpPr>
+      <p:grpSpPr>
+        <a:xfrm>
+          <a:off x="0" y="0"/>
+          <a:ext cx="0" cy="0"/>
+          <a:chOff x="0" y="0"/>
+          <a:chExt cx="0" cy="0"/>
+        </a:xfrm>
+      </p:grpSpPr>
+      <p:sp>
+        <p:nvSpPr>
+          <p:cNvPr id="2" name="Title 1">
+            <a:extLst>
+              <a:ext uri="{FF2B5EF4-FFF2-40B4-BE49-F238E27FC236}">
+                <a16:creationId xmlns:a16="http://schemas.microsoft.com/office/drawing/2014/main" id="{B5F2E749-E201-3232-DAB3-1F82C7BD869E}"/>
+              </a:ext>
+            </a:extLst>
+          </p:cNvPr>
+          <p:cNvSpPr>
+            <a:spLocks noGrp="1"/>
+          </p:cNvSpPr>
+          <p:nvPr>
+            <p:ph type="title"/>
+          </p:nvPr>
+        </p:nvSpPr>
+        <p:spPr/>
+        <p:txBody>
+          <a:bodyPr/>
+          <a:lstStyle/>
+          <a:p>
+            <a:r>
+              <a:rPr lang="en-US" dirty="0"/>
+              <a:t>Muon-Lifetime Considerations</a:t>
+            </a:r>
+          </a:p>
+        </p:txBody>
+      </p:sp>
+      <p:sp>
+        <p:nvSpPr>
+          <p:cNvPr id="3" name="Content Placeholder 2">
+            <a:extLst>
+              <a:ext uri="{FF2B5EF4-FFF2-40B4-BE49-F238E27FC236}">
+                <a16:creationId xmlns:a16="http://schemas.microsoft.com/office/drawing/2014/main" id="{9E0A0A40-ADB9-7214-8562-5917CC41F151}"/>
+              </a:ext>
+            </a:extLst>
+          </p:cNvPr>
+          <p:cNvSpPr>
+            <a:spLocks noGrp="1"/>
+          </p:cNvSpPr>
+          <p:nvPr>
+            <p:ph idx="1"/>
+          </p:nvPr>
+        </p:nvSpPr>
+        <p:spPr/>
+        <p:txBody>
+          <a:bodyPr/>
+          <a:lstStyle/>
+          <a:p>
+            <a:endParaRPr lang="en-US"/>
+          </a:p>
+        </p:txBody>
+      </p:sp>
+      <p:sp>
+        <p:nvSpPr>
+          <p:cNvPr id="5" name="Footer Placeholder 4">
+            <a:extLst>
+              <a:ext uri="{FF2B5EF4-FFF2-40B4-BE49-F238E27FC236}">
+                <a16:creationId xmlns:a16="http://schemas.microsoft.com/office/drawing/2014/main" id="{E44B171F-6537-D2FD-07BF-BE5BF1FF3214}"/>
+              </a:ext>
+            </a:extLst>
+          </p:cNvPr>
+          <p:cNvSpPr>
+            <a:spLocks noGrp="1"/>
+          </p:cNvSpPr>
+          <p:nvPr>
+            <p:ph type="ftr" sz="quarter" idx="11"/>
+          </p:nvPr>
+        </p:nvSpPr>
+        <p:spPr/>
+        <p:txBody>
+          <a:bodyPr/>
+          <a:lstStyle/>
+          <a:p>
+            <a:r>
+              <a:rPr lang="en-US"/>
+              <a:t>Boldy Sensitivity Study Mu2e</a:t>
+            </a:r>
+          </a:p>
+        </p:txBody>
+      </p:sp>
+      <p:sp>
+        <p:nvSpPr>
+          <p:cNvPr id="6" name="Slide Number Placeholder 5">
+            <a:extLst>
+              <a:ext uri="{FF2B5EF4-FFF2-40B4-BE49-F238E27FC236}">
+                <a16:creationId xmlns:a16="http://schemas.microsoft.com/office/drawing/2014/main" id="{FA00A4A5-DAA8-D675-F330-E5A537364A98}"/>
+              </a:ext>
+            </a:extLst>
+          </p:cNvPr>
+          <p:cNvSpPr>
+            <a:spLocks noGrp="1"/>
+          </p:cNvSpPr>
+          <p:nvPr>
+            <p:ph type="sldNum" sz="quarter" idx="12"/>
+          </p:nvPr>
+        </p:nvSpPr>
+        <p:spPr/>
+        <p:txBody>
+          <a:bodyPr/>
+          <a:lstStyle/>
+          <a:p>
+            <a:fld id="{C0E0CB54-3DBF-E947-906E-85E307CF7971}" type="slidenum">
+              <a:rPr lang="en-US" smtClean="0"/>
+              <a:t>37</a:t>
+            </a:fld>
+            <a:endParaRPr lang="en-US"/>
+          </a:p>
+        </p:txBody>
+      </p:sp>
+      <p:sp>
+        <p:nvSpPr>
+          <p:cNvPr id="4" name="Title 1">
+            <a:extLst>
+              <a:ext uri="{FF2B5EF4-FFF2-40B4-BE49-F238E27FC236}">
+                <a16:creationId xmlns:a16="http://schemas.microsoft.com/office/drawing/2014/main" id="{C8518CAF-DE97-FA65-0F07-668E1C32A45F}"/>
+              </a:ext>
+            </a:extLst>
+          </p:cNvPr>
+          <p:cNvSpPr txBox="1">
+            <a:spLocks/>
+          </p:cNvSpPr>
+          <p:nvPr/>
+        </p:nvSpPr>
+        <p:spPr>
+          <a:xfrm>
+            <a:off x="0" y="0"/>
+            <a:ext cx="10515600" cy="424543"/>
+          </a:xfrm>
+          <a:prstGeom prst="rect">
+            <a:avLst/>
+          </a:prstGeom>
+        </p:spPr>
+        <p:txBody>
+          <a:bodyPr vert="horz" lIns="91440" tIns="45720" rIns="91440" bIns="45720" rtlCol="0" anchor="ctr">
+            <a:normAutofit fontScale="90000" lnSpcReduction="10000"/>
+          </a:bodyPr>
+          <a:lstStyle>
+            <a:lvl1pPr algn="l" defTabSz="914400" rtl="0" eaLnBrk="1" latinLnBrk="0" hangingPunct="1">
+              <a:lnSpc>
+                <a:spcPct val="90000"/>
+              </a:lnSpc>
+              <a:spcBef>
+                <a:spcPct val="0"/>
+              </a:spcBef>
+              <a:buNone/>
+              <a:defRPr sz="4400" kern="1200">
+                <a:solidFill>
+                  <a:schemeClr val="tx1"/>
+                </a:solidFill>
+                <a:latin typeface="+mj-lt"/>
+                <a:ea typeface="+mj-ea"/>
+                <a:cs typeface="+mj-cs"/>
+              </a:defRPr>
+            </a:lvl1pPr>
+          </a:lstStyle>
+          <a:p>
+            <a:r>
+              <a:rPr lang="en-US" sz="2800" dirty="0">
+                <a:solidFill>
+                  <a:srgbClr val="C00000"/>
+                </a:solidFill>
+              </a:rPr>
+              <a:t>Muon Lifetime Consideration and Calculation </a:t>
+            </a:r>
           </a:p>
         </p:txBody>
       </p:sp>
@@ -12982,7 +14595,7 @@
 </p:sld>
 </file>
 
-<file path=ppt/slides/slide37.xml><?xml version="1.0" encoding="utf-8"?>
+<file path=ppt/slides/slide38.xml><?xml version="1.0" encoding="utf-8"?>
 <p:sld xmlns:a="http://schemas.openxmlformats.org/drawingml/2006/main" xmlns:r="http://schemas.openxmlformats.org/officeDocument/2006/relationships" xmlns:p="http://schemas.openxmlformats.org/presentationml/2006/main">
   <p:cSld>
     <p:spTree>
@@ -13328,7 +14941,7 @@
           <a:p>
             <a:fld id="{C0E0CB54-3DBF-E947-906E-85E307CF7971}" type="slidenum">
               <a:rPr lang="en-US" smtClean="0"/>
-              <a:t>37</a:t>
+              <a:t>38</a:t>
             </a:fld>
             <a:endParaRPr lang="en-US" dirty="0"/>
           </a:p>
@@ -13497,169 +15110,6 @@
 </p:sld>
 </file>
 
-<file path=ppt/slides/slide38.xml><?xml version="1.0" encoding="utf-8"?>
-<p:sld xmlns:a="http://schemas.openxmlformats.org/drawingml/2006/main" xmlns:r="http://schemas.openxmlformats.org/officeDocument/2006/relationships" xmlns:p="http://schemas.openxmlformats.org/presentationml/2006/main">
-  <p:cSld>
-    <p:spTree>
-      <p:nvGrpSpPr>
-        <p:cNvPr id="1" name=""/>
-        <p:cNvGrpSpPr/>
-        <p:nvPr/>
-      </p:nvGrpSpPr>
-      <p:grpSpPr>
-        <a:xfrm>
-          <a:off x="0" y="0"/>
-          <a:ext cx="0" cy="0"/>
-          <a:chOff x="0" y="0"/>
-          <a:chExt cx="0" cy="0"/>
-        </a:xfrm>
-      </p:grpSpPr>
-      <p:sp>
-        <p:nvSpPr>
-          <p:cNvPr id="3" name="Content Placeholder 2">
-            <a:extLst>
-              <a:ext uri="{FF2B5EF4-FFF2-40B4-BE49-F238E27FC236}">
-                <a16:creationId xmlns:a16="http://schemas.microsoft.com/office/drawing/2014/main" id="{5F9290EE-BEC6-0A6E-2D4B-BA3D8AFA5182}"/>
-              </a:ext>
-            </a:extLst>
-          </p:cNvPr>
-          <p:cNvSpPr>
-            <a:spLocks noGrp="1"/>
-          </p:cNvSpPr>
-          <p:nvPr>
-            <p:ph idx="1"/>
-          </p:nvPr>
-        </p:nvSpPr>
-        <p:spPr>
-          <a:xfrm>
-            <a:off x="0" y="574765"/>
-            <a:ext cx="12192000" cy="5602197"/>
-          </a:xfrm>
-        </p:spPr>
-        <p:txBody>
-          <a:bodyPr/>
-          <a:lstStyle/>
-          <a:p>
-            <a:r>
-              <a:rPr lang="en-US" dirty="0"/>
-              <a:t>Values to use in the calculation:</a:t>
-            </a:r>
-          </a:p>
-          <a:p>
-            <a:pPr lvl="1"/>
-            <a:endParaRPr lang="en-US" dirty="0"/>
-          </a:p>
-        </p:txBody>
-      </p:sp>
-      <p:sp>
-        <p:nvSpPr>
-          <p:cNvPr id="4" name="Footer Placeholder 3">
-            <a:extLst>
-              <a:ext uri="{FF2B5EF4-FFF2-40B4-BE49-F238E27FC236}">
-                <a16:creationId xmlns:a16="http://schemas.microsoft.com/office/drawing/2014/main" id="{A1AA0C7B-4F8E-1302-0E82-E9D410A19CDF}"/>
-              </a:ext>
-            </a:extLst>
-          </p:cNvPr>
-          <p:cNvSpPr>
-            <a:spLocks noGrp="1"/>
-          </p:cNvSpPr>
-          <p:nvPr>
-            <p:ph type="ftr" sz="quarter" idx="11"/>
-          </p:nvPr>
-        </p:nvSpPr>
-        <p:spPr/>
-        <p:txBody>
-          <a:bodyPr/>
-          <a:lstStyle/>
-          <a:p>
-            <a:r>
-              <a:rPr lang="en-US"/>
-              <a:t>Boldy Sensitivity Study Mu2e</a:t>
-            </a:r>
-          </a:p>
-        </p:txBody>
-      </p:sp>
-      <p:sp>
-        <p:nvSpPr>
-          <p:cNvPr id="5" name="Slide Number Placeholder 4">
-            <a:extLst>
-              <a:ext uri="{FF2B5EF4-FFF2-40B4-BE49-F238E27FC236}">
-                <a16:creationId xmlns:a16="http://schemas.microsoft.com/office/drawing/2014/main" id="{9EED8746-9439-C22E-5A2C-4A7E7556C208}"/>
-              </a:ext>
-            </a:extLst>
-          </p:cNvPr>
-          <p:cNvSpPr>
-            <a:spLocks noGrp="1"/>
-          </p:cNvSpPr>
-          <p:nvPr>
-            <p:ph type="sldNum" sz="quarter" idx="12"/>
-          </p:nvPr>
-        </p:nvSpPr>
-        <p:spPr/>
-        <p:txBody>
-          <a:bodyPr/>
-          <a:lstStyle/>
-          <a:p>
-            <a:fld id="{C0E0CB54-3DBF-E947-906E-85E307CF7971}" type="slidenum">
-              <a:rPr lang="en-US" smtClean="0"/>
-              <a:t>38</a:t>
-            </a:fld>
-            <a:endParaRPr lang="en-US"/>
-          </a:p>
-        </p:txBody>
-      </p:sp>
-      <p:sp>
-        <p:nvSpPr>
-          <p:cNvPr id="6" name="Title 1">
-            <a:extLst>
-              <a:ext uri="{FF2B5EF4-FFF2-40B4-BE49-F238E27FC236}">
-                <a16:creationId xmlns:a16="http://schemas.microsoft.com/office/drawing/2014/main" id="{9AE1F9AE-A6BD-D5CA-2031-9DD933346201}"/>
-              </a:ext>
-            </a:extLst>
-          </p:cNvPr>
-          <p:cNvSpPr>
-            <a:spLocks noGrp="1"/>
-          </p:cNvSpPr>
-          <p:nvPr>
-            <p:ph type="title"/>
-          </p:nvPr>
-        </p:nvSpPr>
-        <p:spPr>
-          <a:xfrm>
-            <a:off x="0" y="0"/>
-            <a:ext cx="10515600" cy="424543"/>
-          </a:xfrm>
-        </p:spPr>
-        <p:txBody>
-          <a:bodyPr>
-            <a:normAutofit fontScale="90000"/>
-          </a:bodyPr>
-          <a:lstStyle/>
-          <a:p>
-            <a:r>
-              <a:rPr lang="en-US" sz="2800" dirty="0">
-                <a:solidFill>
-                  <a:srgbClr val="C00000"/>
-                </a:solidFill>
-              </a:rPr>
-              <a:t>Back-of-Envelope Wall Clock Hours Prediction (Pt. 1)</a:t>
-            </a:r>
-          </a:p>
-        </p:txBody>
-      </p:sp>
-    </p:spTree>
-    <p:extLst>
-      <p:ext uri="{BB962C8B-B14F-4D97-AF65-F5344CB8AC3E}">
-        <p14:creationId xmlns:p14="http://schemas.microsoft.com/office/powerpoint/2010/main" val="3464625412"/>
-      </p:ext>
-    </p:extLst>
-  </p:cSld>
-  <p:clrMapOvr>
-    <a:masterClrMapping/>
-  </p:clrMapOvr>
-</p:sld>
-</file>
-
 <file path=ppt/slides/slide39.xml><?xml version="1.0" encoding="utf-8"?>
 <p:sld xmlns:a="http://schemas.openxmlformats.org/drawingml/2006/main" xmlns:r="http://schemas.openxmlformats.org/officeDocument/2006/relationships" xmlns:p="http://schemas.openxmlformats.org/presentationml/2006/main">
   <p:cSld>
@@ -13679,10 +15129,104 @@
       </p:grpSpPr>
       <p:sp>
         <p:nvSpPr>
-          <p:cNvPr id="2" name="Title 1">
-            <a:extLst>
-              <a:ext uri="{FF2B5EF4-FFF2-40B4-BE49-F238E27FC236}">
-                <a16:creationId xmlns:a16="http://schemas.microsoft.com/office/drawing/2014/main" id="{6F78897F-29EC-F688-9496-68ADF18BF5C1}"/>
+          <p:cNvPr id="3" name="Content Placeholder 2">
+            <a:extLst>
+              <a:ext uri="{FF2B5EF4-FFF2-40B4-BE49-F238E27FC236}">
+                <a16:creationId xmlns:a16="http://schemas.microsoft.com/office/drawing/2014/main" id="{5F9290EE-BEC6-0A6E-2D4B-BA3D8AFA5182}"/>
+              </a:ext>
+            </a:extLst>
+          </p:cNvPr>
+          <p:cNvSpPr>
+            <a:spLocks noGrp="1"/>
+          </p:cNvSpPr>
+          <p:nvPr>
+            <p:ph idx="1"/>
+          </p:nvPr>
+        </p:nvSpPr>
+        <p:spPr>
+          <a:xfrm>
+            <a:off x="0" y="574765"/>
+            <a:ext cx="12192000" cy="5602197"/>
+          </a:xfrm>
+        </p:spPr>
+        <p:txBody>
+          <a:bodyPr/>
+          <a:lstStyle/>
+          <a:p>
+            <a:r>
+              <a:rPr lang="en-US" dirty="0"/>
+              <a:t>Values to use in the calculation:</a:t>
+            </a:r>
+          </a:p>
+          <a:p>
+            <a:pPr lvl="1"/>
+            <a:endParaRPr lang="en-US" dirty="0"/>
+          </a:p>
+        </p:txBody>
+      </p:sp>
+      <p:sp>
+        <p:nvSpPr>
+          <p:cNvPr id="4" name="Footer Placeholder 3">
+            <a:extLst>
+              <a:ext uri="{FF2B5EF4-FFF2-40B4-BE49-F238E27FC236}">
+                <a16:creationId xmlns:a16="http://schemas.microsoft.com/office/drawing/2014/main" id="{A1AA0C7B-4F8E-1302-0E82-E9D410A19CDF}"/>
+              </a:ext>
+            </a:extLst>
+          </p:cNvPr>
+          <p:cNvSpPr>
+            <a:spLocks noGrp="1"/>
+          </p:cNvSpPr>
+          <p:nvPr>
+            <p:ph type="ftr" sz="quarter" idx="11"/>
+          </p:nvPr>
+        </p:nvSpPr>
+        <p:spPr/>
+        <p:txBody>
+          <a:bodyPr/>
+          <a:lstStyle/>
+          <a:p>
+            <a:r>
+              <a:rPr lang="en-US"/>
+              <a:t>Boldy Sensitivity Study Mu2e</a:t>
+            </a:r>
+          </a:p>
+        </p:txBody>
+      </p:sp>
+      <p:sp>
+        <p:nvSpPr>
+          <p:cNvPr id="5" name="Slide Number Placeholder 4">
+            <a:extLst>
+              <a:ext uri="{FF2B5EF4-FFF2-40B4-BE49-F238E27FC236}">
+                <a16:creationId xmlns:a16="http://schemas.microsoft.com/office/drawing/2014/main" id="{9EED8746-9439-C22E-5A2C-4A7E7556C208}"/>
+              </a:ext>
+            </a:extLst>
+          </p:cNvPr>
+          <p:cNvSpPr>
+            <a:spLocks noGrp="1"/>
+          </p:cNvSpPr>
+          <p:nvPr>
+            <p:ph type="sldNum" sz="quarter" idx="12"/>
+          </p:nvPr>
+        </p:nvSpPr>
+        <p:spPr/>
+        <p:txBody>
+          <a:bodyPr/>
+          <a:lstStyle/>
+          <a:p>
+            <a:fld id="{C0E0CB54-3DBF-E947-906E-85E307CF7971}" type="slidenum">
+              <a:rPr lang="en-US" smtClean="0"/>
+              <a:t>39</a:t>
+            </a:fld>
+            <a:endParaRPr lang="en-US"/>
+          </a:p>
+        </p:txBody>
+      </p:sp>
+      <p:sp>
+        <p:nvSpPr>
+          <p:cNvPr id="6" name="Title 1">
+            <a:extLst>
+              <a:ext uri="{FF2B5EF4-FFF2-40B4-BE49-F238E27FC236}">
+                <a16:creationId xmlns:a16="http://schemas.microsoft.com/office/drawing/2014/main" id="{9AE1F9AE-A6BD-D5CA-2031-9DD933346201}"/>
               </a:ext>
             </a:extLst>
           </p:cNvPr>
@@ -13693,20 +15237,236 @@
             <p:ph type="title"/>
           </p:nvPr>
         </p:nvSpPr>
-        <p:spPr/>
-        <p:txBody>
-          <a:bodyPr/>
-          <a:lstStyle/>
-          <a:p>
-            <a:r>
-              <a:rPr lang="en-US" dirty="0"/>
-              <a:t>Magnetic Mirror Effect Simple Derivation</a:t>
-            </a:r>
-          </a:p>
-        </p:txBody>
-      </p:sp>
-      <mc:AlternateContent xmlns:mc="http://schemas.openxmlformats.org/markup-compatibility/2006" xmlns:a14="http://schemas.microsoft.com/office/drawing/2010/main">
-        <mc:Choice Requires="a14">
+        <p:spPr>
+          <a:xfrm>
+            <a:off x="0" y="0"/>
+            <a:ext cx="10515600" cy="424543"/>
+          </a:xfrm>
+        </p:spPr>
+        <p:txBody>
+          <a:bodyPr>
+            <a:normAutofit fontScale="90000"/>
+          </a:bodyPr>
+          <a:lstStyle/>
+          <a:p>
+            <a:r>
+              <a:rPr lang="en-US" sz="2800" dirty="0">
+                <a:solidFill>
+                  <a:srgbClr val="C00000"/>
+                </a:solidFill>
+              </a:rPr>
+              <a:t>Back-of-Envelope Wall Clock Hours Prediction (Pt. 1)</a:t>
+            </a:r>
+          </a:p>
+        </p:txBody>
+      </p:sp>
+    </p:spTree>
+    <p:extLst>
+      <p:ext uri="{BB962C8B-B14F-4D97-AF65-F5344CB8AC3E}">
+        <p14:creationId xmlns:p14="http://schemas.microsoft.com/office/powerpoint/2010/main" val="3464625412"/>
+      </p:ext>
+    </p:extLst>
+  </p:cSld>
+  <p:clrMapOvr>
+    <a:masterClrMapping/>
+  </p:clrMapOvr>
+</p:sld>
+</file>
+
+<file path=ppt/slides/slide4.xml><?xml version="1.0" encoding="utf-8"?>
+<p:sld xmlns:a="http://schemas.openxmlformats.org/drawingml/2006/main" xmlns:r="http://schemas.openxmlformats.org/officeDocument/2006/relationships" xmlns:p="http://schemas.openxmlformats.org/presentationml/2006/main">
+  <p:cSld>
+    <p:spTree>
+      <p:nvGrpSpPr>
+        <p:cNvPr id="1" name=""/>
+        <p:cNvGrpSpPr/>
+        <p:nvPr/>
+      </p:nvGrpSpPr>
+      <p:grpSpPr>
+        <a:xfrm>
+          <a:off x="0" y="0"/>
+          <a:ext cx="0" cy="0"/>
+          <a:chOff x="0" y="0"/>
+          <a:chExt cx="0" cy="0"/>
+        </a:xfrm>
+      </p:grpSpPr>
+      <p:sp>
+        <p:nvSpPr>
+          <p:cNvPr id="3" name="Content Placeholder 2">
+            <a:extLst>
+              <a:ext uri="{FF2B5EF4-FFF2-40B4-BE49-F238E27FC236}">
+                <a16:creationId xmlns:a16="http://schemas.microsoft.com/office/drawing/2014/main" id="{004AB05C-D1ED-58F5-BF6C-BFA57B0D0030}"/>
+              </a:ext>
+            </a:extLst>
+          </p:cNvPr>
+          <p:cNvSpPr>
+            <a:spLocks noGrp="1"/>
+          </p:cNvSpPr>
+          <p:nvPr>
+            <p:ph idx="1"/>
+          </p:nvPr>
+        </p:nvSpPr>
+        <p:spPr>
+          <a:xfrm>
+            <a:off x="0" y="424542"/>
+            <a:ext cx="12192000" cy="5931807"/>
+          </a:xfrm>
+        </p:spPr>
+        <p:txBody>
+          <a:bodyPr/>
+          <a:lstStyle/>
+          <a:p>
+            <a:endParaRPr lang="en-US" dirty="0"/>
+          </a:p>
+        </p:txBody>
+      </p:sp>
+      <p:sp>
+        <p:nvSpPr>
+          <p:cNvPr id="5" name="Footer Placeholder 4">
+            <a:extLst>
+              <a:ext uri="{FF2B5EF4-FFF2-40B4-BE49-F238E27FC236}">
+                <a16:creationId xmlns:a16="http://schemas.microsoft.com/office/drawing/2014/main" id="{A980BACF-2A07-8166-205D-A9011A2593D2}"/>
+              </a:ext>
+            </a:extLst>
+          </p:cNvPr>
+          <p:cNvSpPr>
+            <a:spLocks noGrp="1"/>
+          </p:cNvSpPr>
+          <p:nvPr>
+            <p:ph type="ftr" sz="quarter" idx="11"/>
+          </p:nvPr>
+        </p:nvSpPr>
+        <p:spPr/>
+        <p:txBody>
+          <a:bodyPr/>
+          <a:lstStyle/>
+          <a:p>
+            <a:r>
+              <a:rPr lang="en-US"/>
+              <a:t>Boldy Sensitivity Study Mu2e</a:t>
+            </a:r>
+          </a:p>
+        </p:txBody>
+      </p:sp>
+      <p:sp>
+        <p:nvSpPr>
+          <p:cNvPr id="6" name="Slide Number Placeholder 5">
+            <a:extLst>
+              <a:ext uri="{FF2B5EF4-FFF2-40B4-BE49-F238E27FC236}">
+                <a16:creationId xmlns:a16="http://schemas.microsoft.com/office/drawing/2014/main" id="{89171392-E5AC-CE2F-5495-5F8534D2ECF6}"/>
+              </a:ext>
+            </a:extLst>
+          </p:cNvPr>
+          <p:cNvSpPr>
+            <a:spLocks noGrp="1"/>
+          </p:cNvSpPr>
+          <p:nvPr>
+            <p:ph type="sldNum" sz="quarter" idx="12"/>
+          </p:nvPr>
+        </p:nvSpPr>
+        <p:spPr/>
+        <p:txBody>
+          <a:bodyPr/>
+          <a:lstStyle/>
+          <a:p>
+            <a:fld id="{C0E0CB54-3DBF-E947-906E-85E307CF7971}" type="slidenum">
+              <a:rPr lang="en-US" smtClean="0"/>
+              <a:t>4</a:t>
+            </a:fld>
+            <a:endParaRPr lang="en-US"/>
+          </a:p>
+        </p:txBody>
+      </p:sp>
+      <p:sp>
+        <p:nvSpPr>
+          <p:cNvPr id="4" name="Title 1">
+            <a:extLst>
+              <a:ext uri="{FF2B5EF4-FFF2-40B4-BE49-F238E27FC236}">
+                <a16:creationId xmlns:a16="http://schemas.microsoft.com/office/drawing/2014/main" id="{9A9F52FC-1594-13EE-16BA-2E65C360A677}"/>
+              </a:ext>
+            </a:extLst>
+          </p:cNvPr>
+          <p:cNvSpPr txBox="1">
+            <a:spLocks/>
+          </p:cNvSpPr>
+          <p:nvPr/>
+        </p:nvSpPr>
+        <p:spPr>
+          <a:xfrm>
+            <a:off x="0" y="0"/>
+            <a:ext cx="10515600" cy="424543"/>
+          </a:xfrm>
+          <a:prstGeom prst="rect">
+            <a:avLst/>
+          </a:prstGeom>
+        </p:spPr>
+        <p:txBody>
+          <a:bodyPr vert="horz" lIns="91440" tIns="45720" rIns="91440" bIns="45720" rtlCol="0" anchor="ctr">
+            <a:normAutofit fontScale="90000" lnSpcReduction="10000"/>
+          </a:bodyPr>
+          <a:lstStyle>
+            <a:lvl1pPr algn="l" defTabSz="914400" rtl="0" eaLnBrk="1" latinLnBrk="0" hangingPunct="1">
+              <a:lnSpc>
+                <a:spcPct val="90000"/>
+              </a:lnSpc>
+              <a:spcBef>
+                <a:spcPct val="0"/>
+              </a:spcBef>
+              <a:buNone/>
+              <a:defRPr sz="4400" kern="1200">
+                <a:solidFill>
+                  <a:schemeClr val="tx1"/>
+                </a:solidFill>
+                <a:latin typeface="+mj-lt"/>
+                <a:ea typeface="+mj-ea"/>
+                <a:cs typeface="+mj-cs"/>
+              </a:defRPr>
+            </a:lvl1pPr>
+          </a:lstStyle>
+          <a:p>
+            <a:r>
+              <a:rPr lang="en-US" sz="2800" dirty="0">
+                <a:solidFill>
+                  <a:srgbClr val="C00000"/>
+                </a:solidFill>
+              </a:rPr>
+              <a:t>Flavor, Leptons, and Charged Lepton Flavor Violation</a:t>
+            </a:r>
+          </a:p>
+        </p:txBody>
+      </p:sp>
+    </p:spTree>
+    <p:extLst>
+      <p:ext uri="{BB962C8B-B14F-4D97-AF65-F5344CB8AC3E}">
+        <p14:creationId xmlns:p14="http://schemas.microsoft.com/office/powerpoint/2010/main" val="669870449"/>
+      </p:ext>
+    </p:extLst>
+  </p:cSld>
+  <p:clrMapOvr>
+    <a:masterClrMapping/>
+  </p:clrMapOvr>
+</p:sld>
+</file>
+
+<file path=ppt/slides/slide40.xml><?xml version="1.0" encoding="utf-8"?>
+<p:sld xmlns:a="http://schemas.openxmlformats.org/drawingml/2006/main" xmlns:r="http://schemas.openxmlformats.org/officeDocument/2006/relationships" xmlns:p="http://schemas.openxmlformats.org/presentationml/2006/main">
+  <p:cSld>
+    <p:spTree>
+      <p:nvGrpSpPr>
+        <p:cNvPr id="1" name=""/>
+        <p:cNvGrpSpPr/>
+        <p:nvPr/>
+      </p:nvGrpSpPr>
+      <p:grpSpPr>
+        <a:xfrm>
+          <a:off x="0" y="0"/>
+          <a:ext cx="0" cy="0"/>
+          <a:chOff x="0" y="0"/>
+          <a:chExt cx="0" cy="0"/>
+        </a:xfrm>
+      </p:grpSpPr>
+      <mc:AlternateContent xmlns:mc="http://schemas.openxmlformats.org/markup-compatibility/2006">
+        <mc:Choice xmlns:a14="http://schemas.microsoft.com/office/drawing/2010/main" Requires="a14">
           <p:sp>
             <p:nvSpPr>
               <p:cNvPr id="3" name="Content Placeholder 2">
@@ -13723,7 +15483,12 @@
                 <p:ph idx="1"/>
               </p:nvPr>
             </p:nvSpPr>
-            <p:spPr/>
+            <p:spPr>
+              <a:xfrm>
+                <a:off x="0" y="424542"/>
+                <a:ext cx="12192000" cy="5931807"/>
+              </a:xfrm>
+            </p:spPr>
             <p:txBody>
               <a:bodyPr/>
               <a:lstStyle/>
@@ -13953,7 +15718,7 @@
             </p:txBody>
           </p:sp>
         </mc:Choice>
-        <mc:Fallback xmlns="">
+        <mc:Fallback>
           <p:sp>
             <p:nvSpPr>
               <p:cNvPr id="3" name="Content Placeholder 2">
@@ -13971,10 +15736,14 @@
               </p:nvPr>
             </p:nvSpPr>
             <p:spPr>
+              <a:xfrm>
+                <a:off x="0" y="424542"/>
+                <a:ext cx="12192000" cy="5931807"/>
+              </a:xfrm>
               <a:blipFill>
                 <a:blip r:embed="rId2"/>
                 <a:stretch>
-                  <a:fillRect l="-1086" t="-3198"/>
+                  <a:fillRect l="-937" t="-2564"/>
                 </a:stretch>
               </a:blipFill>
             </p:spPr>
@@ -14044,9 +15813,67 @@
           <a:p>
             <a:fld id="{C0E0CB54-3DBF-E947-906E-85E307CF7971}" type="slidenum">
               <a:rPr lang="en-US" smtClean="0"/>
-              <a:t>39</a:t>
+              <a:t>40</a:t>
             </a:fld>
             <a:endParaRPr lang="en-US"/>
+          </a:p>
+        </p:txBody>
+      </p:sp>
+      <p:sp>
+        <p:nvSpPr>
+          <p:cNvPr id="8" name="Title 1">
+            <a:extLst>
+              <a:ext uri="{FF2B5EF4-FFF2-40B4-BE49-F238E27FC236}">
+                <a16:creationId xmlns:a16="http://schemas.microsoft.com/office/drawing/2014/main" id="{EACEEC5F-DC2E-1200-0085-D8BB40A603AC}"/>
+              </a:ext>
+            </a:extLst>
+          </p:cNvPr>
+          <p:cNvSpPr txBox="1">
+            <a:spLocks/>
+          </p:cNvSpPr>
+          <p:nvPr/>
+        </p:nvSpPr>
+        <p:spPr>
+          <a:xfrm>
+            <a:off x="0" y="0"/>
+            <a:ext cx="10515600" cy="424543"/>
+          </a:xfrm>
+          <a:prstGeom prst="rect">
+            <a:avLst/>
+          </a:prstGeom>
+        </p:spPr>
+        <p:txBody>
+          <a:bodyPr vert="horz" lIns="91440" tIns="45720" rIns="91440" bIns="45720" rtlCol="0" anchor="ctr">
+            <a:normAutofit fontScale="90000" lnSpcReduction="10000"/>
+          </a:bodyPr>
+          <a:lstStyle>
+            <a:lvl1pPr algn="l" defTabSz="914400" rtl="0" eaLnBrk="1" latinLnBrk="0" hangingPunct="1">
+              <a:lnSpc>
+                <a:spcPct val="90000"/>
+              </a:lnSpc>
+              <a:spcBef>
+                <a:spcPct val="0"/>
+              </a:spcBef>
+              <a:buNone/>
+              <a:defRPr sz="4400" kern="1200">
+                <a:solidFill>
+                  <a:schemeClr val="tx1"/>
+                </a:solidFill>
+                <a:latin typeface="+mj-lt"/>
+                <a:ea typeface="+mj-ea"/>
+                <a:cs typeface="+mj-cs"/>
+              </a:defRPr>
+            </a:lvl1pPr>
+          </a:lstStyle>
+          <a:p>
+            <a:r>
+              <a:rPr lang="en-US" sz="2800" dirty="0">
+                <a:solidFill>
+                  <a:srgbClr val="C00000"/>
+                </a:solidFill>
+              </a:rPr>
+              <a:t>Magnetic Mirror Effect Derivation (Pt. 1)</a:t>
+            </a:r>
           </a:p>
         </p:txBody>
       </p:sp>
@@ -14054,286 +15881,6 @@
     <p:extLst>
       <p:ext uri="{BB962C8B-B14F-4D97-AF65-F5344CB8AC3E}">
         <p14:creationId xmlns:p14="http://schemas.microsoft.com/office/powerpoint/2010/main" val="84277792"/>
-      </p:ext>
-    </p:extLst>
-  </p:cSld>
-  <p:clrMapOvr>
-    <a:masterClrMapping/>
-  </p:clrMapOvr>
-</p:sld>
-</file>
-
-<file path=ppt/slides/slide4.xml><?xml version="1.0" encoding="utf-8"?>
-<p:sld xmlns:a="http://schemas.openxmlformats.org/drawingml/2006/main" xmlns:r="http://schemas.openxmlformats.org/officeDocument/2006/relationships" xmlns:p="http://schemas.openxmlformats.org/presentationml/2006/main">
-  <p:cSld>
-    <p:spTree>
-      <p:nvGrpSpPr>
-        <p:cNvPr id="1" name=""/>
-        <p:cNvGrpSpPr/>
-        <p:nvPr/>
-      </p:nvGrpSpPr>
-      <p:grpSpPr>
-        <a:xfrm>
-          <a:off x="0" y="0"/>
-          <a:ext cx="0" cy="0"/>
-          <a:chOff x="0" y="0"/>
-          <a:chExt cx="0" cy="0"/>
-        </a:xfrm>
-      </p:grpSpPr>
-      <p:sp>
-        <p:nvSpPr>
-          <p:cNvPr id="2" name="Title 1">
-            <a:extLst>
-              <a:ext uri="{FF2B5EF4-FFF2-40B4-BE49-F238E27FC236}">
-                <a16:creationId xmlns:a16="http://schemas.microsoft.com/office/drawing/2014/main" id="{E18806B5-1DE0-9C43-1112-600F95963F8E}"/>
-              </a:ext>
-            </a:extLst>
-          </p:cNvPr>
-          <p:cNvSpPr>
-            <a:spLocks noGrp="1"/>
-          </p:cNvSpPr>
-          <p:nvPr>
-            <p:ph type="title"/>
-          </p:nvPr>
-        </p:nvSpPr>
-        <p:spPr/>
-        <p:txBody>
-          <a:bodyPr/>
-          <a:lstStyle/>
-          <a:p>
-            <a:r>
-              <a:rPr lang="en-US" dirty="0"/>
-              <a:t>Flavor and Charged Flavor Violation</a:t>
-            </a:r>
-          </a:p>
-        </p:txBody>
-      </p:sp>
-      <p:sp>
-        <p:nvSpPr>
-          <p:cNvPr id="3" name="Content Placeholder 2">
-            <a:extLst>
-              <a:ext uri="{FF2B5EF4-FFF2-40B4-BE49-F238E27FC236}">
-                <a16:creationId xmlns:a16="http://schemas.microsoft.com/office/drawing/2014/main" id="{004AB05C-D1ED-58F5-BF6C-BFA57B0D0030}"/>
-              </a:ext>
-            </a:extLst>
-          </p:cNvPr>
-          <p:cNvSpPr>
-            <a:spLocks noGrp="1"/>
-          </p:cNvSpPr>
-          <p:nvPr>
-            <p:ph idx="1"/>
-          </p:nvPr>
-        </p:nvSpPr>
-        <p:spPr/>
-        <p:txBody>
-          <a:bodyPr/>
-          <a:lstStyle/>
-          <a:p>
-            <a:endParaRPr lang="en-US"/>
-          </a:p>
-        </p:txBody>
-      </p:sp>
-      <p:sp>
-        <p:nvSpPr>
-          <p:cNvPr id="5" name="Footer Placeholder 4">
-            <a:extLst>
-              <a:ext uri="{FF2B5EF4-FFF2-40B4-BE49-F238E27FC236}">
-                <a16:creationId xmlns:a16="http://schemas.microsoft.com/office/drawing/2014/main" id="{A980BACF-2A07-8166-205D-A9011A2593D2}"/>
-              </a:ext>
-            </a:extLst>
-          </p:cNvPr>
-          <p:cNvSpPr>
-            <a:spLocks noGrp="1"/>
-          </p:cNvSpPr>
-          <p:nvPr>
-            <p:ph type="ftr" sz="quarter" idx="11"/>
-          </p:nvPr>
-        </p:nvSpPr>
-        <p:spPr/>
-        <p:txBody>
-          <a:bodyPr/>
-          <a:lstStyle/>
-          <a:p>
-            <a:r>
-              <a:rPr lang="en-US"/>
-              <a:t>Boldy Sensitivity Study Mu2e</a:t>
-            </a:r>
-          </a:p>
-        </p:txBody>
-      </p:sp>
-      <p:sp>
-        <p:nvSpPr>
-          <p:cNvPr id="6" name="Slide Number Placeholder 5">
-            <a:extLst>
-              <a:ext uri="{FF2B5EF4-FFF2-40B4-BE49-F238E27FC236}">
-                <a16:creationId xmlns:a16="http://schemas.microsoft.com/office/drawing/2014/main" id="{89171392-E5AC-CE2F-5495-5F8534D2ECF6}"/>
-              </a:ext>
-            </a:extLst>
-          </p:cNvPr>
-          <p:cNvSpPr>
-            <a:spLocks noGrp="1"/>
-          </p:cNvSpPr>
-          <p:nvPr>
-            <p:ph type="sldNum" sz="quarter" idx="12"/>
-          </p:nvPr>
-        </p:nvSpPr>
-        <p:spPr/>
-        <p:txBody>
-          <a:bodyPr/>
-          <a:lstStyle/>
-          <a:p>
-            <a:fld id="{C0E0CB54-3DBF-E947-906E-85E307CF7971}" type="slidenum">
-              <a:rPr lang="en-US" smtClean="0"/>
-              <a:t>4</a:t>
-            </a:fld>
-            <a:endParaRPr lang="en-US"/>
-          </a:p>
-        </p:txBody>
-      </p:sp>
-    </p:spTree>
-    <p:extLst>
-      <p:ext uri="{BB962C8B-B14F-4D97-AF65-F5344CB8AC3E}">
-        <p14:creationId xmlns:p14="http://schemas.microsoft.com/office/powerpoint/2010/main" val="669870449"/>
-      </p:ext>
-    </p:extLst>
-  </p:cSld>
-  <p:clrMapOvr>
-    <a:masterClrMapping/>
-  </p:clrMapOvr>
-</p:sld>
-</file>
-
-<file path=ppt/slides/slide40.xml><?xml version="1.0" encoding="utf-8"?>
-<p:sld xmlns:a="http://schemas.openxmlformats.org/drawingml/2006/main" xmlns:r="http://schemas.openxmlformats.org/officeDocument/2006/relationships" xmlns:p="http://schemas.openxmlformats.org/presentationml/2006/main">
-  <p:cSld>
-    <p:spTree>
-      <p:nvGrpSpPr>
-        <p:cNvPr id="1" name=""/>
-        <p:cNvGrpSpPr/>
-        <p:nvPr/>
-      </p:nvGrpSpPr>
-      <p:grpSpPr>
-        <a:xfrm>
-          <a:off x="0" y="0"/>
-          <a:ext cx="0" cy="0"/>
-          <a:chOff x="0" y="0"/>
-          <a:chExt cx="0" cy="0"/>
-        </a:xfrm>
-      </p:grpSpPr>
-      <p:sp>
-        <p:nvSpPr>
-          <p:cNvPr id="2" name="Title 1">
-            <a:extLst>
-              <a:ext uri="{FF2B5EF4-FFF2-40B4-BE49-F238E27FC236}">
-                <a16:creationId xmlns:a16="http://schemas.microsoft.com/office/drawing/2014/main" id="{459DCEB7-3DE4-573B-EDA2-1B6FBA276945}"/>
-              </a:ext>
-            </a:extLst>
-          </p:cNvPr>
-          <p:cNvSpPr>
-            <a:spLocks noGrp="1"/>
-          </p:cNvSpPr>
-          <p:nvPr>
-            <p:ph type="title"/>
-          </p:nvPr>
-        </p:nvSpPr>
-        <p:spPr/>
-        <p:txBody>
-          <a:bodyPr/>
-          <a:lstStyle/>
-          <a:p>
-            <a:r>
-              <a:rPr lang="en-US" dirty="0"/>
-              <a:t>Half-Field DS Field Designation</a:t>
-            </a:r>
-          </a:p>
-        </p:txBody>
-      </p:sp>
-      <p:sp>
-        <p:nvSpPr>
-          <p:cNvPr id="3" name="Content Placeholder 2">
-            <a:extLst>
-              <a:ext uri="{FF2B5EF4-FFF2-40B4-BE49-F238E27FC236}">
-                <a16:creationId xmlns:a16="http://schemas.microsoft.com/office/drawing/2014/main" id="{763F44E5-A5F9-A925-1B54-76981E1B3EC5}"/>
-              </a:ext>
-            </a:extLst>
-          </p:cNvPr>
-          <p:cNvSpPr>
-            <a:spLocks noGrp="1"/>
-          </p:cNvSpPr>
-          <p:nvPr>
-            <p:ph idx="1"/>
-          </p:nvPr>
-        </p:nvSpPr>
-        <p:spPr/>
-        <p:txBody>
-          <a:bodyPr/>
-          <a:lstStyle/>
-          <a:p>
-            <a:endParaRPr lang="en-US"/>
-          </a:p>
-        </p:txBody>
-      </p:sp>
-      <p:sp>
-        <p:nvSpPr>
-          <p:cNvPr id="5" name="Footer Placeholder 4">
-            <a:extLst>
-              <a:ext uri="{FF2B5EF4-FFF2-40B4-BE49-F238E27FC236}">
-                <a16:creationId xmlns:a16="http://schemas.microsoft.com/office/drawing/2014/main" id="{D65AFF79-62CF-7ECE-22F4-A18DC570BEAD}"/>
-              </a:ext>
-            </a:extLst>
-          </p:cNvPr>
-          <p:cNvSpPr>
-            <a:spLocks noGrp="1"/>
-          </p:cNvSpPr>
-          <p:nvPr>
-            <p:ph type="ftr" sz="quarter" idx="11"/>
-          </p:nvPr>
-        </p:nvSpPr>
-        <p:spPr/>
-        <p:txBody>
-          <a:bodyPr/>
-          <a:lstStyle/>
-          <a:p>
-            <a:r>
-              <a:rPr lang="en-US"/>
-              <a:t>Boldy Sensitivity Study Mu2e</a:t>
-            </a:r>
-          </a:p>
-        </p:txBody>
-      </p:sp>
-      <p:sp>
-        <p:nvSpPr>
-          <p:cNvPr id="6" name="Slide Number Placeholder 5">
-            <a:extLst>
-              <a:ext uri="{FF2B5EF4-FFF2-40B4-BE49-F238E27FC236}">
-                <a16:creationId xmlns:a16="http://schemas.microsoft.com/office/drawing/2014/main" id="{86DD962C-32BE-EAAC-8D7A-405AFEF08A66}"/>
-              </a:ext>
-            </a:extLst>
-          </p:cNvPr>
-          <p:cNvSpPr>
-            <a:spLocks noGrp="1"/>
-          </p:cNvSpPr>
-          <p:nvPr>
-            <p:ph type="sldNum" sz="quarter" idx="12"/>
-          </p:nvPr>
-        </p:nvSpPr>
-        <p:spPr/>
-        <p:txBody>
-          <a:bodyPr/>
-          <a:lstStyle/>
-          <a:p>
-            <a:fld id="{C0E0CB54-3DBF-E947-906E-85E307CF7971}" type="slidenum">
-              <a:rPr lang="en-US" smtClean="0"/>
-              <a:t>40</a:t>
-            </a:fld>
-            <a:endParaRPr lang="en-US"/>
-          </a:p>
-        </p:txBody>
-      </p:sp>
-    </p:spTree>
-    <p:extLst>
-      <p:ext uri="{BB962C8B-B14F-4D97-AF65-F5344CB8AC3E}">
-        <p14:creationId xmlns:p14="http://schemas.microsoft.com/office/powerpoint/2010/main" val="3399809774"/>
       </p:ext>
     </p:extLst>
   </p:cSld>
@@ -14362,10 +15909,63 @@
       </p:grpSpPr>
       <p:sp>
         <p:nvSpPr>
-          <p:cNvPr id="4" name="Footer Placeholder 3">
-            <a:extLst>
-              <a:ext uri="{FF2B5EF4-FFF2-40B4-BE49-F238E27FC236}">
-                <a16:creationId xmlns:a16="http://schemas.microsoft.com/office/drawing/2014/main" id="{57F60EB5-129C-6ACE-8756-40458FFB2C2C}"/>
+          <p:cNvPr id="2" name="Title 1">
+            <a:extLst>
+              <a:ext uri="{FF2B5EF4-FFF2-40B4-BE49-F238E27FC236}">
+                <a16:creationId xmlns:a16="http://schemas.microsoft.com/office/drawing/2014/main" id="{459DCEB7-3DE4-573B-EDA2-1B6FBA276945}"/>
+              </a:ext>
+            </a:extLst>
+          </p:cNvPr>
+          <p:cNvSpPr>
+            <a:spLocks noGrp="1"/>
+          </p:cNvSpPr>
+          <p:nvPr>
+            <p:ph type="title"/>
+          </p:nvPr>
+        </p:nvSpPr>
+        <p:spPr/>
+        <p:txBody>
+          <a:bodyPr/>
+          <a:lstStyle/>
+          <a:p>
+            <a:r>
+              <a:rPr lang="en-US" dirty="0"/>
+              <a:t>Half-Field DS Field Designation</a:t>
+            </a:r>
+          </a:p>
+        </p:txBody>
+      </p:sp>
+      <p:sp>
+        <p:nvSpPr>
+          <p:cNvPr id="3" name="Content Placeholder 2">
+            <a:extLst>
+              <a:ext uri="{FF2B5EF4-FFF2-40B4-BE49-F238E27FC236}">
+                <a16:creationId xmlns:a16="http://schemas.microsoft.com/office/drawing/2014/main" id="{763F44E5-A5F9-A925-1B54-76981E1B3EC5}"/>
+              </a:ext>
+            </a:extLst>
+          </p:cNvPr>
+          <p:cNvSpPr>
+            <a:spLocks noGrp="1"/>
+          </p:cNvSpPr>
+          <p:nvPr>
+            <p:ph idx="1"/>
+          </p:nvPr>
+        </p:nvSpPr>
+        <p:spPr/>
+        <p:txBody>
+          <a:bodyPr/>
+          <a:lstStyle/>
+          <a:p>
+            <a:endParaRPr lang="en-US"/>
+          </a:p>
+        </p:txBody>
+      </p:sp>
+      <p:sp>
+        <p:nvSpPr>
+          <p:cNvPr id="5" name="Footer Placeholder 4">
+            <a:extLst>
+              <a:ext uri="{FF2B5EF4-FFF2-40B4-BE49-F238E27FC236}">
+                <a16:creationId xmlns:a16="http://schemas.microsoft.com/office/drawing/2014/main" id="{D65AFF79-62CF-7ECE-22F4-A18DC570BEAD}"/>
               </a:ext>
             </a:extLst>
           </p:cNvPr>
@@ -14390,10 +15990,10 @@
       </p:sp>
       <p:sp>
         <p:nvSpPr>
-          <p:cNvPr id="5" name="Slide Number Placeholder 4">
-            <a:extLst>
-              <a:ext uri="{FF2B5EF4-FFF2-40B4-BE49-F238E27FC236}">
-                <a16:creationId xmlns:a16="http://schemas.microsoft.com/office/drawing/2014/main" id="{436548BF-1B03-5ABC-F42B-442BB060B87B}"/>
+          <p:cNvPr id="6" name="Slide Number Placeholder 5">
+            <a:extLst>
+              <a:ext uri="{FF2B5EF4-FFF2-40B4-BE49-F238E27FC236}">
+                <a16:creationId xmlns:a16="http://schemas.microsoft.com/office/drawing/2014/main" id="{86DD962C-32BE-EAAC-8D7A-405AFEF08A66}"/>
               </a:ext>
             </a:extLst>
           </p:cNvPr>
@@ -14412,6 +16012,151 @@
             <a:fld id="{C0E0CB54-3DBF-E947-906E-85E307CF7971}" type="slidenum">
               <a:rPr lang="en-US" smtClean="0"/>
               <a:t>41</a:t>
+            </a:fld>
+            <a:endParaRPr lang="en-US"/>
+          </a:p>
+        </p:txBody>
+      </p:sp>
+      <p:sp>
+        <p:nvSpPr>
+          <p:cNvPr id="4" name="Title 1">
+            <a:extLst>
+              <a:ext uri="{FF2B5EF4-FFF2-40B4-BE49-F238E27FC236}">
+                <a16:creationId xmlns:a16="http://schemas.microsoft.com/office/drawing/2014/main" id="{568356BF-0515-B375-CAA4-90B2F56C5AB7}"/>
+              </a:ext>
+            </a:extLst>
+          </p:cNvPr>
+          <p:cNvSpPr txBox="1">
+            <a:spLocks/>
+          </p:cNvSpPr>
+          <p:nvPr/>
+        </p:nvSpPr>
+        <p:spPr>
+          <a:xfrm>
+            <a:off x="0" y="0"/>
+            <a:ext cx="10515600" cy="424543"/>
+          </a:xfrm>
+          <a:prstGeom prst="rect">
+            <a:avLst/>
+          </a:prstGeom>
+        </p:spPr>
+        <p:txBody>
+          <a:bodyPr vert="horz" lIns="91440" tIns="45720" rIns="91440" bIns="45720" rtlCol="0" anchor="ctr">
+            <a:normAutofit fontScale="90000" lnSpcReduction="10000"/>
+          </a:bodyPr>
+          <a:lstStyle>
+            <a:lvl1pPr algn="l" defTabSz="914400" rtl="0" eaLnBrk="1" latinLnBrk="0" hangingPunct="1">
+              <a:lnSpc>
+                <a:spcPct val="90000"/>
+              </a:lnSpc>
+              <a:spcBef>
+                <a:spcPct val="0"/>
+              </a:spcBef>
+              <a:buNone/>
+              <a:defRPr sz="4400" kern="1200">
+                <a:solidFill>
+                  <a:schemeClr val="tx1"/>
+                </a:solidFill>
+                <a:latin typeface="+mj-lt"/>
+                <a:ea typeface="+mj-ea"/>
+                <a:cs typeface="+mj-cs"/>
+              </a:defRPr>
+            </a:lvl1pPr>
+          </a:lstStyle>
+          <a:p>
+            <a:r>
+              <a:rPr lang="en-US" sz="2800" dirty="0">
+                <a:solidFill>
+                  <a:srgbClr val="C00000"/>
+                </a:solidFill>
+              </a:rPr>
+              <a:t>Half-Field DS Field Necessity Derivation</a:t>
+            </a:r>
+          </a:p>
+        </p:txBody>
+      </p:sp>
+    </p:spTree>
+    <p:extLst>
+      <p:ext uri="{BB962C8B-B14F-4D97-AF65-F5344CB8AC3E}">
+        <p14:creationId xmlns:p14="http://schemas.microsoft.com/office/powerpoint/2010/main" val="3399809774"/>
+      </p:ext>
+    </p:extLst>
+  </p:cSld>
+  <p:clrMapOvr>
+    <a:masterClrMapping/>
+  </p:clrMapOvr>
+</p:sld>
+</file>
+
+<file path=ppt/slides/slide42.xml><?xml version="1.0" encoding="utf-8"?>
+<p:sld xmlns:a="http://schemas.openxmlformats.org/drawingml/2006/main" xmlns:r="http://schemas.openxmlformats.org/officeDocument/2006/relationships" xmlns:p="http://schemas.openxmlformats.org/presentationml/2006/main">
+  <p:cSld>
+    <p:spTree>
+      <p:nvGrpSpPr>
+        <p:cNvPr id="1" name=""/>
+        <p:cNvGrpSpPr/>
+        <p:nvPr/>
+      </p:nvGrpSpPr>
+      <p:grpSpPr>
+        <a:xfrm>
+          <a:off x="0" y="0"/>
+          <a:ext cx="0" cy="0"/>
+          <a:chOff x="0" y="0"/>
+          <a:chExt cx="0" cy="0"/>
+        </a:xfrm>
+      </p:grpSpPr>
+      <p:sp>
+        <p:nvSpPr>
+          <p:cNvPr id="4" name="Footer Placeholder 3">
+            <a:extLst>
+              <a:ext uri="{FF2B5EF4-FFF2-40B4-BE49-F238E27FC236}">
+                <a16:creationId xmlns:a16="http://schemas.microsoft.com/office/drawing/2014/main" id="{57F60EB5-129C-6ACE-8756-40458FFB2C2C}"/>
+              </a:ext>
+            </a:extLst>
+          </p:cNvPr>
+          <p:cNvSpPr>
+            <a:spLocks noGrp="1"/>
+          </p:cNvSpPr>
+          <p:nvPr>
+            <p:ph type="ftr" sz="quarter" idx="11"/>
+          </p:nvPr>
+        </p:nvSpPr>
+        <p:spPr/>
+        <p:txBody>
+          <a:bodyPr/>
+          <a:lstStyle/>
+          <a:p>
+            <a:r>
+              <a:rPr lang="en-US"/>
+              <a:t>Boldy Sensitivity Study Mu2e</a:t>
+            </a:r>
+          </a:p>
+        </p:txBody>
+      </p:sp>
+      <p:sp>
+        <p:nvSpPr>
+          <p:cNvPr id="5" name="Slide Number Placeholder 4">
+            <a:extLst>
+              <a:ext uri="{FF2B5EF4-FFF2-40B4-BE49-F238E27FC236}">
+                <a16:creationId xmlns:a16="http://schemas.microsoft.com/office/drawing/2014/main" id="{436548BF-1B03-5ABC-F42B-442BB060B87B}"/>
+              </a:ext>
+            </a:extLst>
+          </p:cNvPr>
+          <p:cNvSpPr>
+            <a:spLocks noGrp="1"/>
+          </p:cNvSpPr>
+          <p:nvPr>
+            <p:ph type="sldNum" sz="quarter" idx="12"/>
+          </p:nvPr>
+        </p:nvSpPr>
+        <p:spPr/>
+        <p:txBody>
+          <a:bodyPr/>
+          <a:lstStyle/>
+          <a:p>
+            <a:fld id="{C0E0CB54-3DBF-E947-906E-85E307CF7971}" type="slidenum">
+              <a:rPr lang="en-US" smtClean="0"/>
+              <a:t>42</a:t>
             </a:fld>
             <a:endParaRPr lang="en-US"/>
           </a:p>
@@ -14477,34 +16222,6 @@
           <a:chExt cx="0" cy="0"/>
         </a:xfrm>
       </p:grpSpPr>
-      <p:sp>
-        <p:nvSpPr>
-          <p:cNvPr id="2" name="Title 1">
-            <a:extLst>
-              <a:ext uri="{FF2B5EF4-FFF2-40B4-BE49-F238E27FC236}">
-                <a16:creationId xmlns:a16="http://schemas.microsoft.com/office/drawing/2014/main" id="{AA6BB1C5-10C7-BF33-1D1B-01E0BF47027A}"/>
-              </a:ext>
-            </a:extLst>
-          </p:cNvPr>
-          <p:cNvSpPr>
-            <a:spLocks noGrp="1"/>
-          </p:cNvSpPr>
-          <p:nvPr>
-            <p:ph type="title"/>
-          </p:nvPr>
-        </p:nvSpPr>
-        <p:spPr/>
-        <p:txBody>
-          <a:bodyPr/>
-          <a:lstStyle/>
-          <a:p>
-            <a:r>
-              <a:rPr lang="en-US" dirty="0"/>
-              <a:t>The                            Process</a:t>
-            </a:r>
-          </a:p>
-        </p:txBody>
-      </p:sp>
       <p:pic>
         <p:nvPicPr>
           <p:cNvPr id="6" name="Content Placeholder 5" descr="A diagram of a mathematical equation&#10;&#10;AI-generated content may be incorrect.">
@@ -14534,36 +16251,6 @@
           </a:xfrm>
         </p:spPr>
       </p:pic>
-      <p:pic>
-        <p:nvPicPr>
-          <p:cNvPr id="4" name="Picture 3">
-            <a:extLst>
-              <a:ext uri="{FF2B5EF4-FFF2-40B4-BE49-F238E27FC236}">
-                <a16:creationId xmlns:a16="http://schemas.microsoft.com/office/drawing/2014/main" id="{B0E24DE1-890B-0AC2-04FA-72EE5A2A19FC}"/>
-              </a:ext>
-            </a:extLst>
-          </p:cNvPr>
-          <p:cNvPicPr>
-            <a:picLocks noChangeAspect="1"/>
-          </p:cNvPicPr>
-          <p:nvPr/>
-        </p:nvPicPr>
-        <p:blipFill>
-          <a:blip r:embed="rId3"/>
-          <a:stretch>
-            <a:fillRect/>
-          </a:stretch>
-        </p:blipFill>
-        <p:spPr>
-          <a:xfrm>
-            <a:off x="1897017" y="831056"/>
-            <a:ext cx="2794000" cy="393700"/>
-          </a:xfrm>
-          <a:prstGeom prst="rect">
-            <a:avLst/>
-          </a:prstGeom>
-        </p:spPr>
-      </p:pic>
       <p:sp>
         <p:nvSpPr>
           <p:cNvPr id="8" name="Footer Placeholder 7">
@@ -14621,6 +16308,277 @@
           </a:p>
         </p:txBody>
       </p:sp>
+      <mc:AlternateContent xmlns:mc="http://schemas.openxmlformats.org/markup-compatibility/2006">
+        <mc:Choice xmlns:a14="http://schemas.microsoft.com/office/drawing/2010/main" Requires="a14">
+          <p:sp>
+            <p:nvSpPr>
+              <p:cNvPr id="3" name="Title 1">
+                <a:extLst>
+                  <a:ext uri="{FF2B5EF4-FFF2-40B4-BE49-F238E27FC236}">
+                    <a16:creationId xmlns:a16="http://schemas.microsoft.com/office/drawing/2014/main" id="{1B63A3F8-35E4-0EB8-CA33-64A1F6989F63}"/>
+                  </a:ext>
+                </a:extLst>
+              </p:cNvPr>
+              <p:cNvSpPr txBox="1">
+                <a:spLocks/>
+              </p:cNvSpPr>
+              <p:nvPr/>
+            </p:nvSpPr>
+            <p:spPr>
+              <a:xfrm>
+                <a:off x="0" y="0"/>
+                <a:ext cx="10515600" cy="596630"/>
+              </a:xfrm>
+              <a:prstGeom prst="rect">
+                <a:avLst/>
+              </a:prstGeom>
+            </p:spPr>
+            <p:txBody>
+              <a:bodyPr vert="horz" lIns="91440" tIns="45720" rIns="91440" bIns="45720" rtlCol="0" anchor="ctr">
+                <a:normAutofit fontScale="97500"/>
+              </a:bodyPr>
+              <a:lstStyle>
+                <a:lvl1pPr algn="l" defTabSz="914400" rtl="0" eaLnBrk="1" latinLnBrk="0" hangingPunct="1">
+                  <a:lnSpc>
+                    <a:spcPct val="90000"/>
+                  </a:lnSpc>
+                  <a:spcBef>
+                    <a:spcPct val="0"/>
+                  </a:spcBef>
+                  <a:buNone/>
+                  <a:defRPr sz="4400" kern="1200">
+                    <a:solidFill>
+                      <a:schemeClr val="tx1"/>
+                    </a:solidFill>
+                    <a:latin typeface="+mj-lt"/>
+                    <a:ea typeface="+mj-ea"/>
+                    <a:cs typeface="+mj-cs"/>
+                  </a:defRPr>
+                </a:lvl1pPr>
+              </a:lstStyle>
+              <a:p>
+                <a:r>
+                  <a:rPr lang="en-US" sz="2800" dirty="0">
+                    <a:solidFill>
+                      <a:srgbClr val="C00000"/>
+                    </a:solidFill>
+                  </a:rPr>
+                  <a:t>The </a:t>
+                </a:r>
+                <a14:m>
+                  <m:oMath xmlns:m="http://schemas.openxmlformats.org/officeDocument/2006/math">
+                    <m:sSup>
+                      <m:sSupPr>
+                        <m:ctrlPr>
+                          <a:rPr lang="en-US" sz="2800" i="1" smtClean="0">
+                            <a:solidFill>
+                              <a:srgbClr val="C00000"/>
+                            </a:solidFill>
+                            <a:latin typeface="Cambria Math" panose="02040503050406030204" pitchFamily="18" charset="0"/>
+                          </a:rPr>
+                        </m:ctrlPr>
+                      </m:sSupPr>
+                      <m:e>
+                        <m:r>
+                          <a:rPr lang="en-US" sz="2800" i="1" smtClean="0">
+                            <a:solidFill>
+                              <a:srgbClr val="C00000"/>
+                            </a:solidFill>
+                            <a:latin typeface="Cambria Math" panose="02040503050406030204" pitchFamily="18" charset="0"/>
+                            <a:ea typeface="Cambria Math" panose="02040503050406030204" pitchFamily="18" charset="0"/>
+                          </a:rPr>
+                          <m:t>𝜇</m:t>
+                        </m:r>
+                      </m:e>
+                      <m:sup>
+                        <m:r>
+                          <a:rPr lang="en-US" sz="2800" b="0" i="1" smtClean="0">
+                            <a:solidFill>
+                              <a:srgbClr val="C00000"/>
+                            </a:solidFill>
+                            <a:latin typeface="Cambria Math" panose="02040503050406030204" pitchFamily="18" charset="0"/>
+                          </a:rPr>
+                          <m:t>−</m:t>
+                        </m:r>
+                      </m:sup>
+                    </m:sSup>
+                    <m:sSup>
+                      <m:sSupPr>
+                        <m:ctrlPr>
+                          <a:rPr lang="en-US" sz="2800" i="1" smtClean="0">
+                            <a:solidFill>
+                              <a:srgbClr val="C00000"/>
+                            </a:solidFill>
+                            <a:latin typeface="Cambria Math" panose="02040503050406030204" pitchFamily="18" charset="0"/>
+                          </a:rPr>
+                        </m:ctrlPr>
+                      </m:sSupPr>
+                      <m:e>
+                        <m:r>
+                          <a:rPr lang="en-US" sz="2800" b="0" i="1" smtClean="0">
+                            <a:solidFill>
+                              <a:srgbClr val="C00000"/>
+                            </a:solidFill>
+                            <a:latin typeface="Cambria Math" panose="02040503050406030204" pitchFamily="18" charset="0"/>
+                          </a:rPr>
+                          <m:t>𝑒</m:t>
+                        </m:r>
+                      </m:e>
+                      <m:sup>
+                        <m:r>
+                          <a:rPr lang="en-US" sz="2800" b="0" i="1" smtClean="0">
+                            <a:solidFill>
+                              <a:srgbClr val="C00000"/>
+                            </a:solidFill>
+                            <a:latin typeface="Cambria Math" panose="02040503050406030204" pitchFamily="18" charset="0"/>
+                          </a:rPr>
+                          <m:t>−</m:t>
+                        </m:r>
+                      </m:sup>
+                    </m:sSup>
+                    <m:r>
+                      <a:rPr lang="en-US" sz="2800" i="1" smtClean="0">
+                        <a:solidFill>
+                          <a:srgbClr val="C00000"/>
+                        </a:solidFill>
+                        <a:latin typeface="Cambria Math" panose="02040503050406030204" pitchFamily="18" charset="0"/>
+                        <a:ea typeface="Cambria Math" panose="02040503050406030204" pitchFamily="18" charset="0"/>
+                      </a:rPr>
+                      <m:t>→</m:t>
+                    </m:r>
+                    <m:sSup>
+                      <m:sSupPr>
+                        <m:ctrlPr>
+                          <a:rPr lang="en-US" sz="2800" i="1" smtClean="0">
+                            <a:solidFill>
+                              <a:srgbClr val="C00000"/>
+                            </a:solidFill>
+                            <a:latin typeface="Cambria Math" panose="02040503050406030204" pitchFamily="18" charset="0"/>
+                            <a:ea typeface="Cambria Math" panose="02040503050406030204" pitchFamily="18" charset="0"/>
+                          </a:rPr>
+                        </m:ctrlPr>
+                      </m:sSupPr>
+                      <m:e>
+                        <m:r>
+                          <a:rPr lang="en-US" sz="2800" b="0" i="1" smtClean="0">
+                            <a:solidFill>
+                              <a:srgbClr val="C00000"/>
+                            </a:solidFill>
+                            <a:latin typeface="Cambria Math" panose="02040503050406030204" pitchFamily="18" charset="0"/>
+                            <a:ea typeface="Cambria Math" panose="02040503050406030204" pitchFamily="18" charset="0"/>
+                          </a:rPr>
+                          <m:t>𝑒</m:t>
+                        </m:r>
+                      </m:e>
+                      <m:sup>
+                        <m:r>
+                          <a:rPr lang="en-US" sz="2800" b="0" i="1" smtClean="0">
+                            <a:solidFill>
+                              <a:srgbClr val="C00000"/>
+                            </a:solidFill>
+                            <a:latin typeface="Cambria Math" panose="02040503050406030204" pitchFamily="18" charset="0"/>
+                            <a:ea typeface="Cambria Math" panose="02040503050406030204" pitchFamily="18" charset="0"/>
+                          </a:rPr>
+                          <m:t>−</m:t>
+                        </m:r>
+                      </m:sup>
+                    </m:sSup>
+                    <m:sSup>
+                      <m:sSupPr>
+                        <m:ctrlPr>
+                          <a:rPr lang="en-US" sz="2800" i="1" smtClean="0">
+                            <a:solidFill>
+                              <a:srgbClr val="C00000"/>
+                            </a:solidFill>
+                            <a:latin typeface="Cambria Math" panose="02040503050406030204" pitchFamily="18" charset="0"/>
+                            <a:ea typeface="Cambria Math" panose="02040503050406030204" pitchFamily="18" charset="0"/>
+                          </a:rPr>
+                        </m:ctrlPr>
+                      </m:sSupPr>
+                      <m:e>
+                        <m:r>
+                          <a:rPr lang="en-US" sz="2800" b="0" i="1" smtClean="0">
+                            <a:solidFill>
+                              <a:srgbClr val="C00000"/>
+                            </a:solidFill>
+                            <a:latin typeface="Cambria Math" panose="02040503050406030204" pitchFamily="18" charset="0"/>
+                            <a:ea typeface="Cambria Math" panose="02040503050406030204" pitchFamily="18" charset="0"/>
+                          </a:rPr>
+                          <m:t>𝑒</m:t>
+                        </m:r>
+                      </m:e>
+                      <m:sup>
+                        <m:r>
+                          <a:rPr lang="en-US" sz="2800" b="0" i="1" smtClean="0">
+                            <a:solidFill>
+                              <a:srgbClr val="C00000"/>
+                            </a:solidFill>
+                            <a:latin typeface="Cambria Math" panose="02040503050406030204" pitchFamily="18" charset="0"/>
+                            <a:ea typeface="Cambria Math" panose="02040503050406030204" pitchFamily="18" charset="0"/>
+                          </a:rPr>
+                          <m:t>−</m:t>
+                        </m:r>
+                      </m:sup>
+                    </m:sSup>
+                  </m:oMath>
+                </a14:m>
+                <a:r>
+                  <a:rPr lang="en-US" sz="2800" dirty="0">
+                    <a:solidFill>
+                      <a:srgbClr val="C00000"/>
+                    </a:solidFill>
+                  </a:rPr>
+                  <a:t> Process </a:t>
+                </a:r>
+              </a:p>
+            </p:txBody>
+          </p:sp>
+        </mc:Choice>
+        <mc:Fallback>
+          <p:sp>
+            <p:nvSpPr>
+              <p:cNvPr id="3" name="Title 1">
+                <a:extLst>
+                  <a:ext uri="{FF2B5EF4-FFF2-40B4-BE49-F238E27FC236}">
+                    <a16:creationId xmlns:a16="http://schemas.microsoft.com/office/drawing/2014/main" id="{1B63A3F8-35E4-0EB8-CA33-64A1F6989F63}"/>
+                  </a:ext>
+                </a:extLst>
+              </p:cNvPr>
+              <p:cNvSpPr txBox="1">
+                <a:spLocks noRot="1" noChangeAspect="1" noMove="1" noResize="1" noEditPoints="1" noAdjustHandles="1" noChangeArrowheads="1" noChangeShapeType="1" noTextEdit="1"/>
+              </p:cNvSpPr>
+              <p:nvPr/>
+            </p:nvSpPr>
+            <p:spPr>
+              <a:xfrm>
+                <a:off x="0" y="0"/>
+                <a:ext cx="10515600" cy="596630"/>
+              </a:xfrm>
+              <a:prstGeom prst="rect">
+                <a:avLst/>
+              </a:prstGeom>
+              <a:blipFill>
+                <a:blip r:embed="rId3"/>
+                <a:stretch>
+                  <a:fillRect l="-1206" t="-6250" b="-14583"/>
+                </a:stretch>
+              </a:blipFill>
+            </p:spPr>
+            <p:txBody>
+              <a:bodyPr/>
+              <a:lstStyle/>
+              <a:p>
+                <a:r>
+                  <a:rPr lang="en-US">
+                    <a:noFill/>
+                  </a:rPr>
+                  <a:t> </a:t>
+                </a:r>
+              </a:p>
+            </p:txBody>
+          </p:sp>
+        </mc:Fallback>
+      </mc:AlternateContent>
     </p:spTree>
     <p:extLst>
       <p:ext uri="{BB962C8B-B14F-4D97-AF65-F5344CB8AC3E}">
@@ -14653,34 +16611,6 @@
       </p:grpSpPr>
       <p:sp>
         <p:nvSpPr>
-          <p:cNvPr id="2" name="Title 1">
-            <a:extLst>
-              <a:ext uri="{FF2B5EF4-FFF2-40B4-BE49-F238E27FC236}">
-                <a16:creationId xmlns:a16="http://schemas.microsoft.com/office/drawing/2014/main" id="{DD8BE141-8AF4-86A0-A640-9DC5731FF8FC}"/>
-              </a:ext>
-            </a:extLst>
-          </p:cNvPr>
-          <p:cNvSpPr>
-            <a:spLocks noGrp="1"/>
-          </p:cNvSpPr>
-          <p:nvPr>
-            <p:ph type="title"/>
-          </p:nvPr>
-        </p:nvSpPr>
-        <p:spPr/>
-        <p:txBody>
-          <a:bodyPr/>
-          <a:lstStyle/>
-          <a:p>
-            <a:r>
-              <a:rPr lang="en-US" dirty="0"/>
-              <a:t>Other Tests of CLFV Models</a:t>
-            </a:r>
-          </a:p>
-        </p:txBody>
-      </p:sp>
-      <p:sp>
-        <p:nvSpPr>
           <p:cNvPr id="3" name="Content Placeholder 2">
             <a:extLst>
               <a:ext uri="{FF2B5EF4-FFF2-40B4-BE49-F238E27FC236}">
@@ -14695,12 +16625,17 @@
             <p:ph idx="1"/>
           </p:nvPr>
         </p:nvSpPr>
-        <p:spPr/>
-        <p:txBody>
-          <a:bodyPr/>
-          <a:lstStyle/>
-          <a:p>
-            <a:endParaRPr lang="en-US"/>
+        <p:spPr>
+          <a:xfrm>
+            <a:off x="0" y="424543"/>
+            <a:ext cx="12192000" cy="5995712"/>
+          </a:xfrm>
+        </p:spPr>
+        <p:txBody>
+          <a:bodyPr/>
+          <a:lstStyle/>
+          <a:p>
+            <a:endParaRPr lang="en-US" dirty="0"/>
           </a:p>
         </p:txBody>
       </p:sp>
@@ -14758,6 +16693,64 @@
               <a:t>6</a:t>
             </a:fld>
             <a:endParaRPr lang="en-US"/>
+          </a:p>
+        </p:txBody>
+      </p:sp>
+      <p:sp>
+        <p:nvSpPr>
+          <p:cNvPr id="4" name="Title 1">
+            <a:extLst>
+              <a:ext uri="{FF2B5EF4-FFF2-40B4-BE49-F238E27FC236}">
+                <a16:creationId xmlns:a16="http://schemas.microsoft.com/office/drawing/2014/main" id="{A9FF6A48-4823-EAF6-CB6F-70A68BF119E6}"/>
+              </a:ext>
+            </a:extLst>
+          </p:cNvPr>
+          <p:cNvSpPr txBox="1">
+            <a:spLocks/>
+          </p:cNvSpPr>
+          <p:nvPr/>
+        </p:nvSpPr>
+        <p:spPr>
+          <a:xfrm>
+            <a:off x="0" y="0"/>
+            <a:ext cx="10515600" cy="424543"/>
+          </a:xfrm>
+          <a:prstGeom prst="rect">
+            <a:avLst/>
+          </a:prstGeom>
+        </p:spPr>
+        <p:txBody>
+          <a:bodyPr vert="horz" lIns="91440" tIns="45720" rIns="91440" bIns="45720" rtlCol="0" anchor="ctr">
+            <a:normAutofit fontScale="90000" lnSpcReduction="10000"/>
+          </a:bodyPr>
+          <a:lstStyle>
+            <a:lvl1pPr algn="l" defTabSz="914400" rtl="0" eaLnBrk="1" latinLnBrk="0" hangingPunct="1">
+              <a:lnSpc>
+                <a:spcPct val="90000"/>
+              </a:lnSpc>
+              <a:spcBef>
+                <a:spcPct val="0"/>
+              </a:spcBef>
+              <a:buNone/>
+              <a:defRPr sz="4400" kern="1200">
+                <a:solidFill>
+                  <a:schemeClr val="tx1"/>
+                </a:solidFill>
+                <a:latin typeface="+mj-lt"/>
+                <a:ea typeface="+mj-ea"/>
+                <a:cs typeface="+mj-cs"/>
+              </a:defRPr>
+            </a:lvl1pPr>
+          </a:lstStyle>
+          <a:p>
+            <a:r>
+              <a:rPr lang="en-US" sz="2800" dirty="0">
+                <a:solidFill>
+                  <a:srgbClr val="C00000"/>
+                </a:solidFill>
+              </a:rPr>
+              <a:t>Experimental Tests of CLFV Models and the Future</a:t>
+            </a:r>
           </a:p>
         </p:txBody>
       </p:sp>
@@ -15086,6 +17079,64 @@
           </a:p>
         </p:txBody>
       </p:sp>
+      <p:sp>
+        <p:nvSpPr>
+          <p:cNvPr id="5" name="Title 1">
+            <a:extLst>
+              <a:ext uri="{FF2B5EF4-FFF2-40B4-BE49-F238E27FC236}">
+                <a16:creationId xmlns:a16="http://schemas.microsoft.com/office/drawing/2014/main" id="{0DE701D7-7C9B-664B-8E22-BF0C39792433}"/>
+              </a:ext>
+            </a:extLst>
+          </p:cNvPr>
+          <p:cNvSpPr txBox="1">
+            <a:spLocks/>
+          </p:cNvSpPr>
+          <p:nvPr/>
+        </p:nvSpPr>
+        <p:spPr>
+          <a:xfrm>
+            <a:off x="0" y="0"/>
+            <a:ext cx="10515600" cy="424543"/>
+          </a:xfrm>
+          <a:prstGeom prst="rect">
+            <a:avLst/>
+          </a:prstGeom>
+        </p:spPr>
+        <p:txBody>
+          <a:bodyPr vert="horz" lIns="91440" tIns="45720" rIns="91440" bIns="45720" rtlCol="0" anchor="ctr">
+            <a:normAutofit fontScale="90000" lnSpcReduction="10000"/>
+          </a:bodyPr>
+          <a:lstStyle>
+            <a:lvl1pPr algn="l" defTabSz="914400" rtl="0" eaLnBrk="1" latinLnBrk="0" hangingPunct="1">
+              <a:lnSpc>
+                <a:spcPct val="90000"/>
+              </a:lnSpc>
+              <a:spcBef>
+                <a:spcPct val="0"/>
+              </a:spcBef>
+              <a:buNone/>
+              <a:defRPr sz="4400" kern="1200">
+                <a:solidFill>
+                  <a:schemeClr val="tx1"/>
+                </a:solidFill>
+                <a:latin typeface="+mj-lt"/>
+                <a:ea typeface="+mj-ea"/>
+                <a:cs typeface="+mj-cs"/>
+              </a:defRPr>
+            </a:lvl1pPr>
+          </a:lstStyle>
+          <a:p>
+            <a:r>
+              <a:rPr lang="en-US" sz="2800" dirty="0">
+                <a:solidFill>
+                  <a:srgbClr val="C00000"/>
+                </a:solidFill>
+              </a:rPr>
+              <a:t>Primary Experimental Goals of the Mu2e Experiment</a:t>
+            </a:r>
+          </a:p>
+        </p:txBody>
+      </p:sp>
     </p:spTree>
     <p:extLst>
       <p:ext uri="{BB962C8B-B14F-4D97-AF65-F5344CB8AC3E}">
@@ -15279,6 +17330,64 @@
               <a:t>9</a:t>
             </a:fld>
             <a:endParaRPr lang="en-US"/>
+          </a:p>
+        </p:txBody>
+      </p:sp>
+      <p:sp>
+        <p:nvSpPr>
+          <p:cNvPr id="4" name="Title 1">
+            <a:extLst>
+              <a:ext uri="{FF2B5EF4-FFF2-40B4-BE49-F238E27FC236}">
+                <a16:creationId xmlns:a16="http://schemas.microsoft.com/office/drawing/2014/main" id="{DEBBD662-1FFB-2DE5-3313-B60C630AB3F0}"/>
+              </a:ext>
+            </a:extLst>
+          </p:cNvPr>
+          <p:cNvSpPr txBox="1">
+            <a:spLocks/>
+          </p:cNvSpPr>
+          <p:nvPr/>
+        </p:nvSpPr>
+        <p:spPr>
+          <a:xfrm>
+            <a:off x="0" y="0"/>
+            <a:ext cx="10515600" cy="424543"/>
+          </a:xfrm>
+          <a:prstGeom prst="rect">
+            <a:avLst/>
+          </a:prstGeom>
+        </p:spPr>
+        <p:txBody>
+          <a:bodyPr vert="horz" lIns="91440" tIns="45720" rIns="91440" bIns="45720" rtlCol="0" anchor="ctr">
+            <a:normAutofit fontScale="90000" lnSpcReduction="10000"/>
+          </a:bodyPr>
+          <a:lstStyle>
+            <a:lvl1pPr algn="l" defTabSz="914400" rtl="0" eaLnBrk="1" latinLnBrk="0" hangingPunct="1">
+              <a:lnSpc>
+                <a:spcPct val="90000"/>
+              </a:lnSpc>
+              <a:spcBef>
+                <a:spcPct val="0"/>
+              </a:spcBef>
+              <a:buNone/>
+              <a:defRPr sz="4400" kern="1200">
+                <a:solidFill>
+                  <a:schemeClr val="tx1"/>
+                </a:solidFill>
+                <a:latin typeface="+mj-lt"/>
+                <a:ea typeface="+mj-ea"/>
+                <a:cs typeface="+mj-cs"/>
+              </a:defRPr>
+            </a:lvl1pPr>
+          </a:lstStyle>
+          <a:p>
+            <a:r>
+              <a:rPr lang="en-US" sz="2800" dirty="0">
+                <a:solidFill>
+                  <a:srgbClr val="C00000"/>
+                </a:solidFill>
+              </a:rPr>
+              <a:t>Mu2e Experiment Design</a:t>
+            </a:r>
           </a:p>
         </p:txBody>
       </p:sp>

--- a/ProposalWriting/Presentation/BoldyProposalDefense [Autosaved].pptx
+++ b/ProposalWriting/Presentation/BoldyProposalDefense [Autosaved].pptx
@@ -433,7 +433,7 @@
           <a:p>
             <a:fld id="{49E120CA-99AD-3943-B60B-43DCF85265B8}" type="datetimeFigureOut">
               <a:rPr lang="en-US" smtClean="0"/>
-              <a:t>10/2/26</a:t>
+              <a:t>10/6/26</a:t>
             </a:fld>
             <a:endParaRPr lang="en-US"/>
           </a:p>
@@ -847,7 +847,7 @@
           <a:p>
             <a:fld id="{B105E061-EB09-174B-A0D5-FC5974A2AFFB}" type="datetime1">
               <a:rPr lang="en-US" smtClean="0"/>
-              <a:t>10/2/26</a:t>
+              <a:t>10/6/26</a:t>
             </a:fld>
             <a:endParaRPr lang="en-US"/>
           </a:p>
@@ -1048,7 +1048,7 @@
           <a:p>
             <a:fld id="{621252E1-B88E-3342-B0A7-CCAE0CA75BBB}" type="datetime1">
               <a:rPr lang="en-US" smtClean="0"/>
-              <a:t>10/2/26</a:t>
+              <a:t>10/6/26</a:t>
             </a:fld>
             <a:endParaRPr lang="en-US"/>
           </a:p>
@@ -1259,7 +1259,7 @@
           <a:p>
             <a:fld id="{EACE6763-50BE-5B49-B87C-4D19468B7C96}" type="datetime1">
               <a:rPr lang="en-US" smtClean="0"/>
-              <a:t>10/2/26</a:t>
+              <a:t>10/6/26</a:t>
             </a:fld>
             <a:endParaRPr lang="en-US"/>
           </a:p>
@@ -1460,7 +1460,7 @@
           <a:p>
             <a:fld id="{63944F94-749A-F843-B6E1-57F25A03E432}" type="datetime1">
               <a:rPr lang="en-US" smtClean="0"/>
-              <a:t>10/2/26</a:t>
+              <a:t>10/6/26</a:t>
             </a:fld>
             <a:endParaRPr lang="en-US"/>
           </a:p>
@@ -1738,7 +1738,7 @@
           <a:p>
             <a:fld id="{993C7A3E-56A5-C84D-976C-B35F3FE89F79}" type="datetime1">
               <a:rPr lang="en-US" smtClean="0"/>
-              <a:t>10/2/26</a:t>
+              <a:t>10/6/26</a:t>
             </a:fld>
             <a:endParaRPr lang="en-US"/>
           </a:p>
@@ -2006,7 +2006,7 @@
           <a:p>
             <a:fld id="{F4B52015-7C28-484D-B145-D28E2A08F900}" type="datetime1">
               <a:rPr lang="en-US" smtClean="0"/>
-              <a:t>10/2/26</a:t>
+              <a:t>10/6/26</a:t>
             </a:fld>
             <a:endParaRPr lang="en-US"/>
           </a:p>
@@ -2421,7 +2421,7 @@
           <a:p>
             <a:fld id="{FCA991B3-1372-E242-8B38-E6436435C338}" type="datetime1">
               <a:rPr lang="en-US" smtClean="0"/>
-              <a:t>10/2/26</a:t>
+              <a:t>10/6/26</a:t>
             </a:fld>
             <a:endParaRPr lang="en-US"/>
           </a:p>
@@ -2565,7 +2565,7 @@
           <a:p>
             <a:fld id="{919EF1DF-064D-3A44-9645-D74AED0CCD60}" type="datetime1">
               <a:rPr lang="en-US" smtClean="0"/>
-              <a:t>10/2/26</a:t>
+              <a:t>10/6/26</a:t>
             </a:fld>
             <a:endParaRPr lang="en-US"/>
           </a:p>
@@ -2681,7 +2681,7 @@
           <a:p>
             <a:fld id="{7802D0E8-747A-794C-8F8A-E949892A428B}" type="datetime1">
               <a:rPr lang="en-US" smtClean="0"/>
-              <a:t>10/2/26</a:t>
+              <a:t>10/6/26</a:t>
             </a:fld>
             <a:endParaRPr lang="en-US"/>
           </a:p>
@@ -2995,7 +2995,7 @@
           <a:p>
             <a:fld id="{6369CB82-7A51-6E4C-81E6-424375AAB724}" type="datetime1">
               <a:rPr lang="en-US" smtClean="0"/>
-              <a:t>10/2/26</a:t>
+              <a:t>10/6/26</a:t>
             </a:fld>
             <a:endParaRPr lang="en-US"/>
           </a:p>
@@ -3286,7 +3286,7 @@
           <a:p>
             <a:fld id="{88931E28-5FD3-854B-AAE6-645D4F1C2615}" type="datetime1">
               <a:rPr lang="en-US" smtClean="0"/>
-              <a:t>10/2/26</a:t>
+              <a:t>10/6/26</a:t>
             </a:fld>
             <a:endParaRPr lang="en-US"/>
           </a:p>
@@ -3530,7 +3530,7 @@
           <a:p>
             <a:fld id="{13B6B83F-07D0-CF48-A32E-56605F2D4971}" type="datetime1">
               <a:rPr lang="en-US" smtClean="0"/>
-              <a:t>10/2/26</a:t>
+              <a:t>10/6/26</a:t>
             </a:fld>
             <a:endParaRPr lang="en-US"/>
           </a:p>
@@ -4174,17 +4174,45 @@
         </p:nvSpPr>
         <p:spPr>
           <a:xfrm>
-            <a:off x="1524000" y="1995558"/>
-            <a:ext cx="9144000" cy="1655762"/>
+            <a:off x="1524000" y="1995557"/>
+            <a:ext cx="9144000" cy="2644681"/>
           </a:xfrm>
         </p:spPr>
         <p:txBody>
-          <a:bodyPr/>
+          <a:bodyPr>
+            <a:normAutofit lnSpcReduction="10000"/>
+          </a:bodyPr>
           <a:lstStyle/>
           <a:p>
             <a:r>
               <a:rPr lang="en-US" dirty="0"/>
               <a:t>Andrew Boldy</a:t>
+            </a:r>
+          </a:p>
+          <a:p>
+            <a:r>
+              <a:rPr lang="en-US" dirty="0"/>
+              <a:t>Major Professor: Dr. Dave Tedeschi</a:t>
+            </a:r>
+          </a:p>
+          <a:p>
+            <a:r>
+              <a:rPr lang="en-US" dirty="0"/>
+              <a:t>USC Committee Members: Dr. Alexey Petrov, Dr. Matthias Schindler</a:t>
+            </a:r>
+          </a:p>
+          <a:p>
+            <a:r>
+              <a:rPr lang="en-US" dirty="0"/>
+              <a:t>External Committee Member: Dr. Bertrand </a:t>
+            </a:r>
+            <a:r>
+              <a:rPr lang="en-US" dirty="0" err="1"/>
+              <a:t>Echenard</a:t>
+            </a:r>
+            <a:r>
+              <a:rPr lang="en-US" dirty="0"/>
+              <a:t> (Cal Tech)</a:t>
             </a:r>
           </a:p>
           <a:p>
@@ -4975,8 +5003,8 @@
           </a:prstGeom>
         </p:spPr>
       </p:pic>
-      <mc:AlternateContent xmlns:mc="http://schemas.openxmlformats.org/markup-compatibility/2006">
-        <mc:Choice xmlns:a14="http://schemas.microsoft.com/office/drawing/2010/main" Requires="a14">
+      <mc:AlternateContent xmlns:mc="http://schemas.openxmlformats.org/markup-compatibility/2006" xmlns:a14="http://schemas.microsoft.com/office/drawing/2010/main">
+        <mc:Choice Requires="a14">
           <p:sp>
             <p:nvSpPr>
               <p:cNvPr id="4" name="Title 1">
@@ -5034,6 +5062,7 @@
                               <a:srgbClr val="C00000"/>
                             </a:solidFill>
                             <a:latin typeface="Cambria Math" panose="02040503050406030204" pitchFamily="18" charset="0"/>
+                            <a:ea typeface="Cambria Math" panose="02040503050406030204" pitchFamily="18" charset="0"/>
                           </a:rPr>
                         </m:ctrlPr>
                       </m:sSupPr>
@@ -5064,7 +5093,7 @@
                     <m:sSup>
                       <m:sSupPr>
                         <m:ctrlPr>
-                          <a:rPr lang="en-US" sz="2800" i="1" smtClean="0">
+                          <a:rPr lang="en-US" sz="2800" b="0" i="1" smtClean="0">
                             <a:solidFill>
                               <a:srgbClr val="C00000"/>
                             </a:solidFill>
@@ -5108,7 +5137,7 @@
                     <m:sSup>
                       <m:sSupPr>
                         <m:ctrlPr>
-                          <a:rPr lang="en-US" sz="2800" i="1" smtClean="0">
+                          <a:rPr lang="en-US" sz="2800" b="0" i="1" smtClean="0">
                             <a:solidFill>
                               <a:srgbClr val="C00000"/>
                             </a:solidFill>
@@ -5145,7 +5174,7 @@
                     <m:sSup>
                       <m:sSupPr>
                         <m:ctrlPr>
-                          <a:rPr lang="en-US" sz="2800" i="1" smtClean="0">
+                          <a:rPr lang="en-US" sz="2800" b="0" i="1" smtClean="0">
                             <a:solidFill>
                               <a:srgbClr val="C00000"/>
                             </a:solidFill>
@@ -5193,7 +5222,7 @@
             </p:txBody>
           </p:sp>
         </mc:Choice>
-        <mc:Fallback>
+        <mc:Fallback xmlns="">
           <p:sp>
             <p:nvSpPr>
               <p:cNvPr id="4" name="Title 1">
@@ -5483,54 +5512,37 @@
       </p:grpSpPr>
       <p:sp>
         <p:nvSpPr>
-          <p:cNvPr id="2" name="Title 1">
-            <a:extLst>
-              <a:ext uri="{FF2B5EF4-FFF2-40B4-BE49-F238E27FC236}">
-                <a16:creationId xmlns:a16="http://schemas.microsoft.com/office/drawing/2014/main" id="{1678ABB6-7B21-3D6E-E425-8864689338D7}"/>
-              </a:ext>
-            </a:extLst>
-          </p:cNvPr>
-          <p:cNvSpPr>
-            <a:spLocks noGrp="1"/>
-          </p:cNvSpPr>
-          <p:nvPr>
-            <p:ph type="title"/>
-          </p:nvPr>
-        </p:nvSpPr>
-        <p:spPr/>
+          <p:cNvPr id="3" name="Content Placeholder 2">
+            <a:extLst>
+              <a:ext uri="{FF2B5EF4-FFF2-40B4-BE49-F238E27FC236}">
+                <a16:creationId xmlns:a16="http://schemas.microsoft.com/office/drawing/2014/main" id="{5C082BC7-D665-4282-10FB-7CD5404EA439}"/>
+              </a:ext>
+            </a:extLst>
+          </p:cNvPr>
+          <p:cNvSpPr>
+            <a:spLocks noGrp="1"/>
+          </p:cNvSpPr>
+          <p:nvPr>
+            <p:ph idx="1"/>
+          </p:nvPr>
+        </p:nvSpPr>
+        <p:spPr>
+          <a:xfrm>
+            <a:off x="0" y="424542"/>
+            <a:ext cx="12192000" cy="5931807"/>
+          </a:xfrm>
+        </p:spPr>
         <p:txBody>
           <a:bodyPr/>
           <a:lstStyle/>
           <a:p>
             <a:r>
               <a:rPr lang="en-US" dirty="0"/>
-              <a:t>Vertexing</a:t>
-            </a:r>
-          </a:p>
-        </p:txBody>
-      </p:sp>
-      <p:sp>
-        <p:nvSpPr>
-          <p:cNvPr id="3" name="Content Placeholder 2">
-            <a:extLst>
-              <a:ext uri="{FF2B5EF4-FFF2-40B4-BE49-F238E27FC236}">
-                <a16:creationId xmlns:a16="http://schemas.microsoft.com/office/drawing/2014/main" id="{5C082BC7-D665-4282-10FB-7CD5404EA439}"/>
-              </a:ext>
-            </a:extLst>
-          </p:cNvPr>
-          <p:cNvSpPr>
-            <a:spLocks noGrp="1"/>
-          </p:cNvSpPr>
-          <p:nvPr>
-            <p:ph idx="1"/>
-          </p:nvPr>
-        </p:nvSpPr>
-        <p:spPr/>
-        <p:txBody>
-          <a:bodyPr/>
-          <a:lstStyle/>
-          <a:p>
-            <a:endParaRPr lang="en-US"/>
+              <a:t>Parameterization of track reconstructions</a:t>
+            </a:r>
+          </a:p>
+          <a:p>
+            <a:endParaRPr lang="en-US" dirty="0"/>
           </a:p>
         </p:txBody>
       </p:sp>
@@ -6191,7 +6203,7 @@
                       <m:accPr>
                         <m:chr m:val="⃑"/>
                         <m:ctrlPr>
-                          <a:rPr lang="en-US" i="1" smtClean="0">
+                          <a:rPr lang="en-US" b="0" i="1" smtClean="0">
                             <a:latin typeface="Cambria Math" panose="02040503050406030204" pitchFamily="18" charset="0"/>
                           </a:rPr>
                         </m:ctrlPr>
@@ -6451,7 +6463,7 @@
                       <m:accPr>
                         <m:chr m:val="⃑"/>
                         <m:ctrlPr>
-                          <a:rPr lang="en-US" i="1" smtClean="0">
+                          <a:rPr lang="en-US" b="0" i="1" smtClean="0">
                             <a:latin typeface="Cambria Math" panose="02040503050406030204" pitchFamily="18" charset="0"/>
                           </a:rPr>
                         </m:ctrlPr>
@@ -7078,7 +7090,7 @@
                       <m:accPr>
                         <m:chr m:val="⃑"/>
                         <m:ctrlPr>
-                          <a:rPr lang="en-US" i="1" smtClean="0">
+                          <a:rPr lang="en-US" b="0" i="1" smtClean="0">
                             <a:latin typeface="Cambria Math" panose="02040503050406030204" pitchFamily="18" charset="0"/>
                           </a:rPr>
                         </m:ctrlPr>
@@ -7382,7 +7394,7 @@
                       <m:accPr>
                         <m:chr m:val="⃑"/>
                         <m:ctrlPr>
-                          <a:rPr lang="en-US" i="1" smtClean="0">
+                          <a:rPr lang="en-US" b="0" i="1" smtClean="0">
                             <a:latin typeface="Cambria Math" panose="02040503050406030204" pitchFamily="18" charset="0"/>
                           </a:rPr>
                         </m:ctrlPr>
@@ -8177,7 +8189,7 @@
                       <m:accPr>
                         <m:chr m:val="⃑"/>
                         <m:ctrlPr>
-                          <a:rPr lang="en-US" i="1" smtClean="0">
+                          <a:rPr lang="en-US" b="0" i="1" smtClean="0">
                             <a:latin typeface="Cambria Math" panose="02040503050406030204" pitchFamily="18" charset="0"/>
                           </a:rPr>
                         </m:ctrlPr>
@@ -8330,7 +8342,7 @@
                       <m:accPr>
                         <m:chr m:val="⃑"/>
                         <m:ctrlPr>
-                          <a:rPr lang="en-US" i="1" smtClean="0">
+                          <a:rPr lang="en-US" b="0" i="1" smtClean="0">
                             <a:latin typeface="Cambria Math" panose="02040503050406030204" pitchFamily="18" charset="0"/>
                           </a:rPr>
                         </m:ctrlPr>
@@ -8483,7 +8495,7 @@
                       <m:accPr>
                         <m:chr m:val="⃑"/>
                         <m:ctrlPr>
-                          <a:rPr lang="en-US" i="1" smtClean="0">
+                          <a:rPr lang="en-US" b="0" i="1" smtClean="0">
                             <a:latin typeface="Cambria Math" panose="02040503050406030204" pitchFamily="18" charset="0"/>
                           </a:rPr>
                         </m:ctrlPr>
@@ -8655,7 +8667,7 @@
                       <m:accPr>
                         <m:chr m:val="⃑"/>
                         <m:ctrlPr>
-                          <a:rPr lang="en-US" i="1" smtClean="0">
+                          <a:rPr lang="en-US" b="0" i="1" smtClean="0">
                             <a:latin typeface="Cambria Math" panose="02040503050406030204" pitchFamily="18" charset="0"/>
                           </a:rPr>
                         </m:ctrlPr>
@@ -8952,15 +8964,12 @@
                 <a:pPr/>
                 <a14:m>
                   <m:oMathPara xmlns:m="http://schemas.openxmlformats.org/officeDocument/2006/math">
-                    <m:oMathParaPr>
-                      <m:jc m:val="centerGroup"/>
-                    </m:oMathParaPr>
-                    <m:oMath xmlns:m="http://schemas.openxmlformats.org/officeDocument/2006/math">
+                    <m:oMath>
                       <m:acc>
                         <m:accPr>
                           <m:chr m:val="⃑"/>
                           <m:ctrlPr>
-                            <a:rPr lang="en-US" i="1" smtClean="0">
+                            <a:rPr lang="en-US" b="0" i="1" smtClean="0">
                               <a:latin typeface="Cambria Math" panose="02040503050406030204" pitchFamily="18" charset="0"/>
                             </a:rPr>
                           </m:ctrlPr>
@@ -10536,54 +10545,31 @@
       </p:grpSpPr>
       <p:sp>
         <p:nvSpPr>
-          <p:cNvPr id="2" name="Title 1">
-            <a:extLst>
-              <a:ext uri="{FF2B5EF4-FFF2-40B4-BE49-F238E27FC236}">
-                <a16:creationId xmlns:a16="http://schemas.microsoft.com/office/drawing/2014/main" id="{93C2AF71-8E34-2CAA-7AB0-F0179C17C2DE}"/>
-              </a:ext>
-            </a:extLst>
-          </p:cNvPr>
-          <p:cNvSpPr>
-            <a:spLocks noGrp="1"/>
-          </p:cNvSpPr>
-          <p:nvPr>
-            <p:ph type="title"/>
-          </p:nvPr>
-        </p:nvSpPr>
-        <p:spPr/>
+          <p:cNvPr id="3" name="Content Placeholder 2">
+            <a:extLst>
+              <a:ext uri="{FF2B5EF4-FFF2-40B4-BE49-F238E27FC236}">
+                <a16:creationId xmlns:a16="http://schemas.microsoft.com/office/drawing/2014/main" id="{80023601-D1BA-D1E2-CE47-90BA3D838FE3}"/>
+              </a:ext>
+            </a:extLst>
+          </p:cNvPr>
+          <p:cNvSpPr>
+            <a:spLocks noGrp="1"/>
+          </p:cNvSpPr>
+          <p:nvPr>
+            <p:ph idx="1"/>
+          </p:nvPr>
+        </p:nvSpPr>
+        <p:spPr>
+          <a:xfrm>
+            <a:off x="0" y="424542"/>
+            <a:ext cx="12192000" cy="5931807"/>
+          </a:xfrm>
+        </p:spPr>
         <p:txBody>
           <a:bodyPr/>
           <a:lstStyle/>
           <a:p>
-            <a:r>
-              <a:rPr lang="en-US" dirty="0"/>
-              <a:t>Toy-Generator Creation and Validation</a:t>
-            </a:r>
-          </a:p>
-        </p:txBody>
-      </p:sp>
-      <p:sp>
-        <p:nvSpPr>
-          <p:cNvPr id="3" name="Content Placeholder 2">
-            <a:extLst>
-              <a:ext uri="{FF2B5EF4-FFF2-40B4-BE49-F238E27FC236}">
-                <a16:creationId xmlns:a16="http://schemas.microsoft.com/office/drawing/2014/main" id="{80023601-D1BA-D1E2-CE47-90BA3D838FE3}"/>
-              </a:ext>
-            </a:extLst>
-          </p:cNvPr>
-          <p:cNvSpPr>
-            <a:spLocks noGrp="1"/>
-          </p:cNvSpPr>
-          <p:nvPr>
-            <p:ph idx="1"/>
-          </p:nvPr>
-        </p:nvSpPr>
-        <p:spPr/>
-        <p:txBody>
-          <a:bodyPr/>
-          <a:lstStyle/>
-          <a:p>
-            <a:endParaRPr lang="en-US"/>
+            <a:endParaRPr lang="en-US" dirty="0"/>
           </a:p>
         </p:txBody>
       </p:sp>
@@ -11011,34 +10997,6 @@
       </p:grpSpPr>
       <p:sp>
         <p:nvSpPr>
-          <p:cNvPr id="2" name="Title 1">
-            <a:extLst>
-              <a:ext uri="{FF2B5EF4-FFF2-40B4-BE49-F238E27FC236}">
-                <a16:creationId xmlns:a16="http://schemas.microsoft.com/office/drawing/2014/main" id="{36DCFFC3-E975-E0F8-4BFD-C28C957E38B1}"/>
-              </a:ext>
-            </a:extLst>
-          </p:cNvPr>
-          <p:cNvSpPr>
-            <a:spLocks noGrp="1"/>
-          </p:cNvSpPr>
-          <p:nvPr>
-            <p:ph type="title"/>
-          </p:nvPr>
-        </p:nvSpPr>
-        <p:spPr/>
-        <p:txBody>
-          <a:bodyPr/>
-          <a:lstStyle/>
-          <a:p>
-            <a:r>
-              <a:rPr lang="en-US" dirty="0"/>
-              <a:t>Analysis Products (from Stops)</a:t>
-            </a:r>
-          </a:p>
-        </p:txBody>
-      </p:sp>
-      <p:sp>
-        <p:nvSpPr>
           <p:cNvPr id="3" name="Content Placeholder 2">
             <a:extLst>
               <a:ext uri="{FF2B5EF4-FFF2-40B4-BE49-F238E27FC236}">
@@ -11053,7 +11011,12 @@
             <p:ph idx="1"/>
           </p:nvPr>
         </p:nvSpPr>
-        <p:spPr/>
+        <p:spPr>
+          <a:xfrm>
+            <a:off x="0" y="424542"/>
+            <a:ext cx="12192000" cy="5931807"/>
+          </a:xfrm>
+        </p:spPr>
         <p:txBody>
           <a:bodyPr/>
           <a:lstStyle/>
@@ -11346,34 +11309,6 @@
       </p:grpSpPr>
       <p:sp>
         <p:nvSpPr>
-          <p:cNvPr id="2" name="Title 1">
-            <a:extLst>
-              <a:ext uri="{FF2B5EF4-FFF2-40B4-BE49-F238E27FC236}">
-                <a16:creationId xmlns:a16="http://schemas.microsoft.com/office/drawing/2014/main" id="{D2E68E33-2728-D6B4-AA72-1603BD572F74}"/>
-              </a:ext>
-            </a:extLst>
-          </p:cNvPr>
-          <p:cNvSpPr>
-            <a:spLocks noGrp="1"/>
-          </p:cNvSpPr>
-          <p:nvPr>
-            <p:ph type="title"/>
-          </p:nvPr>
-        </p:nvSpPr>
-        <p:spPr/>
-        <p:txBody>
-          <a:bodyPr/>
-          <a:lstStyle/>
-          <a:p>
-            <a:r>
-              <a:rPr lang="en-US" dirty="0"/>
-              <a:t>Candidacy Cuts for Vertexing</a:t>
-            </a:r>
-          </a:p>
-        </p:txBody>
-      </p:sp>
-      <p:sp>
-        <p:nvSpPr>
           <p:cNvPr id="3" name="Content Placeholder 2">
             <a:extLst>
               <a:ext uri="{FF2B5EF4-FFF2-40B4-BE49-F238E27FC236}">
@@ -11388,7 +11323,12 @@
             <p:ph idx="1"/>
           </p:nvPr>
         </p:nvSpPr>
-        <p:spPr/>
+        <p:spPr>
+          <a:xfrm>
+            <a:off x="0" y="424542"/>
+            <a:ext cx="12192000" cy="5931807"/>
+          </a:xfrm>
+        </p:spPr>
         <p:txBody>
           <a:bodyPr/>
           <a:lstStyle/>
@@ -11681,38 +11621,6 @@
       </p:grpSpPr>
       <p:sp>
         <p:nvSpPr>
-          <p:cNvPr id="2" name="Title 1">
-            <a:extLst>
-              <a:ext uri="{FF2B5EF4-FFF2-40B4-BE49-F238E27FC236}">
-                <a16:creationId xmlns:a16="http://schemas.microsoft.com/office/drawing/2014/main" id="{70F8309C-832E-1138-7AA0-3DDACD61FF66}"/>
-              </a:ext>
-            </a:extLst>
-          </p:cNvPr>
-          <p:cNvSpPr>
-            <a:spLocks noGrp="1"/>
-          </p:cNvSpPr>
-          <p:nvPr>
-            <p:ph type="title"/>
-          </p:nvPr>
-        </p:nvSpPr>
-        <p:spPr/>
-        <p:txBody>
-          <a:bodyPr/>
-          <a:lstStyle/>
-          <a:p>
-            <a:r>
-              <a:rPr lang="en-US" dirty="0" err="1"/>
-              <a:t>Vertexer</a:t>
-            </a:r>
-            <a:r>
-              <a:rPr lang="en-US" dirty="0"/>
-              <a:t> Resolution</a:t>
-            </a:r>
-          </a:p>
-        </p:txBody>
-      </p:sp>
-      <p:sp>
-        <p:nvSpPr>
           <p:cNvPr id="3" name="Content Placeholder 2">
             <a:extLst>
               <a:ext uri="{FF2B5EF4-FFF2-40B4-BE49-F238E27FC236}">
@@ -11727,7 +11635,12 @@
             <p:ph idx="1"/>
           </p:nvPr>
         </p:nvSpPr>
-        <p:spPr/>
+        <p:spPr>
+          <a:xfrm>
+            <a:off x="0" y="424542"/>
+            <a:ext cx="12192000" cy="5931807"/>
+          </a:xfrm>
+        </p:spPr>
         <p:txBody>
           <a:bodyPr/>
           <a:lstStyle/>
@@ -12160,38 +12073,6 @@
       </p:grpSpPr>
       <p:sp>
         <p:nvSpPr>
-          <p:cNvPr id="2" name="Title 1">
-            <a:extLst>
-              <a:ext uri="{FF2B5EF4-FFF2-40B4-BE49-F238E27FC236}">
-                <a16:creationId xmlns:a16="http://schemas.microsoft.com/office/drawing/2014/main" id="{C359B161-21B7-E5E6-A68F-12F3880292B3}"/>
-              </a:ext>
-            </a:extLst>
-          </p:cNvPr>
-          <p:cNvSpPr>
-            <a:spLocks noGrp="1"/>
-          </p:cNvSpPr>
-          <p:nvPr>
-            <p:ph type="title"/>
-          </p:nvPr>
-        </p:nvSpPr>
-        <p:spPr/>
-        <p:txBody>
-          <a:bodyPr/>
-          <a:lstStyle/>
-          <a:p>
-            <a:r>
-              <a:rPr lang="en-US" dirty="0" err="1"/>
-              <a:t>Vertexer</a:t>
-            </a:r>
-            <a:r>
-              <a:rPr lang="en-US" dirty="0"/>
-              <a:t> Improvements</a:t>
-            </a:r>
-          </a:p>
-        </p:txBody>
-      </p:sp>
-      <p:sp>
-        <p:nvSpPr>
           <p:cNvPr id="3" name="Content Placeholder 2">
             <a:extLst>
               <a:ext uri="{FF2B5EF4-FFF2-40B4-BE49-F238E27FC236}">
@@ -12206,7 +12087,12 @@
             <p:ph idx="1"/>
           </p:nvPr>
         </p:nvSpPr>
-        <p:spPr/>
+        <p:spPr>
+          <a:xfrm>
+            <a:off x="0" y="424542"/>
+            <a:ext cx="12192000" cy="5931807"/>
+          </a:xfrm>
+        </p:spPr>
         <p:txBody>
           <a:bodyPr/>
           <a:lstStyle/>
@@ -12362,54 +12248,31 @@
       </p:grpSpPr>
       <p:sp>
         <p:nvSpPr>
-          <p:cNvPr id="2" name="Title 1">
-            <a:extLst>
-              <a:ext uri="{FF2B5EF4-FFF2-40B4-BE49-F238E27FC236}">
-                <a16:creationId xmlns:a16="http://schemas.microsoft.com/office/drawing/2014/main" id="{9FF94AB4-2094-057F-2C85-626AF64DE003}"/>
-              </a:ext>
-            </a:extLst>
-          </p:cNvPr>
-          <p:cNvSpPr>
-            <a:spLocks noGrp="1"/>
-          </p:cNvSpPr>
-          <p:nvPr>
-            <p:ph type="title"/>
-          </p:nvPr>
-        </p:nvSpPr>
-        <p:spPr/>
+          <p:cNvPr id="3" name="Content Placeholder 2">
+            <a:extLst>
+              <a:ext uri="{FF2B5EF4-FFF2-40B4-BE49-F238E27FC236}">
+                <a16:creationId xmlns:a16="http://schemas.microsoft.com/office/drawing/2014/main" id="{13699EC3-B19A-42E0-3396-2DD015FEE3E0}"/>
+              </a:ext>
+            </a:extLst>
+          </p:cNvPr>
+          <p:cNvSpPr>
+            <a:spLocks noGrp="1"/>
+          </p:cNvSpPr>
+          <p:nvPr>
+            <p:ph idx="1"/>
+          </p:nvPr>
+        </p:nvSpPr>
+        <p:spPr>
+          <a:xfrm>
+            <a:off x="0" y="551234"/>
+            <a:ext cx="12192000" cy="5805116"/>
+          </a:xfrm>
+        </p:spPr>
         <p:txBody>
           <a:bodyPr/>
           <a:lstStyle/>
           <a:p>
-            <a:r>
-              <a:rPr lang="en-US" dirty="0"/>
-              <a:t>Mixing of Relevant Backgrounds with Process</a:t>
-            </a:r>
-          </a:p>
-        </p:txBody>
-      </p:sp>
-      <p:sp>
-        <p:nvSpPr>
-          <p:cNvPr id="3" name="Content Placeholder 2">
-            <a:extLst>
-              <a:ext uri="{FF2B5EF4-FFF2-40B4-BE49-F238E27FC236}">
-                <a16:creationId xmlns:a16="http://schemas.microsoft.com/office/drawing/2014/main" id="{13699EC3-B19A-42E0-3396-2DD015FEE3E0}"/>
-              </a:ext>
-            </a:extLst>
-          </p:cNvPr>
-          <p:cNvSpPr>
-            <a:spLocks noGrp="1"/>
-          </p:cNvSpPr>
-          <p:nvPr>
-            <p:ph idx="1"/>
-          </p:nvPr>
-        </p:nvSpPr>
-        <p:spPr/>
-        <p:txBody>
-          <a:bodyPr/>
-          <a:lstStyle/>
-          <a:p>
-            <a:endParaRPr lang="en-US"/>
+            <a:endParaRPr lang="en-US" dirty="0"/>
           </a:p>
         </p:txBody>
       </p:sp>
@@ -12470,8 +12333,8 @@
           </a:p>
         </p:txBody>
       </p:sp>
-      <mc:AlternateContent xmlns:mc="http://schemas.openxmlformats.org/markup-compatibility/2006">
-        <mc:Choice xmlns:a14="http://schemas.microsoft.com/office/drawing/2010/main" Requires="a14">
+      <mc:AlternateContent xmlns:mc="http://schemas.openxmlformats.org/markup-compatibility/2006" xmlns:a14="http://schemas.microsoft.com/office/drawing/2010/main">
+        <mc:Choice Requires="a14">
           <p:sp>
             <p:nvSpPr>
               <p:cNvPr id="4" name="Title 1">
@@ -12537,6 +12400,7 @@
                               <a:srgbClr val="C00000"/>
                             </a:solidFill>
                             <a:latin typeface="Cambria Math" panose="02040503050406030204" pitchFamily="18" charset="0"/>
+                            <a:ea typeface="Cambria Math" panose="02040503050406030204" pitchFamily="18" charset="0"/>
                           </a:rPr>
                         </m:ctrlPr>
                       </m:sSupPr>
@@ -12567,7 +12431,7 @@
                     <m:sSup>
                       <m:sSupPr>
                         <m:ctrlPr>
-                          <a:rPr lang="en-US" sz="2800" i="1" smtClean="0">
+                          <a:rPr lang="en-US" sz="2800" b="0" i="1" smtClean="0">
                             <a:solidFill>
                               <a:srgbClr val="C00000"/>
                             </a:solidFill>
@@ -12611,7 +12475,7 @@
                     <m:sSup>
                       <m:sSupPr>
                         <m:ctrlPr>
-                          <a:rPr lang="en-US" sz="2800" i="1" smtClean="0">
+                          <a:rPr lang="en-US" sz="2800" b="0" i="1" smtClean="0">
                             <a:solidFill>
                               <a:srgbClr val="C00000"/>
                             </a:solidFill>
@@ -12648,7 +12512,7 @@
                     <m:sSup>
                       <m:sSupPr>
                         <m:ctrlPr>
-                          <a:rPr lang="en-US" sz="2800" i="1" smtClean="0">
+                          <a:rPr lang="en-US" sz="2800" b="0" i="1" smtClean="0">
                             <a:solidFill>
                               <a:srgbClr val="C00000"/>
                             </a:solidFill>
@@ -12696,7 +12560,7 @@
             </p:txBody>
           </p:sp>
         </mc:Choice>
-        <mc:Fallback>
+        <mc:Fallback xmlns="">
           <p:sp>
             <p:nvSpPr>
               <p:cNvPr id="4" name="Title 1">
@@ -12773,34 +12637,6 @@
       </p:grpSpPr>
       <p:sp>
         <p:nvSpPr>
-          <p:cNvPr id="2" name="Title 1">
-            <a:extLst>
-              <a:ext uri="{FF2B5EF4-FFF2-40B4-BE49-F238E27FC236}">
-                <a16:creationId xmlns:a16="http://schemas.microsoft.com/office/drawing/2014/main" id="{8637BF2B-5112-4B4D-10C3-5AF9705442AE}"/>
-              </a:ext>
-            </a:extLst>
-          </p:cNvPr>
-          <p:cNvSpPr>
-            <a:spLocks noGrp="1"/>
-          </p:cNvSpPr>
-          <p:nvPr>
-            <p:ph type="title"/>
-          </p:nvPr>
-        </p:nvSpPr>
-        <p:spPr/>
-        <p:txBody>
-          <a:bodyPr/>
-          <a:lstStyle/>
-          <a:p>
-            <a:r>
-              <a:rPr lang="en-US" dirty="0"/>
-              <a:t>Theoretical Refinement of Generator</a:t>
-            </a:r>
-          </a:p>
-        </p:txBody>
-      </p:sp>
-      <p:sp>
-        <p:nvSpPr>
           <p:cNvPr id="3" name="Content Placeholder 2">
             <a:extLst>
               <a:ext uri="{FF2B5EF4-FFF2-40B4-BE49-F238E27FC236}">
@@ -12815,7 +12651,12 @@
             <p:ph idx="1"/>
           </p:nvPr>
         </p:nvSpPr>
-        <p:spPr/>
+        <p:spPr>
+          <a:xfrm>
+            <a:off x="0" y="424542"/>
+            <a:ext cx="12192000" cy="5931807"/>
+          </a:xfrm>
+        </p:spPr>
         <p:txBody>
           <a:bodyPr/>
           <a:lstStyle/>
@@ -12969,59 +12810,66 @@
           <a:chExt cx="0" cy="0"/>
         </a:xfrm>
       </p:grpSpPr>
-      <p:sp>
-        <p:nvSpPr>
-          <p:cNvPr id="3" name="Content Placeholder 2">
-            <a:extLst>
-              <a:ext uri="{FF2B5EF4-FFF2-40B4-BE49-F238E27FC236}">
-                <a16:creationId xmlns:a16="http://schemas.microsoft.com/office/drawing/2014/main" id="{133185E4-2D81-D0B6-1538-D0309E1C74B5}"/>
-              </a:ext>
-            </a:extLst>
-          </p:cNvPr>
-          <p:cNvSpPr>
-            <a:spLocks noGrp="1"/>
-          </p:cNvSpPr>
+      <p:pic>
+        <p:nvPicPr>
+          <p:cNvPr id="4" name="Content Placeholder 3">
+            <a:extLst>
+              <a:ext uri="{FF2B5EF4-FFF2-40B4-BE49-F238E27FC236}">
+                <a16:creationId xmlns:a16="http://schemas.microsoft.com/office/drawing/2014/main" id="{26209EC7-1D2D-AD08-833B-AE136434F90D}"/>
+              </a:ext>
+            </a:extLst>
+          </p:cNvPr>
+          <p:cNvPicPr>
+            <a:picLocks noGrp="1" noChangeAspect="1"/>
+          </p:cNvPicPr>
           <p:nvPr>
             <p:ph idx="1"/>
           </p:nvPr>
-        </p:nvSpPr>
+        </p:nvPicPr>
+        <p:blipFill>
+          <a:blip r:embed="rId2"/>
+          <a:stretch>
+            <a:fillRect/>
+          </a:stretch>
+        </p:blipFill>
         <p:spPr>
           <a:xfrm>
-            <a:off x="0" y="424544"/>
-            <a:ext cx="12192000" cy="5752420"/>
+            <a:off x="-4549" y="424543"/>
+            <a:ext cx="6011989" cy="5753100"/>
+          </a:xfrm>
+          <a:prstGeom prst="rect">
+            <a:avLst/>
+          </a:prstGeom>
+        </p:spPr>
+      </p:pic>
+      <p:sp>
+        <p:nvSpPr>
+          <p:cNvPr id="5" name="Footer Placeholder 4">
+            <a:extLst>
+              <a:ext uri="{FF2B5EF4-FFF2-40B4-BE49-F238E27FC236}">
+                <a16:creationId xmlns:a16="http://schemas.microsoft.com/office/drawing/2014/main" id="{1F356C43-9187-1D95-38CE-90813B843A4F}"/>
+              </a:ext>
+            </a:extLst>
+          </p:cNvPr>
+          <p:cNvSpPr>
+            <a:spLocks noGrp="1"/>
+          </p:cNvSpPr>
+          <p:nvPr>
+            <p:ph type="ftr" sz="quarter" idx="11"/>
+          </p:nvPr>
+        </p:nvSpPr>
+        <p:spPr>
+          <a:xfrm>
+            <a:off x="4038600" y="6492875"/>
+            <a:ext cx="4114800" cy="365125"/>
           </a:xfrm>
         </p:spPr>
         <p:txBody>
           <a:bodyPr/>
           <a:lstStyle/>
           <a:p>
-            <a:endParaRPr lang="en-US" dirty="0"/>
-          </a:p>
-        </p:txBody>
-      </p:sp>
-      <p:sp>
-        <p:nvSpPr>
-          <p:cNvPr id="5" name="Footer Placeholder 4">
-            <a:extLst>
-              <a:ext uri="{FF2B5EF4-FFF2-40B4-BE49-F238E27FC236}">
-                <a16:creationId xmlns:a16="http://schemas.microsoft.com/office/drawing/2014/main" id="{1F356C43-9187-1D95-38CE-90813B843A4F}"/>
-              </a:ext>
-            </a:extLst>
-          </p:cNvPr>
-          <p:cNvSpPr>
-            <a:spLocks noGrp="1"/>
-          </p:cNvSpPr>
-          <p:nvPr>
-            <p:ph type="ftr" sz="quarter" idx="11"/>
-          </p:nvPr>
-        </p:nvSpPr>
-        <p:spPr/>
-        <p:txBody>
-          <a:bodyPr/>
-          <a:lstStyle/>
-          <a:p>
-            <a:r>
-              <a:rPr lang="en-US"/>
+            <a:r>
+              <a:rPr lang="en-US" dirty="0"/>
               <a:t>Boldy Sensitivity Study Mu2e</a:t>
             </a:r>
           </a:p>
@@ -13111,6 +12959,284 @@
               </a:rPr>
               <a:t>The Standard Model of Particle Physics</a:t>
             </a:r>
+          </a:p>
+        </p:txBody>
+      </p:sp>
+      <p:sp>
+        <p:nvSpPr>
+          <p:cNvPr id="7" name="TextBox 6">
+            <a:extLst>
+              <a:ext uri="{FF2B5EF4-FFF2-40B4-BE49-F238E27FC236}">
+                <a16:creationId xmlns:a16="http://schemas.microsoft.com/office/drawing/2014/main" id="{99905CEC-1FD0-51BE-F2D3-E8DE82709A78}"/>
+              </a:ext>
+            </a:extLst>
+          </p:cNvPr>
+          <p:cNvSpPr txBox="1"/>
+          <p:nvPr/>
+        </p:nvSpPr>
+        <p:spPr>
+          <a:xfrm>
+            <a:off x="6184562" y="212271"/>
+            <a:ext cx="5663821" cy="6740307"/>
+          </a:xfrm>
+          <a:prstGeom prst="rect">
+            <a:avLst/>
+          </a:prstGeom>
+          <a:noFill/>
+        </p:spPr>
+        <p:txBody>
+          <a:bodyPr wrap="square" rtlCol="0">
+            <a:spAutoFit/>
+          </a:bodyPr>
+          <a:lstStyle/>
+          <a:p>
+            <a:pPr marL="285750" indent="-285750">
+              <a:buFont typeface="Arial" panose="020B0604020202020204" pitchFamily="34" charset="0"/>
+              <a:buChar char="•"/>
+            </a:pPr>
+            <a:r>
+              <a:rPr lang="en-US" dirty="0"/>
+              <a:t>Matter Particles: fermions</a:t>
+            </a:r>
+          </a:p>
+          <a:p>
+            <a:pPr marL="742950" lvl="1" indent="-285750">
+              <a:buFont typeface="Arial" panose="020B0604020202020204" pitchFamily="34" charset="0"/>
+              <a:buChar char="•"/>
+            </a:pPr>
+            <a:r>
+              <a:rPr lang="en-US" dirty="0"/>
+              <a:t>Quarks (positively and negatively charged)</a:t>
+            </a:r>
+          </a:p>
+          <a:p>
+            <a:pPr marL="742950" lvl="1" indent="-285750">
+              <a:buFont typeface="Arial" panose="020B0604020202020204" pitchFamily="34" charset="0"/>
+              <a:buChar char="•"/>
+            </a:pPr>
+            <a:r>
+              <a:rPr lang="en-US" dirty="0"/>
+              <a:t>Leptons (charged and uncharged)</a:t>
+            </a:r>
+          </a:p>
+          <a:p>
+            <a:pPr marL="285750" indent="-285750">
+              <a:buFont typeface="Arial" panose="020B0604020202020204" pitchFamily="34" charset="0"/>
+              <a:buChar char="•"/>
+            </a:pPr>
+            <a:r>
+              <a:rPr lang="en-US" dirty="0"/>
+              <a:t>Interaction Particles: bosons</a:t>
+            </a:r>
+          </a:p>
+          <a:p>
+            <a:pPr marL="742950" lvl="1" indent="-285750">
+              <a:buFont typeface="Arial" panose="020B0604020202020204" pitchFamily="34" charset="0"/>
+              <a:buChar char="•"/>
+            </a:pPr>
+            <a:r>
+              <a:rPr lang="en-US" dirty="0"/>
+              <a:t>Gluons</a:t>
+            </a:r>
+          </a:p>
+          <a:p>
+            <a:pPr marL="742950" lvl="1" indent="-285750">
+              <a:buFont typeface="Arial" panose="020B0604020202020204" pitchFamily="34" charset="0"/>
+              <a:buChar char="•"/>
+            </a:pPr>
+            <a:r>
+              <a:rPr lang="en-US" dirty="0"/>
+              <a:t>Photon</a:t>
+            </a:r>
+          </a:p>
+          <a:p>
+            <a:pPr marL="742950" lvl="1" indent="-285750">
+              <a:buFont typeface="Arial" panose="020B0604020202020204" pitchFamily="34" charset="0"/>
+              <a:buChar char="•"/>
+            </a:pPr>
+            <a:r>
+              <a:rPr lang="en-US" dirty="0"/>
+              <a:t>Z boson</a:t>
+            </a:r>
+          </a:p>
+          <a:p>
+            <a:pPr marL="742950" lvl="1" indent="-285750">
+              <a:buFont typeface="Arial" panose="020B0604020202020204" pitchFamily="34" charset="0"/>
+              <a:buChar char="•"/>
+            </a:pPr>
+            <a:r>
+              <a:rPr lang="en-US" dirty="0"/>
+              <a:t>W bosons</a:t>
+            </a:r>
+          </a:p>
+          <a:p>
+            <a:pPr marL="285750" indent="-285750">
+              <a:buFont typeface="Arial" panose="020B0604020202020204" pitchFamily="34" charset="0"/>
+              <a:buChar char="•"/>
+            </a:pPr>
+            <a:r>
+              <a:rPr lang="en-US" dirty="0"/>
+              <a:t>Higgs Boson (responsible for masses)</a:t>
+            </a:r>
+          </a:p>
+          <a:p>
+            <a:endParaRPr lang="en-US" dirty="0"/>
+          </a:p>
+          <a:p>
+            <a:pPr marL="285750" indent="-285750">
+              <a:buFont typeface="Arial" panose="020B0604020202020204" pitchFamily="34" charset="0"/>
+              <a:buChar char="•"/>
+            </a:pPr>
+            <a:r>
+              <a:rPr lang="en-US" dirty="0"/>
+              <a:t>Matter particles have flavor (distinguishing quantum numbers)</a:t>
+            </a:r>
+          </a:p>
+          <a:p>
+            <a:pPr marL="742950" lvl="1" indent="-285750">
+              <a:buFont typeface="Arial" panose="020B0604020202020204" pitchFamily="34" charset="0"/>
+              <a:buChar char="•"/>
+            </a:pPr>
+            <a:r>
+              <a:rPr lang="en-US" dirty="0"/>
+              <a:t>Quark flavors: up, down, charm, strange, top, bottom </a:t>
+            </a:r>
+          </a:p>
+          <a:p>
+            <a:pPr marL="742950" lvl="1" indent="-285750">
+              <a:buFont typeface="Arial" panose="020B0604020202020204" pitchFamily="34" charset="0"/>
+              <a:buChar char="•"/>
+            </a:pPr>
+            <a:r>
+              <a:rPr lang="en-US" dirty="0"/>
+              <a:t>Charged Lepton flavors: electron, muon, tau</a:t>
+            </a:r>
+          </a:p>
+          <a:p>
+            <a:pPr marL="742950" lvl="1" indent="-285750">
+              <a:buFont typeface="Arial" panose="020B0604020202020204" pitchFamily="34" charset="0"/>
+              <a:buChar char="•"/>
+            </a:pPr>
+            <a:r>
+              <a:rPr lang="en-US" dirty="0"/>
+              <a:t>Uncharged Lepton flavors: electron neutrino, muon neutrino, tau neutrino</a:t>
+            </a:r>
+          </a:p>
+          <a:p>
+            <a:pPr marL="742950" lvl="1" indent="-285750">
+              <a:buFont typeface="Arial" panose="020B0604020202020204" pitchFamily="34" charset="0"/>
+              <a:buChar char="•"/>
+            </a:pPr>
+            <a:endParaRPr lang="en-US" dirty="0"/>
+          </a:p>
+          <a:p>
+            <a:pPr marL="285750" indent="-285750">
+              <a:buFont typeface="Arial" panose="020B0604020202020204" pitchFamily="34" charset="0"/>
+              <a:buChar char="•"/>
+            </a:pPr>
+            <a:r>
+              <a:rPr lang="en-US" dirty="0"/>
+              <a:t>Fundamental symmetries of Standard Model: gauge group symmetries</a:t>
+            </a:r>
+          </a:p>
+          <a:p>
+            <a:pPr marL="285750" indent="-285750">
+              <a:buFont typeface="Arial" panose="020B0604020202020204" pitchFamily="34" charset="0"/>
+              <a:buChar char="•"/>
+            </a:pPr>
+            <a:r>
+              <a:rPr lang="en-US" dirty="0"/>
+              <a:t>Boson number, lepton number, and lepton flavor number considered to be “accidental” symmetry not required by the fundamental group structure </a:t>
+            </a:r>
+          </a:p>
+          <a:p>
+            <a:pPr marL="742950" lvl="1" indent="-285750">
+              <a:buFont typeface="Arial" panose="020B0604020202020204" pitchFamily="34" charset="0"/>
+              <a:buChar char="•"/>
+            </a:pPr>
+            <a:endParaRPr lang="en-US" dirty="0"/>
+          </a:p>
+        </p:txBody>
+      </p:sp>
+      <p:pic>
+        <p:nvPicPr>
+          <p:cNvPr id="9" name="Picture 8">
+            <a:extLst>
+              <a:ext uri="{FF2B5EF4-FFF2-40B4-BE49-F238E27FC236}">
+                <a16:creationId xmlns:a16="http://schemas.microsoft.com/office/drawing/2014/main" id="{4F0340E1-21BE-68F7-BEDB-0DBFC95C15E2}"/>
+              </a:ext>
+            </a:extLst>
+          </p:cNvPr>
+          <p:cNvPicPr>
+            <a:picLocks noChangeAspect="1"/>
+          </p:cNvPicPr>
+          <p:nvPr/>
+        </p:nvPicPr>
+        <p:blipFill>
+          <a:blip r:embed="rId3"/>
+          <a:stretch>
+            <a:fillRect/>
+          </a:stretch>
+        </p:blipFill>
+        <p:spPr>
+          <a:xfrm>
+            <a:off x="8455253" y="5498481"/>
+            <a:ext cx="3570252" cy="229948"/>
+          </a:xfrm>
+          <a:prstGeom prst="rect">
+            <a:avLst/>
+          </a:prstGeom>
+        </p:spPr>
+      </p:pic>
+      <p:sp>
+        <p:nvSpPr>
+          <p:cNvPr id="10" name="Rectangle 9">
+            <a:extLst>
+              <a:ext uri="{FF2B5EF4-FFF2-40B4-BE49-F238E27FC236}">
+                <a16:creationId xmlns:a16="http://schemas.microsoft.com/office/drawing/2014/main" id="{63566328-0143-B62C-994C-4478F1C47740}"/>
+              </a:ext>
+            </a:extLst>
+          </p:cNvPr>
+          <p:cNvSpPr/>
+          <p:nvPr/>
+        </p:nvSpPr>
+        <p:spPr>
+          <a:xfrm>
+            <a:off x="327546" y="3766782"/>
+            <a:ext cx="3384645" cy="1173708"/>
+          </a:xfrm>
+          <a:prstGeom prst="rect">
+            <a:avLst/>
+          </a:prstGeom>
+          <a:noFill/>
+          <a:ln w="88900">
+            <a:solidFill>
+              <a:srgbClr val="FF0000"/>
+            </a:solidFill>
+          </a:ln>
+        </p:spPr>
+        <p:style>
+          <a:lnRef idx="2">
+            <a:schemeClr val="accent1">
+              <a:shade val="15000"/>
+            </a:schemeClr>
+          </a:lnRef>
+          <a:fillRef idx="1">
+            <a:schemeClr val="accent1"/>
+          </a:fillRef>
+          <a:effectRef idx="0">
+            <a:schemeClr val="accent1"/>
+          </a:effectRef>
+          <a:fontRef idx="minor">
+            <a:schemeClr val="lt1"/>
+          </a:fontRef>
+        </p:style>
+        <p:txBody>
+          <a:bodyPr rtlCol="0" anchor="ctr"/>
+          <a:lstStyle/>
+          <a:p>
+            <a:pPr algn="ctr"/>
+            <a:endParaRPr lang="en-US"/>
           </a:p>
         </p:txBody>
       </p:sp>
@@ -13146,34 +13272,6 @@
       </p:grpSpPr>
       <p:sp>
         <p:nvSpPr>
-          <p:cNvPr id="2" name="Title 1">
-            <a:extLst>
-              <a:ext uri="{FF2B5EF4-FFF2-40B4-BE49-F238E27FC236}">
-                <a16:creationId xmlns:a16="http://schemas.microsoft.com/office/drawing/2014/main" id="{CF447FA9-7EA7-7F99-9C52-F7F52DA585CD}"/>
-              </a:ext>
-            </a:extLst>
-          </p:cNvPr>
-          <p:cNvSpPr>
-            <a:spLocks noGrp="1"/>
-          </p:cNvSpPr>
-          <p:nvPr>
-            <p:ph type="title"/>
-          </p:nvPr>
-        </p:nvSpPr>
-        <p:spPr/>
-        <p:txBody>
-          <a:bodyPr/>
-          <a:lstStyle/>
-          <a:p>
-            <a:r>
-              <a:rPr lang="en-US" dirty="0"/>
-              <a:t>Full Sensitivity Study and Statistical Analysis</a:t>
-            </a:r>
-          </a:p>
-        </p:txBody>
-      </p:sp>
-      <p:sp>
-        <p:nvSpPr>
           <p:cNvPr id="3" name="Content Placeholder 2">
             <a:extLst>
               <a:ext uri="{FF2B5EF4-FFF2-40B4-BE49-F238E27FC236}">
@@ -13188,7 +13286,12 @@
             <p:ph idx="1"/>
           </p:nvPr>
         </p:nvSpPr>
-        <p:spPr/>
+        <p:spPr>
+          <a:xfrm>
+            <a:off x="0" y="424542"/>
+            <a:ext cx="12192000" cy="5931807"/>
+          </a:xfrm>
+        </p:spPr>
         <p:txBody>
           <a:bodyPr/>
           <a:lstStyle/>
@@ -13344,54 +13447,31 @@
       </p:grpSpPr>
       <p:sp>
         <p:nvSpPr>
-          <p:cNvPr id="2" name="Title 1">
-            <a:extLst>
-              <a:ext uri="{FF2B5EF4-FFF2-40B4-BE49-F238E27FC236}">
-                <a16:creationId xmlns:a16="http://schemas.microsoft.com/office/drawing/2014/main" id="{939D62CE-5A2C-7C21-97D4-D629099398DD}"/>
-              </a:ext>
-            </a:extLst>
-          </p:cNvPr>
-          <p:cNvSpPr>
-            <a:spLocks noGrp="1"/>
-          </p:cNvSpPr>
-          <p:nvPr>
-            <p:ph type="title"/>
-          </p:nvPr>
-        </p:nvSpPr>
-        <p:spPr/>
+          <p:cNvPr id="3" name="Content Placeholder 2">
+            <a:extLst>
+              <a:ext uri="{FF2B5EF4-FFF2-40B4-BE49-F238E27FC236}">
+                <a16:creationId xmlns:a16="http://schemas.microsoft.com/office/drawing/2014/main" id="{618C2519-85BE-4DAD-8C77-85B9CC8DE9BC}"/>
+              </a:ext>
+            </a:extLst>
+          </p:cNvPr>
+          <p:cNvSpPr>
+            <a:spLocks noGrp="1"/>
+          </p:cNvSpPr>
+          <p:nvPr>
+            <p:ph idx="1"/>
+          </p:nvPr>
+        </p:nvSpPr>
+        <p:spPr>
+          <a:xfrm>
+            <a:off x="0" y="424542"/>
+            <a:ext cx="12192000" cy="5931807"/>
+          </a:xfrm>
+        </p:spPr>
         <p:txBody>
           <a:bodyPr/>
           <a:lstStyle/>
           <a:p>
-            <a:r>
-              <a:rPr lang="en-US" dirty="0"/>
-              <a:t>Additional Approaches to Improve Argument</a:t>
-            </a:r>
-          </a:p>
-        </p:txBody>
-      </p:sp>
-      <p:sp>
-        <p:nvSpPr>
-          <p:cNvPr id="3" name="Content Placeholder 2">
-            <a:extLst>
-              <a:ext uri="{FF2B5EF4-FFF2-40B4-BE49-F238E27FC236}">
-                <a16:creationId xmlns:a16="http://schemas.microsoft.com/office/drawing/2014/main" id="{618C2519-85BE-4DAD-8C77-85B9CC8DE9BC}"/>
-              </a:ext>
-            </a:extLst>
-          </p:cNvPr>
-          <p:cNvSpPr>
-            <a:spLocks noGrp="1"/>
-          </p:cNvSpPr>
-          <p:nvPr>
-            <p:ph idx="1"/>
-          </p:nvPr>
-        </p:nvSpPr>
-        <p:spPr/>
-        <p:txBody>
-          <a:bodyPr/>
-          <a:lstStyle/>
-          <a:p>
-            <a:endParaRPr lang="en-US"/>
+            <a:endParaRPr lang="en-US" dirty="0"/>
           </a:p>
         </p:txBody>
       </p:sp>
@@ -13542,54 +13622,31 @@
       </p:grpSpPr>
       <p:sp>
         <p:nvSpPr>
-          <p:cNvPr id="2" name="Title 1">
-            <a:extLst>
-              <a:ext uri="{FF2B5EF4-FFF2-40B4-BE49-F238E27FC236}">
-                <a16:creationId xmlns:a16="http://schemas.microsoft.com/office/drawing/2014/main" id="{BC8DCCEE-F6E7-0A1C-8C4B-C538663A3DE9}"/>
-              </a:ext>
-            </a:extLst>
-          </p:cNvPr>
-          <p:cNvSpPr>
-            <a:spLocks noGrp="1"/>
-          </p:cNvSpPr>
-          <p:nvPr>
-            <p:ph type="title"/>
-          </p:nvPr>
-        </p:nvSpPr>
-        <p:spPr/>
+          <p:cNvPr id="3" name="Content Placeholder 2">
+            <a:extLst>
+              <a:ext uri="{FF2B5EF4-FFF2-40B4-BE49-F238E27FC236}">
+                <a16:creationId xmlns:a16="http://schemas.microsoft.com/office/drawing/2014/main" id="{5D0FB4EB-5C21-B80A-9106-2C474B5D434C}"/>
+              </a:ext>
+            </a:extLst>
+          </p:cNvPr>
+          <p:cNvSpPr>
+            <a:spLocks noGrp="1"/>
+          </p:cNvSpPr>
+          <p:nvPr>
+            <p:ph idx="1"/>
+          </p:nvPr>
+        </p:nvSpPr>
+        <p:spPr>
+          <a:xfrm>
+            <a:off x="0" y="424542"/>
+            <a:ext cx="12192000" cy="5931807"/>
+          </a:xfrm>
+        </p:spPr>
         <p:txBody>
           <a:bodyPr/>
           <a:lstStyle/>
           <a:p>
-            <a:r>
-              <a:rPr lang="en-US" dirty="0"/>
-              <a:t>Additional Professional Development</a:t>
-            </a:r>
-          </a:p>
-        </p:txBody>
-      </p:sp>
-      <p:sp>
-        <p:nvSpPr>
-          <p:cNvPr id="3" name="Content Placeholder 2">
-            <a:extLst>
-              <a:ext uri="{FF2B5EF4-FFF2-40B4-BE49-F238E27FC236}">
-                <a16:creationId xmlns:a16="http://schemas.microsoft.com/office/drawing/2014/main" id="{5D0FB4EB-5C21-B80A-9106-2C474B5D434C}"/>
-              </a:ext>
-            </a:extLst>
-          </p:cNvPr>
-          <p:cNvSpPr>
-            <a:spLocks noGrp="1"/>
-          </p:cNvSpPr>
-          <p:nvPr>
-            <p:ph idx="1"/>
-          </p:nvPr>
-        </p:nvSpPr>
-        <p:spPr/>
-        <p:txBody>
-          <a:bodyPr/>
-          <a:lstStyle/>
-          <a:p>
-            <a:endParaRPr lang="en-US"/>
+            <a:endParaRPr lang="en-US" dirty="0"/>
           </a:p>
         </p:txBody>
       </p:sp>
@@ -13740,54 +13797,31 @@
       </p:grpSpPr>
       <p:sp>
         <p:nvSpPr>
-          <p:cNvPr id="2" name="Title 1">
-            <a:extLst>
-              <a:ext uri="{FF2B5EF4-FFF2-40B4-BE49-F238E27FC236}">
-                <a16:creationId xmlns:a16="http://schemas.microsoft.com/office/drawing/2014/main" id="{3AF9D99B-40BF-62FD-3259-626DC28F1232}"/>
-              </a:ext>
-            </a:extLst>
-          </p:cNvPr>
-          <p:cNvSpPr>
-            <a:spLocks noGrp="1"/>
-          </p:cNvSpPr>
-          <p:nvPr>
-            <p:ph type="title"/>
-          </p:nvPr>
-        </p:nvSpPr>
-        <p:spPr/>
+          <p:cNvPr id="3" name="Content Placeholder 2">
+            <a:extLst>
+              <a:ext uri="{FF2B5EF4-FFF2-40B4-BE49-F238E27FC236}">
+                <a16:creationId xmlns:a16="http://schemas.microsoft.com/office/drawing/2014/main" id="{A7650A4E-F4CA-5280-6975-74FBD5529A02}"/>
+              </a:ext>
+            </a:extLst>
+          </p:cNvPr>
+          <p:cNvSpPr>
+            <a:spLocks noGrp="1"/>
+          </p:cNvSpPr>
+          <p:nvPr>
+            <p:ph idx="1"/>
+          </p:nvPr>
+        </p:nvSpPr>
+        <p:spPr>
+          <a:xfrm>
+            <a:off x="0" y="424542"/>
+            <a:ext cx="12192000" cy="5931807"/>
+          </a:xfrm>
+        </p:spPr>
         <p:txBody>
           <a:bodyPr/>
           <a:lstStyle/>
           <a:p>
-            <a:r>
-              <a:rPr lang="en-US" dirty="0"/>
-              <a:t>Summary</a:t>
-            </a:r>
-          </a:p>
-        </p:txBody>
-      </p:sp>
-      <p:sp>
-        <p:nvSpPr>
-          <p:cNvPr id="3" name="Content Placeholder 2">
-            <a:extLst>
-              <a:ext uri="{FF2B5EF4-FFF2-40B4-BE49-F238E27FC236}">
-                <a16:creationId xmlns:a16="http://schemas.microsoft.com/office/drawing/2014/main" id="{A7650A4E-F4CA-5280-6975-74FBD5529A02}"/>
-              </a:ext>
-            </a:extLst>
-          </p:cNvPr>
-          <p:cNvSpPr>
-            <a:spLocks noGrp="1"/>
-          </p:cNvSpPr>
-          <p:nvPr>
-            <p:ph idx="1"/>
-          </p:nvPr>
-        </p:nvSpPr>
-        <p:spPr/>
-        <p:txBody>
-          <a:bodyPr/>
-          <a:lstStyle/>
-          <a:p>
-            <a:endParaRPr lang="en-US"/>
+            <a:endParaRPr lang="en-US" dirty="0"/>
           </a:p>
         </p:txBody>
       </p:sp>
@@ -14651,8 +14685,8 @@
           </a:p>
         </p:txBody>
       </p:sp>
-      <mc:AlternateContent xmlns:mc="http://schemas.openxmlformats.org/markup-compatibility/2006" xmlns:a14="http://schemas.microsoft.com/office/drawing/2010/main">
-        <mc:Choice Requires="a14">
+      <mc:AlternateContent xmlns:mc="http://schemas.openxmlformats.org/markup-compatibility/2006">
+        <mc:Choice xmlns:a14="http://schemas.microsoft.com/office/drawing/2010/main" Requires="a14">
           <p:sp>
             <p:nvSpPr>
               <p:cNvPr id="3" name="Content Placeholder 2">
@@ -14677,7 +14711,7 @@
             </p:spPr>
             <p:txBody>
               <a:bodyPr>
-                <a:normAutofit lnSpcReduction="10000"/>
+                <a:normAutofit fontScale="92500" lnSpcReduction="10000"/>
               </a:bodyPr>
               <a:lstStyle/>
               <a:p>
@@ -14800,6 +14834,9 @@
                 <a:endParaRPr lang="en-US" dirty="0"/>
               </a:p>
               <a:p>
+                <a:endParaRPr lang="en-US" dirty="0"/>
+              </a:p>
+              <a:p>
                 <a:pPr marL="0" indent="0">
                   <a:buNone/>
                 </a:pPr>
@@ -14820,22 +14857,8 @@
                 </a14:m>
                 <a:r>
                   <a:rPr lang="en-US" dirty="0"/>
-                  <a:t>) is comprised of multiple different efficiencies </a:t>
+                  <a:t>) is comprised of multiple different efficiencies multiplied together: 						           found via simulation</a:t>
                 </a:r>
-                <a:r>
-                  <a:rPr lang="en-US" dirty="0" err="1"/>
-                  <a:t>multipled</a:t>
-                </a:r>
-                <a:r>
-                  <a:rPr lang="en-US" dirty="0"/>
-                  <a:t> together: 						           found via simulation</a:t>
-                </a:r>
-              </a:p>
-              <a:p>
-                <a:pPr marL="0" indent="0">
-                  <a:buNone/>
-                </a:pPr>
-                <a:endParaRPr lang="en-US" dirty="0"/>
               </a:p>
               <a:p>
                 <a:pPr marL="0" indent="0">
@@ -14846,7 +14869,7 @@
             </p:txBody>
           </p:sp>
         </mc:Choice>
-        <mc:Fallback xmlns="">
+        <mc:Fallback>
           <p:sp>
             <p:nvSpPr>
               <p:cNvPr id="3" name="Content Placeholder 2">
@@ -14871,7 +14894,7 @@
               <a:blipFill>
                 <a:blip r:embed="rId2"/>
                 <a:stretch>
-                  <a:fillRect l="-1145" t="-2326" r="-1249" b="-423"/>
+                  <a:fillRect l="-937" t="-1903" b="-1903"/>
                 </a:stretch>
               </a:blipFill>
             </p:spPr>
@@ -15029,7 +15052,7 @@
         </p:blipFill>
         <p:spPr>
           <a:xfrm>
-            <a:off x="2235925" y="3311660"/>
+            <a:off x="2405742" y="3174009"/>
             <a:ext cx="6043748" cy="706871"/>
           </a:xfrm>
           <a:prstGeom prst="rect">
@@ -15089,7 +15112,7 @@
         </p:blipFill>
         <p:spPr>
           <a:xfrm>
-            <a:off x="1577543" y="5960987"/>
+            <a:off x="1482009" y="6061800"/>
             <a:ext cx="5622267" cy="201626"/>
           </a:xfrm>
           <a:prstGeom prst="rect">
@@ -15127,43 +15150,666 @@
           <a:chExt cx="0" cy="0"/>
         </a:xfrm>
       </p:grpSpPr>
-      <p:sp>
-        <p:nvSpPr>
-          <p:cNvPr id="3" name="Content Placeholder 2">
-            <a:extLst>
-              <a:ext uri="{FF2B5EF4-FFF2-40B4-BE49-F238E27FC236}">
-                <a16:creationId xmlns:a16="http://schemas.microsoft.com/office/drawing/2014/main" id="{5F9290EE-BEC6-0A6E-2D4B-BA3D8AFA5182}"/>
-              </a:ext>
-            </a:extLst>
-          </p:cNvPr>
-          <p:cNvSpPr>
-            <a:spLocks noGrp="1"/>
-          </p:cNvSpPr>
-          <p:nvPr>
-            <p:ph idx="1"/>
-          </p:nvPr>
-        </p:nvSpPr>
-        <p:spPr>
-          <a:xfrm>
-            <a:off x="0" y="574765"/>
-            <a:ext cx="12192000" cy="5602197"/>
-          </a:xfrm>
-        </p:spPr>
-        <p:txBody>
-          <a:bodyPr/>
-          <a:lstStyle/>
-          <a:p>
-            <a:r>
-              <a:rPr lang="en-US" dirty="0"/>
-              <a:t>Values to use in the calculation:</a:t>
-            </a:r>
-          </a:p>
-          <a:p>
-            <a:pPr lvl="1"/>
-            <a:endParaRPr lang="en-US" dirty="0"/>
-          </a:p>
-        </p:txBody>
-      </p:sp>
+      <mc:AlternateContent xmlns:mc="http://schemas.openxmlformats.org/markup-compatibility/2006">
+        <mc:Choice xmlns:a14="http://schemas.microsoft.com/office/drawing/2010/main" Requires="a14">
+          <p:sp>
+            <p:nvSpPr>
+              <p:cNvPr id="3" name="Content Placeholder 2">
+                <a:extLst>
+                  <a:ext uri="{FF2B5EF4-FFF2-40B4-BE49-F238E27FC236}">
+                    <a16:creationId xmlns:a16="http://schemas.microsoft.com/office/drawing/2014/main" id="{5F9290EE-BEC6-0A6E-2D4B-BA3D8AFA5182}"/>
+                  </a:ext>
+                </a:extLst>
+              </p:cNvPr>
+              <p:cNvSpPr>
+                <a:spLocks noGrp="1"/>
+              </p:cNvSpPr>
+              <p:nvPr>
+                <p:ph idx="1"/>
+              </p:nvPr>
+            </p:nvSpPr>
+            <p:spPr>
+              <a:xfrm>
+                <a:off x="0" y="574765"/>
+                <a:ext cx="12192000" cy="5781585"/>
+              </a:xfrm>
+            </p:spPr>
+            <p:txBody>
+              <a:bodyPr>
+                <a:normAutofit/>
+              </a:bodyPr>
+              <a:lstStyle/>
+              <a:p>
+                <a:r>
+                  <a:rPr lang="en-US" dirty="0"/>
+                  <a:t>Values to use in the calculation: </a:t>
+                </a:r>
+              </a:p>
+              <a:p>
+                <a:pPr lvl="1"/>
+                <a14:m>
+                  <m:oMath xmlns:m="http://schemas.openxmlformats.org/officeDocument/2006/math">
+                    <m:r>
+                      <a:rPr lang="en-US" b="0" i="1" smtClean="0">
+                        <a:latin typeface="Cambria Math" panose="02040503050406030204" pitchFamily="18" charset="0"/>
+                      </a:rPr>
+                      <m:t>𝑃</m:t>
+                    </m:r>
+                    <m:r>
+                      <a:rPr lang="en-US" b="0" i="1" smtClean="0">
+                        <a:latin typeface="Cambria Math" panose="02040503050406030204" pitchFamily="18" charset="0"/>
+                      </a:rPr>
+                      <m:t>=1.5</m:t>
+                    </m:r>
+                  </m:oMath>
+                </a14:m>
+                <a:r>
+                  <a:rPr lang="en-US" dirty="0"/>
+                  <a:t> kW (Bernstein, 2019 Frontiers), needs to be reduced by large factor (300) for pileup considerations in reconstruction </a:t>
+                </a:r>
+                <a:r>
+                  <a:rPr lang="en-US" dirty="0">
+                    <a:sym typeface="Wingdings" pitchFamily="2" charset="2"/>
+                  </a:rPr>
+                  <a:t> exact to be determined</a:t>
+                </a:r>
+                <a:endParaRPr lang="en-US" dirty="0"/>
+              </a:p>
+              <a:p>
+                <a:pPr lvl="1"/>
+                <a14:m>
+                  <m:oMath xmlns:m="http://schemas.openxmlformats.org/officeDocument/2006/math">
+                    <m:sSub>
+                      <m:sSubPr>
+                        <m:ctrlPr>
+                          <a:rPr lang="en-US" b="0" i="1" smtClean="0">
+                            <a:latin typeface="Cambria Math" panose="02040503050406030204" pitchFamily="18" charset="0"/>
+                          </a:rPr>
+                        </m:ctrlPr>
+                      </m:sSubPr>
+                      <m:e>
+                        <m:r>
+                          <a:rPr lang="en-US" b="0" i="1" smtClean="0">
+                            <a:latin typeface="Cambria Math" panose="02040503050406030204" pitchFamily="18" charset="0"/>
+                          </a:rPr>
+                          <m:t>𝐸</m:t>
+                        </m:r>
+                      </m:e>
+                      <m:sub>
+                        <m:r>
+                          <a:rPr lang="en-US" b="0" i="1" smtClean="0">
+                            <a:latin typeface="Cambria Math" panose="02040503050406030204" pitchFamily="18" charset="0"/>
+                          </a:rPr>
+                          <m:t>𝑝</m:t>
+                        </m:r>
+                      </m:sub>
+                    </m:sSub>
+                    <m:r>
+                      <a:rPr lang="en-US" b="0" i="1" smtClean="0">
+                        <a:latin typeface="Cambria Math" panose="02040503050406030204" pitchFamily="18" charset="0"/>
+                      </a:rPr>
+                      <m:t>=8</m:t>
+                    </m:r>
+                  </m:oMath>
+                </a14:m>
+                <a:r>
+                  <a:rPr lang="en-US" dirty="0"/>
+                  <a:t> GeV</a:t>
+                </a:r>
+              </a:p>
+              <a:p>
+                <a:pPr lvl="1"/>
+                <a14:m>
+                  <m:oMath xmlns:m="http://schemas.openxmlformats.org/officeDocument/2006/math">
+                    <m:sSub>
+                      <m:sSubPr>
+                        <m:ctrlPr>
+                          <a:rPr lang="en-US" b="0" i="1" smtClean="0">
+                            <a:latin typeface="Cambria Math" panose="02040503050406030204" pitchFamily="18" charset="0"/>
+                          </a:rPr>
+                        </m:ctrlPr>
+                      </m:sSubPr>
+                      <m:e>
+                        <m:r>
+                          <a:rPr lang="en-US" b="0" i="1" smtClean="0">
+                            <a:latin typeface="Cambria Math" panose="02040503050406030204" pitchFamily="18" charset="0"/>
+                          </a:rPr>
+                          <m:t>𝑁</m:t>
+                        </m:r>
+                      </m:e>
+                      <m:sub>
+                        <m:r>
+                          <a:rPr lang="en-US" b="0" i="1" smtClean="0">
+                            <a:latin typeface="Cambria Math" panose="02040503050406030204" pitchFamily="18" charset="0"/>
+                          </a:rPr>
+                          <m:t>𝑠𝑡𝑜𝑝𝑠</m:t>
+                        </m:r>
+                      </m:sub>
+                    </m:sSub>
+                    <m:r>
+                      <a:rPr lang="en-US" b="0" i="1" smtClean="0">
+                        <a:latin typeface="Cambria Math" panose="02040503050406030204" pitchFamily="18" charset="0"/>
+                      </a:rPr>
+                      <m:t>=</m:t>
+                    </m:r>
+                    <m:sSup>
+                      <m:sSupPr>
+                        <m:ctrlPr>
+                          <a:rPr lang="en-US" b="0" i="1" smtClean="0">
+                            <a:latin typeface="Cambria Math" panose="02040503050406030204" pitchFamily="18" charset="0"/>
+                          </a:rPr>
+                        </m:ctrlPr>
+                      </m:sSupPr>
+                      <m:e>
+                        <m:r>
+                          <a:rPr lang="en-US" b="0" i="1" smtClean="0">
+                            <a:latin typeface="Cambria Math" panose="02040503050406030204" pitchFamily="18" charset="0"/>
+                          </a:rPr>
+                          <m:t>10</m:t>
+                        </m:r>
+                      </m:e>
+                      <m:sup>
+                        <m:r>
+                          <a:rPr lang="en-US" b="0" i="1" smtClean="0">
+                            <a:latin typeface="Cambria Math" panose="02040503050406030204" pitchFamily="18" charset="0"/>
+                          </a:rPr>
+                          <m:t>18</m:t>
+                        </m:r>
+                      </m:sup>
+                    </m:sSup>
+                    <m:r>
+                      <a:rPr lang="en-US" b="0" i="1" smtClean="0">
+                        <a:latin typeface="Cambria Math" panose="02040503050406030204" pitchFamily="18" charset="0"/>
+                      </a:rPr>
+                      <m:t> </m:t>
+                    </m:r>
+                    <m:r>
+                      <a:rPr lang="en-US" b="0" i="1" smtClean="0">
+                        <a:latin typeface="Cambria Math" panose="02040503050406030204" pitchFamily="18" charset="0"/>
+                        <a:ea typeface="Cambria Math" panose="02040503050406030204" pitchFamily="18" charset="0"/>
+                      </a:rPr>
+                      <m:t>𝜇</m:t>
+                    </m:r>
+                  </m:oMath>
+                </a14:m>
+                <a:endParaRPr lang="en-US" dirty="0"/>
+              </a:p>
+              <a:p>
+                <a:pPr lvl="1"/>
+                <a14:m>
+                  <m:oMath xmlns:m="http://schemas.openxmlformats.org/officeDocument/2006/math">
+                    <m:sSub>
+                      <m:sSubPr>
+                        <m:ctrlPr>
+                          <a:rPr lang="en-US" b="0" i="1" smtClean="0">
+                            <a:latin typeface="Cambria Math" panose="02040503050406030204" pitchFamily="18" charset="0"/>
+                          </a:rPr>
+                        </m:ctrlPr>
+                      </m:sSubPr>
+                      <m:e>
+                        <m:r>
+                          <a:rPr lang="en-US" b="0" i="1" smtClean="0">
+                            <a:latin typeface="Cambria Math" panose="02040503050406030204" pitchFamily="18" charset="0"/>
+                          </a:rPr>
+                          <m:t>𝑁</m:t>
+                        </m:r>
+                      </m:e>
+                      <m:sub>
+                        <m:r>
+                          <a:rPr lang="en-US" b="0" i="1" smtClean="0">
+                            <a:latin typeface="Cambria Math" panose="02040503050406030204" pitchFamily="18" charset="0"/>
+                          </a:rPr>
+                          <m:t>𝑃𝑂𝑇</m:t>
+                        </m:r>
+                      </m:sub>
+                    </m:sSub>
+                    <m:r>
+                      <a:rPr lang="en-US" b="0" i="1" smtClean="0">
+                        <a:latin typeface="Cambria Math" panose="02040503050406030204" pitchFamily="18" charset="0"/>
+                      </a:rPr>
+                      <m:t>=3.8</m:t>
+                    </m:r>
+                    <m:r>
+                      <a:rPr lang="en-US" b="0" i="1" smtClean="0">
+                        <a:latin typeface="Cambria Math" panose="02040503050406030204" pitchFamily="18" charset="0"/>
+                        <a:ea typeface="Cambria Math" panose="02040503050406030204" pitchFamily="18" charset="0"/>
+                      </a:rPr>
+                      <m:t>×</m:t>
+                    </m:r>
+                    <m:sSup>
+                      <m:sSupPr>
+                        <m:ctrlPr>
+                          <a:rPr lang="en-US" b="0" i="1" smtClean="0">
+                            <a:latin typeface="Cambria Math" panose="02040503050406030204" pitchFamily="18" charset="0"/>
+                            <a:ea typeface="Cambria Math" panose="02040503050406030204" pitchFamily="18" charset="0"/>
+                          </a:rPr>
+                        </m:ctrlPr>
+                      </m:sSupPr>
+                      <m:e>
+                        <m:r>
+                          <a:rPr lang="en-US" b="0" i="1" smtClean="0">
+                            <a:latin typeface="Cambria Math" panose="02040503050406030204" pitchFamily="18" charset="0"/>
+                            <a:ea typeface="Cambria Math" panose="02040503050406030204" pitchFamily="18" charset="0"/>
+                          </a:rPr>
+                          <m:t>10</m:t>
+                        </m:r>
+                      </m:e>
+                      <m:sup>
+                        <m:r>
+                          <a:rPr lang="en-US" b="0" i="1" smtClean="0">
+                            <a:latin typeface="Cambria Math" panose="02040503050406030204" pitchFamily="18" charset="0"/>
+                            <a:ea typeface="Cambria Math" panose="02040503050406030204" pitchFamily="18" charset="0"/>
+                          </a:rPr>
+                          <m:t>20</m:t>
+                        </m:r>
+                      </m:sup>
+                    </m:sSup>
+                  </m:oMath>
+                </a14:m>
+                <a:r>
+                  <a:rPr lang="en-US" dirty="0"/>
+                  <a:t> protons</a:t>
+                </a:r>
+              </a:p>
+              <a:p>
+                <a:pPr lvl="1"/>
+                <a14:m>
+                  <m:oMath xmlns:m="http://schemas.openxmlformats.org/officeDocument/2006/math">
+                    <m:r>
+                      <a:rPr lang="en-US" b="0" i="1" smtClean="0">
+                        <a:latin typeface="Cambria Math" panose="02040503050406030204" pitchFamily="18" charset="0"/>
+                      </a:rPr>
+                      <m:t>𝐵𝑟</m:t>
+                    </m:r>
+                    <m:d>
+                      <m:dPr>
+                        <m:ctrlPr>
+                          <a:rPr lang="en-US" b="0" i="1" smtClean="0">
+                            <a:latin typeface="Cambria Math" panose="02040503050406030204" pitchFamily="18" charset="0"/>
+                          </a:rPr>
+                        </m:ctrlPr>
+                      </m:dPr>
+                      <m:e>
+                        <m:sSup>
+                          <m:sSupPr>
+                            <m:ctrlPr>
+                              <a:rPr lang="en-US" b="0" i="1" smtClean="0">
+                                <a:latin typeface="Cambria Math" panose="02040503050406030204" pitchFamily="18" charset="0"/>
+                                <a:ea typeface="Cambria Math" panose="02040503050406030204" pitchFamily="18" charset="0"/>
+                              </a:rPr>
+                            </m:ctrlPr>
+                          </m:sSupPr>
+                          <m:e>
+                            <m:r>
+                              <a:rPr lang="en-US" b="0" i="1" smtClean="0">
+                                <a:latin typeface="Cambria Math" panose="02040503050406030204" pitchFamily="18" charset="0"/>
+                                <a:ea typeface="Cambria Math" panose="02040503050406030204" pitchFamily="18" charset="0"/>
+                              </a:rPr>
+                              <m:t>𝜇</m:t>
+                            </m:r>
+                          </m:e>
+                          <m:sup>
+                            <m:r>
+                              <a:rPr lang="en-US" b="0" i="1" smtClean="0">
+                                <a:latin typeface="Cambria Math" panose="02040503050406030204" pitchFamily="18" charset="0"/>
+                              </a:rPr>
+                              <m:t>−</m:t>
+                            </m:r>
+                          </m:sup>
+                        </m:sSup>
+                        <m:sSup>
+                          <m:sSupPr>
+                            <m:ctrlPr>
+                              <a:rPr lang="en-US" b="0" i="1" smtClean="0">
+                                <a:latin typeface="Cambria Math" panose="02040503050406030204" pitchFamily="18" charset="0"/>
+                              </a:rPr>
+                            </m:ctrlPr>
+                          </m:sSupPr>
+                          <m:e>
+                            <m:r>
+                              <a:rPr lang="en-US" b="0" i="1" smtClean="0">
+                                <a:latin typeface="Cambria Math" panose="02040503050406030204" pitchFamily="18" charset="0"/>
+                              </a:rPr>
+                              <m:t>𝑒</m:t>
+                            </m:r>
+                          </m:e>
+                          <m:sup>
+                            <m:r>
+                              <a:rPr lang="en-US" b="0" i="1" smtClean="0">
+                                <a:latin typeface="Cambria Math" panose="02040503050406030204" pitchFamily="18" charset="0"/>
+                              </a:rPr>
+                              <m:t>−</m:t>
+                            </m:r>
+                          </m:sup>
+                        </m:sSup>
+                        <m:r>
+                          <a:rPr lang="en-US" b="0" i="1" smtClean="0">
+                            <a:latin typeface="Cambria Math" panose="02040503050406030204" pitchFamily="18" charset="0"/>
+                            <a:ea typeface="Cambria Math" panose="02040503050406030204" pitchFamily="18" charset="0"/>
+                          </a:rPr>
+                          <m:t>→</m:t>
+                        </m:r>
+                        <m:sSup>
+                          <m:sSupPr>
+                            <m:ctrlPr>
+                              <a:rPr lang="en-US" b="0" i="1" smtClean="0">
+                                <a:latin typeface="Cambria Math" panose="02040503050406030204" pitchFamily="18" charset="0"/>
+                                <a:ea typeface="Cambria Math" panose="02040503050406030204" pitchFamily="18" charset="0"/>
+                              </a:rPr>
+                            </m:ctrlPr>
+                          </m:sSupPr>
+                          <m:e>
+                            <m:r>
+                              <a:rPr lang="en-US" b="0" i="1" smtClean="0">
+                                <a:latin typeface="Cambria Math" panose="02040503050406030204" pitchFamily="18" charset="0"/>
+                                <a:ea typeface="Cambria Math" panose="02040503050406030204" pitchFamily="18" charset="0"/>
+                              </a:rPr>
+                              <m:t>𝑒</m:t>
+                            </m:r>
+                          </m:e>
+                          <m:sup>
+                            <m:r>
+                              <a:rPr lang="en-US" b="0" i="1" smtClean="0">
+                                <a:latin typeface="Cambria Math" panose="02040503050406030204" pitchFamily="18" charset="0"/>
+                                <a:ea typeface="Cambria Math" panose="02040503050406030204" pitchFamily="18" charset="0"/>
+                              </a:rPr>
+                              <m:t>−</m:t>
+                            </m:r>
+                          </m:sup>
+                        </m:sSup>
+                        <m:sSup>
+                          <m:sSupPr>
+                            <m:ctrlPr>
+                              <a:rPr lang="en-US" b="0" i="1" smtClean="0">
+                                <a:latin typeface="Cambria Math" panose="02040503050406030204" pitchFamily="18" charset="0"/>
+                                <a:ea typeface="Cambria Math" panose="02040503050406030204" pitchFamily="18" charset="0"/>
+                              </a:rPr>
+                            </m:ctrlPr>
+                          </m:sSupPr>
+                          <m:e>
+                            <m:r>
+                              <a:rPr lang="en-US" b="0" i="1" smtClean="0">
+                                <a:latin typeface="Cambria Math" panose="02040503050406030204" pitchFamily="18" charset="0"/>
+                                <a:ea typeface="Cambria Math" panose="02040503050406030204" pitchFamily="18" charset="0"/>
+                              </a:rPr>
+                              <m:t>𝑒</m:t>
+                            </m:r>
+                          </m:e>
+                          <m:sup>
+                            <m:r>
+                              <a:rPr lang="en-US" b="0" i="1" smtClean="0">
+                                <a:latin typeface="Cambria Math" panose="02040503050406030204" pitchFamily="18" charset="0"/>
+                                <a:ea typeface="Cambria Math" panose="02040503050406030204" pitchFamily="18" charset="0"/>
+                              </a:rPr>
+                              <m:t>−</m:t>
+                            </m:r>
+                          </m:sup>
+                        </m:sSup>
+                      </m:e>
+                    </m:d>
+                    <m:r>
+                      <a:rPr lang="en-US" b="0" i="1" smtClean="0">
+                        <a:latin typeface="Cambria Math" panose="02040503050406030204" pitchFamily="18" charset="0"/>
+                        <a:ea typeface="Cambria Math" panose="02040503050406030204" pitchFamily="18" charset="0"/>
+                      </a:rPr>
+                      <m:t>=1.0×</m:t>
+                    </m:r>
+                    <m:sSup>
+                      <m:sSupPr>
+                        <m:ctrlPr>
+                          <a:rPr lang="en-US" b="0" i="1" smtClean="0">
+                            <a:latin typeface="Cambria Math" panose="02040503050406030204" pitchFamily="18" charset="0"/>
+                            <a:ea typeface="Cambria Math" panose="02040503050406030204" pitchFamily="18" charset="0"/>
+                          </a:rPr>
+                        </m:ctrlPr>
+                      </m:sSupPr>
+                      <m:e>
+                        <m:r>
+                          <a:rPr lang="en-US" b="0" i="1" smtClean="0">
+                            <a:latin typeface="Cambria Math" panose="02040503050406030204" pitchFamily="18" charset="0"/>
+                            <a:ea typeface="Cambria Math" panose="02040503050406030204" pitchFamily="18" charset="0"/>
+                          </a:rPr>
+                          <m:t>10</m:t>
+                        </m:r>
+                      </m:e>
+                      <m:sup>
+                        <m:r>
+                          <a:rPr lang="en-US" b="0" i="1" smtClean="0">
+                            <a:latin typeface="Cambria Math" panose="02040503050406030204" pitchFamily="18" charset="0"/>
+                            <a:ea typeface="Cambria Math" panose="02040503050406030204" pitchFamily="18" charset="0"/>
+                          </a:rPr>
+                          <m:t>−12</m:t>
+                        </m:r>
+                      </m:sup>
+                    </m:sSup>
+                  </m:oMath>
+                </a14:m>
+                <a:r>
+                  <a:rPr lang="en-US" dirty="0"/>
+                  <a:t> branching ratio from Sindrum II analogous process</a:t>
+                </a:r>
+              </a:p>
+              <a:p>
+                <a:pPr lvl="1"/>
+                <a:endParaRPr lang="en-US" dirty="0"/>
+              </a:p>
+              <a:p>
+                <a:pPr lvl="1"/>
+                <a:endParaRPr lang="en-US" dirty="0"/>
+              </a:p>
+              <a:p>
+                <a:pPr marL="457200" lvl="1" indent="0">
+                  <a:buNone/>
+                </a:pPr>
+                <a:endParaRPr lang="en-US" dirty="0"/>
+              </a:p>
+              <a:p>
+                <a:pPr lvl="1"/>
+                <a:r>
+                  <a:rPr lang="en-US" dirty="0"/>
+                  <a:t>For 90% confidence interval </a:t>
+                </a:r>
+                <a14:m>
+                  <m:oMath xmlns:m="http://schemas.openxmlformats.org/officeDocument/2006/math">
+                    <m:sSub>
+                      <m:sSubPr>
+                        <m:ctrlPr>
+                          <a:rPr lang="en-US" b="0" i="1" smtClean="0">
+                            <a:latin typeface="Cambria Math" panose="02040503050406030204" pitchFamily="18" charset="0"/>
+                          </a:rPr>
+                        </m:ctrlPr>
+                      </m:sSubPr>
+                      <m:e>
+                        <m:r>
+                          <a:rPr lang="en-US" b="0" i="1" smtClean="0">
+                            <a:latin typeface="Cambria Math" panose="02040503050406030204" pitchFamily="18" charset="0"/>
+                          </a:rPr>
+                          <m:t>𝑁</m:t>
+                        </m:r>
+                      </m:e>
+                      <m:sub>
+                        <m:r>
+                          <a:rPr lang="en-US" b="0" i="1" smtClean="0">
+                            <a:latin typeface="Cambria Math" panose="02040503050406030204" pitchFamily="18" charset="0"/>
+                          </a:rPr>
+                          <m:t>𝑠𝑖𝑔𝑛𝑎𝑙</m:t>
+                        </m:r>
+                      </m:sub>
+                    </m:sSub>
+                    <m:r>
+                      <a:rPr lang="en-US" b="0" i="1" smtClean="0">
+                        <a:latin typeface="Cambria Math" panose="02040503050406030204" pitchFamily="18" charset="0"/>
+                      </a:rPr>
+                      <m:t>=2.3</m:t>
+                    </m:r>
+                  </m:oMath>
+                </a14:m>
+                <a:r>
+                  <a:rPr lang="en-US" dirty="0"/>
+                  <a:t> events </a:t>
+                </a:r>
+                <a:r>
+                  <a:rPr lang="en-US" dirty="0">
+                    <a:sym typeface="Wingdings" pitchFamily="2" charset="2"/>
+                  </a:rPr>
+                  <a:t></a:t>
+                </a:r>
+                <a:endParaRPr lang="en-US" dirty="0"/>
+              </a:p>
+              <a:p>
+                <a:pPr lvl="1"/>
+                <a:r>
+                  <a:rPr lang="en-US" dirty="0"/>
+                  <a:t>For 95% confidence interval for now events showing </a:t>
+                </a:r>
+                <a14:m>
+                  <m:oMath xmlns:m="http://schemas.openxmlformats.org/officeDocument/2006/math">
+                    <m:sSub>
+                      <m:sSubPr>
+                        <m:ctrlPr>
+                          <a:rPr lang="en-US" i="1">
+                            <a:latin typeface="Cambria Math" panose="02040503050406030204" pitchFamily="18" charset="0"/>
+                          </a:rPr>
+                        </m:ctrlPr>
+                      </m:sSubPr>
+                      <m:e>
+                        <m:r>
+                          <a:rPr lang="en-US" i="1">
+                            <a:latin typeface="Cambria Math" panose="02040503050406030204" pitchFamily="18" charset="0"/>
+                          </a:rPr>
+                          <m:t>𝑁</m:t>
+                        </m:r>
+                      </m:e>
+                      <m:sub>
+                        <m:r>
+                          <a:rPr lang="en-US" i="1">
+                            <a:latin typeface="Cambria Math" panose="02040503050406030204" pitchFamily="18" charset="0"/>
+                          </a:rPr>
+                          <m:t>𝑠𝑖𝑔𝑛𝑎𝑙</m:t>
+                        </m:r>
+                      </m:sub>
+                    </m:sSub>
+                    <m:r>
+                      <a:rPr lang="en-US" i="1">
+                        <a:latin typeface="Cambria Math" panose="02040503050406030204" pitchFamily="18" charset="0"/>
+                      </a:rPr>
+                      <m:t>=</m:t>
+                    </m:r>
+                    <m:r>
+                      <a:rPr lang="en-US" b="0" i="1" smtClean="0">
+                        <a:latin typeface="Cambria Math" panose="02040503050406030204" pitchFamily="18" charset="0"/>
+                      </a:rPr>
+                      <m:t>3</m:t>
+                    </m:r>
+                  </m:oMath>
+                </a14:m>
+                <a:r>
+                  <a:rPr lang="en-US" dirty="0"/>
+                  <a:t> events</a:t>
+                </a:r>
+              </a:p>
+              <a:p>
+                <a:pPr lvl="1"/>
+                <a:r>
+                  <a:rPr lang="en-US" dirty="0"/>
+                  <a:t>For 99% confidence interval for no events showing </a:t>
+                </a:r>
+                <a14:m>
+                  <m:oMath xmlns:m="http://schemas.openxmlformats.org/officeDocument/2006/math">
+                    <m:sSub>
+                      <m:sSubPr>
+                        <m:ctrlPr>
+                          <a:rPr lang="en-US" i="1">
+                            <a:latin typeface="Cambria Math" panose="02040503050406030204" pitchFamily="18" charset="0"/>
+                          </a:rPr>
+                        </m:ctrlPr>
+                      </m:sSubPr>
+                      <m:e>
+                        <m:r>
+                          <a:rPr lang="en-US" i="1">
+                            <a:latin typeface="Cambria Math" panose="02040503050406030204" pitchFamily="18" charset="0"/>
+                          </a:rPr>
+                          <m:t>𝑁</m:t>
+                        </m:r>
+                      </m:e>
+                      <m:sub>
+                        <m:r>
+                          <a:rPr lang="en-US" i="1">
+                            <a:latin typeface="Cambria Math" panose="02040503050406030204" pitchFamily="18" charset="0"/>
+                          </a:rPr>
+                          <m:t>𝑠𝑖𝑔𝑛𝑎𝑙</m:t>
+                        </m:r>
+                      </m:sub>
+                    </m:sSub>
+                    <m:r>
+                      <a:rPr lang="en-US" i="1">
+                        <a:latin typeface="Cambria Math" panose="02040503050406030204" pitchFamily="18" charset="0"/>
+                      </a:rPr>
+                      <m:t>=</m:t>
+                    </m:r>
+                    <m:r>
+                      <a:rPr lang="en-US" b="0" i="1" smtClean="0">
+                        <a:latin typeface="Cambria Math" panose="02040503050406030204" pitchFamily="18" charset="0"/>
+                      </a:rPr>
+                      <m:t>4.6</m:t>
+                    </m:r>
+                  </m:oMath>
+                </a14:m>
+                <a:r>
+                  <a:rPr lang="en-US" dirty="0"/>
+                  <a:t> events</a:t>
+                </a:r>
+              </a:p>
+              <a:p>
+                <a:endParaRPr lang="en-US" dirty="0"/>
+              </a:p>
+            </p:txBody>
+          </p:sp>
+        </mc:Choice>
+        <mc:Fallback>
+          <p:sp>
+            <p:nvSpPr>
+              <p:cNvPr id="3" name="Content Placeholder 2">
+                <a:extLst>
+                  <a:ext uri="{FF2B5EF4-FFF2-40B4-BE49-F238E27FC236}">
+                    <a16:creationId xmlns:a16="http://schemas.microsoft.com/office/drawing/2014/main" id="{5F9290EE-BEC6-0A6E-2D4B-BA3D8AFA5182}"/>
+                  </a:ext>
+                </a:extLst>
+              </p:cNvPr>
+              <p:cNvSpPr>
+                <a:spLocks noGrp="1" noRot="1" noChangeAspect="1" noMove="1" noResize="1" noEditPoints="1" noAdjustHandles="1" noChangeArrowheads="1" noChangeShapeType="1" noTextEdit="1"/>
+              </p:cNvSpPr>
+              <p:nvPr>
+                <p:ph idx="1"/>
+              </p:nvPr>
+            </p:nvSpPr>
+            <p:spPr>
+              <a:xfrm>
+                <a:off x="0" y="574765"/>
+                <a:ext cx="12192000" cy="5781585"/>
+              </a:xfrm>
+              <a:blipFill>
+                <a:blip r:embed="rId2"/>
+                <a:stretch>
+                  <a:fillRect l="-937" t="-1974"/>
+                </a:stretch>
+              </a:blipFill>
+            </p:spPr>
+            <p:txBody>
+              <a:bodyPr/>
+              <a:lstStyle/>
+              <a:p>
+                <a:r>
+                  <a:rPr lang="en-US">
+                    <a:noFill/>
+                  </a:rPr>
+                  <a:t> </a:t>
+                </a:r>
+              </a:p>
+            </p:txBody>
+          </p:sp>
+        </mc:Fallback>
+      </mc:AlternateContent>
       <p:sp>
         <p:nvSpPr>
           <p:cNvPr id="4" name="Footer Placeholder 3">
@@ -15255,11 +15901,41 @@
                   <a:srgbClr val="C00000"/>
                 </a:solidFill>
               </a:rPr>
-              <a:t>Back-of-Envelope Wall Clock Hours Prediction (Pt. 1)</a:t>
-            </a:r>
-          </a:p>
-        </p:txBody>
-      </p:sp>
+              <a:t>Back-of-Envelope Wall Clock Hours Prediction (Pt. 2)</a:t>
+            </a:r>
+          </a:p>
+        </p:txBody>
+      </p:sp>
+      <p:pic>
+        <p:nvPicPr>
+          <p:cNvPr id="2" name="Picture 1">
+            <a:extLst>
+              <a:ext uri="{FF2B5EF4-FFF2-40B4-BE49-F238E27FC236}">
+                <a16:creationId xmlns:a16="http://schemas.microsoft.com/office/drawing/2014/main" id="{77923FF2-3374-173A-1897-48EF55C6476A}"/>
+              </a:ext>
+            </a:extLst>
+          </p:cNvPr>
+          <p:cNvPicPr>
+            <a:picLocks noChangeAspect="1"/>
+          </p:cNvPicPr>
+          <p:nvPr/>
+        </p:nvPicPr>
+        <p:blipFill>
+          <a:blip r:embed="rId3"/>
+          <a:stretch>
+            <a:fillRect/>
+          </a:stretch>
+        </p:blipFill>
+        <p:spPr>
+          <a:xfrm>
+            <a:off x="2851150" y="3465557"/>
+            <a:ext cx="6489700" cy="952500"/>
+          </a:xfrm>
+          <a:prstGeom prst="rect">
+            <a:avLst/>
+          </a:prstGeom>
+        </p:spPr>
+      </p:pic>
     </p:spTree>
     <p:extLst>
       <p:ext uri="{BB962C8B-B14F-4D97-AF65-F5344CB8AC3E}">
@@ -15316,6 +15992,16 @@
           <a:bodyPr/>
           <a:lstStyle/>
           <a:p>
+            <a:r>
+              <a:rPr lang="en-US" dirty="0"/>
+              <a:t>Lepton flavor conservation </a:t>
+            </a:r>
+            <a:r>
+              <a:rPr lang="en-US" dirty="0">
+                <a:sym typeface="Wingdings" pitchFamily="2" charset="2"/>
+              </a:rPr>
+              <a:t> “Accidental symmetry” </a:t>
+            </a:r>
             <a:endParaRPr lang="en-US" dirty="0"/>
           </a:p>
         </p:txBody>
@@ -15465,8 +16151,8 @@
           <a:chExt cx="0" cy="0"/>
         </a:xfrm>
       </p:grpSpPr>
-      <mc:AlternateContent xmlns:mc="http://schemas.openxmlformats.org/markup-compatibility/2006">
-        <mc:Choice xmlns:a14="http://schemas.microsoft.com/office/drawing/2010/main" Requires="a14">
+      <mc:AlternateContent xmlns:mc="http://schemas.openxmlformats.org/markup-compatibility/2006" xmlns:a14="http://schemas.microsoft.com/office/drawing/2010/main">
+        <mc:Choice Requires="a14">
           <p:sp>
             <p:nvSpPr>
               <p:cNvPr id="3" name="Content Placeholder 2">
@@ -15718,7 +16404,7 @@
             </p:txBody>
           </p:sp>
         </mc:Choice>
-        <mc:Fallback>
+        <mc:Fallback xmlns="">
           <p:sp>
             <p:nvSpPr>
               <p:cNvPr id="3" name="Content Placeholder 2">
@@ -16246,7 +16932,7 @@
         </p:blipFill>
         <p:spPr>
           <a:xfrm>
-            <a:off x="1289050" y="2794794"/>
+            <a:off x="1289050" y="3192541"/>
             <a:ext cx="9613900" cy="2413000"/>
           </a:xfrm>
         </p:spPr>
@@ -16308,8 +16994,8 @@
           </a:p>
         </p:txBody>
       </p:sp>
-      <mc:AlternateContent xmlns:mc="http://schemas.openxmlformats.org/markup-compatibility/2006">
-        <mc:Choice xmlns:a14="http://schemas.microsoft.com/office/drawing/2010/main" Requires="a14">
+      <mc:AlternateContent xmlns:mc="http://schemas.openxmlformats.org/markup-compatibility/2006" xmlns:a14="http://schemas.microsoft.com/office/drawing/2010/main">
+        <mc:Choice Requires="a14">
           <p:sp>
             <p:nvSpPr>
               <p:cNvPr id="3" name="Title 1">
@@ -16375,6 +17061,7 @@
                               <a:srgbClr val="C00000"/>
                             </a:solidFill>
                             <a:latin typeface="Cambria Math" panose="02040503050406030204" pitchFamily="18" charset="0"/>
+                            <a:ea typeface="Cambria Math" panose="02040503050406030204" pitchFamily="18" charset="0"/>
                           </a:rPr>
                         </m:ctrlPr>
                       </m:sSupPr>
@@ -16405,7 +17092,7 @@
                     <m:sSup>
                       <m:sSupPr>
                         <m:ctrlPr>
-                          <a:rPr lang="en-US" sz="2800" i="1" smtClean="0">
+                          <a:rPr lang="en-US" sz="2800" b="0" i="1" smtClean="0">
                             <a:solidFill>
                               <a:srgbClr val="C00000"/>
                             </a:solidFill>
@@ -16449,7 +17136,7 @@
                     <m:sSup>
                       <m:sSupPr>
                         <m:ctrlPr>
-                          <a:rPr lang="en-US" sz="2800" i="1" smtClean="0">
+                          <a:rPr lang="en-US" sz="2800" b="0" i="1" smtClean="0">
                             <a:solidFill>
                               <a:srgbClr val="C00000"/>
                             </a:solidFill>
@@ -16486,7 +17173,7 @@
                     <m:sSup>
                       <m:sSupPr>
                         <m:ctrlPr>
-                          <a:rPr lang="en-US" sz="2800" i="1" smtClean="0">
+                          <a:rPr lang="en-US" sz="2800" b="0" i="1" smtClean="0">
                             <a:solidFill>
                               <a:srgbClr val="C00000"/>
                             </a:solidFill>
@@ -16534,7 +17221,7 @@
             </p:txBody>
           </p:sp>
         </mc:Choice>
-        <mc:Fallback>
+        <mc:Fallback xmlns="">
           <p:sp>
             <p:nvSpPr>
               <p:cNvPr id="3" name="Title 1">
@@ -16579,6 +17266,149 @@
           </p:sp>
         </mc:Fallback>
       </mc:AlternateContent>
+      <p:sp>
+        <p:nvSpPr>
+          <p:cNvPr id="4" name="TextBox 3">
+            <a:extLst>
+              <a:ext uri="{FF2B5EF4-FFF2-40B4-BE49-F238E27FC236}">
+                <a16:creationId xmlns:a16="http://schemas.microsoft.com/office/drawing/2014/main" id="{B5D27E49-6FFB-42F1-53F5-D09DD74DD048}"/>
+              </a:ext>
+            </a:extLst>
+          </p:cNvPr>
+          <p:cNvSpPr txBox="1"/>
+          <p:nvPr/>
+        </p:nvSpPr>
+        <p:spPr>
+          <a:xfrm>
+            <a:off x="493594" y="936662"/>
+            <a:ext cx="11204812" cy="372361"/>
+          </a:xfrm>
+          <a:prstGeom prst="rect">
+            <a:avLst/>
+          </a:prstGeom>
+          <a:noFill/>
+        </p:spPr>
+        <p:txBody>
+          <a:bodyPr wrap="square" rtlCol="0">
+            <a:spAutoFit/>
+          </a:bodyPr>
+          <a:lstStyle/>
+          <a:p>
+            <a:r>
+              <a:rPr lang="en-US" dirty="0"/>
+              <a:t>Photonic Lagrangian: tensor vertex coupled with photonic field mixing </a:t>
+            </a:r>
+            <a:r>
+              <a:rPr lang="en-US" dirty="0" err="1"/>
+              <a:t>chiralities</a:t>
+            </a:r>
+            <a:endParaRPr lang="en-US" dirty="0"/>
+          </a:p>
+        </p:txBody>
+      </p:sp>
+      <p:sp>
+        <p:nvSpPr>
+          <p:cNvPr id="5" name="TextBox 4">
+            <a:extLst>
+              <a:ext uri="{FF2B5EF4-FFF2-40B4-BE49-F238E27FC236}">
+                <a16:creationId xmlns:a16="http://schemas.microsoft.com/office/drawing/2014/main" id="{58715DCF-31E4-AE9E-B9FB-F82433789B44}"/>
+              </a:ext>
+            </a:extLst>
+          </p:cNvPr>
+          <p:cNvSpPr txBox="1"/>
+          <p:nvPr/>
+        </p:nvSpPr>
+        <p:spPr>
+          <a:xfrm>
+            <a:off x="682388" y="2072400"/>
+            <a:ext cx="10671412" cy="369332"/>
+          </a:xfrm>
+          <a:prstGeom prst="rect">
+            <a:avLst/>
+          </a:prstGeom>
+          <a:noFill/>
+        </p:spPr>
+        <p:txBody>
+          <a:bodyPr wrap="square" rtlCol="0">
+            <a:spAutoFit/>
+          </a:bodyPr>
+          <a:lstStyle/>
+          <a:p>
+            <a:r>
+              <a:rPr lang="en-US" dirty="0"/>
+              <a:t>Contact Lagrangian: scalar and vector structures, four-point interaction mixing </a:t>
+            </a:r>
+            <a:r>
+              <a:rPr lang="en-US" dirty="0" err="1"/>
+              <a:t>chiralities</a:t>
+            </a:r>
+            <a:r>
+              <a:rPr lang="en-US" dirty="0"/>
+              <a:t> </a:t>
+            </a:r>
+          </a:p>
+        </p:txBody>
+      </p:sp>
+      <p:pic>
+        <p:nvPicPr>
+          <p:cNvPr id="7" name="Picture 6">
+            <a:extLst>
+              <a:ext uri="{FF2B5EF4-FFF2-40B4-BE49-F238E27FC236}">
+                <a16:creationId xmlns:a16="http://schemas.microsoft.com/office/drawing/2014/main" id="{E7363DAB-F955-EF43-21E1-413D125E6D9F}"/>
+              </a:ext>
+            </a:extLst>
+          </p:cNvPr>
+          <p:cNvPicPr>
+            <a:picLocks noChangeAspect="1"/>
+          </p:cNvPicPr>
+          <p:nvPr/>
+        </p:nvPicPr>
+        <p:blipFill>
+          <a:blip r:embed="rId4"/>
+          <a:stretch>
+            <a:fillRect/>
+          </a:stretch>
+        </p:blipFill>
+        <p:spPr>
+          <a:xfrm>
+            <a:off x="3543015" y="298315"/>
+            <a:ext cx="4950157" cy="619692"/>
+          </a:xfrm>
+          <a:prstGeom prst="rect">
+            <a:avLst/>
+          </a:prstGeom>
+        </p:spPr>
+      </p:pic>
+      <p:pic>
+        <p:nvPicPr>
+          <p:cNvPr id="10" name="Picture 9">
+            <a:extLst>
+              <a:ext uri="{FF2B5EF4-FFF2-40B4-BE49-F238E27FC236}">
+                <a16:creationId xmlns:a16="http://schemas.microsoft.com/office/drawing/2014/main" id="{8980FD3B-7FB7-71EC-104A-7F836A62C090}"/>
+              </a:ext>
+            </a:extLst>
+          </p:cNvPr>
+          <p:cNvPicPr>
+            <a:picLocks noChangeAspect="1"/>
+          </p:cNvPicPr>
+          <p:nvPr/>
+        </p:nvPicPr>
+        <p:blipFill>
+          <a:blip r:embed="rId5"/>
+          <a:stretch>
+            <a:fillRect/>
+          </a:stretch>
+        </p:blipFill>
+        <p:spPr>
+          <a:xfrm>
+            <a:off x="2209800" y="1438648"/>
+            <a:ext cx="7772400" cy="359745"/>
+          </a:xfrm>
+          <a:prstGeom prst="rect">
+            <a:avLst/>
+          </a:prstGeom>
+        </p:spPr>
+      </p:pic>
     </p:spTree>
     <p:extLst>
       <p:ext uri="{BB962C8B-B14F-4D97-AF65-F5344CB8AC3E}">
